--- a/promo/dl/brochure/bookie-detail-4p-edit.pptx
+++ b/promo/dl/brochure/bookie-detail-4p-edit.pptx
@@ -1678,7 +1678,7 @@
                   <a:srgbClr val="101D42"/>
                 </a:solidFill>
                 <a:latin typeface="Noto Serif KR Black" pitchFamily="34" charset="0"/>
-                <a:ea typeface="Noto Serif KR Black" pitchFamily="34" charset="-122"/>
+                <a:ea typeface="Noto Serif KR Black" pitchFamily="34" charset="-127"/>
                 <a:cs typeface="Noto Serif KR Black" pitchFamily="34" charset="-120"/>
               </a:rPr>
               <a:t>현장 초등교사가 드리는 제안</a:t>
@@ -1720,7 +1720,7 @@
                   <a:srgbClr val="101D42"/>
                 </a:solidFill>
                 <a:latin typeface="Noto Serif KR Black" pitchFamily="34" charset="0"/>
-                <a:ea typeface="Noto Serif KR Black" pitchFamily="34" charset="-122"/>
+                <a:ea typeface="Noto Serif KR Black" pitchFamily="34" charset="-127"/>
                 <a:cs typeface="Noto Serif KR Black" pitchFamily="34" charset="-120"/>
               </a:rPr>
               <a:t>스스로 생각할 기회를</a:t>
@@ -1740,7 +1740,7 @@
                   <a:srgbClr val="15543C"/>
                 </a:solidFill>
                 <a:latin typeface="Noto Serif KR Black" pitchFamily="34" charset="0"/>
-                <a:ea typeface="Noto Serif KR Black" pitchFamily="34" charset="-122"/>
+                <a:ea typeface="Noto Serif KR Black" pitchFamily="34" charset="-127"/>
                 <a:cs typeface="Noto Serif KR Black" pitchFamily="34" charset="-120"/>
               </a:rPr>
               <a:t>잃을까 두렵습니다.</a:t>
@@ -1782,7 +1782,7 @@
                   <a:srgbClr val="15543C"/>
                 </a:solidFill>
                 <a:latin typeface="Noto Serif KR Black" pitchFamily="34" charset="0"/>
-                <a:ea typeface="Noto Serif KR Black" pitchFamily="34" charset="-122"/>
+                <a:ea typeface="Noto Serif KR Black" pitchFamily="34" charset="-127"/>
                 <a:cs typeface="Noto Serif KR Black" pitchFamily="34" charset="-120"/>
               </a:rPr>
               <a:t>교실에서 마주한 걱정</a:t>
@@ -1824,7 +1824,7 @@
                   <a:srgbClr val="101D42"/>
                 </a:solidFill>
                 <a:latin typeface="Noto Sans KR" pitchFamily="34" charset="0"/>
-                <a:ea typeface="Noto Sans KR" pitchFamily="34" charset="-122"/>
+                <a:ea typeface="Noto Sans KR" pitchFamily="34" charset="-127"/>
                 <a:cs typeface="Noto Sans KR" pitchFamily="34" charset="-120"/>
               </a:rPr>
               <a:t>학교 현장에서 아이들이 </a:t>
@@ -1844,7 +1844,7 @@
                   <a:srgbClr val="FFF0AD"/>
                 </a:highlight>
                 <a:latin typeface="Noto Sans KR" pitchFamily="34" charset="0"/>
-                <a:ea typeface="Noto Sans KR" pitchFamily="34" charset="-122"/>
+                <a:ea typeface="Noto Sans KR" pitchFamily="34" charset="-127"/>
                 <a:cs typeface="Noto Sans KR" pitchFamily="34" charset="-120"/>
               </a:rPr>
               <a:t>책을 충분히 읽지 않는 현실</a:t>
@@ -1861,7 +1861,7 @@
                   <a:srgbClr val="101D42"/>
                 </a:solidFill>
                 <a:latin typeface="Noto Sans KR" pitchFamily="34" charset="0"/>
-                <a:ea typeface="Noto Sans KR" pitchFamily="34" charset="-122"/>
+                <a:ea typeface="Noto Sans KR" pitchFamily="34" charset="-127"/>
                 <a:cs typeface="Noto Sans KR" pitchFamily="34" charset="-120"/>
               </a:rPr>
               <a:t>을 마주했습니다.</a:t>
@@ -1881,7 +1881,7 @@
                   <a:srgbClr val="101D42"/>
                 </a:solidFill>
                 <a:latin typeface="Noto Sans KR" pitchFamily="34" charset="0"/>
-                <a:ea typeface="Noto Sans KR" pitchFamily="34" charset="-122"/>
+                <a:ea typeface="Noto Sans KR" pitchFamily="34" charset="-127"/>
                 <a:cs typeface="Noto Sans KR" pitchFamily="34" charset="-120"/>
               </a:rPr>
               <a:t>다른 사람의 생각을 차분히 따라 읽고, </a:t>
@@ -1901,7 +1901,7 @@
                   <a:srgbClr val="FFF0AD"/>
                 </a:highlight>
                 <a:latin typeface="Noto Sans KR" pitchFamily="34" charset="0"/>
-                <a:ea typeface="Noto Sans KR" pitchFamily="34" charset="-122"/>
+                <a:ea typeface="Noto Sans KR" pitchFamily="34" charset="-127"/>
                 <a:cs typeface="Noto Sans KR" pitchFamily="34" charset="-120"/>
               </a:rPr>
               <a:t>자기 생각을 만들어 볼 기회</a:t>
@@ -1918,7 +1918,7 @@
                   <a:srgbClr val="101D42"/>
                 </a:solidFill>
                 <a:latin typeface="Noto Sans KR" pitchFamily="34" charset="0"/>
-                <a:ea typeface="Noto Sans KR" pitchFamily="34" charset="-122"/>
+                <a:ea typeface="Noto Sans KR" pitchFamily="34" charset="-127"/>
                 <a:cs typeface="Noto Sans KR" pitchFamily="34" charset="-120"/>
               </a:rPr>
               <a:t>마저</a:t>
@@ -1938,7 +1938,7 @@
                   <a:srgbClr val="101D42"/>
                 </a:solidFill>
                 <a:latin typeface="Noto Sans KR" pitchFamily="34" charset="0"/>
-                <a:ea typeface="Noto Sans KR" pitchFamily="34" charset="-122"/>
+                <a:ea typeface="Noto Sans KR" pitchFamily="34" charset="-127"/>
                 <a:cs typeface="Noto Sans KR" pitchFamily="34" charset="-120"/>
               </a:rPr>
               <a:t>잃은 채 자랄까 두렵습니다.</a:t>
@@ -1980,7 +1980,7 @@
                   <a:srgbClr val="15543C"/>
                 </a:solidFill>
                 <a:latin typeface="Noto Serif KR Black" pitchFamily="34" charset="0"/>
-                <a:ea typeface="Noto Serif KR Black" pitchFamily="34" charset="-122"/>
+                <a:ea typeface="Noto Serif KR Black" pitchFamily="34" charset="-127"/>
                 <a:cs typeface="Noto Serif KR Black" pitchFamily="34" charset="-120"/>
               </a:rPr>
               <a:t>정보가 많아도, 깊은 이해는 저절로 생기지 않습니다</a:t>
@@ -2025,7 +2025,7 @@
                   <a:srgbClr val="FFF0AD"/>
                 </a:highlight>
                 <a:latin typeface="Noto Sans KR" pitchFamily="34" charset="0"/>
-                <a:ea typeface="Noto Sans KR" pitchFamily="34" charset="-122"/>
+                <a:ea typeface="Noto Sans KR" pitchFamily="34" charset="-127"/>
                 <a:cs typeface="Noto Sans KR" pitchFamily="34" charset="-120"/>
               </a:rPr>
               <a:t>문장의 뜻</a:t>
@@ -2042,7 +2042,7 @@
                   <a:srgbClr val="101D42"/>
                 </a:solidFill>
                 <a:latin typeface="Noto Sans KR" pitchFamily="34" charset="0"/>
-                <a:ea typeface="Noto Sans KR" pitchFamily="34" charset="-122"/>
+                <a:ea typeface="Noto Sans KR" pitchFamily="34" charset="-127"/>
                 <a:cs typeface="Noto Sans KR" pitchFamily="34" charset="-120"/>
               </a:rPr>
               <a:t>을 헤아리고, </a:t>
@@ -2062,7 +2062,7 @@
                   <a:srgbClr val="FFF0AD"/>
                 </a:highlight>
                 <a:latin typeface="Noto Sans KR" pitchFamily="34" charset="0"/>
-                <a:ea typeface="Noto Sans KR" pitchFamily="34" charset="-122"/>
+                <a:ea typeface="Noto Sans KR" pitchFamily="34" charset="-127"/>
                 <a:cs typeface="Noto Sans KR" pitchFamily="34" charset="-120"/>
               </a:rPr>
               <a:t>앞뒤 내용을 연결</a:t>
@@ -2079,7 +2079,7 @@
                   <a:srgbClr val="101D42"/>
                 </a:solidFill>
                 <a:latin typeface="Noto Sans KR" pitchFamily="34" charset="0"/>
-                <a:ea typeface="Noto Sans KR" pitchFamily="34" charset="-122"/>
+                <a:ea typeface="Noto Sans KR" pitchFamily="34" charset="-127"/>
                 <a:cs typeface="Noto Sans KR" pitchFamily="34" charset="-120"/>
               </a:rPr>
               <a:t>하고, </a:t>
@@ -2099,7 +2099,7 @@
                   <a:srgbClr val="FFF0AD"/>
                 </a:highlight>
                 <a:latin typeface="Noto Sans KR" pitchFamily="34" charset="0"/>
-                <a:ea typeface="Noto Sans KR" pitchFamily="34" charset="-122"/>
+                <a:ea typeface="Noto Sans KR" pitchFamily="34" charset="-127"/>
                 <a:cs typeface="Noto Sans KR" pitchFamily="34" charset="-120"/>
               </a:rPr>
               <a:t>오래 생각하는 시간</a:t>
@@ -2116,7 +2116,7 @@
                   <a:srgbClr val="101D42"/>
                 </a:solidFill>
                 <a:latin typeface="Noto Sans KR" pitchFamily="34" charset="0"/>
-                <a:ea typeface="Noto Sans KR" pitchFamily="34" charset="-122"/>
+                <a:ea typeface="Noto Sans KR" pitchFamily="34" charset="-127"/>
                 <a:cs typeface="Noto Sans KR" pitchFamily="34" charset="-120"/>
               </a:rPr>
               <a:t>은 따로</a:t>
@@ -2136,7 +2136,7 @@
                   <a:srgbClr val="101D42"/>
                 </a:solidFill>
                 <a:latin typeface="Noto Sans KR" pitchFamily="34" charset="0"/>
-                <a:ea typeface="Noto Sans KR" pitchFamily="34" charset="-122"/>
+                <a:ea typeface="Noto Sans KR" pitchFamily="34" charset="-127"/>
                 <a:cs typeface="Noto Sans KR" pitchFamily="34" charset="-120"/>
               </a:rPr>
               <a:t>필요합니다. 짧은 영상과 빠른 답에 익숙해지는 동안, 학생 안에 무엇이</a:t>
@@ -2156,7 +2156,7 @@
                   <a:srgbClr val="101D42"/>
                 </a:solidFill>
                 <a:latin typeface="Noto Sans KR" pitchFamily="34" charset="0"/>
-                <a:ea typeface="Noto Sans KR" pitchFamily="34" charset="-122"/>
+                <a:ea typeface="Noto Sans KR" pitchFamily="34" charset="-127"/>
                 <a:cs typeface="Noto Sans KR" pitchFamily="34" charset="-120"/>
               </a:rPr>
               <a:t>남고 있는지 묻고 싶습니다.</a:t>
@@ -2198,7 +2198,7 @@
                   <a:srgbClr val="15543C"/>
                 </a:solidFill>
                 <a:latin typeface="Noto Serif KR Black" pitchFamily="34" charset="0"/>
-                <a:ea typeface="Noto Serif KR Black" pitchFamily="34" charset="-122"/>
+                <a:ea typeface="Noto Serif KR Black" pitchFamily="34" charset="-127"/>
                 <a:cs typeface="Noto Serif KR Black" pitchFamily="34" charset="-120"/>
               </a:rPr>
               <a:t>학교가 먼저 고민해야 할 질문</a:t>
@@ -2240,7 +2240,7 @@
                   <a:srgbClr val="101D42"/>
                 </a:solidFill>
                 <a:latin typeface="Noto Sans KR" pitchFamily="34" charset="0"/>
-                <a:ea typeface="Noto Sans KR" pitchFamily="34" charset="-122"/>
+                <a:ea typeface="Noto Sans KR" pitchFamily="34" charset="-127"/>
                 <a:cs typeface="Noto Sans KR" pitchFamily="34" charset="-120"/>
               </a:rPr>
               <a:t>학생은 </a:t>
@@ -2260,7 +2260,7 @@
                   <a:srgbClr val="FFF0AD"/>
                 </a:highlight>
                 <a:latin typeface="Noto Sans KR" pitchFamily="34" charset="0"/>
-                <a:ea typeface="Noto Sans KR" pitchFamily="34" charset="-122"/>
+                <a:ea typeface="Noto Sans KR" pitchFamily="34" charset="-127"/>
                 <a:cs typeface="Noto Sans KR" pitchFamily="34" charset="-120"/>
               </a:rPr>
               <a:t>무엇을 알고</a:t>
@@ -2277,7 +2277,7 @@
                   <a:srgbClr val="101D42"/>
                 </a:solidFill>
                 <a:latin typeface="Noto Sans KR" pitchFamily="34" charset="0"/>
-                <a:ea typeface="Noto Sans KR" pitchFamily="34" charset="-122"/>
+                <a:ea typeface="Noto Sans KR" pitchFamily="34" charset="-127"/>
                 <a:cs typeface="Noto Sans KR" pitchFamily="34" charset="-120"/>
               </a:rPr>
               <a:t>, </a:t>
@@ -2297,7 +2297,7 @@
                   <a:srgbClr val="FFF0AD"/>
                 </a:highlight>
                 <a:latin typeface="Noto Sans KR" pitchFamily="34" charset="0"/>
-                <a:ea typeface="Noto Sans KR" pitchFamily="34" charset="-122"/>
+                <a:ea typeface="Noto Sans KR" pitchFamily="34" charset="-127"/>
                 <a:cs typeface="Noto Sans KR" pitchFamily="34" charset="-120"/>
               </a:rPr>
               <a:t>어떤 경험을 쌓고</a:t>
@@ -2314,7 +2314,7 @@
                   <a:srgbClr val="101D42"/>
                 </a:solidFill>
                 <a:latin typeface="Noto Sans KR" pitchFamily="34" charset="0"/>
-                <a:ea typeface="Noto Sans KR" pitchFamily="34" charset="-122"/>
+                <a:ea typeface="Noto Sans KR" pitchFamily="34" charset="-127"/>
                 <a:cs typeface="Noto Sans KR" pitchFamily="34" charset="-120"/>
               </a:rPr>
               <a:t>, </a:t>
@@ -2334,7 +2334,7 @@
                   <a:srgbClr val="FFF0AD"/>
                 </a:highlight>
                 <a:latin typeface="Noto Sans KR" pitchFamily="34" charset="0"/>
-                <a:ea typeface="Noto Sans KR" pitchFamily="34" charset="-122"/>
+                <a:ea typeface="Noto Sans KR" pitchFamily="34" charset="-127"/>
                 <a:cs typeface="Noto Sans KR" pitchFamily="34" charset="-120"/>
               </a:rPr>
               <a:t>어떻게 생각하는 사람</a:t>
@@ -2351,7 +2351,7 @@
                   <a:srgbClr val="101D42"/>
                 </a:solidFill>
                 <a:latin typeface="Noto Sans KR" pitchFamily="34" charset="0"/>
-                <a:ea typeface="Noto Sans KR" pitchFamily="34" charset="-122"/>
+                <a:ea typeface="Noto Sans KR" pitchFamily="34" charset="-127"/>
                 <a:cs typeface="Noto Sans KR" pitchFamily="34" charset="-120"/>
               </a:rPr>
               <a:t>으로 자라야</a:t>
@@ -2371,7 +2371,7 @@
                   <a:srgbClr val="101D42"/>
                 </a:solidFill>
                 <a:latin typeface="Noto Sans KR" pitchFamily="34" charset="0"/>
-                <a:ea typeface="Noto Sans KR" pitchFamily="34" charset="-122"/>
+                <a:ea typeface="Noto Sans KR" pitchFamily="34" charset="-127"/>
                 <a:cs typeface="Noto Sans KR" pitchFamily="34" charset="-120"/>
               </a:rPr>
               <a:t>할까요. 디지털 도구를 도입하는 일에도 이 질문이 먼저 놓여야 합니다.</a:t>
@@ -2416,7 +2416,7 @@
                   <a:srgbClr val="FFF0AD"/>
                 </a:highlight>
                 <a:latin typeface="Noto Sans KR" pitchFamily="34" charset="0"/>
-                <a:ea typeface="Noto Sans KR" pitchFamily="34" charset="-122"/>
+                <a:ea typeface="Noto Sans KR" pitchFamily="34" charset="-127"/>
                 <a:cs typeface="Noto Sans KR" pitchFamily="34" charset="-120"/>
               </a:rPr>
               <a:t>스스로 읽고 이해하며</a:t>
@@ -2433,7 +2433,7 @@
                   <a:srgbClr val="101D42"/>
                 </a:solidFill>
                 <a:latin typeface="Noto Sans KR" pitchFamily="34" charset="0"/>
-                <a:ea typeface="Noto Sans KR" pitchFamily="34" charset="-122"/>
+                <a:ea typeface="Noto Sans KR" pitchFamily="34" charset="-127"/>
                 <a:cs typeface="Noto Sans KR" pitchFamily="34" charset="-120"/>
               </a:rPr>
               <a:t>, </a:t>
@@ -2453,7 +2453,7 @@
                   <a:srgbClr val="FFF0AD"/>
                 </a:highlight>
                 <a:latin typeface="Noto Sans KR" pitchFamily="34" charset="0"/>
-                <a:ea typeface="Noto Sans KR" pitchFamily="34" charset="-122"/>
+                <a:ea typeface="Noto Sans KR" pitchFamily="34" charset="-127"/>
                 <a:cs typeface="Noto Sans KR" pitchFamily="34" charset="-120"/>
               </a:rPr>
               <a:t>근거를 들어 말하는 힘</a:t>
@@ -2470,7 +2470,7 @@
                   <a:srgbClr val="101D42"/>
                 </a:solidFill>
                 <a:latin typeface="Noto Sans KR" pitchFamily="34" charset="0"/>
-                <a:ea typeface="Noto Sans KR" pitchFamily="34" charset="-122"/>
+                <a:ea typeface="Noto Sans KR" pitchFamily="34" charset="-127"/>
                 <a:cs typeface="Noto Sans KR" pitchFamily="34" charset="-120"/>
               </a:rPr>
               <a:t>을 꾸준히 길러 주어야</a:t>
@@ -2490,7 +2490,7 @@
                   <a:srgbClr val="101D42"/>
                 </a:solidFill>
                 <a:latin typeface="Noto Sans KR" pitchFamily="34" charset="0"/>
-                <a:ea typeface="Noto Sans KR" pitchFamily="34" charset="-122"/>
+                <a:ea typeface="Noto Sans KR" pitchFamily="34" charset="-127"/>
                 <a:cs typeface="Noto Sans KR" pitchFamily="34" charset="-120"/>
               </a:rPr>
               <a:t>합니다. 이 절실함에서 부기가 시작됐습니다.</a:t>
@@ -2532,7 +2532,7 @@
                   <a:srgbClr val="101D42"/>
                 </a:solidFill>
                 <a:latin typeface="Noto Serif KR Black" pitchFamily="34" charset="0"/>
-                <a:ea typeface="Noto Serif KR Black" pitchFamily="34" charset="-122"/>
+                <a:ea typeface="Noto Serif KR Black" pitchFamily="34" charset="-127"/>
                 <a:cs typeface="Noto Serif KR Black" pitchFamily="34" charset="-120"/>
               </a:rPr>
               <a:t>스마트폰 속 세상에 빠져 있는 아이들이</a:t>
@@ -2552,7 +2552,7 @@
                   <a:srgbClr val="15543C"/>
                 </a:solidFill>
                 <a:latin typeface="Noto Serif KR Black" pitchFamily="34" charset="0"/>
-                <a:ea typeface="Noto Serif KR Black" pitchFamily="34" charset="-122"/>
+                <a:ea typeface="Noto Serif KR Black" pitchFamily="34" charset="-127"/>
                 <a:cs typeface="Noto Serif KR Black" pitchFamily="34" charset="-120"/>
               </a:rPr>
               <a:t>세상을 깊이있게 이해하는 아이로 자라고 있을까요?</a:t>
@@ -2594,7 +2594,7 @@
                   <a:srgbClr val="101D42"/>
                 </a:solidFill>
                 <a:latin typeface="Noto Sans KR" pitchFamily="34" charset="0"/>
-                <a:ea typeface="Noto Sans KR" pitchFamily="34" charset="-122"/>
+                <a:ea typeface="Noto Sans KR" pitchFamily="34" charset="-127"/>
                 <a:cs typeface="Noto Sans KR" pitchFamily="34" charset="-120"/>
               </a:rPr>
               <a:t>1 / 4</a:t>
@@ -3489,7 +3489,7 @@
                   <a:srgbClr val="101D42"/>
                 </a:solidFill>
                 <a:latin typeface="Noto Serif KR Black" pitchFamily="34" charset="0"/>
-                <a:ea typeface="Noto Serif KR Black" pitchFamily="34" charset="-122"/>
+                <a:ea typeface="Noto Serif KR Black" pitchFamily="34" charset="-127"/>
                 <a:cs typeface="Noto Serif KR Black" pitchFamily="34" charset="-120"/>
               </a:rPr>
               <a:t>독서가 만드는 이해의 바탕</a:t>
@@ -3531,7 +3531,7 @@
                   <a:srgbClr val="101D42"/>
                 </a:solidFill>
                 <a:latin typeface="Noto Serif KR Black" pitchFamily="34" charset="0"/>
-                <a:ea typeface="Noto Serif KR Black" pitchFamily="34" charset="-122"/>
+                <a:ea typeface="Noto Serif KR Black" pitchFamily="34" charset="-127"/>
                 <a:cs typeface="Noto Serif KR Black" pitchFamily="34" charset="-120"/>
               </a:rPr>
               <a:t>아는 것이 쌓여야,</a:t>
@@ -3551,7 +3551,7 @@
                   <a:srgbClr val="15543C"/>
                 </a:solidFill>
                 <a:latin typeface="Noto Serif KR Black" pitchFamily="34" charset="0"/>
-                <a:ea typeface="Noto Serif KR Black" pitchFamily="34" charset="-122"/>
+                <a:ea typeface="Noto Serif KR Black" pitchFamily="34" charset="-127"/>
                 <a:cs typeface="Noto Serif KR Black" pitchFamily="34" charset="-120"/>
               </a:rPr>
               <a:t>새 지식이 연결됩니다.</a:t>
@@ -3593,7 +3593,7 @@
                   <a:srgbClr val="15543C"/>
                 </a:solidFill>
                 <a:latin typeface="Noto Serif KR Black" pitchFamily="34" charset="0"/>
-                <a:ea typeface="Noto Serif KR Black" pitchFamily="34" charset="-122"/>
+                <a:ea typeface="Noto Serif KR Black" pitchFamily="34" charset="-127"/>
                 <a:cs typeface="Noto Serif KR Black" pitchFamily="34" charset="-120"/>
               </a:rPr>
               <a:t>어휘와 간접 경험이 이해의 바탕을 넓힙니다</a:t>
@@ -3635,7 +3635,7 @@
                   <a:srgbClr val="101D42"/>
                 </a:solidFill>
                 <a:latin typeface="Noto Sans KR" pitchFamily="34" charset="0"/>
-                <a:ea typeface="Noto Sans KR" pitchFamily="34" charset="-122"/>
+                <a:ea typeface="Noto Sans KR" pitchFamily="34" charset="-127"/>
                 <a:cs typeface="Noto Sans KR" pitchFamily="34" charset="-120"/>
               </a:rPr>
               <a:t>이야기에서는 </a:t>
@@ -3655,7 +3655,7 @@
                   <a:srgbClr val="FFF0AD"/>
                 </a:highlight>
                 <a:latin typeface="Noto Sans KR" pitchFamily="34" charset="0"/>
-                <a:ea typeface="Noto Sans KR" pitchFamily="34" charset="-122"/>
+                <a:ea typeface="Noto Sans KR" pitchFamily="34" charset="-127"/>
                 <a:cs typeface="Noto Sans KR" pitchFamily="34" charset="-120"/>
               </a:rPr>
               <a:t>다른 삶과 선택</a:t>
@@ -3672,7 +3672,7 @@
                   <a:srgbClr val="101D42"/>
                 </a:solidFill>
                 <a:latin typeface="Noto Sans KR" pitchFamily="34" charset="0"/>
-                <a:ea typeface="Noto Sans KR" pitchFamily="34" charset="-122"/>
+                <a:ea typeface="Noto Sans KR" pitchFamily="34" charset="-127"/>
                 <a:cs typeface="Noto Sans KR" pitchFamily="34" charset="-120"/>
               </a:rPr>
               <a:t>을, 설명하는 글에서는 세상의 원리를,</a:t>
@@ -3692,7 +3692,7 @@
                   <a:srgbClr val="101D42"/>
                 </a:solidFill>
                 <a:latin typeface="Noto Sans KR" pitchFamily="34" charset="0"/>
-                <a:ea typeface="Noto Sans KR" pitchFamily="34" charset="-122"/>
+                <a:ea typeface="Noto Sans KR" pitchFamily="34" charset="-127"/>
                 <a:cs typeface="Noto Sans KR" pitchFamily="34" charset="-120"/>
               </a:rPr>
               <a:t>에세이에서는 </a:t>
@@ -3712,7 +3712,7 @@
                   <a:srgbClr val="FFF0AD"/>
                 </a:highlight>
                 <a:latin typeface="Noto Sans KR" pitchFamily="34" charset="0"/>
-                <a:ea typeface="Noto Sans KR" pitchFamily="34" charset="-122"/>
+                <a:ea typeface="Noto Sans KR" pitchFamily="34" charset="-127"/>
                 <a:cs typeface="Noto Sans KR" pitchFamily="34" charset="-120"/>
               </a:rPr>
               <a:t>다른 사람의 생각</a:t>
@@ -3729,7 +3729,7 @@
                   <a:srgbClr val="101D42"/>
                 </a:solidFill>
                 <a:latin typeface="Noto Sans KR" pitchFamily="34" charset="0"/>
-                <a:ea typeface="Noto Sans KR" pitchFamily="34" charset="-122"/>
+                <a:ea typeface="Noto Sans KR" pitchFamily="34" charset="-127"/>
                 <a:cs typeface="Noto Sans KR" pitchFamily="34" charset="-120"/>
               </a:rPr>
               <a:t>을 만납니다. 문맥 속에서 </a:t>
@@ -3749,7 +3749,7 @@
                   <a:srgbClr val="FFF0AD"/>
                 </a:highlight>
                 <a:latin typeface="Noto Sans KR" pitchFamily="34" charset="0"/>
-                <a:ea typeface="Noto Sans KR" pitchFamily="34" charset="-122"/>
+                <a:ea typeface="Noto Sans KR" pitchFamily="34" charset="-127"/>
                 <a:cs typeface="Noto Sans KR" pitchFamily="34" charset="-120"/>
               </a:rPr>
               <a:t>낱말</a:t>
@@ -3766,7 +3766,7 @@
                   <a:srgbClr val="101D42"/>
                 </a:solidFill>
                 <a:latin typeface="Noto Sans KR" pitchFamily="34" charset="0"/>
-                <a:ea typeface="Noto Sans KR" pitchFamily="34" charset="-122"/>
+                <a:ea typeface="Noto Sans KR" pitchFamily="34" charset="-127"/>
                 <a:cs typeface="Noto Sans KR" pitchFamily="34" charset="-120"/>
               </a:rPr>
               <a:t>을 익히고,</a:t>
@@ -3786,7 +3786,7 @@
                   <a:srgbClr val="101D42"/>
                 </a:solidFill>
                 <a:latin typeface="Noto Sans KR" pitchFamily="34" charset="0"/>
-                <a:ea typeface="Noto Sans KR" pitchFamily="34" charset="-122"/>
+                <a:ea typeface="Noto Sans KR" pitchFamily="34" charset="-127"/>
                 <a:cs typeface="Noto Sans KR" pitchFamily="34" charset="-120"/>
               </a:rPr>
               <a:t>다른 생각을 따라 읽으며 </a:t>
@@ -3806,7 +3806,7 @@
                   <a:srgbClr val="FFF0AD"/>
                 </a:highlight>
                 <a:latin typeface="Noto Sans KR" pitchFamily="34" charset="0"/>
-                <a:ea typeface="Noto Sans KR" pitchFamily="34" charset="-122"/>
+                <a:ea typeface="Noto Sans KR" pitchFamily="34" charset="-127"/>
                 <a:cs typeface="Noto Sans KR" pitchFamily="34" charset="-120"/>
               </a:rPr>
               <a:t>자기 경험</a:t>
@@ -3823,7 +3823,7 @@
                   <a:srgbClr val="101D42"/>
                 </a:solidFill>
                 <a:latin typeface="Noto Sans KR" pitchFamily="34" charset="0"/>
-                <a:ea typeface="Noto Sans KR" pitchFamily="34" charset="-122"/>
+                <a:ea typeface="Noto Sans KR" pitchFamily="34" charset="-127"/>
                 <a:cs typeface="Noto Sans KR" pitchFamily="34" charset="-120"/>
               </a:rPr>
               <a:t>과 비교합니다.</a:t>
@@ -3865,7 +3865,7 @@
                   <a:srgbClr val="15543C"/>
                 </a:solidFill>
                 <a:latin typeface="Noto Serif KR Black" pitchFamily="34" charset="0"/>
-                <a:ea typeface="Noto Serif KR Black" pitchFamily="34" charset="-122"/>
+                <a:ea typeface="Noto Serif KR Black" pitchFamily="34" charset="-127"/>
                 <a:cs typeface="Noto Serif KR Black" pitchFamily="34" charset="-120"/>
               </a:rPr>
               <a:t>스키마는 경험과 지식이 조직된 ‘이해의 틀’입니다</a:t>
@@ -3907,7 +3907,7 @@
                   <a:srgbClr val="101D42"/>
                 </a:solidFill>
                 <a:latin typeface="Noto Sans KR" pitchFamily="34" charset="0"/>
-                <a:ea typeface="Noto Sans KR" pitchFamily="34" charset="-122"/>
+                <a:ea typeface="Noto Sans KR" pitchFamily="34" charset="-127"/>
                 <a:cs typeface="Noto Sans KR" pitchFamily="34" charset="-120"/>
               </a:rPr>
               <a:t>새로운 내용은 </a:t>
@@ -3927,7 +3927,7 @@
                   <a:srgbClr val="FFF0AD"/>
                 </a:highlight>
                 <a:latin typeface="Noto Sans KR" pitchFamily="34" charset="0"/>
-                <a:ea typeface="Noto Sans KR" pitchFamily="34" charset="-122"/>
+                <a:ea typeface="Noto Sans KR" pitchFamily="34" charset="-127"/>
                 <a:cs typeface="Noto Sans KR" pitchFamily="34" charset="-120"/>
               </a:rPr>
               <a:t>이미 알고 있는 개념과 경험</a:t>
@@ -3944,7 +3944,7 @@
                   <a:srgbClr val="101D42"/>
                 </a:solidFill>
                 <a:latin typeface="Noto Sans KR" pitchFamily="34" charset="0"/>
-                <a:ea typeface="Noto Sans KR" pitchFamily="34" charset="-122"/>
+                <a:ea typeface="Noto Sans KR" pitchFamily="34" charset="-127"/>
                 <a:cs typeface="Noto Sans KR" pitchFamily="34" charset="-120"/>
               </a:rPr>
               <a:t>에 연결될 때 더 잘 이해할 수</a:t>
@@ -3964,7 +3964,7 @@
                   <a:srgbClr val="101D42"/>
                 </a:solidFill>
                 <a:latin typeface="Noto Sans KR" pitchFamily="34" charset="0"/>
-                <a:ea typeface="Noto Sans KR" pitchFamily="34" charset="-122"/>
+                <a:ea typeface="Noto Sans KR" pitchFamily="34" charset="-127"/>
                 <a:cs typeface="Noto Sans KR" pitchFamily="34" charset="-120"/>
               </a:rPr>
               <a:t>있습니다. </a:t>
@@ -3984,7 +3984,7 @@
                   <a:srgbClr val="FFF0AD"/>
                 </a:highlight>
                 <a:latin typeface="Noto Sans KR" pitchFamily="34" charset="0"/>
-                <a:ea typeface="Noto Sans KR" pitchFamily="34" charset="-122"/>
+                <a:ea typeface="Noto Sans KR" pitchFamily="34" charset="-127"/>
                 <a:cs typeface="Noto Sans KR" pitchFamily="34" charset="-120"/>
               </a:rPr>
               <a:t>관련 어휘와 배경지식</a:t>
@@ -4001,7 +4001,7 @@
                   <a:srgbClr val="101D42"/>
                 </a:solidFill>
                 <a:latin typeface="Noto Sans KR" pitchFamily="34" charset="0"/>
-                <a:ea typeface="Noto Sans KR" pitchFamily="34" charset="-122"/>
+                <a:ea typeface="Noto Sans KR" pitchFamily="34" charset="-127"/>
                 <a:cs typeface="Noto Sans KR" pitchFamily="34" charset="-120"/>
               </a:rPr>
               <a:t>이 부족하면 글자를 읽어도 </a:t>
@@ -4021,7 +4021,7 @@
                   <a:srgbClr val="FFF0AD"/>
                 </a:highlight>
                 <a:latin typeface="Noto Sans KR" pitchFamily="34" charset="0"/>
-                <a:ea typeface="Noto Sans KR" pitchFamily="34" charset="-122"/>
+                <a:ea typeface="Noto Sans KR" pitchFamily="34" charset="-127"/>
                 <a:cs typeface="Noto Sans KR" pitchFamily="34" charset="-120"/>
               </a:rPr>
               <a:t>맥락과 의미</a:t>
@@ -4038,7 +4038,7 @@
                   <a:srgbClr val="101D42"/>
                 </a:solidFill>
                 <a:latin typeface="Noto Sans KR" pitchFamily="34" charset="0"/>
-                <a:ea typeface="Noto Sans KR" pitchFamily="34" charset="-122"/>
+                <a:ea typeface="Noto Sans KR" pitchFamily="34" charset="-127"/>
                 <a:cs typeface="Noto Sans KR" pitchFamily="34" charset="-120"/>
               </a:rPr>
               <a:t>를</a:t>
@@ -4058,7 +4058,7 @@
                   <a:srgbClr val="101D42"/>
                 </a:solidFill>
                 <a:latin typeface="Noto Sans KR" pitchFamily="34" charset="0"/>
-                <a:ea typeface="Noto Sans KR" pitchFamily="34" charset="-122"/>
+                <a:ea typeface="Noto Sans KR" pitchFamily="34" charset="-127"/>
                 <a:cs typeface="Noto Sans KR" pitchFamily="34" charset="-120"/>
               </a:rPr>
               <a:t>연결하기 어렵습니다.</a:t>
@@ -4100,7 +4100,7 @@
                   <a:srgbClr val="101D42"/>
                 </a:solidFill>
                 <a:latin typeface="Noto Sans KR" pitchFamily="34" charset="0"/>
-                <a:ea typeface="Noto Sans KR" pitchFamily="34" charset="-122"/>
+                <a:ea typeface="Noto Sans KR" pitchFamily="34" charset="-127"/>
                 <a:cs typeface="Noto Sans KR" pitchFamily="34" charset="-120"/>
               </a:rPr>
               <a:t>그래서 읽기 전 필요한 </a:t>
@@ -4120,7 +4120,7 @@
                   <a:srgbClr val="FFF0AD"/>
                 </a:highlight>
                 <a:latin typeface="Noto Sans KR" pitchFamily="34" charset="0"/>
-                <a:ea typeface="Noto Sans KR" pitchFamily="34" charset="-122"/>
+                <a:ea typeface="Noto Sans KR" pitchFamily="34" charset="-127"/>
                 <a:cs typeface="Noto Sans KR" pitchFamily="34" charset="-120"/>
               </a:rPr>
               <a:t>배경을 짚고</a:t>
@@ -4137,7 +4137,7 @@
                   <a:srgbClr val="101D42"/>
                 </a:solidFill>
                 <a:latin typeface="Noto Sans KR" pitchFamily="34" charset="0"/>
-                <a:ea typeface="Noto Sans KR" pitchFamily="34" charset="-122"/>
+                <a:ea typeface="Noto Sans KR" pitchFamily="34" charset="-127"/>
                 <a:cs typeface="Noto Sans KR" pitchFamily="34" charset="-120"/>
               </a:rPr>
               <a:t>, 읽으며 </a:t>
@@ -4157,7 +4157,7 @@
                   <a:srgbClr val="FFF0AD"/>
                 </a:highlight>
                 <a:latin typeface="Noto Sans KR" pitchFamily="34" charset="0"/>
-                <a:ea typeface="Noto Sans KR" pitchFamily="34" charset="-122"/>
+                <a:ea typeface="Noto Sans KR" pitchFamily="34" charset="-127"/>
                 <a:cs typeface="Noto Sans KR" pitchFamily="34" charset="-120"/>
               </a:rPr>
               <a:t>어휘를 익히고</a:t>
@@ -4174,7 +4174,7 @@
                   <a:srgbClr val="101D42"/>
                 </a:solidFill>
                 <a:latin typeface="Noto Sans KR" pitchFamily="34" charset="0"/>
-                <a:ea typeface="Noto Sans KR" pitchFamily="34" charset="-122"/>
+                <a:ea typeface="Noto Sans KR" pitchFamily="34" charset="-127"/>
                 <a:cs typeface="Noto Sans KR" pitchFamily="34" charset="-120"/>
               </a:rPr>
               <a:t>, 새 내용으로</a:t>
@@ -4197,7 +4197,7 @@
                   <a:srgbClr val="FFF0AD"/>
                 </a:highlight>
                 <a:latin typeface="Noto Sans KR" pitchFamily="34" charset="0"/>
-                <a:ea typeface="Noto Sans KR" pitchFamily="34" charset="-122"/>
+                <a:ea typeface="Noto Sans KR" pitchFamily="34" charset="-127"/>
                 <a:cs typeface="Noto Sans KR" pitchFamily="34" charset="-120"/>
               </a:rPr>
               <a:t>기존 생각을 넓히거나 고치는</a:t>
@@ -4214,7 +4214,7 @@
                   <a:srgbClr val="101D42"/>
                 </a:solidFill>
                 <a:latin typeface="Noto Sans KR" pitchFamily="34" charset="0"/>
-                <a:ea typeface="Noto Sans KR" pitchFamily="34" charset="-122"/>
+                <a:ea typeface="Noto Sans KR" pitchFamily="34" charset="-127"/>
                 <a:cs typeface="Noto Sans KR" pitchFamily="34" charset="-120"/>
               </a:rPr>
               <a:t> 과정이 필요합니다.</a:t>
@@ -4256,7 +4256,7 @@
                   <a:srgbClr val="15543C"/>
                 </a:solidFill>
                 <a:latin typeface="Noto Sans KR" pitchFamily="34" charset="0"/>
-                <a:ea typeface="Noto Sans KR" pitchFamily="34" charset="-122"/>
+                <a:ea typeface="Noto Sans KR" pitchFamily="34" charset="-127"/>
                 <a:cs typeface="Noto Sans KR" pitchFamily="34" charset="-120"/>
               </a:rPr>
               <a:t>어휘 · 간접 경험</a:t>
@@ -4298,7 +4298,7 @@
                   <a:srgbClr val="15543C"/>
                 </a:solidFill>
                 <a:latin typeface="Noto Sans KR" pitchFamily="34" charset="0"/>
-                <a:ea typeface="Noto Sans KR" pitchFamily="34" charset="-122"/>
+                <a:ea typeface="Noto Sans KR" pitchFamily="34" charset="-127"/>
                 <a:cs typeface="Noto Sans KR" pitchFamily="34" charset="-120"/>
               </a:rPr>
               <a:t>배경지식 · 스키마</a:t>
@@ -4340,7 +4340,7 @@
                   <a:srgbClr val="15543C"/>
                 </a:solidFill>
                 <a:latin typeface="Noto Sans KR" pitchFamily="34" charset="0"/>
-                <a:ea typeface="Noto Sans KR" pitchFamily="34" charset="-122"/>
+                <a:ea typeface="Noto Sans KR" pitchFamily="34" charset="-127"/>
                 <a:cs typeface="Noto Sans KR" pitchFamily="34" charset="-120"/>
               </a:rPr>
               <a:t>이해 · 추론 · 연결</a:t>
@@ -4382,7 +4382,7 @@
                   <a:srgbClr val="D59B32"/>
                 </a:solidFill>
                 <a:latin typeface="Noto Sans KR" pitchFamily="34" charset="0"/>
-                <a:ea typeface="Noto Sans KR" pitchFamily="34" charset="-122"/>
+                <a:ea typeface="Noto Sans KR" pitchFamily="34" charset="-127"/>
                 <a:cs typeface="Noto Sans KR" pitchFamily="34" charset="-120"/>
               </a:rPr>
               <a:t>→</a:t>
@@ -4424,7 +4424,7 @@
                   <a:srgbClr val="D59B32"/>
                 </a:solidFill>
                 <a:latin typeface="Noto Sans KR" pitchFamily="34" charset="0"/>
-                <a:ea typeface="Noto Sans KR" pitchFamily="34" charset="-122"/>
+                <a:ea typeface="Noto Sans KR" pitchFamily="34" charset="-127"/>
                 <a:cs typeface="Noto Sans KR" pitchFamily="34" charset="-120"/>
               </a:rPr>
               <a:t>→</a:t>
@@ -4466,7 +4466,7 @@
                   <a:srgbClr val="101D42"/>
                 </a:solidFill>
                 <a:latin typeface="Noto Serif KR Black" pitchFamily="34" charset="0"/>
-                <a:ea typeface="Noto Serif KR Black" pitchFamily="34" charset="-122"/>
+                <a:ea typeface="Noto Serif KR Black" pitchFamily="34" charset="-127"/>
                 <a:cs typeface="Noto Serif KR Black" pitchFamily="34" charset="-120"/>
               </a:rPr>
               <a:t>읽고 받아들이는 경험이 쌓여,</a:t>
@@ -4486,7 +4486,7 @@
                   <a:srgbClr val="15543C"/>
                 </a:solidFill>
                 <a:latin typeface="Noto Serif KR Black" pitchFamily="34" charset="0"/>
-                <a:ea typeface="Noto Serif KR Black" pitchFamily="34" charset="-122"/>
+                <a:ea typeface="Noto Serif KR Black" pitchFamily="34" charset="-127"/>
                 <a:cs typeface="Noto Serif KR Black" pitchFamily="34" charset="-120"/>
               </a:rPr>
               <a:t>세상을 이해하는 생각의 바탕이 됩니다.</a:t>
@@ -4528,7 +4528,7 @@
                   <a:srgbClr val="43516A"/>
                 </a:solidFill>
                 <a:latin typeface="Noto Sans KR" pitchFamily="34" charset="0"/>
-                <a:ea typeface="Noto Sans KR" pitchFamily="34" charset="-122"/>
+                <a:ea typeface="Noto Sans KR" pitchFamily="34" charset="-127"/>
                 <a:cs typeface="Noto Sans KR" pitchFamily="34" charset="-120"/>
               </a:rPr>
               <a:t>배경지식의 영향은 지식의 정확성 · 글의 특성 등에 따라 달라집니다.</a:t>
@@ -4548,7 +4548,7 @@
                   <a:srgbClr val="43516A"/>
                 </a:solidFill>
                 <a:latin typeface="Noto Sans KR" pitchFamily="34" charset="0"/>
-                <a:ea typeface="Noto Sans KR" pitchFamily="34" charset="-122"/>
+                <a:ea typeface="Noto Sans KR" pitchFamily="34" charset="-127"/>
                 <a:cs typeface="Noto Sans KR" pitchFamily="34" charset="-120"/>
               </a:rPr>
               <a:t>출처: Smith et al. (2021) · Hattan et al. (2024)</a:t>
@@ -4590,7 +4590,7 @@
                   <a:srgbClr val="101D42"/>
                 </a:solidFill>
                 <a:latin typeface="Noto Sans KR" pitchFamily="34" charset="0"/>
-                <a:ea typeface="Noto Sans KR" pitchFamily="34" charset="-122"/>
+                <a:ea typeface="Noto Sans KR" pitchFamily="34" charset="-127"/>
                 <a:cs typeface="Noto Sans KR" pitchFamily="34" charset="-120"/>
               </a:rPr>
               <a:t>2 / 4</a:t>
@@ -5320,7 +5320,7 @@
                   <a:srgbClr val="101D42"/>
                 </a:solidFill>
                 <a:latin typeface="Noto Serif KR Black" pitchFamily="34" charset="0"/>
-                <a:ea typeface="Noto Serif KR Black" pitchFamily="34" charset="-122"/>
+                <a:ea typeface="Noto Serif KR Black" pitchFamily="34" charset="-127"/>
                 <a:cs typeface="Noto Serif KR Black" pitchFamily="34" charset="-120"/>
               </a:rPr>
               <a:t>단편적인 정보에서 깊이 있는 이해로</a:t>
@@ -5362,7 +5362,7 @@
                   <a:srgbClr val="101D42"/>
                 </a:solidFill>
                 <a:latin typeface="Noto Serif KR Black" pitchFamily="34" charset="0"/>
-                <a:ea typeface="Noto Serif KR Black" pitchFamily="34" charset="-122"/>
+                <a:ea typeface="Noto Serif KR Black" pitchFamily="34" charset="-127"/>
                 <a:cs typeface="Noto Serif KR Black" pitchFamily="34" charset="-120"/>
               </a:rPr>
               <a:t>‘본 적 있다’는 익숙함이</a:t>
@@ -5404,7 +5404,7 @@
                   <a:srgbClr val="15543C"/>
                 </a:solidFill>
                 <a:latin typeface="Noto Serif KR Black" pitchFamily="34" charset="0"/>
-                <a:ea typeface="Noto Serif KR Black" pitchFamily="34" charset="-122"/>
+                <a:ea typeface="Noto Serif KR Black" pitchFamily="34" charset="-127"/>
                 <a:cs typeface="Noto Serif KR Black" pitchFamily="34" charset="-120"/>
               </a:rPr>
               <a:t>‘안다’는 이해는 아닙니다.</a:t>
@@ -5446,7 +5446,7 @@
                   <a:srgbClr val="15543C"/>
                 </a:solidFill>
                 <a:latin typeface="Noto Serif KR Black" pitchFamily="34" charset="0"/>
-                <a:ea typeface="Noto Serif KR Black" pitchFamily="34" charset="-122"/>
+                <a:ea typeface="Noto Serif KR Black" pitchFamily="34" charset="-127"/>
                 <a:cs typeface="Noto Serif KR Black" pitchFamily="34" charset="-120"/>
               </a:rPr>
               <a:t>단편적인 정보가 생각의 전부가 될까 걱정됩니다</a:t>
@@ -5488,7 +5488,7 @@
                   <a:srgbClr val="101D42"/>
                 </a:solidFill>
                 <a:latin typeface="Noto Sans KR" pitchFamily="34" charset="0"/>
-                <a:ea typeface="Noto Sans KR" pitchFamily="34" charset="-122"/>
+                <a:ea typeface="Noto Sans KR" pitchFamily="34" charset="-127"/>
                 <a:cs typeface="Noto Sans KR" pitchFamily="34" charset="-120"/>
               </a:rPr>
               <a:t>SNS와 짧은 영상은 정보를 빠르게 접하게 합니다. 그러나 이런 접촉만</a:t>
@@ -5508,7 +5508,7 @@
                   <a:srgbClr val="101D42"/>
                 </a:solidFill>
                 <a:latin typeface="Noto Sans KR" pitchFamily="34" charset="0"/>
-                <a:ea typeface="Noto Sans KR" pitchFamily="34" charset="-122"/>
+                <a:ea typeface="Noto Sans KR" pitchFamily="34" charset="-127"/>
                 <a:cs typeface="Noto Sans KR" pitchFamily="34" charset="-120"/>
               </a:rPr>
               <a:t>이어지면 </a:t>
@@ -5528,7 +5528,7 @@
                   <a:srgbClr val="FFF0AD"/>
                 </a:highlight>
                 <a:latin typeface="Noto Sans KR" pitchFamily="34" charset="0"/>
-                <a:ea typeface="Noto Sans KR" pitchFamily="34" charset="-122"/>
+                <a:ea typeface="Noto Sans KR" pitchFamily="34" charset="-127"/>
                 <a:cs typeface="Noto Sans KR" pitchFamily="34" charset="-120"/>
               </a:rPr>
               <a:t>원인과 맥락</a:t>
@@ -5545,7 +5545,7 @@
                   <a:srgbClr val="101D42"/>
                 </a:solidFill>
                 <a:latin typeface="Noto Sans KR" pitchFamily="34" charset="0"/>
-                <a:ea typeface="Noto Sans KR" pitchFamily="34" charset="-122"/>
+                <a:ea typeface="Noto Sans KR" pitchFamily="34" charset="-127"/>
                 <a:cs typeface="Noto Sans KR" pitchFamily="34" charset="-120"/>
               </a:rPr>
               <a:t>, </a:t>
@@ -5565,7 +5565,7 @@
                   <a:srgbClr val="FFF0AD"/>
                 </a:highlight>
                 <a:latin typeface="Noto Sans KR" pitchFamily="34" charset="0"/>
-                <a:ea typeface="Noto Sans KR" pitchFamily="34" charset="-122"/>
+                <a:ea typeface="Noto Sans KR" pitchFamily="34" charset="-127"/>
                 <a:cs typeface="Noto Sans KR" pitchFamily="34" charset="-120"/>
               </a:rPr>
               <a:t>다른 관점과 반대 근거</a:t>
@@ -5582,7 +5582,7 @@
                   <a:srgbClr val="101D42"/>
                 </a:solidFill>
                 <a:latin typeface="Noto Sans KR" pitchFamily="34" charset="0"/>
-                <a:ea typeface="Noto Sans KR" pitchFamily="34" charset="-122"/>
+                <a:ea typeface="Noto Sans KR" pitchFamily="34" charset="-127"/>
                 <a:cs typeface="Noto Sans KR" pitchFamily="34" charset="-120"/>
               </a:rPr>
               <a:t>를 따져 볼 시간은 부족해질</a:t>
@@ -5602,7 +5602,7 @@
                   <a:srgbClr val="101D42"/>
                 </a:solidFill>
                 <a:latin typeface="Noto Sans KR" pitchFamily="34" charset="0"/>
-                <a:ea typeface="Noto Sans KR" pitchFamily="34" charset="-122"/>
+                <a:ea typeface="Noto Sans KR" pitchFamily="34" charset="-127"/>
                 <a:cs typeface="Noto Sans KR" pitchFamily="34" charset="-120"/>
               </a:rPr>
               <a:t>수 있습니다.</a:t>
@@ -5644,7 +5644,7 @@
                   <a:srgbClr val="15543C"/>
                 </a:solidFill>
                 <a:latin typeface="Noto Serif KR Black" pitchFamily="34" charset="0"/>
-                <a:ea typeface="Noto Serif KR Black" pitchFamily="34" charset="-122"/>
+                <a:ea typeface="Noto Serif KR Black" pitchFamily="34" charset="-127"/>
                 <a:cs typeface="Noto Serif KR Black" pitchFamily="34" charset="-120"/>
               </a:rPr>
               <a:t>‘안다는 착각’을 넘어서는 연습이 필요합니다</a:t>
@@ -5686,7 +5686,7 @@
                   <a:srgbClr val="101D42"/>
                 </a:solidFill>
                 <a:latin typeface="Noto Sans KR" pitchFamily="34" charset="0"/>
-                <a:ea typeface="Noto Sans KR" pitchFamily="34" charset="-122"/>
+                <a:ea typeface="Noto Sans KR" pitchFamily="34" charset="-127"/>
                 <a:cs typeface="Noto Sans KR" pitchFamily="34" charset="-120"/>
               </a:rPr>
               <a:t>인터넷 검색 실험에서는 찾은 정보를 </a:t>
@@ -5706,7 +5706,7 @@
                   <a:srgbClr val="FFF0AD"/>
                 </a:highlight>
                 <a:latin typeface="Noto Sans KR" pitchFamily="34" charset="0"/>
-                <a:ea typeface="Noto Sans KR" pitchFamily="34" charset="-122"/>
+                <a:ea typeface="Noto Sans KR" pitchFamily="34" charset="-127"/>
                 <a:cs typeface="Noto Sans KR" pitchFamily="34" charset="-120"/>
               </a:rPr>
               <a:t>자신의 지식으로 혼동</a:t>
@@ -5723,7 +5723,7 @@
                   <a:srgbClr val="101D42"/>
                 </a:solidFill>
                 <a:latin typeface="Noto Sans KR" pitchFamily="34" charset="0"/>
-                <a:ea typeface="Noto Sans KR" pitchFamily="34" charset="-122"/>
+                <a:ea typeface="Noto Sans KR" pitchFamily="34" charset="-127"/>
                 <a:cs typeface="Noto Sans KR" pitchFamily="34" charset="-120"/>
               </a:rPr>
               <a:t>하고, 아는</a:t>
@@ -5743,7 +5743,7 @@
                   <a:srgbClr val="101D42"/>
                 </a:solidFill>
                 <a:latin typeface="Noto Sans KR" pitchFamily="34" charset="0"/>
-                <a:ea typeface="Noto Sans KR" pitchFamily="34" charset="-122"/>
+                <a:ea typeface="Noto Sans KR" pitchFamily="34" charset="-127"/>
                 <a:cs typeface="Noto Sans KR" pitchFamily="34" charset="-120"/>
               </a:rPr>
               <a:t>정도를 </a:t>
@@ -5763,7 +5763,7 @@
                   <a:srgbClr val="FFF0AD"/>
                 </a:highlight>
                 <a:latin typeface="Noto Sans KR" pitchFamily="34" charset="0"/>
-                <a:ea typeface="Noto Sans KR" pitchFamily="34" charset="-122"/>
+                <a:ea typeface="Noto Sans KR" pitchFamily="34" charset="-127"/>
                 <a:cs typeface="Noto Sans KR" pitchFamily="34" charset="-120"/>
               </a:rPr>
               <a:t>과대평가</a:t>
@@ -5780,7 +5780,7 @@
                   <a:srgbClr val="101D42"/>
                 </a:solidFill>
                 <a:latin typeface="Noto Sans KR" pitchFamily="34" charset="0"/>
-                <a:ea typeface="Noto Sans KR" pitchFamily="34" charset="-122"/>
+                <a:ea typeface="Noto Sans KR" pitchFamily="34" charset="-127"/>
                 <a:cs typeface="Noto Sans KR" pitchFamily="34" charset="-120"/>
               </a:rPr>
               <a:t>하는 현상이 관찰됐습니다.</a:t>
@@ -5822,7 +5822,7 @@
                   <a:srgbClr val="101D42"/>
                 </a:solidFill>
                 <a:latin typeface="Noto Sans KR" pitchFamily="34" charset="0"/>
-                <a:ea typeface="Noto Sans KR" pitchFamily="34" charset="-122"/>
+                <a:ea typeface="Noto Sans KR" pitchFamily="34" charset="-127"/>
                 <a:cs typeface="Noto Sans KR" pitchFamily="34" charset="-120"/>
               </a:rPr>
               <a:t>학생이 </a:t>
@@ -5842,7 +5842,7 @@
                   <a:srgbClr val="FFF0AD"/>
                 </a:highlight>
                 <a:latin typeface="Noto Sans KR" pitchFamily="34" charset="0"/>
-                <a:ea typeface="Noto Sans KR" pitchFamily="34" charset="-122"/>
+                <a:ea typeface="Noto Sans KR" pitchFamily="34" charset="-127"/>
                 <a:cs typeface="Noto Sans KR" pitchFamily="34" charset="-120"/>
               </a:rPr>
               <a:t>자기 말로 설명</a:t>
@@ -5859,7 +5859,7 @@
                   <a:srgbClr val="101D42"/>
                 </a:solidFill>
                 <a:latin typeface="Noto Sans KR" pitchFamily="34" charset="0"/>
-                <a:ea typeface="Noto Sans KR" pitchFamily="34" charset="-122"/>
+                <a:ea typeface="Noto Sans KR" pitchFamily="34" charset="-127"/>
                 <a:cs typeface="Noto Sans KR" pitchFamily="34" charset="-120"/>
               </a:rPr>
               <a:t>하고, </a:t>
@@ -5879,7 +5879,7 @@
                   <a:srgbClr val="FFF0AD"/>
                 </a:highlight>
                 <a:latin typeface="Noto Sans KR" pitchFamily="34" charset="0"/>
-                <a:ea typeface="Noto Sans KR" pitchFamily="34" charset="-122"/>
+                <a:ea typeface="Noto Sans KR" pitchFamily="34" charset="-127"/>
                 <a:cs typeface="Noto Sans KR" pitchFamily="34" charset="-120"/>
               </a:rPr>
               <a:t>책에서 근거를 찾고</a:t>
@@ -5896,7 +5896,7 @@
                   <a:srgbClr val="101D42"/>
                 </a:solidFill>
                 <a:latin typeface="Noto Sans KR" pitchFamily="34" charset="0"/>
-                <a:ea typeface="Noto Sans KR" pitchFamily="34" charset="-122"/>
+                <a:ea typeface="Noto Sans KR" pitchFamily="34" charset="-127"/>
                 <a:cs typeface="Noto Sans KR" pitchFamily="34" charset="-120"/>
               </a:rPr>
               <a:t>, </a:t>
@@ -5916,7 +5916,7 @@
                   <a:srgbClr val="FFF0AD"/>
                 </a:highlight>
                 <a:latin typeface="Noto Sans KR" pitchFamily="34" charset="0"/>
-                <a:ea typeface="Noto Sans KR" pitchFamily="34" charset="-122"/>
+                <a:ea typeface="Noto Sans KR" pitchFamily="34" charset="-127"/>
                 <a:cs typeface="Noto Sans KR" pitchFamily="34" charset="-120"/>
               </a:rPr>
               <a:t>다른 상황에 적용</a:t>
@@ -5933,7 +5933,7 @@
                   <a:srgbClr val="101D42"/>
                 </a:solidFill>
                 <a:latin typeface="Noto Sans KR" pitchFamily="34" charset="0"/>
-                <a:ea typeface="Noto Sans KR" pitchFamily="34" charset="-122"/>
+                <a:ea typeface="Noto Sans KR" pitchFamily="34" charset="-127"/>
                 <a:cs typeface="Noto Sans KR" pitchFamily="34" charset="-120"/>
               </a:rPr>
               <a:t>해 보는</a:t>
@@ -5953,7 +5953,7 @@
                   <a:srgbClr val="101D42"/>
                 </a:solidFill>
                 <a:latin typeface="Noto Sans KR" pitchFamily="34" charset="0"/>
-                <a:ea typeface="Noto Sans KR" pitchFamily="34" charset="-122"/>
+                <a:ea typeface="Noto Sans KR" pitchFamily="34" charset="-127"/>
                 <a:cs typeface="Noto Sans KR" pitchFamily="34" charset="-120"/>
               </a:rPr>
               <a:t>활동이 필요합니다.</a:t>
@@ -5995,7 +5995,7 @@
                   <a:srgbClr val="15543C"/>
                 </a:solidFill>
                 <a:latin typeface="Noto Serif KR Black" pitchFamily="34" charset="0"/>
-                <a:ea typeface="Noto Serif KR Black" pitchFamily="34" charset="-122"/>
+                <a:ea typeface="Noto Serif KR Black" pitchFamily="34" charset="-127"/>
                 <a:cs typeface="Noto Serif KR Black" pitchFamily="34" charset="-120"/>
               </a:rPr>
               <a:t>디지털 교육의 중심에도 학생의 사고가 있어야 합니다</a:t>
@@ -6037,7 +6037,7 @@
                   <a:srgbClr val="101D42"/>
                 </a:solidFill>
                 <a:latin typeface="Noto Sans KR" pitchFamily="34" charset="0"/>
-                <a:ea typeface="Noto Sans KR" pitchFamily="34" charset="-122"/>
+                <a:ea typeface="Noto Sans KR" pitchFamily="34" charset="-127"/>
                 <a:cs typeface="Noto Sans KR" pitchFamily="34" charset="-120"/>
               </a:rPr>
               <a:t>AI가 빠르게 답을 제시해도, 그 </a:t>
@@ -6057,7 +6057,7 @@
                   <a:srgbClr val="FFF0AD"/>
                 </a:highlight>
                 <a:latin typeface="Noto Sans KR" pitchFamily="34" charset="0"/>
-                <a:ea typeface="Noto Sans KR" pitchFamily="34" charset="-122"/>
+                <a:ea typeface="Noto Sans KR" pitchFamily="34" charset="-127"/>
                 <a:cs typeface="Noto Sans KR" pitchFamily="34" charset="-120"/>
               </a:rPr>
               <a:t>뜻과 근거를 판단하는 힘</a:t>
@@ -6074,7 +6074,7 @@
                   <a:srgbClr val="101D42"/>
                 </a:solidFill>
                 <a:latin typeface="Noto Sans KR" pitchFamily="34" charset="0"/>
-                <a:ea typeface="Noto Sans KR" pitchFamily="34" charset="-122"/>
+                <a:ea typeface="Noto Sans KR" pitchFamily="34" charset="-127"/>
                 <a:cs typeface="Noto Sans KR" pitchFamily="34" charset="-120"/>
               </a:rPr>
               <a:t>은 학생 안에 있어야</a:t>
@@ -6094,7 +6094,7 @@
                   <a:srgbClr val="101D42"/>
                 </a:solidFill>
                 <a:latin typeface="Noto Sans KR" pitchFamily="34" charset="0"/>
-                <a:ea typeface="Noto Sans KR" pitchFamily="34" charset="-122"/>
+                <a:ea typeface="Noto Sans KR" pitchFamily="34" charset="-127"/>
                 <a:cs typeface="Noto Sans KR" pitchFamily="34" charset="-120"/>
               </a:rPr>
               <a:t>합니다. 기술은 읽기와 표현을 돕고, 학생에게 </a:t>
@@ -6114,7 +6114,7 @@
                   <a:srgbClr val="FFF0AD"/>
                 </a:highlight>
                 <a:latin typeface="Noto Sans KR" pitchFamily="34" charset="0"/>
-                <a:ea typeface="Noto Sans KR" pitchFamily="34" charset="-122"/>
+                <a:ea typeface="Noto Sans KR" pitchFamily="34" charset="-127"/>
                 <a:cs typeface="Noto Sans KR" pitchFamily="34" charset="-120"/>
               </a:rPr>
               <a:t>충분히 생각할 시간</a:t>
@@ -6131,7 +6131,7 @@
                   <a:srgbClr val="101D42"/>
                 </a:solidFill>
                 <a:latin typeface="Noto Sans KR" pitchFamily="34" charset="0"/>
-                <a:ea typeface="Noto Sans KR" pitchFamily="34" charset="-122"/>
+                <a:ea typeface="Noto Sans KR" pitchFamily="34" charset="-127"/>
                 <a:cs typeface="Noto Sans KR" pitchFamily="34" charset="-120"/>
               </a:rPr>
               <a:t>을 주는</a:t>
@@ -6151,7 +6151,7 @@
                   <a:srgbClr val="101D42"/>
                 </a:solidFill>
                 <a:latin typeface="Noto Sans KR" pitchFamily="34" charset="0"/>
-                <a:ea typeface="Noto Sans KR" pitchFamily="34" charset="-122"/>
+                <a:ea typeface="Noto Sans KR" pitchFamily="34" charset="-127"/>
                 <a:cs typeface="Noto Sans KR" pitchFamily="34" charset="-120"/>
               </a:rPr>
               <a:t>방향으로 써야 합니다.</a:t>
@@ -6193,7 +6193,7 @@
                   <a:srgbClr val="FFFFFF"/>
                 </a:solidFill>
                 <a:latin typeface="Noto Sans KR" pitchFamily="34" charset="0"/>
-                <a:ea typeface="Noto Sans KR" pitchFamily="34" charset="-122"/>
+                <a:ea typeface="Noto Sans KR" pitchFamily="34" charset="-127"/>
                 <a:cs typeface="Noto Sans KR" pitchFamily="34" charset="-120"/>
               </a:rPr>
               <a:t>?</a:t>
@@ -6235,7 +6235,7 @@
                   <a:srgbClr val="15543C"/>
                 </a:solidFill>
                 <a:latin typeface="Noto Sans KR" pitchFamily="34" charset="0"/>
-                <a:ea typeface="Noto Sans KR" pitchFamily="34" charset="-122"/>
+                <a:ea typeface="Noto Sans KR" pitchFamily="34" charset="-127"/>
                 <a:cs typeface="Noto Sans KR" pitchFamily="34" charset="-120"/>
               </a:rPr>
               <a:t>내 말로 설명할 수 있는가?</a:t>
@@ -6255,7 +6255,7 @@
                   <a:srgbClr val="15543C"/>
                 </a:solidFill>
                 <a:latin typeface="Noto Sans KR" pitchFamily="34" charset="0"/>
-                <a:ea typeface="Noto Sans KR" pitchFamily="34" charset="-122"/>
+                <a:ea typeface="Noto Sans KR" pitchFamily="34" charset="-127"/>
                 <a:cs typeface="Noto Sans KR" pitchFamily="34" charset="-120"/>
               </a:rPr>
               <a:t>그렇게 생각한 근거는 무엇인가?</a:t>
@@ -6275,7 +6275,7 @@
                   <a:srgbClr val="15543C"/>
                 </a:solidFill>
                 <a:latin typeface="Noto Sans KR" pitchFamily="34" charset="0"/>
-                <a:ea typeface="Noto Sans KR" pitchFamily="34" charset="-122"/>
+                <a:ea typeface="Noto Sans KR" pitchFamily="34" charset="-127"/>
                 <a:cs typeface="Noto Sans KR" pitchFamily="34" charset="-120"/>
               </a:rPr>
               <a:t>다른 상황에도 적용할 수 있는가?</a:t>
@@ -6317,7 +6317,7 @@
                   <a:srgbClr val="FFFFFF"/>
                 </a:solidFill>
                 <a:latin typeface="Noto Sans KR" pitchFamily="34" charset="0"/>
-                <a:ea typeface="Noto Sans KR" pitchFamily="34" charset="-122"/>
+                <a:ea typeface="Noto Sans KR" pitchFamily="34" charset="-127"/>
                 <a:cs typeface="Noto Sans KR" pitchFamily="34" charset="-120"/>
               </a:rPr>
               <a:t>?</a:t>
@@ -6359,7 +6359,7 @@
                   <a:srgbClr val="FFFFFF"/>
                 </a:solidFill>
                 <a:latin typeface="Noto Sans KR" pitchFamily="34" charset="0"/>
-                <a:ea typeface="Noto Sans KR" pitchFamily="34" charset="-122"/>
+                <a:ea typeface="Noto Sans KR" pitchFamily="34" charset="-127"/>
                 <a:cs typeface="Noto Sans KR" pitchFamily="34" charset="-120"/>
               </a:rPr>
               <a:t>?</a:t>
@@ -6401,7 +6401,7 @@
                   <a:srgbClr val="43516A"/>
                 </a:solidFill>
                 <a:latin typeface="Noto Sans KR" pitchFamily="34" charset="0"/>
-                <a:ea typeface="Noto Sans KR" pitchFamily="34" charset="-122"/>
+                <a:ea typeface="Noto Sans KR" pitchFamily="34" charset="-127"/>
                 <a:cs typeface="Noto Sans KR" pitchFamily="34" charset="-120"/>
               </a:rPr>
               <a:t>연구는 성인의 인터넷 검색 실험이며, 초등학생의 SNS 효과를 직접 검증한 결과는 아닙니다.</a:t>
@@ -6421,7 +6421,7 @@
                   <a:srgbClr val="43516A"/>
                 </a:solidFill>
                 <a:latin typeface="Noto Sans KR" pitchFamily="34" charset="0"/>
-                <a:ea typeface="Noto Sans KR" pitchFamily="34" charset="-122"/>
+                <a:ea typeface="Noto Sans KR" pitchFamily="34" charset="-127"/>
                 <a:cs typeface="Noto Sans KR" pitchFamily="34" charset="-120"/>
               </a:rPr>
               <a:t>출처: Fisher et al. (2015) · Ward (2021)</a:t>
@@ -6463,7 +6463,7 @@
                   <a:srgbClr val="101D42"/>
                 </a:solidFill>
                 <a:latin typeface="Noto Sans KR" pitchFamily="34" charset="0"/>
-                <a:ea typeface="Noto Sans KR" pitchFamily="34" charset="-122"/>
+                <a:ea typeface="Noto Sans KR" pitchFamily="34" charset="-127"/>
                 <a:cs typeface="Noto Sans KR" pitchFamily="34" charset="-120"/>
               </a:rPr>
               <a:t>3 / 4</a:t>
@@ -7595,7 +7595,7 @@
                   <a:srgbClr val="101D42"/>
                 </a:solidFill>
                 <a:latin typeface="Noto Serif KR Black" pitchFamily="34" charset="0"/>
-                <a:ea typeface="Noto Serif KR Black" pitchFamily="34" charset="-122"/>
+                <a:ea typeface="Noto Serif KR Black" pitchFamily="34" charset="-127"/>
                 <a:cs typeface="Noto Serif KR Black" pitchFamily="34" charset="-120"/>
               </a:rPr>
               <a:t>교실의 문제에서 출발한 부기</a:t>
@@ -7637,7 +7637,7 @@
                   <a:srgbClr val="101D42"/>
                 </a:solidFill>
                 <a:latin typeface="Noto Serif KR Black" pitchFamily="34" charset="0"/>
-                <a:ea typeface="Noto Serif KR Black" pitchFamily="34" charset="-122"/>
+                <a:ea typeface="Noto Serif KR Black" pitchFamily="34" charset="-127"/>
                 <a:cs typeface="Noto Serif KR Black" pitchFamily="34" charset="-120"/>
               </a:rPr>
               <a:t>지금 학교 현장에는</a:t>
@@ -7657,7 +7657,7 @@
                   <a:srgbClr val="15543C"/>
                 </a:solidFill>
                 <a:latin typeface="Noto Serif KR Black" pitchFamily="34" charset="0"/>
-                <a:ea typeface="Noto Serif KR Black" pitchFamily="34" charset="-122"/>
+                <a:ea typeface="Noto Serif KR Black" pitchFamily="34" charset="-127"/>
                 <a:cs typeface="Noto Serif KR Black" pitchFamily="34" charset="-120"/>
               </a:rPr>
               <a:t>독서가 절실합니다.</a:t>
@@ -7699,7 +7699,7 @@
                   <a:srgbClr val="15543C"/>
                 </a:solidFill>
                 <a:latin typeface="Noto Serif KR Black" pitchFamily="34" charset="0"/>
-                <a:ea typeface="Noto Serif KR Black" pitchFamily="34" charset="-122"/>
+                <a:ea typeface="Noto Serif KR Black" pitchFamily="34" charset="-127"/>
                 <a:cs typeface="Noto Serif KR Black" pitchFamily="34" charset="-120"/>
               </a:rPr>
               <a:t>고전의 지혜에서 시작하고자 합니다</a:t>
@@ -7741,7 +7741,7 @@
                   <a:srgbClr val="101D42"/>
                 </a:solidFill>
                 <a:latin typeface="Noto Sans KR" pitchFamily="34" charset="0"/>
-                <a:ea typeface="Noto Sans KR" pitchFamily="34" charset="-122"/>
+                <a:ea typeface="Noto Sans KR" pitchFamily="34" charset="-127"/>
                 <a:cs typeface="Noto Sans KR" pitchFamily="34" charset="-120"/>
               </a:rPr>
               <a:t>사람과 세상을 이해하고 </a:t>
@@ -7761,7 +7761,7 @@
                   <a:srgbClr val="FFF0AD"/>
                 </a:highlight>
                 <a:latin typeface="Noto Sans KR" pitchFamily="34" charset="0"/>
-                <a:ea typeface="Noto Sans KR" pitchFamily="34" charset="-122"/>
+                <a:ea typeface="Noto Sans KR" pitchFamily="34" charset="-127"/>
                 <a:cs typeface="Noto Sans KR" pitchFamily="34" charset="-120"/>
               </a:rPr>
               <a:t>스스로 생각할 힘</a:t>
@@ -7778,7 +7778,7 @@
                   <a:srgbClr val="101D42"/>
                 </a:solidFill>
                 <a:latin typeface="Noto Sans KR" pitchFamily="34" charset="0"/>
-                <a:ea typeface="Noto Sans KR" pitchFamily="34" charset="-122"/>
+                <a:ea typeface="Noto Sans KR" pitchFamily="34" charset="-127"/>
                 <a:cs typeface="Noto Sans KR" pitchFamily="34" charset="-120"/>
               </a:rPr>
               <a:t>을 기르기 위해, </a:t>
@@ -7798,7 +7798,7 @@
                   <a:srgbClr val="FFF0AD"/>
                 </a:highlight>
                 <a:latin typeface="Noto Sans KR" pitchFamily="34" charset="0"/>
-                <a:ea typeface="Noto Sans KR" pitchFamily="34" charset="-122"/>
+                <a:ea typeface="Noto Sans KR" pitchFamily="34" charset="-127"/>
                 <a:cs typeface="Noto Sans KR" pitchFamily="34" charset="-120"/>
               </a:rPr>
               <a:t>고전의 지혜</a:t>
@@ -7815,7 +7815,7 @@
                   <a:srgbClr val="101D42"/>
                 </a:solidFill>
                 <a:latin typeface="Noto Sans KR" pitchFamily="34" charset="0"/>
-                <a:ea typeface="Noto Sans KR" pitchFamily="34" charset="-122"/>
+                <a:ea typeface="Noto Sans KR" pitchFamily="34" charset="-127"/>
                 <a:cs typeface="Noto Sans KR" pitchFamily="34" charset="-120"/>
               </a:rPr>
               <a:t>를</a:t>
@@ -7835,7 +7835,7 @@
                   <a:srgbClr val="101D42"/>
                 </a:solidFill>
                 <a:latin typeface="Noto Sans KR" pitchFamily="34" charset="0"/>
-                <a:ea typeface="Noto Sans KR" pitchFamily="34" charset="-122"/>
+                <a:ea typeface="Noto Sans KR" pitchFamily="34" charset="-127"/>
                 <a:cs typeface="Noto Sans KR" pitchFamily="34" charset="-120"/>
               </a:rPr>
               <a:t>빌리고자 했습니다. </a:t>
@@ -7855,7 +7855,7 @@
                   <a:srgbClr val="FFF0AD"/>
                 </a:highlight>
                 <a:latin typeface="Noto Sans KR" pitchFamily="34" charset="0"/>
-                <a:ea typeface="Noto Sans KR" pitchFamily="34" charset="-122"/>
+                <a:ea typeface="Noto Sans KR" pitchFamily="34" charset="-127"/>
                 <a:cs typeface="Noto Sans KR" pitchFamily="34" charset="-120"/>
               </a:rPr>
               <a:t>우정과 책임</a:t>
@@ -7872,7 +7872,7 @@
                   <a:srgbClr val="101D42"/>
                 </a:solidFill>
                 <a:latin typeface="Noto Sans KR" pitchFamily="34" charset="0"/>
-                <a:ea typeface="Noto Sans KR" pitchFamily="34" charset="-122"/>
+                <a:ea typeface="Noto Sans KR" pitchFamily="34" charset="-127"/>
                 <a:cs typeface="Noto Sans KR" pitchFamily="34" charset="-120"/>
               </a:rPr>
               <a:t>, </a:t>
@@ -7892,7 +7892,7 @@
                   <a:srgbClr val="FFF0AD"/>
                 </a:highlight>
                 <a:latin typeface="Noto Sans KR" pitchFamily="34" charset="0"/>
-                <a:ea typeface="Noto Sans KR" pitchFamily="34" charset="-122"/>
+                <a:ea typeface="Noto Sans KR" pitchFamily="34" charset="-127"/>
                 <a:cs typeface="Noto Sans KR" pitchFamily="34" charset="-120"/>
               </a:rPr>
               <a:t>공정과 나눔</a:t>
@@ -7909,7 +7909,7 @@
                   <a:srgbClr val="101D42"/>
                 </a:solidFill>
                 <a:latin typeface="Noto Sans KR" pitchFamily="34" charset="0"/>
-                <a:ea typeface="Noto Sans KR" pitchFamily="34" charset="-122"/>
+                <a:ea typeface="Noto Sans KR" pitchFamily="34" charset="-127"/>
                 <a:cs typeface="Noto Sans KR" pitchFamily="34" charset="-120"/>
               </a:rPr>
               <a:t>을 읽으며 ‘왜 그런 선택을 했을까’,</a:t>
@@ -7929,7 +7929,7 @@
                   <a:srgbClr val="101D42"/>
                 </a:solidFill>
                 <a:latin typeface="Noto Sans KR" pitchFamily="34" charset="0"/>
-                <a:ea typeface="Noto Sans KR" pitchFamily="34" charset="-122"/>
+                <a:ea typeface="Noto Sans KR" pitchFamily="34" charset="-127"/>
                 <a:cs typeface="Noto Sans KR" pitchFamily="34" charset="-120"/>
               </a:rPr>
               <a:t>‘나라면 어떻게 했을까’를 함께 묻습니다.</a:t>
@@ -7971,7 +7971,7 @@
                   <a:srgbClr val="15543C"/>
                 </a:solidFill>
                 <a:latin typeface="Noto Serif KR Black" pitchFamily="34" charset="0"/>
-                <a:ea typeface="Noto Serif KR Black" pitchFamily="34" charset="-122"/>
+                <a:ea typeface="Noto Serif KR Black" pitchFamily="34" charset="-127"/>
                 <a:cs typeface="Noto Serif KR Black" pitchFamily="34" charset="-120"/>
               </a:rPr>
               <a:t>초등교사들이 뜻을 모아 만들었습니다</a:t>
@@ -8013,7 +8013,7 @@
                   <a:srgbClr val="101D42"/>
                 </a:solidFill>
                 <a:latin typeface="Noto Sans KR" pitchFamily="34" charset="0"/>
-                <a:ea typeface="Noto Sans KR" pitchFamily="34" charset="-122"/>
+                <a:ea typeface="Noto Sans KR" pitchFamily="34" charset="-127"/>
                 <a:cs typeface="Noto Sans KR" pitchFamily="34" charset="-120"/>
               </a:rPr>
               <a:t>교실의 읽기 어려움을 풀고자 </a:t>
@@ -8033,7 +8033,7 @@
                   <a:srgbClr val="FFF0AD"/>
                 </a:highlight>
                 <a:latin typeface="Noto Sans KR" pitchFamily="34" charset="0"/>
-                <a:ea typeface="Noto Sans KR" pitchFamily="34" charset="-122"/>
+                <a:ea typeface="Noto Sans KR" pitchFamily="34" charset="-127"/>
                 <a:cs typeface="Noto Sans KR" pitchFamily="34" charset="-120"/>
               </a:rPr>
               <a:t>교사들이 기획</a:t>
@@ -8050,7 +8050,7 @@
                   <a:srgbClr val="101D42"/>
                 </a:solidFill>
                 <a:latin typeface="Noto Sans KR" pitchFamily="34" charset="0"/>
-                <a:ea typeface="Noto Sans KR" pitchFamily="34" charset="-122"/>
+                <a:ea typeface="Noto Sans KR" pitchFamily="34" charset="-127"/>
                 <a:cs typeface="Noto Sans KR" pitchFamily="34" charset="-120"/>
               </a:rPr>
               <a:t>하고, </a:t>
@@ -8070,7 +8070,7 @@
                   <a:srgbClr val="FFF0AD"/>
                 </a:highlight>
                 <a:latin typeface="Noto Sans KR" pitchFamily="34" charset="0"/>
-                <a:ea typeface="Noto Sans KR" pitchFamily="34" charset="-122"/>
+                <a:ea typeface="Noto Sans KR" pitchFamily="34" charset="-127"/>
                 <a:cs typeface="Noto Sans KR" pitchFamily="34" charset="-120"/>
               </a:rPr>
               <a:t>기업의 지원</a:t>
@@ -8087,7 +8087,7 @@
                   <a:srgbClr val="101D42"/>
                 </a:solidFill>
                 <a:latin typeface="Noto Sans KR" pitchFamily="34" charset="0"/>
-                <a:ea typeface="Noto Sans KR" pitchFamily="34" charset="-122"/>
+                <a:ea typeface="Noto Sans KR" pitchFamily="34" charset="-127"/>
                 <a:cs typeface="Noto Sans KR" pitchFamily="34" charset="-120"/>
               </a:rPr>
               <a:t>을 더해 학교에</a:t>
@@ -8107,7 +8107,7 @@
                   <a:srgbClr val="101D42"/>
                 </a:solidFill>
                 <a:latin typeface="Noto Sans KR" pitchFamily="34" charset="0"/>
-                <a:ea typeface="Noto Sans KR" pitchFamily="34" charset="-122"/>
+                <a:ea typeface="Noto Sans KR" pitchFamily="34" charset="-127"/>
                 <a:cs typeface="Noto Sans KR" pitchFamily="34" charset="-120"/>
               </a:rPr>
               <a:t>적용했습니다. 학교에서 </a:t>
@@ -8127,7 +8127,7 @@
                   <a:srgbClr val="FFF0AD"/>
                 </a:highlight>
                 <a:latin typeface="Noto Sans KR" pitchFamily="34" charset="0"/>
-                <a:ea typeface="Noto Sans KR" pitchFamily="34" charset="-122"/>
+                <a:ea typeface="Noto Sans KR" pitchFamily="34" charset="-127"/>
                 <a:cs typeface="Noto Sans KR" pitchFamily="34" charset="-120"/>
               </a:rPr>
               <a:t>시범 사용</a:t>
@@ -8144,7 +8144,7 @@
                   <a:srgbClr val="101D42"/>
                 </a:solidFill>
                 <a:latin typeface="Noto Sans KR" pitchFamily="34" charset="0"/>
-                <a:ea typeface="Noto Sans KR" pitchFamily="34" charset="-122"/>
+                <a:ea typeface="Noto Sans KR" pitchFamily="34" charset="-127"/>
                 <a:cs typeface="Noto Sans KR" pitchFamily="34" charset="-120"/>
               </a:rPr>
               <a:t>을 통해 </a:t>
@@ -8164,7 +8164,7 @@
                   <a:srgbClr val="FFF0AD"/>
                 </a:highlight>
                 <a:latin typeface="Noto Sans KR" pitchFamily="34" charset="0"/>
-                <a:ea typeface="Noto Sans KR" pitchFamily="34" charset="-122"/>
+                <a:ea typeface="Noto Sans KR" pitchFamily="34" charset="-127"/>
                 <a:cs typeface="Noto Sans KR" pitchFamily="34" charset="-120"/>
               </a:rPr>
               <a:t>계속 개선하고 발전</a:t>
@@ -8181,7 +8181,7 @@
                   <a:srgbClr val="101D42"/>
                 </a:solidFill>
                 <a:latin typeface="Noto Sans KR" pitchFamily="34" charset="0"/>
-                <a:ea typeface="Noto Sans KR" pitchFamily="34" charset="-122"/>
+                <a:ea typeface="Noto Sans KR" pitchFamily="34" charset="-127"/>
                 <a:cs typeface="Noto Sans KR" pitchFamily="34" charset="-120"/>
               </a:rPr>
               <a:t>시켜 나가고</a:t>
@@ -8201,7 +8201,7 @@
                   <a:srgbClr val="101D42"/>
                 </a:solidFill>
                 <a:latin typeface="Noto Sans KR" pitchFamily="34" charset="0"/>
-                <a:ea typeface="Noto Sans KR" pitchFamily="34" charset="-122"/>
+                <a:ea typeface="Noto Sans KR" pitchFamily="34" charset="-127"/>
                 <a:cs typeface="Noto Sans KR" pitchFamily="34" charset="-120"/>
               </a:rPr>
               <a:t>있습니다.</a:t>
@@ -8243,7 +8243,7 @@
                   <a:srgbClr val="101D42"/>
                 </a:solidFill>
                 <a:latin typeface="Noto Sans KR" pitchFamily="34" charset="0"/>
-                <a:ea typeface="Noto Sans KR" pitchFamily="34" charset="-122"/>
+                <a:ea typeface="Noto Sans KR" pitchFamily="34" charset="-127"/>
                 <a:cs typeface="Noto Sans KR" pitchFamily="34" charset="-120"/>
               </a:rPr>
               <a:t>낱말 뜻 · 능동적 그림 읽기 · 다국어 지원</a:t>
@@ -8285,7 +8285,7 @@
                   <a:srgbClr val="15543C"/>
                 </a:solidFill>
                 <a:latin typeface="Noto Serif KR Black" pitchFamily="34" charset="0"/>
-                <a:ea typeface="Noto Serif KR Black" pitchFamily="34" charset="-122"/>
+                <a:ea typeface="Noto Serif KR Black" pitchFamily="34" charset="-127"/>
                 <a:cs typeface="Noto Serif KR Black" pitchFamily="34" charset="-120"/>
               </a:rPr>
               <a:t>읽기 지원</a:t>
@@ -8327,7 +8327,7 @@
                   <a:srgbClr val="101D42"/>
                 </a:solidFill>
                 <a:latin typeface="Noto Sans KR" pitchFamily="34" charset="0"/>
-                <a:ea typeface="Noto Sans KR" pitchFamily="34" charset="-122"/>
+                <a:ea typeface="Noto Sans KR" pitchFamily="34" charset="-127"/>
                 <a:cs typeface="Noto Sans KR" pitchFamily="34" charset="-120"/>
               </a:rPr>
               <a:t>캐릭터와의 대화 · 다양한 독후활동</a:t>
@@ -8369,7 +8369,7 @@
                   <a:srgbClr val="15543C"/>
                 </a:solidFill>
                 <a:latin typeface="Noto Serif KR Black" pitchFamily="34" charset="0"/>
-                <a:ea typeface="Noto Serif KR Black" pitchFamily="34" charset="-122"/>
+                <a:ea typeface="Noto Serif KR Black" pitchFamily="34" charset="-127"/>
                 <a:cs typeface="Noto Serif KR Black" pitchFamily="34" charset="-120"/>
               </a:rPr>
               <a:t>생각과 표현</a:t>
@@ -8411,7 +8411,7 @@
                   <a:srgbClr val="101D42"/>
                 </a:solidFill>
                 <a:latin typeface="Noto Sans KR" pitchFamily="34" charset="0"/>
-                <a:ea typeface="Noto Sans KR" pitchFamily="34" charset="-122"/>
+                <a:ea typeface="Noto Sans KR" pitchFamily="34" charset="-127"/>
                 <a:cs typeface="Noto Sans KR" pitchFamily="34" charset="-120"/>
               </a:rPr>
               <a:t>독서 기록 자산 · 수업 자료 · 학생 기록</a:t>
@@ -8453,7 +8453,7 @@
                   <a:srgbClr val="15543C"/>
                 </a:solidFill>
                 <a:latin typeface="Noto Serif KR Black" pitchFamily="34" charset="0"/>
-                <a:ea typeface="Noto Serif KR Black" pitchFamily="34" charset="-122"/>
+                <a:ea typeface="Noto Serif KR Black" pitchFamily="34" charset="-127"/>
                 <a:cs typeface="Noto Serif KR Black" pitchFamily="34" charset="-120"/>
               </a:rPr>
               <a:t>기록과 지도</a:t>
@@ -8495,7 +8495,7 @@
                   <a:srgbClr val="15543C"/>
                 </a:solidFill>
                 <a:latin typeface="Noto Serif KR Black" pitchFamily="34" charset="0"/>
-                <a:ea typeface="Noto Serif KR Black" pitchFamily="34" charset="-122"/>
+                <a:ea typeface="Noto Serif KR Black" pitchFamily="34" charset="-127"/>
                 <a:cs typeface="Noto Serif KR Black" pitchFamily="34" charset="-120"/>
               </a:rPr>
               <a:t>모두가 차별 없이 함께 읽을 수 있도록</a:t>
@@ -8537,7 +8537,7 @@
                   <a:srgbClr val="101D42"/>
                 </a:solidFill>
                 <a:latin typeface="Noto Sans KR" pitchFamily="34" charset="0"/>
-                <a:ea typeface="Noto Sans KR" pitchFamily="34" charset="-122"/>
+                <a:ea typeface="Noto Sans KR" pitchFamily="34" charset="-127"/>
                 <a:cs typeface="Noto Sans KR" pitchFamily="34" charset="-120"/>
               </a:rPr>
               <a:t>어려운 어휘는 </a:t>
@@ -8557,7 +8557,7 @@
                   <a:srgbClr val="FFF0AD"/>
                 </a:highlight>
                 <a:latin typeface="Noto Sans KR" pitchFamily="34" charset="0"/>
-                <a:ea typeface="Noto Sans KR" pitchFamily="34" charset="-122"/>
+                <a:ea typeface="Noto Sans KR" pitchFamily="34" charset="-127"/>
                 <a:cs typeface="Noto Sans KR" pitchFamily="34" charset="-120"/>
               </a:rPr>
               <a:t>디지털 도움</a:t>
@@ -8574,7 +8574,7 @@
                   <a:srgbClr val="101D42"/>
                 </a:solidFill>
                 <a:latin typeface="Noto Sans KR" pitchFamily="34" charset="0"/>
-                <a:ea typeface="Noto Sans KR" pitchFamily="34" charset="-122"/>
+                <a:ea typeface="Noto Sans KR" pitchFamily="34" charset="-127"/>
                 <a:cs typeface="Noto Sans KR" pitchFamily="34" charset="-120"/>
               </a:rPr>
               <a:t>으로, 언어의 차이는 </a:t>
@@ -8594,7 +8594,7 @@
                   <a:srgbClr val="FFF0AD"/>
                 </a:highlight>
                 <a:latin typeface="Noto Sans KR" pitchFamily="34" charset="0"/>
-                <a:ea typeface="Noto Sans KR" pitchFamily="34" charset="-122"/>
+                <a:ea typeface="Noto Sans KR" pitchFamily="34" charset="-127"/>
                 <a:cs typeface="Noto Sans KR" pitchFamily="34" charset="-120"/>
               </a:rPr>
               <a:t>다국어 번역</a:t>
@@ -8611,7 +8611,7 @@
                   <a:srgbClr val="101D42"/>
                 </a:solidFill>
                 <a:latin typeface="Noto Sans KR" pitchFamily="34" charset="0"/>
-                <a:ea typeface="Noto Sans KR" pitchFamily="34" charset="-122"/>
+                <a:ea typeface="Noto Sans KR" pitchFamily="34" charset="-127"/>
                 <a:cs typeface="Noto Sans KR" pitchFamily="34" charset="-120"/>
               </a:rPr>
               <a:t>으로 지원합니다. </a:t>
@@ -8631,7 +8631,7 @@
                   <a:srgbClr val="FFF0AD"/>
                 </a:highlight>
                 <a:latin typeface="Noto Sans KR" pitchFamily="34" charset="0"/>
-                <a:ea typeface="Noto Sans KR" pitchFamily="34" charset="-122"/>
+                <a:ea typeface="Noto Sans KR" pitchFamily="34" charset="-127"/>
                 <a:cs typeface="Noto Sans KR" pitchFamily="34" charset="-120"/>
               </a:rPr>
               <a:t>다문화</a:t>
@@ -8654,7 +8654,7 @@
                   <a:srgbClr val="FFF0AD"/>
                 </a:highlight>
                 <a:latin typeface="Noto Sans KR" pitchFamily="34" charset="0"/>
-                <a:ea typeface="Noto Sans KR" pitchFamily="34" charset="-122"/>
+                <a:ea typeface="Noto Sans KR" pitchFamily="34" charset="-127"/>
                 <a:cs typeface="Noto Sans KR" pitchFamily="34" charset="-120"/>
               </a:rPr>
               <a:t>학생</a:t>
@@ -8671,7 +8671,7 @@
                   <a:srgbClr val="101D42"/>
                 </a:solidFill>
                 <a:latin typeface="Noto Sans KR" pitchFamily="34" charset="0"/>
-                <a:ea typeface="Noto Sans KR" pitchFamily="34" charset="-122"/>
+                <a:ea typeface="Noto Sans KR" pitchFamily="34" charset="-127"/>
                 <a:cs typeface="Noto Sans KR" pitchFamily="34" charset="-120"/>
               </a:rPr>
               <a:t>을 포함한 </a:t>
@@ -8691,7 +8691,7 @@
                   <a:srgbClr val="FFF0AD"/>
                 </a:highlight>
                 <a:latin typeface="Noto Sans KR" pitchFamily="34" charset="0"/>
-                <a:ea typeface="Noto Sans KR" pitchFamily="34" charset="-122"/>
+                <a:ea typeface="Noto Sans KR" pitchFamily="34" charset="-127"/>
                 <a:cs typeface="Noto Sans KR" pitchFamily="34" charset="-120"/>
               </a:rPr>
               <a:t>모두가 차별 없이 함께 읽는 가치</a:t>
@@ -8708,7 +8708,7 @@
                   <a:srgbClr val="101D42"/>
                 </a:solidFill>
                 <a:latin typeface="Noto Sans KR" pitchFamily="34" charset="0"/>
-                <a:ea typeface="Noto Sans KR" pitchFamily="34" charset="-122"/>
+                <a:ea typeface="Noto Sans KR" pitchFamily="34" charset="-127"/>
                 <a:cs typeface="Noto Sans KR" pitchFamily="34" charset="-120"/>
               </a:rPr>
               <a:t>를 확산하고자 합니다.</a:t>
@@ -8750,7 +8750,7 @@
                   <a:srgbClr val="101D42"/>
                 </a:solidFill>
                 <a:latin typeface="Noto Sans KR" pitchFamily="34" charset="0"/>
-                <a:ea typeface="Noto Sans KR" pitchFamily="34" charset="-122"/>
+                <a:ea typeface="Noto Sans KR" pitchFamily="34" charset="-127"/>
                 <a:cs typeface="Noto Sans KR" pitchFamily="34" charset="-120"/>
               </a:rPr>
               <a:t>학생에게는 </a:t>
@@ -8770,7 +8770,7 @@
                   <a:srgbClr val="FFF0AD"/>
                 </a:highlight>
                 <a:latin typeface="Noto Sans KR" pitchFamily="34" charset="0"/>
-                <a:ea typeface="Noto Sans KR" pitchFamily="34" charset="-122"/>
+                <a:ea typeface="Noto Sans KR" pitchFamily="34" charset="-127"/>
                 <a:cs typeface="Noto Sans KR" pitchFamily="34" charset="-120"/>
               </a:rPr>
               <a:t>충분히 읽고 생각할 시간</a:t>
@@ -8787,7 +8787,7 @@
                   <a:srgbClr val="101D42"/>
                 </a:solidFill>
                 <a:latin typeface="Noto Sans KR" pitchFamily="34" charset="0"/>
-                <a:ea typeface="Noto Sans KR" pitchFamily="34" charset="-122"/>
+                <a:ea typeface="Noto Sans KR" pitchFamily="34" charset="-127"/>
                 <a:cs typeface="Noto Sans KR" pitchFamily="34" charset="-120"/>
               </a:rPr>
               <a:t>을, 교사에게는 </a:t>
@@ -8807,7 +8807,7 @@
                   <a:srgbClr val="FFF0AD"/>
                 </a:highlight>
                 <a:latin typeface="Noto Sans KR" pitchFamily="34" charset="0"/>
-                <a:ea typeface="Noto Sans KR" pitchFamily="34" charset="-122"/>
+                <a:ea typeface="Noto Sans KR" pitchFamily="34" charset="-127"/>
                 <a:cs typeface="Noto Sans KR" pitchFamily="34" charset="-120"/>
               </a:rPr>
               <a:t>수업 준비와 개별 지도</a:t>
@@ -8824,7 +8824,7 @@
                   <a:srgbClr val="101D42"/>
                 </a:solidFill>
                 <a:latin typeface="Noto Sans KR" pitchFamily="34" charset="0"/>
-                <a:ea typeface="Noto Sans KR" pitchFamily="34" charset="-122"/>
+                <a:ea typeface="Noto Sans KR" pitchFamily="34" charset="-127"/>
                 <a:cs typeface="Noto Sans KR" pitchFamily="34" charset="-120"/>
               </a:rPr>
               <a:t>를 위한</a:t>
@@ -8844,7 +8844,7 @@
                   <a:srgbClr val="101D42"/>
                 </a:solidFill>
                 <a:latin typeface="Noto Sans KR" pitchFamily="34" charset="0"/>
-                <a:ea typeface="Noto Sans KR" pitchFamily="34" charset="-122"/>
+                <a:ea typeface="Noto Sans KR" pitchFamily="34" charset="-127"/>
                 <a:cs typeface="Noto Sans KR" pitchFamily="34" charset="-120"/>
               </a:rPr>
               <a:t>지원을 요청드립니다.</a:t>
@@ -8886,7 +8886,7 @@
                   <a:srgbClr val="101D42"/>
                 </a:solidFill>
                 <a:latin typeface="Noto Serif KR Black" pitchFamily="34" charset="0"/>
-                <a:ea typeface="Noto Serif KR Black" pitchFamily="34" charset="-122"/>
+                <a:ea typeface="Noto Serif KR Black" pitchFamily="34" charset="-127"/>
                 <a:cs typeface="Noto Serif KR Black" pitchFamily="34" charset="-120"/>
               </a:rPr>
               <a:t>경남의 아이들이 스스로 이해하고 판단하는 사람으로 자라도록,</a:t>
@@ -8906,7 +8906,7 @@
                   <a:srgbClr val="15543C"/>
                 </a:solidFill>
                 <a:latin typeface="Noto Serif KR Black" pitchFamily="34" charset="0"/>
-                <a:ea typeface="Noto Serif KR Black" pitchFamily="34" charset="-122"/>
+                <a:ea typeface="Noto Serif KR Black" pitchFamily="34" charset="-127"/>
                 <a:cs typeface="Noto Serif KR Black" pitchFamily="34" charset="-120"/>
               </a:rPr>
               <a:t>기본 독서교육을 함께 지켜 주십시오.</a:t>
@@ -8948,7 +8948,7 @@
                   <a:srgbClr val="101D42"/>
                 </a:solidFill>
                 <a:latin typeface="Noto Sans KR" pitchFamily="34" charset="0"/>
-                <a:ea typeface="Noto Sans KR" pitchFamily="34" charset="-122"/>
+                <a:ea typeface="Noto Sans KR" pitchFamily="34" charset="-127"/>
                 <a:cs typeface="Noto Sans KR" pitchFamily="34" charset="-120"/>
               </a:rPr>
               <a:t>4 / 4</a:t>

--- a/promo/dl/brochure/bookie-detail-4p-edit.pptx
+++ b/promo/dl/brochure/bookie-detail-4p-edit.pptx
@@ -1,113 +1,113 @@
 
 <file path=ppt/presentation.xml><?xml version="1.0" encoding="utf-8"?>
-<p:presentation xmlns:a="http://schemas.openxmlformats.org/drawingml/2006/main" xmlns:r="http://schemas.openxmlformats.org/officeDocument/2006/relationships" xmlns:p="http://schemas.openxmlformats.org/presentationml/2006/main" saveSubsetFonts="1" autoCompressPictures="0">
-  <p:sldMasterIdLst>
-    <p:sldMasterId id="2147483648" r:id="rId1"/>
-  </p:sldMasterIdLst>
-  <p:sldIdLst>
-    <p:sldId id="256" r:id="rId2"/>
-    <p:sldId id="257" r:id="rId3"/>
-    <p:sldId id="258" r:id="rId4"/>
-    <p:sldId id="259" r:id="rId5"/>
-  </p:sldIdLst>
-  <p:notesMasterIdLst>
-    <p:notesMasterId r:id="rId6"/>
-  </p:notesMasterIdLst>
-  <p:sldSz cx="7560005" cy="10692003"/>
-  <p:notesSz cx="10692003" cy="7560005"/>
-  <p:defaultTextStyle>
-    <a:lvl1pPr marL="0" algn="l" defTabSz="914400" rtl="0" eaLnBrk="1" latinLnBrk="0" hangingPunct="1">
-      <a:defRPr sz="1800" kern="1200">
-        <a:solidFill>
-          <a:schemeClr val="tx1"/>
-        </a:solidFill>
-        <a:latin typeface="+mn-lt"/>
-        <a:ea typeface="+mn-ea"/>
-        <a:cs typeface="+mn-cs"/>
-      </a:defRPr>
-    </a:lvl1pPr>
-    <a:lvl2pPr marL="457200" algn="l" defTabSz="914400" rtl="0" eaLnBrk="1" latinLnBrk="0" hangingPunct="1">
-      <a:defRPr sz="1800" kern="1200">
-        <a:solidFill>
-          <a:schemeClr val="tx1"/>
-        </a:solidFill>
-        <a:latin typeface="+mn-lt"/>
-        <a:ea typeface="+mn-ea"/>
-        <a:cs typeface="+mn-cs"/>
-      </a:defRPr>
-    </a:lvl2pPr>
-    <a:lvl3pPr marL="914400" algn="l" defTabSz="914400" rtl="0" eaLnBrk="1" latinLnBrk="0" hangingPunct="1">
-      <a:defRPr sz="1800" kern="1200">
-        <a:solidFill>
-          <a:schemeClr val="tx1"/>
-        </a:solidFill>
-        <a:latin typeface="+mn-lt"/>
-        <a:ea typeface="+mn-ea"/>
-        <a:cs typeface="+mn-cs"/>
-      </a:defRPr>
-    </a:lvl3pPr>
-    <a:lvl4pPr marL="1371600" algn="l" defTabSz="914400" rtl="0" eaLnBrk="1" latinLnBrk="0" hangingPunct="1">
-      <a:defRPr sz="1800" kern="1200">
-        <a:solidFill>
-          <a:schemeClr val="tx1"/>
-        </a:solidFill>
-        <a:latin typeface="+mn-lt"/>
-        <a:ea typeface="+mn-ea"/>
-        <a:cs typeface="+mn-cs"/>
-      </a:defRPr>
-    </a:lvl4pPr>
-    <a:lvl5pPr marL="1828800" algn="l" defTabSz="914400" rtl="0" eaLnBrk="1" latinLnBrk="0" hangingPunct="1">
-      <a:defRPr sz="1800" kern="1200">
-        <a:solidFill>
-          <a:schemeClr val="tx1"/>
-        </a:solidFill>
-        <a:latin typeface="+mn-lt"/>
-        <a:ea typeface="+mn-ea"/>
-        <a:cs typeface="+mn-cs"/>
-      </a:defRPr>
-    </a:lvl5pPr>
-    <a:lvl6pPr marL="2286000" algn="l" defTabSz="914400" rtl="0" eaLnBrk="1" latinLnBrk="0" hangingPunct="1">
-      <a:defRPr sz="1800" kern="1200">
-        <a:solidFill>
-          <a:schemeClr val="tx1"/>
-        </a:solidFill>
-        <a:latin typeface="+mn-lt"/>
-        <a:ea typeface="+mn-ea"/>
-        <a:cs typeface="+mn-cs"/>
-      </a:defRPr>
-    </a:lvl6pPr>
-    <a:lvl7pPr marL="2743200" algn="l" defTabSz="914400" rtl="0" eaLnBrk="1" latinLnBrk="0" hangingPunct="1">
-      <a:defRPr sz="1800" kern="1200">
-        <a:solidFill>
-          <a:schemeClr val="tx1"/>
-        </a:solidFill>
-        <a:latin typeface="+mn-lt"/>
-        <a:ea typeface="+mn-ea"/>
-        <a:cs typeface="+mn-cs"/>
-      </a:defRPr>
-    </a:lvl7pPr>
-    <a:lvl8pPr marL="3200400" algn="l" defTabSz="914400" rtl="0" eaLnBrk="1" latinLnBrk="0" hangingPunct="1">
-      <a:defRPr sz="1800" kern="1200">
-        <a:solidFill>
-          <a:schemeClr val="tx1"/>
-        </a:solidFill>
-        <a:latin typeface="+mn-lt"/>
-        <a:ea typeface="+mn-ea"/>
-        <a:cs typeface="+mn-cs"/>
-      </a:defRPr>
-    </a:lvl8pPr>
-    <a:lvl9pPr marL="3657600" algn="l" defTabSz="914400" rtl="0" eaLnBrk="1" latinLnBrk="0" hangingPunct="1">
-      <a:defRPr sz="1800" kern="1200">
-        <a:solidFill>
-          <a:schemeClr val="tx1"/>
-        </a:solidFill>
-        <a:latin typeface="+mn-lt"/>
-        <a:ea typeface="+mn-ea"/>
-        <a:cs typeface="+mn-cs"/>
-      </a:defRPr>
-    </a:lvl9pPr>
-  </p:defaultTextStyle>
-</p:presentation>
+<ns0:presentation xmlns:ns0="http://schemas.openxmlformats.org/presentationml/2006/main" xmlns:ns1="http://schemas.openxmlformats.org/officeDocument/2006/relationships" xmlns:ns2="http://schemas.openxmlformats.org/drawingml/2006/main" saveSubsetFonts="1" autoCompressPictures="0">
+  <ns0:sldMasterIdLst>
+    <ns0:sldMasterId id="2147483648" ns1:id="rId1"/>
+  </ns0:sldMasterIdLst>
+  <ns0:sldIdLst>
+    <ns0:sldId id="257" ns1:id="rId3"/>
+    <ns0:sldId id="258" ns1:id="rId4"/>
+    <ns0:sldId id="259" ns1:id="rId5"/>
+    <ns0:sldId id="260" ns1:id="rId6"/>
+  </ns0:sldIdLst>
+  <ns0:notesMasterIdLst>
+    <ns0:notesMasterId ns1:id="rId7"/>
+  </ns0:notesMasterIdLst>
+  <ns0:sldSz cx="7560005" cy="10692003"/>
+  <ns0:notesSz cx="10692003" cy="7560005"/>
+  <ns0:defaultTextStyle>
+    <ns2:lvl1pPr marL="0" algn="l" defTabSz="914400" rtl="0" eaLnBrk="1" latinLnBrk="0" hangingPunct="1">
+      <ns2:defRPr sz="1800" kern="1200">
+        <ns2:solidFill>
+          <ns2:schemeClr val="tx1"/>
+        </ns2:solidFill>
+        <ns2:latin typeface="+mn-lt"/>
+        <ns2:ea typeface="+mn-ea"/>
+        <ns2:cs typeface="+mn-cs"/>
+      </ns2:defRPr>
+    </ns2:lvl1pPr>
+    <ns2:lvl2pPr marL="457200" algn="l" defTabSz="914400" rtl="0" eaLnBrk="1" latinLnBrk="0" hangingPunct="1">
+      <ns2:defRPr sz="1800" kern="1200">
+        <ns2:solidFill>
+          <ns2:schemeClr val="tx1"/>
+        </ns2:solidFill>
+        <ns2:latin typeface="+mn-lt"/>
+        <ns2:ea typeface="+mn-ea"/>
+        <ns2:cs typeface="+mn-cs"/>
+      </ns2:defRPr>
+    </ns2:lvl2pPr>
+    <ns2:lvl3pPr marL="914400" algn="l" defTabSz="914400" rtl="0" eaLnBrk="1" latinLnBrk="0" hangingPunct="1">
+      <ns2:defRPr sz="1800" kern="1200">
+        <ns2:solidFill>
+          <ns2:schemeClr val="tx1"/>
+        </ns2:solidFill>
+        <ns2:latin typeface="+mn-lt"/>
+        <ns2:ea typeface="+mn-ea"/>
+        <ns2:cs typeface="+mn-cs"/>
+      </ns2:defRPr>
+    </ns2:lvl3pPr>
+    <ns2:lvl4pPr marL="1371600" algn="l" defTabSz="914400" rtl="0" eaLnBrk="1" latinLnBrk="0" hangingPunct="1">
+      <ns2:defRPr sz="1800" kern="1200">
+        <ns2:solidFill>
+          <ns2:schemeClr val="tx1"/>
+        </ns2:solidFill>
+        <ns2:latin typeface="+mn-lt"/>
+        <ns2:ea typeface="+mn-ea"/>
+        <ns2:cs typeface="+mn-cs"/>
+      </ns2:defRPr>
+    </ns2:lvl4pPr>
+    <ns2:lvl5pPr marL="1828800" algn="l" defTabSz="914400" rtl="0" eaLnBrk="1" latinLnBrk="0" hangingPunct="1">
+      <ns2:defRPr sz="1800" kern="1200">
+        <ns2:solidFill>
+          <ns2:schemeClr val="tx1"/>
+        </ns2:solidFill>
+        <ns2:latin typeface="+mn-lt"/>
+        <ns2:ea typeface="+mn-ea"/>
+        <ns2:cs typeface="+mn-cs"/>
+      </ns2:defRPr>
+    </ns2:lvl5pPr>
+    <ns2:lvl6pPr marL="2286000" algn="l" defTabSz="914400" rtl="0" eaLnBrk="1" latinLnBrk="0" hangingPunct="1">
+      <ns2:defRPr sz="1800" kern="1200">
+        <ns2:solidFill>
+          <ns2:schemeClr val="tx1"/>
+        </ns2:solidFill>
+        <ns2:latin typeface="+mn-lt"/>
+        <ns2:ea typeface="+mn-ea"/>
+        <ns2:cs typeface="+mn-cs"/>
+      </ns2:defRPr>
+    </ns2:lvl6pPr>
+    <ns2:lvl7pPr marL="2743200" algn="l" defTabSz="914400" rtl="0" eaLnBrk="1" latinLnBrk="0" hangingPunct="1">
+      <ns2:defRPr sz="1800" kern="1200">
+        <ns2:solidFill>
+          <ns2:schemeClr val="tx1"/>
+        </ns2:solidFill>
+        <ns2:latin typeface="+mn-lt"/>
+        <ns2:ea typeface="+mn-ea"/>
+        <ns2:cs typeface="+mn-cs"/>
+      </ns2:defRPr>
+    </ns2:lvl7pPr>
+    <ns2:lvl8pPr marL="3200400" algn="l" defTabSz="914400" rtl="0" eaLnBrk="1" latinLnBrk="0" hangingPunct="1">
+      <ns2:defRPr sz="1800" kern="1200">
+        <ns2:solidFill>
+          <ns2:schemeClr val="tx1"/>
+        </ns2:solidFill>
+        <ns2:latin typeface="+mn-lt"/>
+        <ns2:ea typeface="+mn-ea"/>
+        <ns2:cs typeface="+mn-cs"/>
+      </ns2:defRPr>
+    </ns2:lvl8pPr>
+    <ns2:lvl9pPr marL="3657600" algn="l" defTabSz="914400" rtl="0" eaLnBrk="1" latinLnBrk="0" hangingPunct="1">
+      <ns2:defRPr sz="1800" kern="1200">
+        <ns2:solidFill>
+          <ns2:schemeClr val="tx1"/>
+        </ns2:solidFill>
+        <ns2:latin typeface="+mn-lt"/>
+        <ns2:ea typeface="+mn-ea"/>
+        <ns2:cs typeface="+mn-cs"/>
+      </ns2:defRPr>
+    </ns2:lvl9pPr>
+  </ns0:defaultTextStyle>
+</ns0:presentation>
 </file>
 
 <file path=ppt/notesMasters/notesMaster1.xml><?xml version="1.0" encoding="utf-8"?>
@@ -793,6 +793,94 @@
             <a:fld id="{F7021451-1387-4CA6-816F-3879F97B5CBC}" type="slidenum">
               <a:rPr lang="en-US"/>
               <a:t>4</a:t>
+            </a:fld>
+            <a:endParaRPr lang="en-US"/>
+          </a:p>
+        </p:txBody>
+      </p:sp>
+    </p:spTree>
+    <p:extLst>
+      <p:ext uri="{BB962C8B-B14F-4D97-AF65-F5344CB8AC3E}">
+        <p14:creationId xmlns:p14="http://schemas.microsoft.com/office/powerpoint/2010/main" val="1024086991"/>
+      </p:ext>
+    </p:extLst>
+  </p:cSld>
+  <p:clrMapOvr>
+    <a:masterClrMapping/>
+  </p:clrMapOvr>
+</p:notes>
+</file>
+
+<file path=ppt/notesSlides/notesSlide5.xml><?xml version="1.0" encoding="utf-8"?>
+<p:notes xmlns:a="http://schemas.openxmlformats.org/drawingml/2006/main" xmlns:r="http://schemas.openxmlformats.org/officeDocument/2006/relationships" xmlns:p="http://schemas.openxmlformats.org/presentationml/2006/main">
+  <p:cSld>
+    <p:spTree>
+      <p:nvGrpSpPr>
+        <p:cNvPr id="1" name=""/>
+        <p:cNvGrpSpPr/>
+        <p:nvPr/>
+      </p:nvGrpSpPr>
+      <p:grpSpPr>
+        <a:xfrm>
+          <a:off x="0" y="0"/>
+          <a:ext cx="0" cy="0"/>
+          <a:chOff x="0" y="0"/>
+          <a:chExt cx="0" cy="0"/>
+        </a:xfrm>
+      </p:grpSpPr>
+      <p:sp>
+        <p:nvSpPr>
+          <p:cNvPr id="2" name="Slide Image Placeholder 1"/>
+          <p:cNvSpPr>
+            <a:spLocks noGrp="1" noRot="1" noChangeAspect="1"/>
+          </p:cNvSpPr>
+          <p:nvPr>
+            <p:ph type="sldImg"/>
+          </p:nvPr>
+        </p:nvSpPr>
+        <p:spPr/>
+      </p:sp>
+      <p:sp>
+        <p:nvSpPr>
+          <p:cNvPr id="3" name="Notes Placeholder 2"/>
+          <p:cNvSpPr>
+            <a:spLocks noGrp="1"/>
+          </p:cNvSpPr>
+          <p:nvPr>
+            <p:ph type="body" idx="1"/>
+          </p:nvPr>
+        </p:nvSpPr>
+        <p:spPr/>
+        <p:txBody>
+          <a:bodyPr/>
+          <a:lstStyle/>
+          <a:p>
+            <a:r>
+              <a:rPr lang="en-US" dirty="0"/>
+              <a:t/>
+            </a:r>
+            <a:endParaRPr lang="en-US" dirty="0"/>
+          </a:p>
+        </p:txBody>
+      </p:sp>
+      <p:sp>
+        <p:nvSpPr>
+          <p:cNvPr id="4" name="Slide Number Placeholder 3"/>
+          <p:cNvSpPr>
+            <a:spLocks noGrp="1"/>
+          </p:cNvSpPr>
+          <p:nvPr>
+            <p:ph type="sldNum" sz="quarter" idx="10"/>
+          </p:nvPr>
+        </p:nvSpPr>
+        <p:spPr/>
+        <p:txBody>
+          <a:bodyPr/>
+          <a:lstStyle/>
+          <a:p>
+            <a:fld id="{F7021451-1387-4CA6-816F-3879F97B5CBC}" type="slidenum">
+              <a:rPr lang="en-US"/>
+              <a:t>5</a:t>
             </a:fld>
             <a:endParaRPr lang="en-US"/>
           </a:p>
@@ -1150,6 +1238,3144 @@
         </p:nvSpPr>
         <p:spPr>
           <a:xfrm>
+            <a:off x="1335913" y="495300"/>
+            <a:ext cx="5843143" cy="0"/>
+          </a:xfrm>
+          <a:prstGeom prst="line">
+            <a:avLst/>
+          </a:prstGeom>
+          <a:noFill/>
+          <a:ln w="7620">
+            <a:solidFill>
+              <a:srgbClr val="D59B32"/>
+            </a:solidFill>
+            <a:prstDash val="solid"/>
+          </a:ln>
+        </p:spPr>
+      </p:sp>
+      <p:sp>
+        <p:nvSpPr>
+          <p:cNvPr id="3" name="Shape 1"/>
+          <p:cNvSpPr/>
+          <p:nvPr/>
+        </p:nvSpPr>
+        <p:spPr>
+          <a:xfrm>
+            <a:off x="406400" y="3136900"/>
+            <a:ext cx="266700" cy="292100"/>
+          </a:xfrm>
+          <a:custGeom>
+            <a:avLst/>
+            <a:gdLst/>
+            <a:ahLst/>
+            <a:cxnLst/>
+            <a:rect l="l" t="t" r="r" b="b"/>
+            <a:pathLst>
+              <a:path w="266700" h="292100">
+                <a:moveTo>
+                  <a:pt x="127000" y="292100"/>
+                </a:moveTo>
+                <a:lnTo>
+                  <a:pt x="127000" y="139700"/>
+                </a:lnTo>
+                <a:cubicBezTo>
+                  <a:pt x="63500" y="165100"/>
+                  <a:pt x="0" y="139700"/>
+                  <a:pt x="0" y="38100"/>
+                </a:cubicBezTo>
+                <a:cubicBezTo>
+                  <a:pt x="101600" y="25400"/>
+                  <a:pt x="127000" y="76200"/>
+                  <a:pt x="127000" y="139700"/>
+                </a:cubicBezTo>
+                <a:cubicBezTo>
+                  <a:pt x="127000" y="38100"/>
+                  <a:pt x="203200" y="0"/>
+                  <a:pt x="266700" y="12700"/>
+                </a:cubicBezTo>
+                <a:cubicBezTo>
+                  <a:pt x="266700" y="101600"/>
+                  <a:pt x="203200" y="152400"/>
+                  <a:pt x="127000" y="139700"/>
+                </a:cubicBezTo>
+              </a:path>
+            </a:pathLst>
+          </a:custGeom>
+          <a:solidFill>
+            <a:srgbClr val="D59B32"/>
+          </a:solidFill>
+          <a:ln/>
+        </p:spPr>
+      </p:sp>
+      <p:sp>
+        <p:nvSpPr>
+          <p:cNvPr id="4" name="Shape 2"/>
+          <p:cNvSpPr/>
+          <p:nvPr/>
+        </p:nvSpPr>
+        <p:spPr>
+          <a:xfrm>
+            <a:off x="2616200" y="3124200"/>
+            <a:ext cx="0" cy="901700"/>
+          </a:xfrm>
+          <a:prstGeom prst="line">
+            <a:avLst/>
+          </a:prstGeom>
+          <a:noFill/>
+          <a:ln w="6350">
+            <a:solidFill>
+              <a:srgbClr val="D59B32"/>
+            </a:solidFill>
+            <a:prstDash val="solid"/>
+          </a:ln>
+        </p:spPr>
+      </p:sp>
+      <p:sp>
+        <p:nvSpPr>
+          <p:cNvPr id="5" name="Shape 3"/>
+          <p:cNvSpPr/>
+          <p:nvPr/>
+        </p:nvSpPr>
+        <p:spPr>
+          <a:xfrm>
+            <a:off x="2730500" y="3149600"/>
+            <a:ext cx="203200" cy="203200"/>
+          </a:xfrm>
+          <a:custGeom>
+            <a:avLst/>
+            <a:gdLst/>
+            <a:ahLst/>
+            <a:cxnLst/>
+            <a:rect l="l" t="t" r="r" b="b"/>
+            <a:pathLst>
+              <a:path w="203200" h="203200">
+                <a:moveTo>
+                  <a:pt x="203200" y="101600"/>
+                </a:moveTo>
+                <a:cubicBezTo>
+                  <a:pt x="203200" y="45491"/>
+                  <a:pt x="157709" y="0"/>
+                  <a:pt x="101600" y="0"/>
+                </a:cubicBezTo>
+                <a:cubicBezTo>
+                  <a:pt x="45491" y="0"/>
+                  <a:pt x="0" y="45491"/>
+                  <a:pt x="0" y="101600"/>
+                </a:cubicBezTo>
+                <a:cubicBezTo>
+                  <a:pt x="0" y="157709"/>
+                  <a:pt x="45491" y="203200"/>
+                  <a:pt x="101600" y="203200"/>
+                </a:cubicBezTo>
+                <a:cubicBezTo>
+                  <a:pt x="157709" y="203200"/>
+                  <a:pt x="203200" y="157709"/>
+                  <a:pt x="203200" y="101600"/>
+                </a:cubicBezTo>
+              </a:path>
+            </a:pathLst>
+          </a:custGeom>
+          <a:ln w="20320">
+            <a:solidFill>
+              <a:srgbClr val="D59B32"/>
+            </a:solidFill>
+            <a:prstDash val="solid"/>
+          </a:ln>
+        </p:spPr>
+      </p:sp>
+      <p:sp>
+        <p:nvSpPr>
+          <p:cNvPr id="6" name="Shape 4"/>
+          <p:cNvSpPr/>
+          <p:nvPr/>
+        </p:nvSpPr>
+        <p:spPr>
+          <a:xfrm>
+            <a:off x="2781300" y="3340100"/>
+            <a:ext cx="0" cy="50800"/>
+          </a:xfrm>
+          <a:prstGeom prst="line">
+            <a:avLst/>
+          </a:prstGeom>
+          <a:noFill/>
+          <a:ln w="20320">
+            <a:solidFill>
+              <a:srgbClr val="D59B32"/>
+            </a:solidFill>
+            <a:prstDash val="solid"/>
+          </a:ln>
+        </p:spPr>
+      </p:sp>
+      <p:sp>
+        <p:nvSpPr>
+          <p:cNvPr id="7" name="Shape 5"/>
+          <p:cNvSpPr/>
+          <p:nvPr/>
+        </p:nvSpPr>
+        <p:spPr>
+          <a:xfrm>
+            <a:off x="2882900" y="3340100"/>
+            <a:ext cx="0" cy="50800"/>
+          </a:xfrm>
+          <a:prstGeom prst="line">
+            <a:avLst/>
+          </a:prstGeom>
+          <a:noFill/>
+          <a:ln w="20320">
+            <a:solidFill>
+              <a:srgbClr val="D59B32"/>
+            </a:solidFill>
+            <a:prstDash val="solid"/>
+          </a:ln>
+        </p:spPr>
+      </p:sp>
+      <p:sp>
+        <p:nvSpPr>
+          <p:cNvPr id="8" name="Shape 6"/>
+          <p:cNvSpPr/>
+          <p:nvPr/>
+        </p:nvSpPr>
+        <p:spPr>
+          <a:xfrm>
+            <a:off x="2781300" y="3390900"/>
+            <a:ext cx="101600" cy="0"/>
+          </a:xfrm>
+          <a:prstGeom prst="line">
+            <a:avLst/>
+          </a:prstGeom>
+          <a:noFill/>
+          <a:ln w="20320">
+            <a:solidFill>
+              <a:srgbClr val="D59B32"/>
+            </a:solidFill>
+            <a:prstDash val="solid"/>
+          </a:ln>
+        </p:spPr>
+      </p:sp>
+      <p:sp>
+        <p:nvSpPr>
+          <p:cNvPr id="9" name="Shape 7"/>
+          <p:cNvSpPr/>
+          <p:nvPr/>
+        </p:nvSpPr>
+        <p:spPr>
+          <a:xfrm>
+            <a:off x="2794000" y="3429000"/>
+            <a:ext cx="76200" cy="0"/>
+          </a:xfrm>
+          <a:prstGeom prst="line">
+            <a:avLst/>
+          </a:prstGeom>
+          <a:noFill/>
+          <a:ln w="20320">
+            <a:solidFill>
+              <a:srgbClr val="D59B32"/>
+            </a:solidFill>
+            <a:prstDash val="solid"/>
+          </a:ln>
+        </p:spPr>
+      </p:sp>
+      <p:sp>
+        <p:nvSpPr>
+          <p:cNvPr id="10" name="Shape 8"/>
+          <p:cNvSpPr/>
+          <p:nvPr/>
+        </p:nvSpPr>
+        <p:spPr>
+          <a:xfrm>
+            <a:off x="2832100" y="3251200"/>
+            <a:ext cx="0" cy="127000"/>
+          </a:xfrm>
+          <a:prstGeom prst="line">
+            <a:avLst/>
+          </a:prstGeom>
+          <a:noFill/>
+          <a:ln w="20320">
+            <a:solidFill>
+              <a:srgbClr val="D59B32"/>
+            </a:solidFill>
+            <a:prstDash val="solid"/>
+          </a:ln>
+        </p:spPr>
+      </p:sp>
+      <p:sp>
+        <p:nvSpPr>
+          <p:cNvPr id="11" name="Shape 9"/>
+          <p:cNvSpPr/>
+          <p:nvPr/>
+        </p:nvSpPr>
+        <p:spPr>
+          <a:xfrm>
+            <a:off x="2794000" y="3213100"/>
+            <a:ext cx="38100" cy="38100"/>
+          </a:xfrm>
+          <a:prstGeom prst="line">
+            <a:avLst/>
+          </a:prstGeom>
+          <a:noFill/>
+          <a:ln w="20320">
+            <a:solidFill>
+              <a:srgbClr val="D59B32"/>
+            </a:solidFill>
+            <a:prstDash val="solid"/>
+          </a:ln>
+        </p:spPr>
+      </p:sp>
+      <p:sp>
+        <p:nvSpPr>
+          <p:cNvPr id="12" name="Shape 10"/>
+          <p:cNvSpPr/>
+          <p:nvPr/>
+        </p:nvSpPr>
+        <p:spPr>
+          <a:xfrm>
+            <a:off x="2832100" y="3213100"/>
+            <a:ext cx="38100" cy="38100"/>
+          </a:xfrm>
+          <a:prstGeom prst="line">
+            <a:avLst/>
+          </a:prstGeom>
+          <a:noFill/>
+          <a:ln w="20320">
+            <a:solidFill>
+              <a:srgbClr val="D59B32"/>
+            </a:solidFill>
+            <a:prstDash val="solid"/>
+          </a:ln>
+        </p:spPr>
+      </p:sp>
+      <p:sp>
+        <p:nvSpPr>
+          <p:cNvPr id="13" name="Shape 11"/>
+          <p:cNvSpPr/>
+          <p:nvPr/>
+        </p:nvSpPr>
+        <p:spPr>
+          <a:xfrm>
+            <a:off x="4914900" y="3124200"/>
+            <a:ext cx="0" cy="901700"/>
+          </a:xfrm>
+          <a:prstGeom prst="line">
+            <a:avLst/>
+          </a:prstGeom>
+          <a:noFill/>
+          <a:ln w="6350">
+            <a:solidFill>
+              <a:srgbClr val="D59B32"/>
+            </a:solidFill>
+            <a:prstDash val="solid"/>
+          </a:ln>
+        </p:spPr>
+      </p:sp>
+      <p:sp>
+        <p:nvSpPr>
+          <p:cNvPr id="14" name="Shape 12"/>
+          <p:cNvSpPr/>
+          <p:nvPr/>
+        </p:nvSpPr>
+        <p:spPr>
+          <a:xfrm>
+            <a:off x="4991100" y="3124200"/>
+            <a:ext cx="279400" cy="292100"/>
+          </a:xfrm>
+          <a:custGeom>
+            <a:avLst/>
+            <a:gdLst/>
+            <a:ahLst/>
+            <a:cxnLst/>
+            <a:rect l="l" t="t" r="r" b="b"/>
+            <a:pathLst>
+              <a:path w="279400" h="292100">
+                <a:moveTo>
+                  <a:pt x="139700" y="292100"/>
+                </a:moveTo>
+                <a:cubicBezTo>
+                  <a:pt x="101600" y="241300"/>
+                  <a:pt x="0" y="190500"/>
+                  <a:pt x="0" y="101600"/>
+                </a:cubicBezTo>
+                <a:cubicBezTo>
+                  <a:pt x="0" y="0"/>
+                  <a:pt x="114300" y="0"/>
+                  <a:pt x="139700" y="76200"/>
+                </a:cubicBezTo>
+                <a:cubicBezTo>
+                  <a:pt x="165100" y="0"/>
+                  <a:pt x="279400" y="0"/>
+                  <a:pt x="279400" y="101600"/>
+                </a:cubicBezTo>
+                <a:cubicBezTo>
+                  <a:pt x="279400" y="190500"/>
+                  <a:pt x="177800" y="241300"/>
+                  <a:pt x="139700" y="292100"/>
+                </a:cubicBezTo>
+              </a:path>
+            </a:pathLst>
+          </a:custGeom>
+          <a:solidFill>
+            <a:srgbClr val="D59B32"/>
+          </a:solidFill>
+          <a:ln/>
+        </p:spPr>
+      </p:sp>
+      <p:sp>
+        <p:nvSpPr>
+          <p:cNvPr id="15" name="Shape 13"/>
+          <p:cNvSpPr/>
+          <p:nvPr/>
+        </p:nvSpPr>
+        <p:spPr>
+          <a:xfrm>
+            <a:off x="317500" y="4508500"/>
+            <a:ext cx="6925056" cy="1701800"/>
+          </a:xfrm>
+          <a:prstGeom prst="roundRect">
+            <a:avLst>
+              <a:gd name="adj" fmla="val 5970"/>
+            </a:avLst>
+          </a:prstGeom>
+          <a:solidFill>
+            <a:srgbClr val="F6F5F0"/>
+          </a:solidFill>
+          <a:ln/>
+        </p:spPr>
+      </p:sp>
+      <p:sp>
+        <p:nvSpPr>
+          <p:cNvPr id="16" name="Shape 14"/>
+          <p:cNvSpPr/>
+          <p:nvPr/>
+        </p:nvSpPr>
+        <p:spPr>
+          <a:xfrm>
+            <a:off x="876300" y="5867400"/>
+            <a:ext cx="1676400" cy="266700"/>
+          </a:xfrm>
+          <a:prstGeom prst="roundRect">
+            <a:avLst>
+              <a:gd name="adj" fmla="val 47619"/>
+            </a:avLst>
+          </a:prstGeom>
+          <a:solidFill>
+            <a:srgbClr val="EBE7D9"/>
+          </a:solidFill>
+          <a:ln/>
+        </p:spPr>
+      </p:sp>
+      <p:sp>
+        <p:nvSpPr>
+          <p:cNvPr id="17" name="Shape 15"/>
+          <p:cNvSpPr/>
+          <p:nvPr/>
+        </p:nvSpPr>
+        <p:spPr>
+          <a:xfrm>
+            <a:off x="2946400" y="5867400"/>
+            <a:ext cx="1676400" cy="266700"/>
+          </a:xfrm>
+          <a:prstGeom prst="roundRect">
+            <a:avLst>
+              <a:gd name="adj" fmla="val 47619"/>
+            </a:avLst>
+          </a:prstGeom>
+          <a:solidFill>
+            <a:srgbClr val="EBE7D9"/>
+          </a:solidFill>
+          <a:ln/>
+        </p:spPr>
+      </p:sp>
+      <p:sp>
+        <p:nvSpPr>
+          <p:cNvPr id="18" name="Shape 16"/>
+          <p:cNvSpPr/>
+          <p:nvPr/>
+        </p:nvSpPr>
+        <p:spPr>
+          <a:xfrm>
+            <a:off x="5016500" y="5867400"/>
+            <a:ext cx="1676400" cy="266700"/>
+          </a:xfrm>
+          <a:prstGeom prst="roundRect">
+            <a:avLst>
+              <a:gd name="adj" fmla="val 47619"/>
+            </a:avLst>
+          </a:prstGeom>
+          <a:solidFill>
+            <a:srgbClr val="EBE7D9"/>
+          </a:solidFill>
+          <a:ln/>
+        </p:spPr>
+      </p:sp>
+      <p:sp>
+        <p:nvSpPr>
+          <p:cNvPr id="19" name="Shape 17"/>
+          <p:cNvSpPr/>
+          <p:nvPr/>
+        </p:nvSpPr>
+        <p:spPr>
+          <a:xfrm>
+            <a:off x="317500" y="7645400"/>
+            <a:ext cx="1676400" cy="825500"/>
+          </a:xfrm>
+          <a:prstGeom prst="roundRect">
+            <a:avLst>
+              <a:gd name="adj" fmla="val 9231"/>
+            </a:avLst>
+          </a:prstGeom>
+          <a:solidFill>
+            <a:srgbClr val="F0F5EF"/>
+          </a:solidFill>
+          <a:ln/>
+        </p:spPr>
+      </p:sp>
+      <p:sp>
+        <p:nvSpPr>
+          <p:cNvPr id="20" name="Shape 18"/>
+          <p:cNvSpPr/>
+          <p:nvPr/>
+        </p:nvSpPr>
+        <p:spPr>
+          <a:xfrm>
+            <a:off x="443484" y="7784084"/>
+            <a:ext cx="256159" cy="244475"/>
+          </a:xfrm>
+          <a:custGeom>
+            <a:avLst/>
+            <a:gdLst/>
+            <a:ahLst/>
+            <a:cxnLst/>
+            <a:rect l="l" t="t" r="r" b="b"/>
+            <a:pathLst>
+              <a:path w="256159" h="244475">
+                <a:moveTo>
+                  <a:pt x="128054" y="244475"/>
+                </a:moveTo>
+                <a:lnTo>
+                  <a:pt x="128054" y="34925"/>
+                </a:lnTo>
+                <a:cubicBezTo>
+                  <a:pt x="81496" y="0"/>
+                  <a:pt x="34925" y="0"/>
+                  <a:pt x="0" y="23279"/>
+                </a:cubicBezTo>
+                <a:lnTo>
+                  <a:pt x="0" y="232829"/>
+                </a:lnTo>
+                <a:cubicBezTo>
+                  <a:pt x="34925" y="209550"/>
+                  <a:pt x="81496" y="209550"/>
+                  <a:pt x="128054" y="244475"/>
+                </a:cubicBezTo>
+                <a:cubicBezTo>
+                  <a:pt x="174625" y="209550"/>
+                  <a:pt x="221196" y="209550"/>
+                  <a:pt x="256121" y="232829"/>
+                </a:cubicBezTo>
+                <a:lnTo>
+                  <a:pt x="256121" y="23279"/>
+                </a:lnTo>
+                <a:cubicBezTo>
+                  <a:pt x="221196" y="0"/>
+                  <a:pt x="174625" y="0"/>
+                  <a:pt x="128054" y="34925"/>
+                </a:cubicBezTo>
+              </a:path>
+            </a:pathLst>
+          </a:custGeom>
+          <a:ln w="18669">
+            <a:solidFill>
+              <a:srgbClr val="15543C"/>
+            </a:solidFill>
+            <a:prstDash val="solid"/>
+          </a:ln>
+        </p:spPr>
+      </p:sp>
+      <p:sp>
+        <p:nvSpPr>
+          <p:cNvPr id="21" name="Shape 19"/>
+          <p:cNvSpPr/>
+          <p:nvPr/>
+        </p:nvSpPr>
+        <p:spPr>
+          <a:xfrm>
+            <a:off x="2063750" y="7645400"/>
+            <a:ext cx="1676400" cy="825500"/>
+          </a:xfrm>
+          <a:prstGeom prst="roundRect">
+            <a:avLst>
+              <a:gd name="adj" fmla="val 9231"/>
+            </a:avLst>
+          </a:prstGeom>
+          <a:solidFill>
+            <a:srgbClr val="F0F5EF"/>
+          </a:solidFill>
+          <a:ln/>
+        </p:spPr>
+      </p:sp>
+      <p:sp>
+        <p:nvSpPr>
+          <p:cNvPr id="22" name="Shape 20"/>
+          <p:cNvSpPr/>
+          <p:nvPr/>
+        </p:nvSpPr>
+        <p:spPr>
+          <a:xfrm>
+            <a:off x="2189734" y="7795641"/>
+            <a:ext cx="256159" cy="186309"/>
+          </a:xfrm>
+          <a:custGeom>
+            <a:avLst/>
+            <a:gdLst/>
+            <a:ahLst/>
+            <a:cxnLst/>
+            <a:rect l="l" t="t" r="r" b="b"/>
+            <a:pathLst>
+              <a:path w="256159" h="186309">
+                <a:moveTo>
+                  <a:pt x="58204" y="186271"/>
+                </a:moveTo>
+                <a:lnTo>
+                  <a:pt x="197904" y="186271"/>
+                </a:lnTo>
+                <a:cubicBezTo>
+                  <a:pt x="230086" y="186271"/>
+                  <a:pt x="256121" y="160236"/>
+                  <a:pt x="256121" y="128054"/>
+                </a:cubicBezTo>
+                <a:lnTo>
+                  <a:pt x="256121" y="58204"/>
+                </a:lnTo>
+                <a:cubicBezTo>
+                  <a:pt x="256121" y="26035"/>
+                  <a:pt x="230086" y="0"/>
+                  <a:pt x="197904" y="0"/>
+                </a:cubicBezTo>
+                <a:lnTo>
+                  <a:pt x="58204" y="0"/>
+                </a:lnTo>
+                <a:cubicBezTo>
+                  <a:pt x="26035" y="0"/>
+                  <a:pt x="0" y="26035"/>
+                  <a:pt x="0" y="58204"/>
+                </a:cubicBezTo>
+                <a:lnTo>
+                  <a:pt x="0" y="128054"/>
+                </a:lnTo>
+                <a:cubicBezTo>
+                  <a:pt x="0" y="160236"/>
+                  <a:pt x="26035" y="186271"/>
+                  <a:pt x="58204" y="186271"/>
+                </a:cubicBezTo>
+              </a:path>
+            </a:pathLst>
+          </a:custGeom>
+          <a:ln w="18669">
+            <a:solidFill>
+              <a:srgbClr val="15543C"/>
+            </a:solidFill>
+            <a:prstDash val="solid"/>
+          </a:ln>
+        </p:spPr>
+      </p:sp>
+      <p:sp>
+        <p:nvSpPr>
+          <p:cNvPr id="23" name="Shape 21"/>
+          <p:cNvSpPr/>
+          <p:nvPr/>
+        </p:nvSpPr>
+        <p:spPr>
+          <a:xfrm>
+            <a:off x="2224659" y="7981950"/>
+            <a:ext cx="23241" cy="58166"/>
+          </a:xfrm>
+          <a:prstGeom prst="line">
+            <a:avLst/>
+          </a:prstGeom>
+          <a:noFill/>
+          <a:ln w="18669">
+            <a:solidFill>
+              <a:srgbClr val="15543C"/>
+            </a:solidFill>
+            <a:prstDash val="solid"/>
+          </a:ln>
+        </p:spPr>
+      </p:sp>
+      <p:sp>
+        <p:nvSpPr>
+          <p:cNvPr id="24" name="Shape 22"/>
+          <p:cNvSpPr/>
+          <p:nvPr/>
+        </p:nvSpPr>
+        <p:spPr>
+          <a:xfrm>
+            <a:off x="2224659" y="7981950"/>
+            <a:ext cx="93091" cy="58166"/>
+          </a:xfrm>
+          <a:prstGeom prst="line">
+            <a:avLst/>
+          </a:prstGeom>
+          <a:noFill/>
+          <a:ln w="18669">
+            <a:solidFill>
+              <a:srgbClr val="15543C"/>
+            </a:solidFill>
+            <a:prstDash val="solid"/>
+          </a:ln>
+        </p:spPr>
+      </p:sp>
+      <p:sp>
+        <p:nvSpPr>
+          <p:cNvPr id="25" name="Shape 23"/>
+          <p:cNvSpPr/>
+          <p:nvPr/>
+        </p:nvSpPr>
+        <p:spPr>
+          <a:xfrm>
+            <a:off x="2250186" y="7879461"/>
+            <a:ext cx="18669" cy="18669"/>
+          </a:xfrm>
+          <a:custGeom>
+            <a:avLst/>
+            <a:gdLst/>
+            <a:ahLst/>
+            <a:cxnLst/>
+            <a:rect l="l" t="t" r="r" b="b"/>
+            <a:pathLst>
+              <a:path w="18669" h="18669">
+                <a:moveTo>
+                  <a:pt x="18631" y="9309"/>
+                </a:moveTo>
+                <a:cubicBezTo>
+                  <a:pt x="18631" y="4166"/>
+                  <a:pt x="14453" y="0"/>
+                  <a:pt x="9309" y="0"/>
+                </a:cubicBezTo>
+                <a:cubicBezTo>
+                  <a:pt x="4166" y="0"/>
+                  <a:pt x="0" y="4166"/>
+                  <a:pt x="0" y="9309"/>
+                </a:cubicBezTo>
+                <a:cubicBezTo>
+                  <a:pt x="0" y="14453"/>
+                  <a:pt x="4166" y="18631"/>
+                  <a:pt x="9309" y="18631"/>
+                </a:cubicBezTo>
+                <a:cubicBezTo>
+                  <a:pt x="14453" y="18631"/>
+                  <a:pt x="18631" y="14453"/>
+                  <a:pt x="18631" y="9309"/>
+                </a:cubicBezTo>
+              </a:path>
+            </a:pathLst>
+          </a:custGeom>
+          <a:solidFill>
+            <a:srgbClr val="15543C"/>
+          </a:solidFill>
+          <a:ln/>
+        </p:spPr>
+      </p:sp>
+      <p:sp>
+        <p:nvSpPr>
+          <p:cNvPr id="26" name="Shape 24"/>
+          <p:cNvSpPr/>
+          <p:nvPr/>
+        </p:nvSpPr>
+        <p:spPr>
+          <a:xfrm>
+            <a:off x="2308479" y="7879461"/>
+            <a:ext cx="18669" cy="18669"/>
+          </a:xfrm>
+          <a:custGeom>
+            <a:avLst/>
+            <a:gdLst/>
+            <a:ahLst/>
+            <a:cxnLst/>
+            <a:rect l="l" t="t" r="r" b="b"/>
+            <a:pathLst>
+              <a:path w="18669" h="18669">
+                <a:moveTo>
+                  <a:pt x="18631" y="9309"/>
+                </a:moveTo>
+                <a:cubicBezTo>
+                  <a:pt x="18631" y="4166"/>
+                  <a:pt x="14453" y="0"/>
+                  <a:pt x="9309" y="0"/>
+                </a:cubicBezTo>
+                <a:cubicBezTo>
+                  <a:pt x="4166" y="0"/>
+                  <a:pt x="0" y="4166"/>
+                  <a:pt x="0" y="9309"/>
+                </a:cubicBezTo>
+                <a:cubicBezTo>
+                  <a:pt x="0" y="14453"/>
+                  <a:pt x="4166" y="18631"/>
+                  <a:pt x="9309" y="18631"/>
+                </a:cubicBezTo>
+                <a:cubicBezTo>
+                  <a:pt x="14453" y="18631"/>
+                  <a:pt x="18631" y="14453"/>
+                  <a:pt x="18631" y="9309"/>
+                </a:cubicBezTo>
+              </a:path>
+            </a:pathLst>
+          </a:custGeom>
+          <a:solidFill>
+            <a:srgbClr val="15543C"/>
+          </a:solidFill>
+          <a:ln/>
+        </p:spPr>
+      </p:sp>
+      <p:sp>
+        <p:nvSpPr>
+          <p:cNvPr id="27" name="Shape 25"/>
+          <p:cNvSpPr/>
+          <p:nvPr/>
+        </p:nvSpPr>
+        <p:spPr>
+          <a:xfrm>
+            <a:off x="2366645" y="7879461"/>
+            <a:ext cx="18669" cy="18669"/>
+          </a:xfrm>
+          <a:custGeom>
+            <a:avLst/>
+            <a:gdLst/>
+            <a:ahLst/>
+            <a:cxnLst/>
+            <a:rect l="l" t="t" r="r" b="b"/>
+            <a:pathLst>
+              <a:path w="18669" h="18669">
+                <a:moveTo>
+                  <a:pt x="18631" y="9309"/>
+                </a:moveTo>
+                <a:cubicBezTo>
+                  <a:pt x="18631" y="4166"/>
+                  <a:pt x="14453" y="0"/>
+                  <a:pt x="9309" y="0"/>
+                </a:cubicBezTo>
+                <a:cubicBezTo>
+                  <a:pt x="4166" y="0"/>
+                  <a:pt x="0" y="4166"/>
+                  <a:pt x="0" y="9309"/>
+                </a:cubicBezTo>
+                <a:cubicBezTo>
+                  <a:pt x="0" y="14453"/>
+                  <a:pt x="4166" y="18631"/>
+                  <a:pt x="9309" y="18631"/>
+                </a:cubicBezTo>
+                <a:cubicBezTo>
+                  <a:pt x="14453" y="18631"/>
+                  <a:pt x="18631" y="14453"/>
+                  <a:pt x="18631" y="9309"/>
+                </a:cubicBezTo>
+              </a:path>
+            </a:pathLst>
+          </a:custGeom>
+          <a:solidFill>
+            <a:srgbClr val="15543C"/>
+          </a:solidFill>
+          <a:ln/>
+        </p:spPr>
+      </p:sp>
+      <p:sp>
+        <p:nvSpPr>
+          <p:cNvPr id="28" name="Shape 26"/>
+          <p:cNvSpPr/>
+          <p:nvPr/>
+        </p:nvSpPr>
+        <p:spPr>
+          <a:xfrm>
+            <a:off x="3810000" y="7645400"/>
+            <a:ext cx="1676400" cy="825500"/>
+          </a:xfrm>
+          <a:prstGeom prst="roundRect">
+            <a:avLst>
+              <a:gd name="adj" fmla="val 9231"/>
+            </a:avLst>
+          </a:prstGeom>
+          <a:solidFill>
+            <a:srgbClr val="F0F5EF"/>
+          </a:solidFill>
+          <a:ln/>
+        </p:spPr>
+      </p:sp>
+      <p:sp>
+        <p:nvSpPr>
+          <p:cNvPr id="29" name="Shape 27"/>
+          <p:cNvSpPr/>
+          <p:nvPr/>
+        </p:nvSpPr>
+        <p:spPr>
+          <a:xfrm>
+            <a:off x="3959225" y="7795641"/>
+            <a:ext cx="232791" cy="232791"/>
+          </a:xfrm>
+          <a:custGeom>
+            <a:avLst/>
+            <a:gdLst/>
+            <a:ahLst/>
+            <a:cxnLst/>
+            <a:rect l="l" t="t" r="r" b="b"/>
+            <a:pathLst>
+              <a:path w="232791" h="232791">
+                <a:moveTo>
+                  <a:pt x="0" y="232829"/>
+                </a:moveTo>
+                <a:lnTo>
+                  <a:pt x="23279" y="151346"/>
+                </a:lnTo>
+                <a:lnTo>
+                  <a:pt x="174625" y="0"/>
+                </a:lnTo>
+                <a:lnTo>
+                  <a:pt x="232829" y="58204"/>
+                </a:lnTo>
+                <a:lnTo>
+                  <a:pt x="81496" y="209550"/>
+                </a:lnTo>
+                <a:lnTo>
+                  <a:pt x="0" y="232829"/>
+                </a:lnTo>
+              </a:path>
+            </a:pathLst>
+          </a:custGeom>
+          <a:ln w="18669">
+            <a:solidFill>
+              <a:srgbClr val="15543C"/>
+            </a:solidFill>
+            <a:prstDash val="solid"/>
+          </a:ln>
+        </p:spPr>
+      </p:sp>
+      <p:sp>
+        <p:nvSpPr>
+          <p:cNvPr id="30" name="Shape 28"/>
+          <p:cNvSpPr/>
+          <p:nvPr/>
+        </p:nvSpPr>
+        <p:spPr>
+          <a:xfrm>
+            <a:off x="3982466" y="7947025"/>
+            <a:ext cx="58293" cy="58166"/>
+          </a:xfrm>
+          <a:prstGeom prst="line">
+            <a:avLst/>
+          </a:prstGeom>
+          <a:noFill/>
+          <a:ln w="18669">
+            <a:solidFill>
+              <a:srgbClr val="15543C"/>
+            </a:solidFill>
+            <a:prstDash val="solid"/>
+          </a:ln>
+        </p:spPr>
+      </p:sp>
+      <p:sp>
+        <p:nvSpPr>
+          <p:cNvPr id="31" name="Shape 29"/>
+          <p:cNvSpPr/>
+          <p:nvPr/>
+        </p:nvSpPr>
+        <p:spPr>
+          <a:xfrm>
+            <a:off x="4098925" y="7830566"/>
+            <a:ext cx="58166" cy="58293"/>
+          </a:xfrm>
+          <a:prstGeom prst="line">
+            <a:avLst/>
+          </a:prstGeom>
+          <a:noFill/>
+          <a:ln w="18669">
+            <a:solidFill>
+              <a:srgbClr val="15543C"/>
+            </a:solidFill>
+            <a:prstDash val="solid"/>
+          </a:ln>
+        </p:spPr>
+      </p:sp>
+      <p:sp>
+        <p:nvSpPr>
+          <p:cNvPr id="32" name="Shape 30"/>
+          <p:cNvSpPr/>
+          <p:nvPr/>
+        </p:nvSpPr>
+        <p:spPr>
+          <a:xfrm>
+            <a:off x="5556250" y="7645400"/>
+            <a:ext cx="1676400" cy="825500"/>
+          </a:xfrm>
+          <a:prstGeom prst="roundRect">
+            <a:avLst>
+              <a:gd name="adj" fmla="val 9231"/>
+            </a:avLst>
+          </a:prstGeom>
+          <a:solidFill>
+            <a:srgbClr val="F0F5EF"/>
+          </a:solidFill>
+          <a:ln/>
+        </p:spPr>
+      </p:sp>
+      <p:sp>
+        <p:nvSpPr>
+          <p:cNvPr id="33" name="Shape 31"/>
+          <p:cNvSpPr/>
+          <p:nvPr/>
+        </p:nvSpPr>
+        <p:spPr>
+          <a:xfrm>
+            <a:off x="5705475" y="7947025"/>
+            <a:ext cx="32639" cy="93091"/>
+          </a:xfrm>
+          <a:prstGeom prst="rect">
+            <a:avLst/>
+          </a:prstGeom>
+          <a:solidFill>
+            <a:srgbClr val="15543C"/>
+          </a:solidFill>
+          <a:ln/>
+        </p:spPr>
+      </p:sp>
+      <p:sp>
+        <p:nvSpPr>
+          <p:cNvPr id="34" name="Shape 32"/>
+          <p:cNvSpPr/>
+          <p:nvPr/>
+        </p:nvSpPr>
+        <p:spPr>
+          <a:xfrm>
+            <a:off x="5775325" y="7888859"/>
+            <a:ext cx="32639" cy="151384"/>
+          </a:xfrm>
+          <a:prstGeom prst="rect">
+            <a:avLst/>
+          </a:prstGeom>
+          <a:solidFill>
+            <a:srgbClr val="15543C"/>
+          </a:solidFill>
+          <a:ln/>
+        </p:spPr>
+      </p:sp>
+      <p:sp>
+        <p:nvSpPr>
+          <p:cNvPr id="35" name="Shape 33"/>
+          <p:cNvSpPr/>
+          <p:nvPr/>
+        </p:nvSpPr>
+        <p:spPr>
+          <a:xfrm>
+            <a:off x="5845175" y="7830566"/>
+            <a:ext cx="32639" cy="209550"/>
+          </a:xfrm>
+          <a:prstGeom prst="rect">
+            <a:avLst/>
+          </a:prstGeom>
+          <a:solidFill>
+            <a:srgbClr val="15543C"/>
+          </a:solidFill>
+          <a:ln/>
+        </p:spPr>
+      </p:sp>
+      <p:sp>
+        <p:nvSpPr>
+          <p:cNvPr id="36" name="Shape 34"/>
+          <p:cNvSpPr/>
+          <p:nvPr/>
+        </p:nvSpPr>
+        <p:spPr>
+          <a:xfrm>
+            <a:off x="5915025" y="7772400"/>
+            <a:ext cx="32639" cy="267716"/>
+          </a:xfrm>
+          <a:prstGeom prst="rect">
+            <a:avLst/>
+          </a:prstGeom>
+          <a:solidFill>
+            <a:srgbClr val="15543C"/>
+          </a:solidFill>
+          <a:ln/>
+        </p:spPr>
+      </p:sp>
+      <p:sp>
+        <p:nvSpPr>
+          <p:cNvPr id="37" name="Shape 35"/>
+          <p:cNvSpPr/>
+          <p:nvPr/>
+        </p:nvSpPr>
+        <p:spPr>
+          <a:xfrm>
+            <a:off x="317500" y="8636000"/>
+            <a:ext cx="6925056" cy="812800"/>
+          </a:xfrm>
+          <a:prstGeom prst="roundRect">
+            <a:avLst>
+              <a:gd name="adj" fmla="val 12500"/>
+            </a:avLst>
+          </a:prstGeom>
+          <a:solidFill>
+            <a:srgbClr val="F6F5F0"/>
+          </a:solidFill>
+          <a:ln/>
+        </p:spPr>
+      </p:sp>
+      <p:sp>
+        <p:nvSpPr>
+          <p:cNvPr id="38" name="Shape 36"/>
+          <p:cNvSpPr/>
+          <p:nvPr/>
+        </p:nvSpPr>
+        <p:spPr>
+          <a:xfrm>
+            <a:off x="317500" y="9829800"/>
+            <a:ext cx="6925056" cy="596900"/>
+          </a:xfrm>
+          <a:prstGeom prst="roundRect">
+            <a:avLst>
+              <a:gd name="adj" fmla="val 17021"/>
+            </a:avLst>
+          </a:prstGeom>
+          <a:solidFill>
+            <a:srgbClr val="F0F5EF"/>
+          </a:solidFill>
+          <a:ln/>
+        </p:spPr>
+      </p:sp>
+      <p:pic>
+        <p:nvPicPr>
+          <p:cNvPr id="39" name="Image 0" descr="부기 책을 함께 읽는 두 아이">    </p:cNvPr>
+          <p:cNvPicPr>
+            <a:picLocks noChangeAspect="1"/>
+          </p:cNvPicPr>
+          <p:nvPr/>
+        </p:nvPicPr>
+        <p:blipFill>
+          <a:blip r:embed="rId1"/>
+          <a:stretch>
+            <a:fillRect/>
+          </a:stretch>
+        </p:blipFill>
+        <p:spPr>
+          <a:xfrm>
+            <a:off x="5702300" y="6362700"/>
+            <a:ext cx="1409700" cy="968248"/>
+          </a:xfrm>
+          <a:prstGeom prst="rect">
+            <a:avLst/>
+          </a:prstGeom>
+        </p:spPr>
+      </p:pic>
+      <p:sp>
+        <p:nvSpPr>
+          <p:cNvPr id="40" name="txt-1-0"/>
+          <p:cNvSpPr txBox="1"/>
+          <p:nvPr/>
+        </p:nvSpPr>
+        <p:spPr>
+          <a:xfrm>
+            <a:off x="381000" y="296926"/>
+            <a:ext cx="1035177" cy="364871"/>
+          </a:xfrm>
+          <a:prstGeom prst="rect">
+            <a:avLst/>
+          </a:prstGeom>
+          <a:noFill/>
+          <a:ln/>
+        </p:spPr>
+        <p:txBody>
+          <a:bodyPr wrap="square" lIns="0" tIns="0" rIns="0" bIns="0" rtlCol="0" anchor="t"/>
+          <a:lstStyle/>
+          <a:p>
+            <a:pPr algn="l" indent="0" marL="0">
+              <a:lnSpc>
+                <a:spcPts val="2210"/>
+              </a:lnSpc>
+              <a:buNone/>
+            </a:pPr>
+            <a:r>
+              <a:rPr lang="ko-KR" altLang="en-US" sz="1700" dirty="0">
+                <a:solidFill>
+                  <a:srgbClr val="101D42"/>
+                </a:solidFill>
+                <a:latin typeface="Noto Serif KR Black" pitchFamily="34" charset="0"/>
+                <a:ea typeface="Noto Serif KR Black" pitchFamily="34" charset="-122"/>
+                <a:cs typeface="Noto Serif KR Black" pitchFamily="34" charset="-120"/>
+              </a:rPr>
+              <a:t>AI 시대,</a:t>
+            </a:r>
+            <a:endParaRPr lang="en-US" sz="1700" dirty="0"/>
+          </a:p>
+        </p:txBody>
+      </p:sp>
+      <p:sp>
+        <p:nvSpPr>
+          <p:cNvPr id="41" name="txt-1-1"/>
+          <p:cNvSpPr txBox="1"/>
+          <p:nvPr/>
+        </p:nvSpPr>
+        <p:spPr>
+          <a:xfrm>
+            <a:off x="355473" y="694182"/>
+            <a:ext cx="5665724" cy="1030224"/>
+          </a:xfrm>
+          <a:prstGeom prst="rect">
+            <a:avLst/>
+          </a:prstGeom>
+          <a:noFill/>
+          <a:ln/>
+        </p:spPr>
+        <p:txBody>
+          <a:bodyPr wrap="square" lIns="0" tIns="0" rIns="0" bIns="0" rtlCol="0" anchor="t"/>
+          <a:lstStyle/>
+          <a:p>
+            <a:pPr algn="l" indent="0" marL="0">
+              <a:lnSpc>
+                <a:spcPts val="6240"/>
+              </a:lnSpc>
+              <a:buNone/>
+            </a:pPr>
+            <a:r>
+              <a:rPr lang="ko-KR" altLang="en-US" sz="4800" dirty="0">
+                <a:solidFill>
+                  <a:srgbClr val="101D42"/>
+                </a:solidFill>
+                <a:latin typeface="Noto Serif KR Black" pitchFamily="34" charset="0"/>
+                <a:ea typeface="Noto Serif KR Black" pitchFamily="34" charset="-122"/>
+                <a:cs typeface="Noto Serif KR Black" pitchFamily="34" charset="-120"/>
+              </a:rPr>
+              <a:t>독서는 모든 학습의</a:t>
+            </a:r>
+            <a:endParaRPr lang="en-US" sz="4800" dirty="0"/>
+          </a:p>
+        </p:txBody>
+      </p:sp>
+      <p:sp>
+        <p:nvSpPr>
+          <p:cNvPr id="42" name="txt-1-2"/>
+          <p:cNvSpPr txBox="1"/>
+          <p:nvPr/>
+        </p:nvSpPr>
+        <p:spPr>
+          <a:xfrm>
+            <a:off x="355473" y="1406271"/>
+            <a:ext cx="3908044" cy="1116076"/>
+          </a:xfrm>
+          <a:prstGeom prst="rect">
+            <a:avLst/>
+          </a:prstGeom>
+          <a:noFill/>
+          <a:ln/>
+        </p:spPr>
+        <p:txBody>
+          <a:bodyPr wrap="square" lIns="0" tIns="0" rIns="0" bIns="0" rtlCol="0" anchor="t"/>
+          <a:lstStyle/>
+          <a:p>
+            <a:pPr algn="l" indent="0" marL="0">
+              <a:lnSpc>
+                <a:spcPts val="6760"/>
+              </a:lnSpc>
+              <a:buNone/>
+            </a:pPr>
+            <a:r>
+              <a:rPr lang="ko-KR" altLang="en-US" sz="5200" dirty="0">
+                <a:solidFill>
+                  <a:srgbClr val="15543C"/>
+                </a:solidFill>
+                <a:latin typeface="Noto Serif KR Black" pitchFamily="34" charset="0"/>
+                <a:ea typeface="Noto Serif KR Black" pitchFamily="34" charset="-122"/>
+                <a:cs typeface="Noto Serif KR Black" pitchFamily="34" charset="-120"/>
+              </a:rPr>
+              <a:t>기본</a:t>
+            </a:r>
+            <a:pPr algn="l" indent="0" marL="0">
+              <a:lnSpc>
+                <a:spcPts val="6760"/>
+              </a:lnSpc>
+              <a:buNone/>
+            </a:pPr>
+            <a:r>
+              <a:rPr lang="ko-KR" altLang="en-US" sz="5200" dirty="0">
+                <a:solidFill>
+                  <a:srgbClr val="101D42"/>
+                </a:solidFill>
+                <a:latin typeface="Noto Serif KR Black" pitchFamily="34" charset="0"/>
+                <a:ea typeface="Noto Serif KR Black" pitchFamily="34" charset="-122"/>
+                <a:cs typeface="Noto Serif KR Black" pitchFamily="34" charset="-120"/>
+              </a:rPr>
+              <a:t>입니다.</a:t>
+            </a:r>
+            <a:endParaRPr lang="en-US" sz="5200" dirty="0"/>
+          </a:p>
+        </p:txBody>
+      </p:sp>
+      <p:sp>
+        <p:nvSpPr>
+          <p:cNvPr id="43" name="txt-1-3"/>
+          <p:cNvSpPr txBox="1"/>
+          <p:nvPr/>
+        </p:nvSpPr>
+        <p:spPr>
+          <a:xfrm>
+            <a:off x="381000" y="2336419"/>
+            <a:ext cx="5091049" cy="701040"/>
+          </a:xfrm>
+          <a:prstGeom prst="rect">
+            <a:avLst/>
+          </a:prstGeom>
+          <a:noFill/>
+          <a:ln/>
+        </p:spPr>
+        <p:txBody>
+          <a:bodyPr wrap="square" lIns="0" tIns="0" rIns="0" bIns="0" rtlCol="0" anchor="t"/>
+          <a:lstStyle/>
+          <a:p>
+            <a:pPr algn="l" indent="0" marL="0">
+              <a:lnSpc>
+                <a:spcPts val="2400"/>
+              </a:lnSpc>
+              <a:buNone/>
+            </a:pPr>
+            <a:r>
+              <a:rPr lang="ko-KR" altLang="en-US" sz="1600" dirty="0">
+                <a:solidFill>
+                  <a:srgbClr val="101D42"/>
+                </a:solidFill>
+                <a:latin typeface="Noto Sans KR" pitchFamily="34" charset="0"/>
+                <a:ea typeface="Noto Sans KR" pitchFamily="34" charset="-122"/>
+                <a:cs typeface="Noto Sans KR" pitchFamily="34" charset="-120"/>
+              </a:rPr>
+              <a:t>AI가 답을 내놓아도,</a:t>
+            </a:r>
+            <a:endParaRPr lang="en-US" sz="1600" dirty="0"/>
+          </a:p>
+          <a:p>
+            <a:pPr algn="l" indent="0" marL="0">
+              <a:lnSpc>
+                <a:spcPts val="2400"/>
+              </a:lnSpc>
+              <a:buNone/>
+            </a:pPr>
+            <a:r>
+              <a:rPr lang="ko-KR" altLang="en-US" sz="1600" b="1" dirty="0">
+                <a:solidFill>
+                  <a:srgbClr val="101D42"/>
+                </a:solidFill>
+                <a:highlight>
+                  <a:srgbClr val="FFF0AD"/>
+                </a:highlight>
+                <a:latin typeface="Noto Sans KR" pitchFamily="34" charset="0"/>
+                <a:ea typeface="Noto Sans KR" pitchFamily="34" charset="-122"/>
+                <a:cs typeface="Noto Sans KR" pitchFamily="34" charset="-120"/>
+              </a:rPr>
+              <a:t>읽고 이해하고 판단하는 힘</a:t>
+            </a:r>
+            <a:pPr algn="l" indent="0" marL="0">
+              <a:lnSpc>
+                <a:spcPts val="2400"/>
+              </a:lnSpc>
+              <a:buNone/>
+            </a:pPr>
+            <a:r>
+              <a:rPr lang="ko-KR" altLang="en-US" sz="1600" dirty="0">
+                <a:solidFill>
+                  <a:srgbClr val="101D42"/>
+                </a:solidFill>
+                <a:latin typeface="Noto Sans KR" pitchFamily="34" charset="0"/>
+                <a:ea typeface="Noto Sans KR" pitchFamily="34" charset="-122"/>
+                <a:cs typeface="Noto Sans KR" pitchFamily="34" charset="-120"/>
+              </a:rPr>
+              <a:t>은 학생 안에 있어야 합니다.</a:t>
+            </a:r>
+            <a:endParaRPr lang="en-US" sz="1600" dirty="0"/>
+          </a:p>
+        </p:txBody>
+      </p:sp>
+      <p:sp>
+        <p:nvSpPr>
+          <p:cNvPr id="44" name="txt-1-4"/>
+          <p:cNvSpPr txBox="1"/>
+          <p:nvPr/>
+        </p:nvSpPr>
+        <p:spPr>
+          <a:xfrm>
+            <a:off x="787146" y="3116072"/>
+            <a:ext cx="1358138" cy="364871"/>
+          </a:xfrm>
+          <a:prstGeom prst="rect">
+            <a:avLst/>
+          </a:prstGeom>
+          <a:noFill/>
+          <a:ln/>
+        </p:spPr>
+        <p:txBody>
+          <a:bodyPr wrap="square" lIns="0" tIns="0" rIns="0" bIns="0" rtlCol="0" anchor="t"/>
+          <a:lstStyle/>
+          <a:p>
+            <a:pPr algn="l" indent="0" marL="0">
+              <a:lnSpc>
+                <a:spcPts val="2210"/>
+              </a:lnSpc>
+              <a:buNone/>
+            </a:pPr>
+            <a:r>
+              <a:rPr lang="ko-KR" altLang="en-US" sz="1700" dirty="0">
+                <a:solidFill>
+                  <a:srgbClr val="15543C"/>
+                </a:solidFill>
+                <a:latin typeface="Noto Serif KR Black" pitchFamily="34" charset="0"/>
+                <a:ea typeface="Noto Serif KR Black" pitchFamily="34" charset="-122"/>
+                <a:cs typeface="Noto Serif KR Black" pitchFamily="34" charset="-120"/>
+              </a:rPr>
+              <a:t>학습의 기본</a:t>
+            </a:r>
+            <a:endParaRPr lang="en-US" sz="1700" dirty="0"/>
+          </a:p>
+        </p:txBody>
+      </p:sp>
+      <p:sp>
+        <p:nvSpPr>
+          <p:cNvPr id="45" name="txt-1-5"/>
+          <p:cNvSpPr txBox="1"/>
+          <p:nvPr/>
+        </p:nvSpPr>
+        <p:spPr>
+          <a:xfrm>
+            <a:off x="3085465" y="3116072"/>
+            <a:ext cx="1358138" cy="364871"/>
+          </a:xfrm>
+          <a:prstGeom prst="rect">
+            <a:avLst/>
+          </a:prstGeom>
+          <a:noFill/>
+          <a:ln/>
+        </p:spPr>
+        <p:txBody>
+          <a:bodyPr wrap="square" lIns="0" tIns="0" rIns="0" bIns="0" rtlCol="0" anchor="t"/>
+          <a:lstStyle/>
+          <a:p>
+            <a:pPr algn="l" indent="0" marL="0">
+              <a:lnSpc>
+                <a:spcPts val="2210"/>
+              </a:lnSpc>
+              <a:buNone/>
+            </a:pPr>
+            <a:r>
+              <a:rPr lang="ko-KR" altLang="en-US" sz="1700" dirty="0">
+                <a:solidFill>
+                  <a:srgbClr val="15543C"/>
+                </a:solidFill>
+                <a:latin typeface="Noto Serif KR Black" pitchFamily="34" charset="0"/>
+                <a:ea typeface="Noto Serif KR Black" pitchFamily="34" charset="-122"/>
+                <a:cs typeface="Noto Serif KR Black" pitchFamily="34" charset="-120"/>
+              </a:rPr>
+              <a:t>사고의 기본</a:t>
+            </a:r>
+            <a:endParaRPr lang="en-US" sz="1700" dirty="0"/>
+          </a:p>
+        </p:txBody>
+      </p:sp>
+      <p:sp>
+        <p:nvSpPr>
+          <p:cNvPr id="46" name="txt-1-6"/>
+          <p:cNvSpPr txBox="1"/>
+          <p:nvPr/>
+        </p:nvSpPr>
+        <p:spPr>
+          <a:xfrm>
+            <a:off x="5383784" y="3116072"/>
+            <a:ext cx="1128776" cy="364871"/>
+          </a:xfrm>
+          <a:prstGeom prst="rect">
+            <a:avLst/>
+          </a:prstGeom>
+          <a:noFill/>
+          <a:ln/>
+        </p:spPr>
+        <p:txBody>
+          <a:bodyPr wrap="square" lIns="0" tIns="0" rIns="0" bIns="0" rtlCol="0" anchor="t"/>
+          <a:lstStyle/>
+          <a:p>
+            <a:pPr algn="l" indent="0" marL="0">
+              <a:lnSpc>
+                <a:spcPts val="2210"/>
+              </a:lnSpc>
+              <a:buNone/>
+            </a:pPr>
+            <a:r>
+              <a:rPr lang="ko-KR" altLang="en-US" sz="1700" dirty="0">
+                <a:solidFill>
+                  <a:srgbClr val="15543C"/>
+                </a:solidFill>
+                <a:latin typeface="Noto Serif KR Black" pitchFamily="34" charset="0"/>
+                <a:ea typeface="Noto Serif KR Black" pitchFamily="34" charset="-122"/>
+                <a:cs typeface="Noto Serif KR Black" pitchFamily="34" charset="-120"/>
+              </a:rPr>
+              <a:t>삶의 기본</a:t>
+            </a:r>
+            <a:endParaRPr lang="en-US" sz="1700" dirty="0"/>
+          </a:p>
+        </p:txBody>
+      </p:sp>
+      <p:sp>
+        <p:nvSpPr>
+          <p:cNvPr id="47" name="txt-1-7"/>
+          <p:cNvSpPr txBox="1"/>
+          <p:nvPr/>
+        </p:nvSpPr>
+        <p:spPr>
+          <a:xfrm>
+            <a:off x="398653" y="3540252"/>
+            <a:ext cx="2162683" cy="467360"/>
+          </a:xfrm>
+          <a:prstGeom prst="rect">
+            <a:avLst/>
+          </a:prstGeom>
+          <a:noFill/>
+          <a:ln/>
+        </p:spPr>
+        <p:txBody>
+          <a:bodyPr wrap="square" lIns="0" tIns="0" rIns="0" bIns="0" rtlCol="0" anchor="t"/>
+          <a:lstStyle/>
+          <a:p>
+            <a:pPr algn="ctr" indent="0" marL="0">
+              <a:lnSpc>
+                <a:spcPts val="1600"/>
+              </a:lnSpc>
+              <a:buNone/>
+            </a:pPr>
+            <a:r>
+              <a:rPr lang="ko-KR" altLang="en-US" sz="1080" dirty="0">
+                <a:solidFill>
+                  <a:srgbClr val="101D42"/>
+                </a:solidFill>
+                <a:latin typeface="Noto Sans KR" pitchFamily="34" charset="0"/>
+                <a:ea typeface="Noto Sans KR" pitchFamily="34" charset="-122"/>
+                <a:cs typeface="Noto Sans KR" pitchFamily="34" charset="-120"/>
+              </a:rPr>
+              <a:t>낱말과 문장의 뜻을 이해하고</a:t>
+            </a:r>
+            <a:endParaRPr lang="en-US" sz="1080" dirty="0"/>
+          </a:p>
+          <a:p>
+            <a:pPr algn="ctr" indent="0" marL="0">
+              <a:lnSpc>
+                <a:spcPts val="1600"/>
+              </a:lnSpc>
+              <a:buNone/>
+            </a:pPr>
+            <a:r>
+              <a:rPr lang="ko-KR" altLang="en-US" sz="1080" b="1" dirty="0">
+                <a:solidFill>
+                  <a:srgbClr val="101D42"/>
+                </a:solidFill>
+                <a:highlight>
+                  <a:srgbClr val="FFF0AD"/>
+                </a:highlight>
+                <a:latin typeface="Noto Sans KR" pitchFamily="34" charset="0"/>
+                <a:ea typeface="Noto Sans KR" pitchFamily="34" charset="-122"/>
+                <a:cs typeface="Noto Sans KR" pitchFamily="34" charset="-120"/>
+              </a:rPr>
+              <a:t>모든 교과의 학습</a:t>
+            </a:r>
+            <a:pPr algn="ctr" indent="0" marL="0">
+              <a:lnSpc>
+                <a:spcPts val="1600"/>
+              </a:lnSpc>
+              <a:buNone/>
+            </a:pPr>
+            <a:r>
+              <a:rPr lang="ko-KR" altLang="en-US" sz="1080" dirty="0">
+                <a:solidFill>
+                  <a:srgbClr val="101D42"/>
+                </a:solidFill>
+                <a:latin typeface="Noto Sans KR" pitchFamily="34" charset="0"/>
+                <a:ea typeface="Noto Sans KR" pitchFamily="34" charset="-122"/>
+                <a:cs typeface="Noto Sans KR" pitchFamily="34" charset="-120"/>
+              </a:rPr>
+              <a:t>을 이어 가는 힘</a:t>
+            </a:r>
+            <a:endParaRPr lang="en-US" sz="1080" dirty="0"/>
+          </a:p>
+        </p:txBody>
+      </p:sp>
+      <p:sp>
+        <p:nvSpPr>
+          <p:cNvPr id="48" name="txt-1-8"/>
+          <p:cNvSpPr txBox="1"/>
+          <p:nvPr/>
+        </p:nvSpPr>
+        <p:spPr>
+          <a:xfrm>
+            <a:off x="3178937" y="3540252"/>
+            <a:ext cx="1503045" cy="467360"/>
+          </a:xfrm>
+          <a:prstGeom prst="rect">
+            <a:avLst/>
+          </a:prstGeom>
+          <a:noFill/>
+          <a:ln/>
+        </p:spPr>
+        <p:txBody>
+          <a:bodyPr wrap="square" lIns="0" tIns="0" rIns="0" bIns="0" rtlCol="0" anchor="t"/>
+          <a:lstStyle/>
+          <a:p>
+            <a:pPr algn="l" indent="0" marL="0">
+              <a:lnSpc>
+                <a:spcPts val="1600"/>
+              </a:lnSpc>
+              <a:buNone/>
+            </a:pPr>
+            <a:r>
+              <a:rPr lang="ko-KR" altLang="en-US" sz="1080" dirty="0">
+                <a:solidFill>
+                  <a:srgbClr val="101D42"/>
+                </a:solidFill>
+                <a:latin typeface="Noto Sans KR" pitchFamily="34" charset="0"/>
+                <a:ea typeface="Noto Sans KR" pitchFamily="34" charset="-122"/>
+                <a:cs typeface="Noto Sans KR" pitchFamily="34" charset="-120"/>
+              </a:rPr>
+              <a:t>근거를 찾고 질문하며</a:t>
+            </a:r>
+            <a:endParaRPr lang="en-US" sz="1080" dirty="0"/>
+          </a:p>
+          <a:p>
+            <a:pPr algn="l" indent="0" marL="0">
+              <a:lnSpc>
+                <a:spcPts val="1600"/>
+              </a:lnSpc>
+              <a:buNone/>
+            </a:pPr>
+            <a:r>
+              <a:rPr lang="ko-KR" altLang="en-US" sz="1080" dirty="0">
+                <a:solidFill>
+                  <a:srgbClr val="101D42"/>
+                </a:solidFill>
+                <a:latin typeface="Noto Sans KR" pitchFamily="34" charset="0"/>
+                <a:ea typeface="Noto Sans KR" pitchFamily="34" charset="-122"/>
+                <a:cs typeface="Noto Sans KR" pitchFamily="34" charset="-120"/>
+              </a:rPr>
+              <a:t>자기 생각을 세우는 힘</a:t>
+            </a:r>
+            <a:endParaRPr lang="en-US" sz="1080" dirty="0"/>
+          </a:p>
+        </p:txBody>
+      </p:sp>
+      <p:sp>
+        <p:nvSpPr>
+          <p:cNvPr id="49" name="txt-1-9"/>
+          <p:cNvSpPr txBox="1"/>
+          <p:nvPr/>
+        </p:nvSpPr>
+        <p:spPr>
+          <a:xfrm>
+            <a:off x="5241290" y="3540252"/>
+            <a:ext cx="1668907" cy="467360"/>
+          </a:xfrm>
+          <a:prstGeom prst="rect">
+            <a:avLst/>
+          </a:prstGeom>
+          <a:noFill/>
+          <a:ln/>
+        </p:spPr>
+        <p:txBody>
+          <a:bodyPr wrap="square" lIns="0" tIns="0" rIns="0" bIns="0" rtlCol="0" anchor="t"/>
+          <a:lstStyle/>
+          <a:p>
+            <a:pPr algn="ctr" indent="0" marL="0">
+              <a:lnSpc>
+                <a:spcPts val="1600"/>
+              </a:lnSpc>
+              <a:buNone/>
+            </a:pPr>
+            <a:r>
+              <a:rPr lang="ko-KR" altLang="en-US" sz="1080" dirty="0">
+                <a:solidFill>
+                  <a:srgbClr val="101D42"/>
+                </a:solidFill>
+                <a:latin typeface="Noto Sans KR" pitchFamily="34" charset="0"/>
+                <a:ea typeface="Noto Sans KR" pitchFamily="34" charset="-122"/>
+                <a:cs typeface="Noto Sans KR" pitchFamily="34" charset="-120"/>
+              </a:rPr>
+              <a:t>책 속의 다른 삶을 만나</a:t>
+            </a:r>
+            <a:endParaRPr lang="en-US" sz="1080" dirty="0"/>
+          </a:p>
+          <a:p>
+            <a:pPr algn="ctr" indent="0" marL="0">
+              <a:lnSpc>
+                <a:spcPts val="1600"/>
+              </a:lnSpc>
+              <a:buNone/>
+            </a:pPr>
+            <a:r>
+              <a:rPr lang="ko-KR" altLang="en-US" sz="1080" dirty="0">
+                <a:solidFill>
+                  <a:srgbClr val="101D42"/>
+                </a:solidFill>
+                <a:latin typeface="Noto Sans KR" pitchFamily="34" charset="0"/>
+                <a:ea typeface="Noto Sans KR" pitchFamily="34" charset="-122"/>
+                <a:cs typeface="Noto Sans KR" pitchFamily="34" charset="-120"/>
+              </a:rPr>
+              <a:t>나와 타인을 이해하는 힘</a:t>
+            </a:r>
+            <a:endParaRPr lang="en-US" sz="1080" dirty="0"/>
+          </a:p>
+        </p:txBody>
+      </p:sp>
+      <p:sp>
+        <p:nvSpPr>
+          <p:cNvPr id="50" name="txt-1-10"/>
+          <p:cNvSpPr txBox="1"/>
+          <p:nvPr/>
+        </p:nvSpPr>
+        <p:spPr>
+          <a:xfrm>
+            <a:off x="1478280" y="4168521"/>
+            <a:ext cx="4601845" cy="214630"/>
+          </a:xfrm>
+          <a:prstGeom prst="rect">
+            <a:avLst/>
+          </a:prstGeom>
+          <a:noFill/>
+          <a:ln/>
+        </p:spPr>
+        <p:txBody>
+          <a:bodyPr wrap="square" lIns="0" tIns="0" rIns="0" bIns="0" rtlCol="0" anchor="t"/>
+          <a:lstStyle/>
+          <a:p>
+            <a:pPr algn="ctr" indent="0" marL="0">
+              <a:lnSpc>
+                <a:spcPts val="1300"/>
+              </a:lnSpc>
+              <a:buNone/>
+            </a:pPr>
+            <a:r>
+              <a:rPr lang="ko-KR" altLang="en-US" sz="1000" dirty="0">
+                <a:solidFill>
+                  <a:srgbClr val="101D42"/>
+                </a:solidFill>
+                <a:latin typeface="Noto Sans KR" pitchFamily="34" charset="0"/>
+                <a:ea typeface="Noto Sans KR" pitchFamily="34" charset="-122"/>
+                <a:cs typeface="Noto Sans KR" pitchFamily="34" charset="-120"/>
+              </a:rPr>
+              <a:t>직접 읽고 근거를 찾는 연습이 AI의 답을 판단할 바탕이 됩니다.*</a:t>
+            </a:r>
+            <a:endParaRPr lang="en-US" sz="1000" dirty="0"/>
+          </a:p>
+        </p:txBody>
+      </p:sp>
+      <p:sp>
+        <p:nvSpPr>
+          <p:cNvPr id="51" name="txt-1-11"/>
+          <p:cNvSpPr txBox="1"/>
+          <p:nvPr/>
+        </p:nvSpPr>
+        <p:spPr>
+          <a:xfrm>
+            <a:off x="482346" y="4628134"/>
+            <a:ext cx="5168646" cy="579501"/>
+          </a:xfrm>
+          <a:prstGeom prst="rect">
+            <a:avLst/>
+          </a:prstGeom>
+          <a:noFill/>
+          <a:ln/>
+        </p:spPr>
+        <p:txBody>
+          <a:bodyPr wrap="square" lIns="0" tIns="0" rIns="0" bIns="0" rtlCol="0" anchor="t"/>
+          <a:lstStyle/>
+          <a:p>
+            <a:pPr algn="l" indent="0" marL="0">
+              <a:lnSpc>
+                <a:spcPts val="3510"/>
+              </a:lnSpc>
+              <a:buNone/>
+            </a:pPr>
+            <a:r>
+              <a:rPr lang="ko-KR" altLang="en-US" sz="2700" dirty="0">
+                <a:solidFill>
+                  <a:srgbClr val="101D42"/>
+                </a:solidFill>
+                <a:latin typeface="Noto Serif KR Black" pitchFamily="34" charset="0"/>
+                <a:ea typeface="Noto Serif KR Black" pitchFamily="34" charset="-122"/>
+                <a:cs typeface="Noto Serif KR Black" pitchFamily="34" charset="-120"/>
+              </a:rPr>
+              <a:t>기본이 쌓일 시간이 필요합니다</a:t>
+            </a:r>
+            <a:endParaRPr lang="en-US" sz="2700" dirty="0"/>
+          </a:p>
+        </p:txBody>
+      </p:sp>
+      <p:sp>
+        <p:nvSpPr>
+          <p:cNvPr id="52" name="txt-1-12"/>
+          <p:cNvSpPr txBox="1"/>
+          <p:nvPr/>
+        </p:nvSpPr>
+        <p:spPr>
+          <a:xfrm>
+            <a:off x="495300" y="5127625"/>
+            <a:ext cx="7026656" cy="540385"/>
+          </a:xfrm>
+          <a:prstGeom prst="rect">
+            <a:avLst/>
+          </a:prstGeom>
+          <a:noFill/>
+          <a:ln/>
+        </p:spPr>
+        <p:txBody>
+          <a:bodyPr wrap="square" lIns="0" tIns="0" rIns="0" bIns="0" rtlCol="0" anchor="t"/>
+          <a:lstStyle/>
+          <a:p>
+            <a:pPr algn="l" indent="0" marL="0">
+              <a:lnSpc>
+                <a:spcPts val="1850"/>
+              </a:lnSpc>
+              <a:buNone/>
+            </a:pPr>
+            <a:r>
+              <a:rPr lang="ko-KR" altLang="en-US" sz="1210" dirty="0">
+                <a:solidFill>
+                  <a:srgbClr val="101D42"/>
+                </a:solidFill>
+                <a:latin typeface="Noto Sans KR" pitchFamily="34" charset="0"/>
+                <a:ea typeface="Noto Sans KR" pitchFamily="34" charset="-122"/>
+                <a:cs typeface="Noto Sans KR" pitchFamily="34" charset="-120"/>
+              </a:rPr>
+              <a:t>전자도서관과 책이 있어도 낯선 어휘에서 막히면 이해와 재미가 끊깁니다.</a:t>
+            </a:r>
+            <a:endParaRPr lang="en-US" sz="1210" dirty="0"/>
+          </a:p>
+          <a:p>
+            <a:pPr algn="l" indent="0" marL="0">
+              <a:lnSpc>
+                <a:spcPts val="1850"/>
+              </a:lnSpc>
+              <a:buNone/>
+            </a:pPr>
+            <a:r>
+              <a:rPr lang="ko-KR" altLang="en-US" sz="1210" dirty="0">
+                <a:solidFill>
+                  <a:srgbClr val="101D42"/>
+                </a:solidFill>
+                <a:latin typeface="Noto Sans KR" pitchFamily="34" charset="0"/>
+                <a:ea typeface="Noto Sans KR" pitchFamily="34" charset="-122"/>
+                <a:cs typeface="Noto Sans KR" pitchFamily="34" charset="-120"/>
+              </a:rPr>
+              <a:t>읽는 중의 도움과 교사의 질문을 연결해 한 권 읽는 경험을 돕습니다.</a:t>
+            </a:r>
+            <a:endParaRPr lang="en-US" sz="1210" dirty="0"/>
+          </a:p>
+        </p:txBody>
+      </p:sp>
+      <p:sp>
+        <p:nvSpPr>
+          <p:cNvPr id="53" name="txt-1-13"/>
+          <p:cNvSpPr txBox="1"/>
+          <p:nvPr/>
+        </p:nvSpPr>
+        <p:spPr>
+          <a:xfrm>
+            <a:off x="2679319" y="5862955"/>
+            <a:ext cx="334010" cy="279019"/>
+          </a:xfrm>
+          <a:prstGeom prst="rect">
+            <a:avLst/>
+          </a:prstGeom>
+          <a:noFill/>
+          <a:ln/>
+        </p:spPr>
+        <p:txBody>
+          <a:bodyPr wrap="square" lIns="0" tIns="0" rIns="0" bIns="0" rtlCol="0" anchor="t"/>
+          <a:lstStyle/>
+          <a:p>
+            <a:pPr algn="l" indent="0" marL="0">
+              <a:lnSpc>
+                <a:spcPts val="1690"/>
+              </a:lnSpc>
+              <a:buNone/>
+            </a:pPr>
+            <a:r>
+              <a:rPr lang="ko-KR" altLang="en-US" sz="1300" dirty="0">
+                <a:solidFill>
+                  <a:srgbClr val="D59B32"/>
+                </a:solidFill>
+                <a:latin typeface="Noto Sans KR" pitchFamily="34" charset="0"/>
+                <a:ea typeface="Noto Sans KR" pitchFamily="34" charset="-122"/>
+                <a:cs typeface="Noto Sans KR" pitchFamily="34" charset="-120"/>
+              </a:rPr>
+              <a:t>→</a:t>
+            </a:r>
+            <a:endParaRPr lang="en-US" sz="1300" dirty="0"/>
+          </a:p>
+        </p:txBody>
+      </p:sp>
+      <p:sp>
+        <p:nvSpPr>
+          <p:cNvPr id="54" name="txt-1-14"/>
+          <p:cNvSpPr txBox="1"/>
+          <p:nvPr/>
+        </p:nvSpPr>
+        <p:spPr>
+          <a:xfrm>
+            <a:off x="4749038" y="5862955"/>
+            <a:ext cx="334010" cy="279019"/>
+          </a:xfrm>
+          <a:prstGeom prst="rect">
+            <a:avLst/>
+          </a:prstGeom>
+          <a:noFill/>
+          <a:ln/>
+        </p:spPr>
+        <p:txBody>
+          <a:bodyPr wrap="square" lIns="0" tIns="0" rIns="0" bIns="0" rtlCol="0" anchor="t"/>
+          <a:lstStyle/>
+          <a:p>
+            <a:pPr algn="l" indent="0" marL="0">
+              <a:lnSpc>
+                <a:spcPts val="1690"/>
+              </a:lnSpc>
+              <a:buNone/>
+            </a:pPr>
+            <a:r>
+              <a:rPr lang="ko-KR" altLang="en-US" sz="1300" dirty="0">
+                <a:solidFill>
+                  <a:srgbClr val="D59B32"/>
+                </a:solidFill>
+                <a:latin typeface="Noto Sans KR" pitchFamily="34" charset="0"/>
+                <a:ea typeface="Noto Sans KR" pitchFamily="34" charset="-122"/>
+                <a:cs typeface="Noto Sans KR" pitchFamily="34" charset="-120"/>
+              </a:rPr>
+              <a:t>→</a:t>
+            </a:r>
+            <a:endParaRPr lang="en-US" sz="1300" dirty="0"/>
+          </a:p>
+        </p:txBody>
+      </p:sp>
+      <p:sp>
+        <p:nvSpPr>
+          <p:cNvPr id="55" name="txt-1-15"/>
+          <p:cNvSpPr txBox="1"/>
+          <p:nvPr/>
+        </p:nvSpPr>
+        <p:spPr>
+          <a:xfrm>
+            <a:off x="1261364" y="5897499"/>
+            <a:ext cx="907161" cy="236093"/>
+          </a:xfrm>
+          <a:prstGeom prst="rect">
+            <a:avLst/>
+          </a:prstGeom>
+          <a:noFill/>
+          <a:ln/>
+        </p:spPr>
+        <p:txBody>
+          <a:bodyPr wrap="square" lIns="0" tIns="0" rIns="0" bIns="0" rtlCol="0" anchor="t"/>
+          <a:lstStyle/>
+          <a:p>
+            <a:pPr algn="ctr" indent="0" marL="0">
+              <a:lnSpc>
+                <a:spcPts val="1430"/>
+              </a:lnSpc>
+              <a:buNone/>
+            </a:pPr>
+            <a:r>
+              <a:rPr lang="ko-KR" altLang="en-US" sz="1100" dirty="0">
+                <a:solidFill>
+                  <a:srgbClr val="101D42"/>
+                </a:solidFill>
+                <a:latin typeface="Noto Sans KR" pitchFamily="34" charset="0"/>
+                <a:ea typeface="Noto Sans KR" pitchFamily="34" charset="-122"/>
+                <a:cs typeface="Noto Sans KR" pitchFamily="34" charset="-120"/>
+              </a:rPr>
+              <a:t>모르는 낱말</a:t>
+            </a:r>
+            <a:endParaRPr lang="en-US" sz="1100" dirty="0"/>
+          </a:p>
+        </p:txBody>
+      </p:sp>
+      <p:sp>
+        <p:nvSpPr>
+          <p:cNvPr id="56" name="txt-1-16"/>
+          <p:cNvSpPr txBox="1"/>
+          <p:nvPr/>
+        </p:nvSpPr>
+        <p:spPr>
+          <a:xfrm>
+            <a:off x="3331083" y="5897499"/>
+            <a:ext cx="907161" cy="236093"/>
+          </a:xfrm>
+          <a:prstGeom prst="rect">
+            <a:avLst/>
+          </a:prstGeom>
+          <a:noFill/>
+          <a:ln/>
+        </p:spPr>
+        <p:txBody>
+          <a:bodyPr wrap="square" lIns="0" tIns="0" rIns="0" bIns="0" rtlCol="0" anchor="t"/>
+          <a:lstStyle/>
+          <a:p>
+            <a:pPr algn="ctr" indent="0" marL="0">
+              <a:lnSpc>
+                <a:spcPts val="1430"/>
+              </a:lnSpc>
+              <a:buNone/>
+            </a:pPr>
+            <a:r>
+              <a:rPr lang="ko-KR" altLang="en-US" sz="1100" dirty="0">
+                <a:solidFill>
+                  <a:srgbClr val="101D42"/>
+                </a:solidFill>
+                <a:latin typeface="Noto Sans KR" pitchFamily="34" charset="0"/>
+                <a:ea typeface="Noto Sans KR" pitchFamily="34" charset="-122"/>
+                <a:cs typeface="Noto Sans KR" pitchFamily="34" charset="-120"/>
+              </a:rPr>
+              <a:t>이해의 중단</a:t>
+            </a:r>
+            <a:endParaRPr lang="en-US" sz="1100" dirty="0"/>
+          </a:p>
+        </p:txBody>
+      </p:sp>
+      <p:sp>
+        <p:nvSpPr>
+          <p:cNvPr id="57" name="txt-1-17"/>
+          <p:cNvSpPr txBox="1"/>
+          <p:nvPr/>
+        </p:nvSpPr>
+        <p:spPr>
+          <a:xfrm>
+            <a:off x="5400802" y="5897499"/>
+            <a:ext cx="907161" cy="236093"/>
+          </a:xfrm>
+          <a:prstGeom prst="rect">
+            <a:avLst/>
+          </a:prstGeom>
+          <a:noFill/>
+          <a:ln/>
+        </p:spPr>
+        <p:txBody>
+          <a:bodyPr wrap="square" lIns="0" tIns="0" rIns="0" bIns="0" rtlCol="0" anchor="t"/>
+          <a:lstStyle/>
+          <a:p>
+            <a:pPr algn="ctr" indent="0" marL="0">
+              <a:lnSpc>
+                <a:spcPts val="1430"/>
+              </a:lnSpc>
+              <a:buNone/>
+            </a:pPr>
+            <a:r>
+              <a:rPr lang="ko-KR" altLang="en-US" sz="1100" dirty="0">
+                <a:solidFill>
+                  <a:srgbClr val="101D42"/>
+                </a:solidFill>
+                <a:latin typeface="Noto Sans KR" pitchFamily="34" charset="0"/>
+                <a:ea typeface="Noto Sans KR" pitchFamily="34" charset="-122"/>
+                <a:cs typeface="Noto Sans KR" pitchFamily="34" charset="-120"/>
+              </a:rPr>
+              <a:t>읽기의 포기</a:t>
+            </a:r>
+            <a:endParaRPr lang="en-US" sz="1100" dirty="0"/>
+          </a:p>
+        </p:txBody>
+      </p:sp>
+      <p:sp>
+        <p:nvSpPr>
+          <p:cNvPr id="58" name="txt-1-18"/>
+          <p:cNvSpPr txBox="1"/>
+          <p:nvPr/>
+        </p:nvSpPr>
+        <p:spPr>
+          <a:xfrm>
+            <a:off x="381000" y="6415151"/>
+            <a:ext cx="4904105" cy="450723"/>
+          </a:xfrm>
+          <a:prstGeom prst="rect">
+            <a:avLst/>
+          </a:prstGeom>
+          <a:noFill/>
+          <a:ln/>
+        </p:spPr>
+        <p:txBody>
+          <a:bodyPr wrap="square" lIns="0" tIns="0" rIns="0" bIns="0" rtlCol="0" anchor="t"/>
+          <a:lstStyle/>
+          <a:p>
+            <a:pPr algn="l" indent="0" marL="0">
+              <a:lnSpc>
+                <a:spcPts val="2730"/>
+              </a:lnSpc>
+              <a:buNone/>
+            </a:pPr>
+            <a:r>
+              <a:rPr lang="ko-KR" altLang="en-US" sz="2100" dirty="0">
+                <a:solidFill>
+                  <a:srgbClr val="15543C"/>
+                </a:solidFill>
+                <a:latin typeface="Noto Serif KR Black" pitchFamily="34" charset="0"/>
+                <a:ea typeface="Noto Serif KR Black" pitchFamily="34" charset="-122"/>
+                <a:cs typeface="Noto Serif KR Black" pitchFamily="34" charset="-120"/>
+              </a:rPr>
+              <a:t>초등교사들이 뜻을 모아 만들었습니다</a:t>
+            </a:r>
+            <a:endParaRPr lang="en-US" sz="2100" dirty="0"/>
+          </a:p>
+        </p:txBody>
+      </p:sp>
+      <p:sp>
+        <p:nvSpPr>
+          <p:cNvPr id="59" name="txt-1-19"/>
+          <p:cNvSpPr txBox="1"/>
+          <p:nvPr/>
+        </p:nvSpPr>
+        <p:spPr>
+          <a:xfrm>
+            <a:off x="381000" y="6811899"/>
+            <a:ext cx="4670044" cy="493649"/>
+          </a:xfrm>
+          <a:prstGeom prst="rect">
+            <a:avLst/>
+          </a:prstGeom>
+          <a:noFill/>
+          <a:ln/>
+        </p:spPr>
+        <p:txBody>
+          <a:bodyPr wrap="square" lIns="0" tIns="0" rIns="0" bIns="0" rtlCol="0" anchor="t"/>
+          <a:lstStyle/>
+          <a:p>
+            <a:pPr algn="l" indent="0" marL="0">
+              <a:lnSpc>
+                <a:spcPts val="2990"/>
+              </a:lnSpc>
+              <a:buNone/>
+            </a:pPr>
+            <a:r>
+              <a:rPr lang="ko-KR" altLang="en-US" sz="2300" dirty="0">
+                <a:solidFill>
+                  <a:srgbClr val="101D42"/>
+                </a:solidFill>
+                <a:latin typeface="Noto Sans KR" pitchFamily="34" charset="0"/>
+                <a:ea typeface="Noto Sans KR" pitchFamily="34" charset="-122"/>
+                <a:cs typeface="Noto Sans KR" pitchFamily="34" charset="-120"/>
+              </a:rPr>
+              <a:t>부기는 </a:t>
+            </a:r>
+            <a:pPr algn="l" indent="0" marL="0">
+              <a:lnSpc>
+                <a:spcPts val="2990"/>
+              </a:lnSpc>
+              <a:buNone/>
+            </a:pPr>
+            <a:r>
+              <a:rPr lang="ko-KR" altLang="en-US" sz="2300" b="1" dirty="0">
+                <a:solidFill>
+                  <a:srgbClr val="101D42"/>
+                </a:solidFill>
+                <a:highlight>
+                  <a:srgbClr val="FFF0AD"/>
+                </a:highlight>
+                <a:latin typeface="Noto Sans KR" pitchFamily="34" charset="0"/>
+                <a:ea typeface="Noto Sans KR" pitchFamily="34" charset="-122"/>
+                <a:cs typeface="Noto Sans KR" pitchFamily="34" charset="-120"/>
+              </a:rPr>
+              <a:t>정답 대신 질문</a:t>
+            </a:r>
+            <a:pPr algn="l" indent="0" marL="0">
+              <a:lnSpc>
+                <a:spcPts val="2990"/>
+              </a:lnSpc>
+              <a:buNone/>
+            </a:pPr>
+            <a:r>
+              <a:rPr lang="ko-KR" altLang="en-US" sz="2300" dirty="0">
+                <a:solidFill>
+                  <a:srgbClr val="101D42"/>
+                </a:solidFill>
+                <a:latin typeface="Noto Sans KR" pitchFamily="34" charset="0"/>
+                <a:ea typeface="Noto Sans KR" pitchFamily="34" charset="-122"/>
+                <a:cs typeface="Noto Sans KR" pitchFamily="34" charset="-120"/>
+              </a:rPr>
+              <a:t>을 건넵니다.</a:t>
+            </a:r>
+            <a:endParaRPr lang="en-US" sz="2300" dirty="0"/>
+          </a:p>
+        </p:txBody>
+      </p:sp>
+      <p:sp>
+        <p:nvSpPr>
+          <p:cNvPr id="60" name="txt-1-20"/>
+          <p:cNvSpPr txBox="1"/>
+          <p:nvPr/>
+        </p:nvSpPr>
+        <p:spPr>
+          <a:xfrm>
+            <a:off x="381000" y="7313422"/>
+            <a:ext cx="4235577" cy="225425"/>
+          </a:xfrm>
+          <a:prstGeom prst="rect">
+            <a:avLst/>
+          </a:prstGeom>
+          <a:noFill/>
+          <a:ln/>
+        </p:spPr>
+        <p:txBody>
+          <a:bodyPr wrap="square" lIns="0" tIns="0" rIns="0" bIns="0" rtlCol="0" anchor="t"/>
+          <a:lstStyle/>
+          <a:p>
+            <a:pPr algn="l" indent="0" marL="0">
+              <a:lnSpc>
+                <a:spcPts val="1365"/>
+              </a:lnSpc>
+              <a:buNone/>
+            </a:pPr>
+            <a:r>
+              <a:rPr lang="ko-KR" altLang="en-US" sz="1050" dirty="0">
+                <a:solidFill>
+                  <a:srgbClr val="101D42"/>
+                </a:solidFill>
+                <a:latin typeface="Noto Sans KR" pitchFamily="34" charset="0"/>
+                <a:ea typeface="Noto Sans KR" pitchFamily="34" charset="-122"/>
+                <a:cs typeface="Noto Sans KR" pitchFamily="34" charset="-120"/>
+              </a:rPr>
+              <a:t>온라인과 인쇄 활동지로 같은 책과 질문을 함께 읽습니다.</a:t>
+            </a:r>
+            <a:endParaRPr lang="en-US" sz="1050" dirty="0"/>
+          </a:p>
+        </p:txBody>
+      </p:sp>
+      <p:sp>
+        <p:nvSpPr>
+          <p:cNvPr id="61" name="txt-1-21"/>
+          <p:cNvSpPr txBox="1"/>
+          <p:nvPr/>
+        </p:nvSpPr>
+        <p:spPr>
+          <a:xfrm>
+            <a:off x="825246" y="7737856"/>
+            <a:ext cx="584200" cy="343408"/>
+          </a:xfrm>
+          <a:prstGeom prst="rect">
+            <a:avLst/>
+          </a:prstGeom>
+          <a:noFill/>
+          <a:ln/>
+        </p:spPr>
+        <p:txBody>
+          <a:bodyPr wrap="square" lIns="0" tIns="0" rIns="0" bIns="0" rtlCol="0" anchor="t"/>
+          <a:lstStyle/>
+          <a:p>
+            <a:pPr algn="l" indent="0" marL="0">
+              <a:lnSpc>
+                <a:spcPts val="2080"/>
+              </a:lnSpc>
+              <a:buNone/>
+            </a:pPr>
+            <a:r>
+              <a:rPr lang="ko-KR" altLang="en-US" sz="1600" dirty="0">
+                <a:solidFill>
+                  <a:srgbClr val="15543C"/>
+                </a:solidFill>
+                <a:latin typeface="Noto Serif KR Black" pitchFamily="34" charset="0"/>
+                <a:ea typeface="Noto Serif KR Black" pitchFamily="34" charset="-122"/>
+                <a:cs typeface="Noto Serif KR Black" pitchFamily="34" charset="-120"/>
+              </a:rPr>
+              <a:t>읽기</a:t>
+            </a:r>
+            <a:endParaRPr lang="en-US" sz="1600" dirty="0"/>
+          </a:p>
+        </p:txBody>
+      </p:sp>
+      <p:sp>
+        <p:nvSpPr>
+          <p:cNvPr id="62" name="txt-1-22"/>
+          <p:cNvSpPr txBox="1"/>
+          <p:nvPr/>
+        </p:nvSpPr>
+        <p:spPr>
+          <a:xfrm>
+            <a:off x="2571242" y="7737856"/>
+            <a:ext cx="584200" cy="343408"/>
+          </a:xfrm>
+          <a:prstGeom prst="rect">
+            <a:avLst/>
+          </a:prstGeom>
+          <a:noFill/>
+          <a:ln/>
+        </p:spPr>
+        <p:txBody>
+          <a:bodyPr wrap="square" lIns="0" tIns="0" rIns="0" bIns="0" rtlCol="0" anchor="t"/>
+          <a:lstStyle/>
+          <a:p>
+            <a:pPr algn="l" indent="0" marL="0">
+              <a:lnSpc>
+                <a:spcPts val="2080"/>
+              </a:lnSpc>
+              <a:buNone/>
+            </a:pPr>
+            <a:r>
+              <a:rPr lang="ko-KR" altLang="en-US" sz="1600" dirty="0">
+                <a:solidFill>
+                  <a:srgbClr val="15543C"/>
+                </a:solidFill>
+                <a:latin typeface="Noto Serif KR Black" pitchFamily="34" charset="0"/>
+                <a:ea typeface="Noto Serif KR Black" pitchFamily="34" charset="-122"/>
+                <a:cs typeface="Noto Serif KR Black" pitchFamily="34" charset="-120"/>
+              </a:rPr>
+              <a:t>묻기</a:t>
+            </a:r>
+            <a:endParaRPr lang="en-US" sz="1600" dirty="0"/>
+          </a:p>
+        </p:txBody>
+      </p:sp>
+      <p:sp>
+        <p:nvSpPr>
+          <p:cNvPr id="63" name="txt-1-23"/>
+          <p:cNvSpPr txBox="1"/>
+          <p:nvPr/>
+        </p:nvSpPr>
+        <p:spPr>
+          <a:xfrm>
+            <a:off x="4317238" y="7737856"/>
+            <a:ext cx="1016127" cy="343408"/>
+          </a:xfrm>
+          <a:prstGeom prst="rect">
+            <a:avLst/>
+          </a:prstGeom>
+          <a:noFill/>
+          <a:ln/>
+        </p:spPr>
+        <p:txBody>
+          <a:bodyPr wrap="square" lIns="0" tIns="0" rIns="0" bIns="0" rtlCol="0" anchor="t"/>
+          <a:lstStyle/>
+          <a:p>
+            <a:pPr algn="l" indent="0" marL="0">
+              <a:lnSpc>
+                <a:spcPts val="2080"/>
+              </a:lnSpc>
+              <a:buNone/>
+            </a:pPr>
+            <a:r>
+              <a:rPr lang="ko-KR" altLang="en-US" sz="1600" dirty="0">
+                <a:solidFill>
+                  <a:srgbClr val="15543C"/>
+                </a:solidFill>
+                <a:latin typeface="Noto Serif KR Black" pitchFamily="34" charset="0"/>
+                <a:ea typeface="Noto Serif KR Black" pitchFamily="34" charset="-122"/>
+                <a:cs typeface="Noto Serif KR Black" pitchFamily="34" charset="-120"/>
+              </a:rPr>
+              <a:t>표현하기</a:t>
+            </a:r>
+            <a:endParaRPr lang="en-US" sz="1600" dirty="0"/>
+          </a:p>
+        </p:txBody>
+      </p:sp>
+      <p:sp>
+        <p:nvSpPr>
+          <p:cNvPr id="64" name="txt-1-24"/>
+          <p:cNvSpPr txBox="1"/>
+          <p:nvPr/>
+        </p:nvSpPr>
+        <p:spPr>
+          <a:xfrm>
+            <a:off x="5951220" y="7737856"/>
+            <a:ext cx="811911" cy="343408"/>
+          </a:xfrm>
+          <a:prstGeom prst="rect">
+            <a:avLst/>
+          </a:prstGeom>
+          <a:noFill/>
+          <a:ln/>
+        </p:spPr>
+        <p:txBody>
+          <a:bodyPr wrap="square" lIns="0" tIns="0" rIns="0" bIns="0" rtlCol="0" anchor="t"/>
+          <a:lstStyle/>
+          <a:p>
+            <a:pPr algn="ctr" indent="0" marL="0">
+              <a:lnSpc>
+                <a:spcPts val="2080"/>
+              </a:lnSpc>
+              <a:buNone/>
+            </a:pPr>
+            <a:r>
+              <a:rPr lang="ko-KR" altLang="en-US" sz="1600" dirty="0">
+                <a:solidFill>
+                  <a:srgbClr val="15543C"/>
+                </a:solidFill>
+                <a:latin typeface="Noto Serif KR Black" pitchFamily="34" charset="0"/>
+                <a:ea typeface="Noto Serif KR Black" pitchFamily="34" charset="-122"/>
+                <a:cs typeface="Noto Serif KR Black" pitchFamily="34" charset="-120"/>
+              </a:rPr>
+              <a:t>모으기</a:t>
+            </a:r>
+            <a:endParaRPr lang="en-US" sz="1600" dirty="0"/>
+          </a:p>
+        </p:txBody>
+      </p:sp>
+      <p:sp>
+        <p:nvSpPr>
+          <p:cNvPr id="65" name="txt-1-25"/>
+          <p:cNvSpPr txBox="1"/>
+          <p:nvPr/>
+        </p:nvSpPr>
+        <p:spPr>
+          <a:xfrm>
+            <a:off x="616077" y="8082280"/>
+            <a:ext cx="1080135" cy="350520"/>
+          </a:xfrm>
+          <a:prstGeom prst="rect">
+            <a:avLst/>
+          </a:prstGeom>
+          <a:noFill/>
+          <a:ln/>
+        </p:spPr>
+        <p:txBody>
+          <a:bodyPr wrap="square" lIns="0" tIns="0" rIns="0" bIns="0" rtlCol="0" anchor="t"/>
+          <a:lstStyle/>
+          <a:p>
+            <a:pPr algn="ctr" indent="0" marL="0">
+              <a:lnSpc>
+                <a:spcPts val="1200"/>
+              </a:lnSpc>
+              <a:buNone/>
+            </a:pPr>
+            <a:r>
+              <a:rPr lang="ko-KR" altLang="en-US" sz="850" dirty="0">
+                <a:solidFill>
+                  <a:srgbClr val="101D42"/>
+                </a:solidFill>
+                <a:latin typeface="Noto Sans KR" pitchFamily="34" charset="0"/>
+                <a:ea typeface="Noto Sans KR" pitchFamily="34" charset="-122"/>
+                <a:cs typeface="Noto Sans KR" pitchFamily="34" charset="-120"/>
+              </a:rPr>
+              <a:t>능동적 그림 읽기</a:t>
+            </a:r>
+            <a:endParaRPr lang="en-US" sz="850" dirty="0"/>
+          </a:p>
+          <a:p>
+            <a:pPr algn="ctr" indent="0" marL="0">
+              <a:lnSpc>
+                <a:spcPts val="1200"/>
+              </a:lnSpc>
+              <a:buNone/>
+            </a:pPr>
+            <a:r>
+              <a:rPr lang="ko-KR" altLang="en-US" sz="850" dirty="0">
+                <a:solidFill>
+                  <a:srgbClr val="101D42"/>
+                </a:solidFill>
+                <a:latin typeface="Noto Sans KR" pitchFamily="34" charset="0"/>
+                <a:ea typeface="Noto Sans KR" pitchFamily="34" charset="-122"/>
+                <a:cs typeface="Noto Sans KR" pitchFamily="34" charset="-120"/>
+              </a:rPr>
+              <a:t>낱말 · 다국어 지원</a:t>
+            </a:r>
+            <a:endParaRPr lang="en-US" sz="850" dirty="0"/>
+          </a:p>
+        </p:txBody>
+      </p:sp>
+      <p:sp>
+        <p:nvSpPr>
+          <p:cNvPr id="66" name="txt-1-26"/>
+          <p:cNvSpPr txBox="1"/>
+          <p:nvPr/>
+        </p:nvSpPr>
+        <p:spPr>
+          <a:xfrm>
+            <a:off x="2228342" y="8082280"/>
+            <a:ext cx="1345946" cy="350520"/>
+          </a:xfrm>
+          <a:prstGeom prst="rect">
+            <a:avLst/>
+          </a:prstGeom>
+          <a:noFill/>
+          <a:ln/>
+        </p:spPr>
+        <p:txBody>
+          <a:bodyPr wrap="square" lIns="0" tIns="0" rIns="0" bIns="0" rtlCol="0" anchor="t"/>
+          <a:lstStyle/>
+          <a:p>
+            <a:pPr algn="ctr" indent="0" marL="0">
+              <a:lnSpc>
+                <a:spcPts val="1200"/>
+              </a:lnSpc>
+              <a:buNone/>
+            </a:pPr>
+            <a:r>
+              <a:rPr lang="ko-KR" altLang="en-US" sz="850" dirty="0">
+                <a:solidFill>
+                  <a:srgbClr val="101D42"/>
+                </a:solidFill>
+                <a:latin typeface="Noto Sans KR" pitchFamily="34" charset="0"/>
+                <a:ea typeface="Noto Sans KR" pitchFamily="34" charset="-122"/>
+                <a:cs typeface="Noto Sans KR" pitchFamily="34" charset="-120"/>
+              </a:rPr>
+              <a:t>캐릭터와의 대화</a:t>
+            </a:r>
+            <a:endParaRPr lang="en-US" sz="850" dirty="0"/>
+          </a:p>
+          <a:p>
+            <a:pPr algn="ctr" indent="0" marL="0">
+              <a:lnSpc>
+                <a:spcPts val="1200"/>
+              </a:lnSpc>
+              <a:buNone/>
+            </a:pPr>
+            <a:r>
+              <a:rPr lang="ko-KR" altLang="en-US" sz="850" dirty="0">
+                <a:solidFill>
+                  <a:srgbClr val="101D42"/>
+                </a:solidFill>
+                <a:latin typeface="Noto Sans KR" pitchFamily="34" charset="0"/>
+                <a:ea typeface="Noto Sans KR" pitchFamily="34" charset="-122"/>
+                <a:cs typeface="Noto Sans KR" pitchFamily="34" charset="-120"/>
+              </a:rPr>
+              <a:t>생각한 까닭을 묻는 질문</a:t>
+            </a:r>
+            <a:endParaRPr lang="en-US" sz="850" dirty="0"/>
+          </a:p>
+        </p:txBody>
+      </p:sp>
+      <p:sp>
+        <p:nvSpPr>
+          <p:cNvPr id="67" name="txt-1-27"/>
+          <p:cNvSpPr txBox="1"/>
+          <p:nvPr/>
+        </p:nvSpPr>
+        <p:spPr>
+          <a:xfrm>
+            <a:off x="3796030" y="8082280"/>
+            <a:ext cx="1701165" cy="350520"/>
+          </a:xfrm>
+          <a:prstGeom prst="rect">
+            <a:avLst/>
+          </a:prstGeom>
+          <a:noFill/>
+          <a:ln/>
+        </p:spPr>
+        <p:txBody>
+          <a:bodyPr wrap="square" lIns="0" tIns="0" rIns="0" bIns="0" rtlCol="0" anchor="t"/>
+          <a:lstStyle/>
+          <a:p>
+            <a:pPr algn="ctr" indent="0" marL="0">
+              <a:lnSpc>
+                <a:spcPts val="1200"/>
+              </a:lnSpc>
+              <a:buNone/>
+            </a:pPr>
+            <a:r>
+              <a:rPr lang="ko-KR" altLang="en-US" sz="850" dirty="0">
+                <a:solidFill>
+                  <a:srgbClr val="101D42"/>
+                </a:solidFill>
+                <a:latin typeface="Noto Sans KR" pitchFamily="34" charset="0"/>
+                <a:ea typeface="Noto Sans KR" pitchFamily="34" charset="-122"/>
+                <a:cs typeface="Noto Sans KR" pitchFamily="34" charset="-120"/>
+              </a:rPr>
+              <a:t>글, 그림, 편지 쓰기</a:t>
+            </a:r>
+            <a:endParaRPr lang="en-US" sz="850" dirty="0"/>
+          </a:p>
+          <a:p>
+            <a:pPr algn="ctr" indent="0" marL="0">
+              <a:lnSpc>
+                <a:spcPts val="1200"/>
+              </a:lnSpc>
+              <a:buNone/>
+            </a:pPr>
+            <a:r>
+              <a:rPr lang="ko-KR" altLang="en-US" sz="850" dirty="0">
+                <a:solidFill>
+                  <a:srgbClr val="101D42"/>
+                </a:solidFill>
+                <a:latin typeface="Noto Sans KR" pitchFamily="34" charset="0"/>
+                <a:ea typeface="Noto Sans KR" pitchFamily="34" charset="-122"/>
+                <a:cs typeface="Noto Sans KR" pitchFamily="34" charset="-120"/>
+              </a:rPr>
+              <a:t>화면과 인쇄 활동지로 참여</a:t>
+            </a:r>
+            <a:endParaRPr lang="en-US" sz="850" dirty="0"/>
+          </a:p>
+        </p:txBody>
+      </p:sp>
+      <p:sp>
+        <p:nvSpPr>
+          <p:cNvPr id="68" name="txt-1-28"/>
+          <p:cNvSpPr txBox="1"/>
+          <p:nvPr/>
+        </p:nvSpPr>
+        <p:spPr>
+          <a:xfrm>
+            <a:off x="5553202" y="8082280"/>
+            <a:ext cx="1679702" cy="350520"/>
+          </a:xfrm>
+          <a:prstGeom prst="rect">
+            <a:avLst/>
+          </a:prstGeom>
+          <a:noFill/>
+          <a:ln/>
+        </p:spPr>
+        <p:txBody>
+          <a:bodyPr wrap="square" lIns="0" tIns="0" rIns="0" bIns="0" rtlCol="0" anchor="t"/>
+          <a:lstStyle/>
+          <a:p>
+            <a:pPr algn="ctr" indent="0" marL="0">
+              <a:lnSpc>
+                <a:spcPts val="1200"/>
+              </a:lnSpc>
+              <a:buNone/>
+            </a:pPr>
+            <a:r>
+              <a:rPr lang="ko-KR" altLang="en-US" sz="850" dirty="0">
+                <a:solidFill>
+                  <a:srgbClr val="101D42"/>
+                </a:solidFill>
+                <a:latin typeface="Noto Sans KR" pitchFamily="34" charset="0"/>
+                <a:ea typeface="Noto Sans KR" pitchFamily="34" charset="-122"/>
+                <a:cs typeface="Noto Sans KR" pitchFamily="34" charset="-120"/>
+              </a:rPr>
+              <a:t>독서 기록 자산</a:t>
+            </a:r>
+            <a:endParaRPr lang="en-US" sz="850" dirty="0"/>
+          </a:p>
+          <a:p>
+            <a:pPr algn="ctr" indent="0" marL="0">
+              <a:lnSpc>
+                <a:spcPts val="1200"/>
+              </a:lnSpc>
+              <a:buNone/>
+            </a:pPr>
+            <a:r>
+              <a:rPr lang="ko-KR" altLang="en-US" sz="850" dirty="0">
+                <a:solidFill>
+                  <a:srgbClr val="101D42"/>
+                </a:solidFill>
+                <a:latin typeface="Noto Sans KR" pitchFamily="34" charset="0"/>
+                <a:ea typeface="Noto Sans KR" pitchFamily="34" charset="-122"/>
+                <a:cs typeface="Noto Sans KR" pitchFamily="34" charset="-120"/>
+              </a:rPr>
+              <a:t>무엇을 느끼고 달라졌는지 기록</a:t>
+            </a:r>
+            <a:endParaRPr lang="en-US" sz="850" dirty="0"/>
+          </a:p>
+        </p:txBody>
+      </p:sp>
+      <p:sp>
+        <p:nvSpPr>
+          <p:cNvPr id="69" name="txt-1-29"/>
+          <p:cNvSpPr txBox="1"/>
+          <p:nvPr/>
+        </p:nvSpPr>
+        <p:spPr>
+          <a:xfrm>
+            <a:off x="756666" y="8758047"/>
+            <a:ext cx="1141476" cy="515112"/>
+          </a:xfrm>
+          <a:prstGeom prst="rect">
+            <a:avLst/>
+          </a:prstGeom>
+          <a:noFill/>
+          <a:ln/>
+        </p:spPr>
+        <p:txBody>
+          <a:bodyPr wrap="square" lIns="0" tIns="0" rIns="0" bIns="0" rtlCol="0" anchor="t"/>
+          <a:lstStyle/>
+          <a:p>
+            <a:pPr algn="l" indent="0" marL="0">
+              <a:lnSpc>
+                <a:spcPts val="3120"/>
+              </a:lnSpc>
+              <a:buNone/>
+            </a:pPr>
+            <a:r>
+              <a:rPr lang="ko-KR" altLang="en-US" sz="2400" dirty="0">
+                <a:solidFill>
+                  <a:srgbClr val="15543C"/>
+                </a:solidFill>
+                <a:latin typeface="Noto Sans KR" pitchFamily="34" charset="0"/>
+                <a:ea typeface="Noto Sans KR" pitchFamily="34" charset="-122"/>
+                <a:cs typeface="Noto Sans KR" pitchFamily="34" charset="-120"/>
+              </a:rPr>
+              <a:t>72학급</a:t>
+            </a:r>
+            <a:endParaRPr lang="en-US" sz="2400" dirty="0"/>
+          </a:p>
+        </p:txBody>
+      </p:sp>
+      <p:sp>
+        <p:nvSpPr>
+          <p:cNvPr id="70" name="txt-1-30"/>
+          <p:cNvSpPr txBox="1"/>
+          <p:nvPr/>
+        </p:nvSpPr>
+        <p:spPr>
+          <a:xfrm>
+            <a:off x="2399538" y="8758047"/>
+            <a:ext cx="1298448" cy="515112"/>
+          </a:xfrm>
+          <a:prstGeom prst="rect">
+            <a:avLst/>
+          </a:prstGeom>
+          <a:noFill/>
+          <a:ln/>
+        </p:spPr>
+        <p:txBody>
+          <a:bodyPr wrap="square" lIns="0" tIns="0" rIns="0" bIns="0" rtlCol="0" anchor="t"/>
+          <a:lstStyle/>
+          <a:p>
+            <a:pPr algn="l" indent="0" marL="0">
+              <a:lnSpc>
+                <a:spcPts val="3120"/>
+              </a:lnSpc>
+              <a:buNone/>
+            </a:pPr>
+            <a:r>
+              <a:rPr lang="ko-KR" altLang="en-US" sz="2400" dirty="0">
+                <a:solidFill>
+                  <a:srgbClr val="15543C"/>
+                </a:solidFill>
+                <a:latin typeface="Noto Sans KR" pitchFamily="34" charset="0"/>
+                <a:ea typeface="Noto Sans KR" pitchFamily="34" charset="-122"/>
+                <a:cs typeface="Noto Sans KR" pitchFamily="34" charset="-120"/>
+              </a:rPr>
+              <a:t>1,196명</a:t>
+            </a:r>
+            <a:endParaRPr lang="en-US" sz="2400" dirty="0"/>
+          </a:p>
+        </p:txBody>
+      </p:sp>
+      <p:sp>
+        <p:nvSpPr>
+          <p:cNvPr id="71" name="txt-1-31"/>
+          <p:cNvSpPr txBox="1"/>
+          <p:nvPr/>
+        </p:nvSpPr>
+        <p:spPr>
+          <a:xfrm>
+            <a:off x="4029202" y="8758047"/>
+            <a:ext cx="1484503" cy="515112"/>
+          </a:xfrm>
+          <a:prstGeom prst="rect">
+            <a:avLst/>
+          </a:prstGeom>
+          <a:noFill/>
+          <a:ln/>
+        </p:spPr>
+        <p:txBody>
+          <a:bodyPr wrap="square" lIns="0" tIns="0" rIns="0" bIns="0" rtlCol="0" anchor="t"/>
+          <a:lstStyle/>
+          <a:p>
+            <a:pPr algn="l" indent="0" marL="0">
+              <a:lnSpc>
+                <a:spcPts val="3120"/>
+              </a:lnSpc>
+              <a:buNone/>
+            </a:pPr>
+            <a:r>
+              <a:rPr lang="ko-KR" altLang="en-US" sz="2400" dirty="0">
+                <a:solidFill>
+                  <a:srgbClr val="15543C"/>
+                </a:solidFill>
+                <a:latin typeface="Noto Sans KR" pitchFamily="34" charset="0"/>
+                <a:ea typeface="Noto Sans KR" pitchFamily="34" charset="-122"/>
+                <a:cs typeface="Noto Sans KR" pitchFamily="34" charset="-120"/>
+              </a:rPr>
+              <a:t>26,924건</a:t>
+            </a:r>
+            <a:endParaRPr lang="en-US" sz="2400" dirty="0"/>
+          </a:p>
+        </p:txBody>
+      </p:sp>
+      <p:sp>
+        <p:nvSpPr>
+          <p:cNvPr id="72" name="txt-1-32"/>
+          <p:cNvSpPr txBox="1"/>
+          <p:nvPr/>
+        </p:nvSpPr>
+        <p:spPr>
+          <a:xfrm>
+            <a:off x="5827903" y="8758047"/>
+            <a:ext cx="1298448" cy="515112"/>
+          </a:xfrm>
+          <a:prstGeom prst="rect">
+            <a:avLst/>
+          </a:prstGeom>
+          <a:noFill/>
+          <a:ln/>
+        </p:spPr>
+        <p:txBody>
+          <a:bodyPr wrap="square" lIns="0" tIns="0" rIns="0" bIns="0" rtlCol="0" anchor="t"/>
+          <a:lstStyle/>
+          <a:p>
+            <a:pPr algn="l" indent="0" marL="0">
+              <a:lnSpc>
+                <a:spcPts val="3120"/>
+              </a:lnSpc>
+              <a:buNone/>
+            </a:pPr>
+            <a:r>
+              <a:rPr lang="ko-KR" altLang="en-US" sz="2400" dirty="0">
+                <a:solidFill>
+                  <a:srgbClr val="15543C"/>
+                </a:solidFill>
+                <a:latin typeface="Noto Sans KR" pitchFamily="34" charset="0"/>
+                <a:ea typeface="Noto Sans KR" pitchFamily="34" charset="-122"/>
+                <a:cs typeface="Noto Sans KR" pitchFamily="34" charset="-120"/>
+              </a:rPr>
+              <a:t>1,816건</a:t>
+            </a:r>
+            <a:endParaRPr lang="en-US" sz="2400" dirty="0"/>
+          </a:p>
+        </p:txBody>
+      </p:sp>
+      <p:sp>
+        <p:nvSpPr>
+          <p:cNvPr id="73" name="txt-1-33"/>
+          <p:cNvSpPr txBox="1"/>
+          <p:nvPr/>
+        </p:nvSpPr>
+        <p:spPr>
+          <a:xfrm>
+            <a:off x="945896" y="9116314"/>
+            <a:ext cx="725043" cy="225425"/>
+          </a:xfrm>
+          <a:prstGeom prst="rect">
+            <a:avLst/>
+          </a:prstGeom>
+          <a:noFill/>
+          <a:ln/>
+        </p:spPr>
+        <p:txBody>
+          <a:bodyPr wrap="square" lIns="0" tIns="0" rIns="0" bIns="0" rtlCol="0" anchor="t"/>
+          <a:lstStyle/>
+          <a:p>
+            <a:pPr algn="l" indent="0" marL="0">
+              <a:lnSpc>
+                <a:spcPts val="1365"/>
+              </a:lnSpc>
+              <a:buNone/>
+            </a:pPr>
+            <a:r>
+              <a:rPr lang="ko-KR" altLang="en-US" sz="1050" dirty="0">
+                <a:solidFill>
+                  <a:srgbClr val="101D42"/>
+                </a:solidFill>
+                <a:latin typeface="Noto Sans KR" pitchFamily="34" charset="0"/>
+                <a:ea typeface="Noto Sans KR" pitchFamily="34" charset="-122"/>
+                <a:cs typeface="Noto Sans KR" pitchFamily="34" charset="-120"/>
+              </a:rPr>
+              <a:t>운영 학급</a:t>
+            </a:r>
+            <a:endParaRPr lang="en-US" sz="1050" dirty="0"/>
+          </a:p>
+        </p:txBody>
+      </p:sp>
+      <p:sp>
+        <p:nvSpPr>
+          <p:cNvPr id="74" name="txt-1-34"/>
+          <p:cNvSpPr txBox="1"/>
+          <p:nvPr/>
+        </p:nvSpPr>
+        <p:spPr>
+          <a:xfrm>
+            <a:off x="2522474" y="9116314"/>
+            <a:ext cx="1027811" cy="225425"/>
+          </a:xfrm>
+          <a:prstGeom prst="rect">
+            <a:avLst/>
+          </a:prstGeom>
+          <a:noFill/>
+          <a:ln/>
+        </p:spPr>
+        <p:txBody>
+          <a:bodyPr wrap="square" lIns="0" tIns="0" rIns="0" bIns="0" rtlCol="0" anchor="t"/>
+          <a:lstStyle/>
+          <a:p>
+            <a:pPr algn="l" indent="0" marL="0">
+              <a:lnSpc>
+                <a:spcPts val="1365"/>
+              </a:lnSpc>
+              <a:buNone/>
+            </a:pPr>
+            <a:r>
+              <a:rPr lang="ko-KR" altLang="en-US" sz="1050" dirty="0">
+                <a:solidFill>
+                  <a:srgbClr val="101D42"/>
+                </a:solidFill>
+                <a:latin typeface="Noto Sans KR" pitchFamily="34" charset="0"/>
+                <a:ea typeface="Noto Sans KR" pitchFamily="34" charset="-122"/>
+                <a:cs typeface="Noto Sans KR" pitchFamily="34" charset="-120"/>
+              </a:rPr>
+              <a:t>실제 사용 학생</a:t>
+            </a:r>
+            <a:endParaRPr lang="en-US" sz="1050" dirty="0"/>
+          </a:p>
+        </p:txBody>
+      </p:sp>
+      <p:sp>
+        <p:nvSpPr>
+          <p:cNvPr id="75" name="txt-1-35"/>
+          <p:cNvSpPr txBox="1"/>
+          <p:nvPr/>
+        </p:nvSpPr>
+        <p:spPr>
+          <a:xfrm>
+            <a:off x="4374261" y="9116314"/>
+            <a:ext cx="725043" cy="225425"/>
+          </a:xfrm>
+          <a:prstGeom prst="rect">
+            <a:avLst/>
+          </a:prstGeom>
+          <a:noFill/>
+          <a:ln/>
+        </p:spPr>
+        <p:txBody>
+          <a:bodyPr wrap="square" lIns="0" tIns="0" rIns="0" bIns="0" rtlCol="0" anchor="t"/>
+          <a:lstStyle/>
+          <a:p>
+            <a:pPr algn="l" indent="0" marL="0">
+              <a:lnSpc>
+                <a:spcPts val="1365"/>
+              </a:lnSpc>
+              <a:buNone/>
+            </a:pPr>
+            <a:r>
+              <a:rPr lang="ko-KR" altLang="en-US" sz="1050" dirty="0">
+                <a:solidFill>
+                  <a:srgbClr val="101D42"/>
+                </a:solidFill>
+                <a:latin typeface="Noto Sans KR" pitchFamily="34" charset="0"/>
+                <a:ea typeface="Noto Sans KR" pitchFamily="34" charset="-122"/>
+                <a:cs typeface="Noto Sans KR" pitchFamily="34" charset="-120"/>
+              </a:rPr>
+              <a:t>완독 기록</a:t>
+            </a:r>
+            <a:endParaRPr lang="en-US" sz="1050" dirty="0"/>
+          </a:p>
+        </p:txBody>
+      </p:sp>
+      <p:sp>
+        <p:nvSpPr>
+          <p:cNvPr id="76" name="txt-1-36"/>
+          <p:cNvSpPr txBox="1"/>
+          <p:nvPr/>
+        </p:nvSpPr>
+        <p:spPr>
+          <a:xfrm>
+            <a:off x="5965952" y="9116314"/>
+            <a:ext cx="994918" cy="225425"/>
+          </a:xfrm>
+          <a:prstGeom prst="rect">
+            <a:avLst/>
+          </a:prstGeom>
+          <a:noFill/>
+          <a:ln/>
+        </p:spPr>
+        <p:txBody>
+          <a:bodyPr wrap="square" lIns="0" tIns="0" rIns="0" bIns="0" rtlCol="0" anchor="t"/>
+          <a:lstStyle/>
+          <a:p>
+            <a:pPr algn="l" indent="0" marL="0">
+              <a:lnSpc>
+                <a:spcPts val="1365"/>
+              </a:lnSpc>
+              <a:buNone/>
+            </a:pPr>
+            <a:r>
+              <a:rPr lang="ko-KR" altLang="en-US" sz="1050" dirty="0">
+                <a:solidFill>
+                  <a:srgbClr val="101D42"/>
+                </a:solidFill>
+                <a:latin typeface="Noto Sans KR" pitchFamily="34" charset="0"/>
+                <a:ea typeface="Noto Sans KR" pitchFamily="34" charset="-122"/>
+                <a:cs typeface="Noto Sans KR" pitchFamily="34" charset="-120"/>
+              </a:rPr>
+              <a:t>독후활동 제출</a:t>
+            </a:r>
+            <a:endParaRPr lang="en-US" sz="1050" dirty="0"/>
+          </a:p>
+        </p:txBody>
+      </p:sp>
+      <p:sp>
+        <p:nvSpPr>
+          <p:cNvPr id="77" name="txt-1-37"/>
+          <p:cNvSpPr txBox="1"/>
+          <p:nvPr/>
+        </p:nvSpPr>
+        <p:spPr>
+          <a:xfrm>
+            <a:off x="2012823" y="9514586"/>
+            <a:ext cx="3532124" cy="214630"/>
+          </a:xfrm>
+          <a:prstGeom prst="rect">
+            <a:avLst/>
+          </a:prstGeom>
+          <a:noFill/>
+          <a:ln/>
+        </p:spPr>
+        <p:txBody>
+          <a:bodyPr wrap="square" lIns="0" tIns="0" rIns="0" bIns="0" rtlCol="0" anchor="t"/>
+          <a:lstStyle/>
+          <a:p>
+            <a:pPr algn="ctr" indent="0" marL="0">
+              <a:lnSpc>
+                <a:spcPts val="1300"/>
+              </a:lnSpc>
+              <a:buNone/>
+            </a:pPr>
+            <a:r>
+              <a:rPr lang="ko-KR" altLang="en-US" sz="1000" dirty="0">
+                <a:solidFill>
+                  <a:srgbClr val="101D42"/>
+                </a:solidFill>
+                <a:latin typeface="Noto Sans KR" pitchFamily="34" charset="0"/>
+                <a:ea typeface="Noto Sans KR" pitchFamily="34" charset="-122"/>
+                <a:cs typeface="Noto Sans KR" pitchFamily="34" charset="-120"/>
+              </a:rPr>
+              <a:t>2026. 9. 20.~10. 21. 선도교사단 온오프라인 운영 종합</a:t>
+            </a:r>
+            <a:endParaRPr lang="en-US" sz="1000" dirty="0"/>
+          </a:p>
+        </p:txBody>
+      </p:sp>
+      <p:sp>
+        <p:nvSpPr>
+          <p:cNvPr id="78" name="txt-1-38"/>
+          <p:cNvSpPr txBox="1"/>
+          <p:nvPr/>
+        </p:nvSpPr>
+        <p:spPr>
+          <a:xfrm>
+            <a:off x="1502410" y="9843897"/>
+            <a:ext cx="4554855" cy="572516"/>
+          </a:xfrm>
+          <a:prstGeom prst="rect">
+            <a:avLst/>
+          </a:prstGeom>
+          <a:noFill/>
+          <a:ln/>
+        </p:spPr>
+        <p:txBody>
+          <a:bodyPr wrap="square" lIns="0" tIns="0" rIns="0" bIns="0" rtlCol="0" anchor="t"/>
+          <a:lstStyle/>
+          <a:p>
+            <a:pPr algn="ctr" indent="0" marL="0">
+              <a:lnSpc>
+                <a:spcPts val="1960"/>
+              </a:lnSpc>
+              <a:buNone/>
+            </a:pPr>
+            <a:r>
+              <a:rPr lang="ko-KR" altLang="en-US" sz="1400" dirty="0">
+                <a:solidFill>
+                  <a:srgbClr val="101D42"/>
+                </a:solidFill>
+                <a:latin typeface="Noto Serif KR Black" pitchFamily="34" charset="0"/>
+                <a:ea typeface="Noto Serif KR Black" pitchFamily="34" charset="-122"/>
+                <a:cs typeface="Noto Serif KR Black" pitchFamily="34" charset="-120"/>
+              </a:rPr>
+              <a:t>경남의 모든 학생이 읽고 생각하는 기본을 갖추도록,</a:t>
+            </a:r>
+            <a:endParaRPr lang="en-US" sz="1400" dirty="0"/>
+          </a:p>
+          <a:p>
+            <a:pPr algn="ctr" indent="0" marL="0">
+              <a:lnSpc>
+                <a:spcPts val="1960"/>
+              </a:lnSpc>
+              <a:buNone/>
+            </a:pPr>
+            <a:r>
+              <a:rPr lang="ko-KR" altLang="en-US" sz="1400" dirty="0">
+                <a:solidFill>
+                  <a:srgbClr val="15543C"/>
+                </a:solidFill>
+                <a:latin typeface="Noto Serif KR Black" pitchFamily="34" charset="0"/>
+                <a:ea typeface="Noto Serif KR Black" pitchFamily="34" charset="-122"/>
+                <a:cs typeface="Noto Serif KR Black" pitchFamily="34" charset="-120"/>
+              </a:rPr>
+              <a:t>학교 독서교육의 지속적인 운영을 지원해 주십시오.</a:t>
+            </a:r>
+            <a:endParaRPr lang="en-US" sz="1400" dirty="0"/>
+          </a:p>
+        </p:txBody>
+      </p:sp>
+      <p:sp>
+        <p:nvSpPr>
+          <p:cNvPr id="79" name="txt-1-39"/>
+          <p:cNvSpPr txBox="1"/>
+          <p:nvPr/>
+        </p:nvSpPr>
+        <p:spPr>
+          <a:xfrm>
+            <a:off x="304800" y="10510393"/>
+            <a:ext cx="6350000" cy="139446"/>
+          </a:xfrm>
+          <a:prstGeom prst="rect">
+            <a:avLst/>
+          </a:prstGeom>
+          <a:noFill/>
+          <a:ln/>
+        </p:spPr>
+        <p:txBody>
+          <a:bodyPr wrap="square" lIns="0" tIns="0" rIns="0" bIns="0" rtlCol="0" anchor="t"/>
+          <a:lstStyle/>
+          <a:p>
+            <a:pPr algn="l" indent="0" marL="0">
+              <a:lnSpc>
+                <a:spcPts val="845"/>
+              </a:lnSpc>
+              <a:buNone/>
+            </a:pPr>
+            <a:r>
+              <a:rPr lang="ko-KR" altLang="en-US" sz="650" dirty="0">
+                <a:solidFill>
+                  <a:srgbClr val="43516A"/>
+                </a:solidFill>
+                <a:latin typeface="Noto Sans KR" pitchFamily="34" charset="0"/>
+                <a:ea typeface="Noto Sans KR" pitchFamily="34" charset="-122"/>
+                <a:cs typeface="Noto Sans KR" pitchFamily="34" charset="-120"/>
+              </a:rPr>
+              <a:t>* Kreijkes 외(2026), Computers &amp; Education 243, 105514. 중등학생 연구.</a:t>
+            </a:r>
+            <a:endParaRPr lang="en-US" sz="650" dirty="0"/>
+          </a:p>
+        </p:txBody>
+      </p:sp>
+    </p:spTree>
+  </p:cSld>
+  <p:clrMapOvr>
+    <a:masterClrMapping/>
+  </p:clrMapOvr>
+</p:sld>
+</file>
+
+<file path=ppt/slides/slide2.xml><?xml version="1.0" encoding="utf-8"?>
+<p:sld xmlns:a="http://schemas.openxmlformats.org/drawingml/2006/main" xmlns:r="http://schemas.openxmlformats.org/officeDocument/2006/relationships" xmlns:p="http://schemas.openxmlformats.org/presentationml/2006/main">
+  <p:cSld name="Slide 2">
+    <p:bg>
+      <p:bgPr>
+        <a:solidFill>
+          <a:srgbClr val="FFFFFF"/>
+        </a:solidFill>
+      </p:bgPr>
+    </p:bg>
+    <p:spTree>
+      <p:nvGrpSpPr>
+        <p:cNvPr id="1" name=""/>
+        <p:cNvGrpSpPr/>
+        <p:nvPr/>
+      </p:nvGrpSpPr>
+      <p:grpSpPr>
+        <a:xfrm>
+          <a:off x="0" y="0"/>
+          <a:ext cx="0" cy="0"/>
+          <a:chOff x="0" y="0"/>
+          <a:chExt cx="0" cy="0"/>
+        </a:xfrm>
+      </p:grpSpPr>
+      <p:sp>
+        <p:nvSpPr>
+          <p:cNvPr id="2" name="Shape 0"/>
+          <p:cNvSpPr/>
+          <p:nvPr/>
+        </p:nvSpPr>
+        <p:spPr>
+          <a:xfrm>
             <a:off x="3196082" y="495300"/>
             <a:ext cx="3982974" cy="0"/>
           </a:xfrm>
@@ -1678,7 +4904,7 @@
                   <a:srgbClr val="101D42"/>
                 </a:solidFill>
                 <a:latin typeface="Noto Serif KR Black" pitchFamily="34" charset="0"/>
-                <a:ea typeface="Noto Serif KR Black" pitchFamily="34" charset="-127"/>
+                <a:ea typeface="Noto Serif KR Black" pitchFamily="34" charset="-122"/>
                 <a:cs typeface="Noto Serif KR Black" pitchFamily="34" charset="-120"/>
               </a:rPr>
               <a:t>현장 초등교사가 드리는 제안</a:t>
@@ -1720,7 +4946,7 @@
                   <a:srgbClr val="101D42"/>
                 </a:solidFill>
                 <a:latin typeface="Noto Serif KR Black" pitchFamily="34" charset="0"/>
-                <a:ea typeface="Noto Serif KR Black" pitchFamily="34" charset="-127"/>
+                <a:ea typeface="Noto Serif KR Black" pitchFamily="34" charset="-122"/>
                 <a:cs typeface="Noto Serif KR Black" pitchFamily="34" charset="-120"/>
               </a:rPr>
               <a:t>스스로 생각할 기회를</a:t>
@@ -1740,7 +4966,7 @@
                   <a:srgbClr val="15543C"/>
                 </a:solidFill>
                 <a:latin typeface="Noto Serif KR Black" pitchFamily="34" charset="0"/>
-                <a:ea typeface="Noto Serif KR Black" pitchFamily="34" charset="-127"/>
+                <a:ea typeface="Noto Serif KR Black" pitchFamily="34" charset="-122"/>
                 <a:cs typeface="Noto Serif KR Black" pitchFamily="34" charset="-120"/>
               </a:rPr>
               <a:t>잃을까 두렵습니다.</a:t>
@@ -1782,7 +5008,7 @@
                   <a:srgbClr val="15543C"/>
                 </a:solidFill>
                 <a:latin typeface="Noto Serif KR Black" pitchFamily="34" charset="0"/>
-                <a:ea typeface="Noto Serif KR Black" pitchFamily="34" charset="-127"/>
+                <a:ea typeface="Noto Serif KR Black" pitchFamily="34" charset="-122"/>
                 <a:cs typeface="Noto Serif KR Black" pitchFamily="34" charset="-120"/>
               </a:rPr>
               <a:t>교실에서 마주한 걱정</a:t>
@@ -1824,10 +5050,258 @@
                   <a:srgbClr val="101D42"/>
                 </a:solidFill>
                 <a:latin typeface="Noto Sans KR" pitchFamily="34" charset="0"/>
-                <a:ea typeface="Noto Sans KR" pitchFamily="34" charset="-127"/>
-                <a:cs typeface="Noto Sans KR" pitchFamily="34" charset="-120"/>
-              </a:rPr>
-              <a:t>학교 현장에서 아이들이 </a:t>
+                <a:ea typeface="Noto Sans KR" pitchFamily="34" charset="-122"/>
+                <a:cs typeface="Noto Sans KR" pitchFamily="34" charset="-120"/>
+              </a:rPr>
+              <a:t>GPT가 요약과 답안을 대신 만드는 동안 학생은 무엇을 직접 읽고 생각할까요.</a:t>
+            </a:r>
+            <a:endParaRPr lang="en-US" sz="1800" dirty="0"/>
+          </a:p>
+          <a:p>
+            <a:pPr algn="l" indent="0" marL="0">
+              <a:lnSpc>
+                <a:spcPts val="2600"/>
+              </a:lnSpc>
+              <a:buNone/>
+            </a:pPr>
+            <a:r>
+              <a:rPr lang="ko-KR" altLang="en-US" sz="1800" dirty="0">
+                <a:solidFill>
+                  <a:srgbClr val="101D42"/>
+                </a:solidFill>
+                <a:latin typeface="Noto Sans KR" pitchFamily="34" charset="0"/>
+                <a:ea typeface="Noto Sans KR" pitchFamily="34" charset="-122"/>
+                <a:cs typeface="Noto Sans KR" pitchFamily="34" charset="-120"/>
+              </a:rPr>
+              <a:t>글을 따라 읽고, 근거를 찾고, 자기 말로 정리하는 시간을</a:t>
+            </a:r>
+            <a:endParaRPr lang="en-US" sz="1800" dirty="0"/>
+          </a:p>
+          <a:p>
+            <a:pPr algn="l" indent="0" marL="0">
+              <a:lnSpc>
+                <a:spcPts val="2600"/>
+              </a:lnSpc>
+              <a:buNone/>
+            </a:pPr>
+            <a:r>
+              <a:rPr lang="ko-KR" altLang="en-US" sz="1800" dirty="0">
+                <a:solidFill>
+                  <a:srgbClr val="101D42"/>
+                </a:solidFill>
+                <a:latin typeface="Noto Sans KR" pitchFamily="34" charset="0"/>
+                <a:ea typeface="Noto Sans KR" pitchFamily="34" charset="-122"/>
+                <a:cs typeface="Noto Sans KR" pitchFamily="34" charset="-120"/>
+              </a:rPr>
+              <a:t>교실에서 지키려는 고민으로 부기를 만들었습니다.</a:t>
+            </a:r>
+            <a:endParaRPr lang="en-US" sz="1800" dirty="0"/>
+          </a:p>
+        </p:txBody>
+      </p:sp>
+      <p:sp>
+        <p:nvSpPr>
+          <p:cNvPr id="24" name="txt-2-4"/>
+          <p:cNvSpPr txBox="1"/>
+          <p:nvPr/>
+        </p:nvSpPr>
+        <p:spPr>
+          <a:xfrm>
+            <a:off x="863346" y="4424426"/>
+            <a:ext cx="6174994" cy="418465"/>
+          </a:xfrm>
+          <a:prstGeom prst="rect">
+            <a:avLst/>
+          </a:prstGeom>
+          <a:noFill/>
+          <a:ln/>
+        </p:spPr>
+        <p:txBody>
+          <a:bodyPr wrap="square" lIns="0" tIns="0" rIns="0" bIns="0" rtlCol="0" anchor="t"/>
+          <a:lstStyle/>
+          <a:p>
+            <a:pPr algn="l" indent="0" marL="0">
+              <a:lnSpc>
+                <a:spcPts val="2535"/>
+              </a:lnSpc>
+              <a:buNone/>
+            </a:pPr>
+            <a:r>
+              <a:rPr lang="ko-KR" altLang="en-US" sz="1950" dirty="0">
+                <a:solidFill>
+                  <a:srgbClr val="15543C"/>
+                </a:solidFill>
+                <a:latin typeface="Noto Serif KR Black" pitchFamily="34" charset="0"/>
+                <a:ea typeface="Noto Serif KR Black" pitchFamily="34" charset="-122"/>
+                <a:cs typeface="Noto Serif KR Black" pitchFamily="34" charset="-120"/>
+              </a:rPr>
+              <a:t>정보가 많아도, 깊은 이해는 저절로 생기지 않습니다</a:t>
+            </a:r>
+            <a:endParaRPr lang="en-US" sz="1950" dirty="0"/>
+          </a:p>
+        </p:txBody>
+      </p:sp>
+      <p:sp>
+        <p:nvSpPr>
+          <p:cNvPr id="25" name="txt-2-5"/>
+          <p:cNvSpPr txBox="1"/>
+          <p:nvPr/>
+        </p:nvSpPr>
+        <p:spPr>
+          <a:xfrm>
+            <a:off x="381000" y="4945253"/>
+            <a:ext cx="7140956" cy="1089660"/>
+          </a:xfrm>
+          <a:prstGeom prst="rect">
+            <a:avLst/>
+          </a:prstGeom>
+          <a:noFill/>
+          <a:ln/>
+        </p:spPr>
+        <p:txBody>
+          <a:bodyPr wrap="square" lIns="0" tIns="0" rIns="0" bIns="0" rtlCol="0" anchor="t"/>
+          <a:lstStyle/>
+          <a:p>
+            <a:pPr algn="l" indent="0" marL="0">
+              <a:lnSpc>
+                <a:spcPts val="2600"/>
+              </a:lnSpc>
+              <a:buNone/>
+            </a:pPr>
+            <a:r>
+              <a:rPr lang="ko-KR" altLang="en-US" sz="1800" b="1" dirty="0">
+                <a:solidFill>
+                  <a:srgbClr val="101D42"/>
+                </a:solidFill>
+                <a:latin typeface="Noto Sans KR" pitchFamily="34" charset="0"/>
+                <a:ea typeface="Noto Sans KR" pitchFamily="34" charset="-122"/>
+                <a:cs typeface="Noto Sans KR" pitchFamily="34" charset="-120"/>
+              </a:rPr>
+              <a:t>생각할 일을 바깥 도구에 맡기는 현상을 인지 외주화라고 부릅니다.</a:t>
+            </a:r>
+            <a:endParaRPr lang="en-US" sz="1800" dirty="0"/>
+          </a:p>
+          <a:p>
+            <a:pPr algn="l" indent="0" marL="0">
+              <a:lnSpc>
+                <a:spcPts val="2600"/>
+              </a:lnSpc>
+              <a:buNone/>
+            </a:pPr>
+            <a:r>
+              <a:rPr lang="ko-KR" altLang="en-US" sz="1800" b="1" dirty="0">
+                <a:solidFill>
+                  <a:srgbClr val="101D42"/>
+                </a:solidFill>
+                <a:latin typeface="Noto Sans KR" pitchFamily="34" charset="0"/>
+                <a:ea typeface="Noto Sans KR" pitchFamily="34" charset="-122"/>
+                <a:cs typeface="Noto Sans KR" pitchFamily="34" charset="-120"/>
+              </a:rPr>
+              <a:t>AI의 답을 이해하고 검토하려면 학생 안에 낱말과 배경지식이</a:t>
+            </a:r>
+            <a:endParaRPr lang="en-US" sz="1800" dirty="0"/>
+          </a:p>
+          <a:p>
+            <a:pPr algn="l" indent="0" marL="0">
+              <a:lnSpc>
+                <a:spcPts val="2600"/>
+              </a:lnSpc>
+              <a:buNone/>
+            </a:pPr>
+            <a:r>
+              <a:rPr lang="ko-KR" altLang="en-US" sz="1800" b="1" dirty="0">
+                <a:solidFill>
+                  <a:srgbClr val="101D42"/>
+                </a:solidFill>
+                <a:latin typeface="Noto Sans KR" pitchFamily="34" charset="0"/>
+                <a:ea typeface="Noto Sans KR" pitchFamily="34" charset="-122"/>
+                <a:cs typeface="Noto Sans KR" pitchFamily="34" charset="-120"/>
+              </a:rPr>
+              <a:t>쌓여 있어야 합니다. 독서수업은 그 바탕을 마련하는 시간입니다.</a:t>
+            </a:r>
+            <a:endParaRPr lang="en-US" sz="1800" dirty="0"/>
+          </a:p>
+        </p:txBody>
+      </p:sp>
+      <p:sp>
+        <p:nvSpPr>
+          <p:cNvPr id="26" name="txt-2-6"/>
+          <p:cNvSpPr txBox="1"/>
+          <p:nvPr/>
+        </p:nvSpPr>
+        <p:spPr>
+          <a:xfrm>
+            <a:off x="863346" y="6341999"/>
+            <a:ext cx="3579368" cy="418465"/>
+          </a:xfrm>
+          <a:prstGeom prst="rect">
+            <a:avLst/>
+          </a:prstGeom>
+          <a:noFill/>
+          <a:ln/>
+        </p:spPr>
+        <p:txBody>
+          <a:bodyPr wrap="square" lIns="0" tIns="0" rIns="0" bIns="0" rtlCol="0" anchor="t"/>
+          <a:lstStyle/>
+          <a:p>
+            <a:pPr algn="l" indent="0" marL="0">
+              <a:lnSpc>
+                <a:spcPts val="2535"/>
+              </a:lnSpc>
+              <a:buNone/>
+            </a:pPr>
+            <a:r>
+              <a:rPr lang="ko-KR" altLang="en-US" sz="1950" dirty="0">
+                <a:solidFill>
+                  <a:srgbClr val="15543C"/>
+                </a:solidFill>
+                <a:latin typeface="Noto Serif KR Black" pitchFamily="34" charset="0"/>
+                <a:ea typeface="Noto Serif KR Black" pitchFamily="34" charset="-122"/>
+                <a:cs typeface="Noto Serif KR Black" pitchFamily="34" charset="-120"/>
+              </a:rPr>
+              <a:t>학교가 먼저 고민해야 할 질문</a:t>
+            </a:r>
+            <a:endParaRPr lang="en-US" sz="1950" dirty="0"/>
+          </a:p>
+        </p:txBody>
+      </p:sp>
+      <p:sp>
+        <p:nvSpPr>
+          <p:cNvPr id="27" name="txt-2-7"/>
+          <p:cNvSpPr txBox="1"/>
+          <p:nvPr/>
+        </p:nvSpPr>
+        <p:spPr>
+          <a:xfrm>
+            <a:off x="381000" y="6837045"/>
+            <a:ext cx="7140956" cy="759460"/>
+          </a:xfrm>
+          <a:prstGeom prst="rect">
+            <a:avLst/>
+          </a:prstGeom>
+          <a:noFill/>
+          <a:ln/>
+        </p:spPr>
+        <p:txBody>
+          <a:bodyPr wrap="square" lIns="0" tIns="0" rIns="0" bIns="0" rtlCol="0" anchor="t"/>
+          <a:lstStyle/>
+          <a:p>
+            <a:pPr algn="l" indent="0" marL="0">
+              <a:lnSpc>
+                <a:spcPts val="2600"/>
+              </a:lnSpc>
+              <a:buNone/>
+            </a:pPr>
+            <a:r>
+              <a:rPr lang="ko-KR" altLang="en-US" sz="1800" dirty="0">
+                <a:solidFill>
+                  <a:srgbClr val="101D42"/>
+                </a:solidFill>
+                <a:latin typeface="Noto Sans KR" pitchFamily="34" charset="0"/>
+                <a:ea typeface="Noto Sans KR" pitchFamily="34" charset="-122"/>
+                <a:cs typeface="Noto Sans KR" pitchFamily="34" charset="-120"/>
+              </a:rPr>
+              <a:t>학생은 </a:t>
             </a:r>
             <a:pPr algn="l" indent="0" marL="0">
               <a:lnSpc>
@@ -1844,10 +5318,10 @@
                   <a:srgbClr val="FFF0AD"/>
                 </a:highlight>
                 <a:latin typeface="Noto Sans KR" pitchFamily="34" charset="0"/>
-                <a:ea typeface="Noto Sans KR" pitchFamily="34" charset="-127"/>
-                <a:cs typeface="Noto Sans KR" pitchFamily="34" charset="-120"/>
-              </a:rPr>
-              <a:t>책을 충분히 읽지 않는 현실</a:t>
+                <a:ea typeface="Noto Sans KR" pitchFamily="34" charset="-122"/>
+                <a:cs typeface="Noto Sans KR" pitchFamily="34" charset="-120"/>
+              </a:rPr>
+              <a:t>무엇을 알고</a:t>
             </a:r>
             <a:pPr algn="l" indent="0" marL="0">
               <a:lnSpc>
@@ -1861,30 +5335,10 @@
                   <a:srgbClr val="101D42"/>
                 </a:solidFill>
                 <a:latin typeface="Noto Sans KR" pitchFamily="34" charset="0"/>
-                <a:ea typeface="Noto Sans KR" pitchFamily="34" charset="-127"/>
-                <a:cs typeface="Noto Sans KR" pitchFamily="34" charset="-120"/>
-              </a:rPr>
-              <a:t>을 마주했습니다.</a:t>
-            </a:r>
-            <a:endParaRPr lang="en-US" sz="1800" dirty="0"/>
-          </a:p>
-          <a:p>
-            <a:pPr algn="l" indent="0" marL="0">
-              <a:lnSpc>
-                <a:spcPts val="2600"/>
-              </a:lnSpc>
-              <a:buNone/>
-            </a:pPr>
-            <a:r>
-              <a:rPr lang="ko-KR" altLang="en-US" sz="1800" dirty="0">
-                <a:solidFill>
-                  <a:srgbClr val="101D42"/>
-                </a:solidFill>
-                <a:latin typeface="Noto Sans KR" pitchFamily="34" charset="0"/>
-                <a:ea typeface="Noto Sans KR" pitchFamily="34" charset="-127"/>
-                <a:cs typeface="Noto Sans KR" pitchFamily="34" charset="-120"/>
-              </a:rPr>
-              <a:t>다른 사람의 생각을 차분히 따라 읽고, </a:t>
+                <a:ea typeface="Noto Sans KR" pitchFamily="34" charset="-122"/>
+                <a:cs typeface="Noto Sans KR" pitchFamily="34" charset="-120"/>
+              </a:rPr>
+              <a:t>, </a:t>
             </a:r>
             <a:pPr algn="l" indent="0" marL="0">
               <a:lnSpc>
@@ -1901,10 +5355,10 @@
                   <a:srgbClr val="FFF0AD"/>
                 </a:highlight>
                 <a:latin typeface="Noto Sans KR" pitchFamily="34" charset="0"/>
-                <a:ea typeface="Noto Sans KR" pitchFamily="34" charset="-127"/>
-                <a:cs typeface="Noto Sans KR" pitchFamily="34" charset="-120"/>
-              </a:rPr>
-              <a:t>자기 생각을 만들어 볼 기회</a:t>
+                <a:ea typeface="Noto Sans KR" pitchFamily="34" charset="-122"/>
+                <a:cs typeface="Noto Sans KR" pitchFamily="34" charset="-120"/>
+              </a:rPr>
+              <a:t>어떤 경험을 쌓고</a:t>
             </a:r>
             <a:pPr algn="l" indent="0" marL="0">
               <a:lnSpc>
@@ -1918,10 +5372,47 @@
                   <a:srgbClr val="101D42"/>
                 </a:solidFill>
                 <a:latin typeface="Noto Sans KR" pitchFamily="34" charset="0"/>
-                <a:ea typeface="Noto Sans KR" pitchFamily="34" charset="-127"/>
-                <a:cs typeface="Noto Sans KR" pitchFamily="34" charset="-120"/>
-              </a:rPr>
-              <a:t>마저</a:t>
+                <a:ea typeface="Noto Sans KR" pitchFamily="34" charset="-122"/>
+                <a:cs typeface="Noto Sans KR" pitchFamily="34" charset="-120"/>
+              </a:rPr>
+              <a:t>, </a:t>
+            </a:r>
+            <a:pPr algn="l" indent="0" marL="0">
+              <a:lnSpc>
+                <a:spcPts val="2600"/>
+              </a:lnSpc>
+              <a:buNone/>
+            </a:pPr>
+            <a:r>
+              <a:rPr lang="ko-KR" altLang="en-US" sz="1800" b="1" dirty="0">
+                <a:solidFill>
+                  <a:srgbClr val="101D42"/>
+                </a:solidFill>
+                <a:highlight>
+                  <a:srgbClr val="FFF0AD"/>
+                </a:highlight>
+                <a:latin typeface="Noto Sans KR" pitchFamily="34" charset="0"/>
+                <a:ea typeface="Noto Sans KR" pitchFamily="34" charset="-122"/>
+                <a:cs typeface="Noto Sans KR" pitchFamily="34" charset="-120"/>
+              </a:rPr>
+              <a:t>어떻게 생각하는 사람</a:t>
+            </a:r>
+            <a:pPr algn="l" indent="0" marL="0">
+              <a:lnSpc>
+                <a:spcPts val="2600"/>
+              </a:lnSpc>
+              <a:buNone/>
+            </a:pPr>
+            <a:r>
+              <a:rPr lang="ko-KR" altLang="en-US" sz="1800" dirty="0">
+                <a:solidFill>
+                  <a:srgbClr val="101D42"/>
+                </a:solidFill>
+                <a:latin typeface="Noto Sans KR" pitchFamily="34" charset="0"/>
+                <a:ea typeface="Noto Sans KR" pitchFamily="34" charset="-122"/>
+                <a:cs typeface="Noto Sans KR" pitchFamily="34" charset="-120"/>
+              </a:rPr>
+              <a:t>으로 자라야</a:t>
             </a:r>
             <a:endParaRPr lang="en-US" sz="1800" dirty="0"/>
           </a:p>
@@ -1938,10 +5429,10 @@
                   <a:srgbClr val="101D42"/>
                 </a:solidFill>
                 <a:latin typeface="Noto Sans KR" pitchFamily="34" charset="0"/>
-                <a:ea typeface="Noto Sans KR" pitchFamily="34" charset="-127"/>
-                <a:cs typeface="Noto Sans KR" pitchFamily="34" charset="-120"/>
-              </a:rPr>
-              <a:t>잃은 채 자랄까 두렵습니다.</a:t>
+                <a:ea typeface="Noto Sans KR" pitchFamily="34" charset="-122"/>
+                <a:cs typeface="Noto Sans KR" pitchFamily="34" charset="-120"/>
+              </a:rPr>
+              <a:t>할까요. 디지털 도구를 도입하는 일에도 이 질문이 먼저 놓여야 합니다.</a:t>
             </a:r>
             <a:endParaRPr lang="en-US" sz="1800" dirty="0"/>
           </a:p>
@@ -1949,14 +5440,14 @@
       </p:sp>
       <p:sp>
         <p:nvSpPr>
-          <p:cNvPr id="24" name="txt-2-4"/>
+          <p:cNvPr id="28" name="txt-2-8"/>
           <p:cNvSpPr txBox="1"/>
           <p:nvPr/>
         </p:nvSpPr>
         <p:spPr>
           <a:xfrm>
-            <a:off x="863346" y="4424426"/>
-            <a:ext cx="6174994" cy="418465"/>
+            <a:off x="381000" y="7637145"/>
+            <a:ext cx="6979285" cy="759460"/>
           </a:xfrm>
           <a:prstGeom prst="rect">
             <a:avLst/>
@@ -1970,35 +5461,112 @@
           <a:p>
             <a:pPr algn="l" indent="0" marL="0">
               <a:lnSpc>
-                <a:spcPts val="2535"/>
-              </a:lnSpc>
-              <a:buNone/>
-            </a:pPr>
-            <a:r>
-              <a:rPr lang="ko-KR" altLang="en-US" sz="1950" dirty="0">
-                <a:solidFill>
-                  <a:srgbClr val="15543C"/>
-                </a:solidFill>
-                <a:latin typeface="Noto Serif KR Black" pitchFamily="34" charset="0"/>
-                <a:ea typeface="Noto Serif KR Black" pitchFamily="34" charset="-127"/>
-                <a:cs typeface="Noto Serif KR Black" pitchFamily="34" charset="-120"/>
-              </a:rPr>
-              <a:t>정보가 많아도, 깊은 이해는 저절로 생기지 않습니다</a:t>
-            </a:r>
-            <a:endParaRPr lang="en-US" sz="1950" dirty="0"/>
+                <a:spcPts val="2600"/>
+              </a:lnSpc>
+              <a:buNone/>
+            </a:pPr>
+            <a:r>
+              <a:rPr lang="ko-KR" altLang="en-US" sz="1800" b="1" dirty="0">
+                <a:solidFill>
+                  <a:srgbClr val="101D42"/>
+                </a:solidFill>
+                <a:highlight>
+                  <a:srgbClr val="FFF0AD"/>
+                </a:highlight>
+                <a:latin typeface="Noto Sans KR" pitchFamily="34" charset="0"/>
+                <a:ea typeface="Noto Sans KR" pitchFamily="34" charset="-122"/>
+                <a:cs typeface="Noto Sans KR" pitchFamily="34" charset="-120"/>
+              </a:rPr>
+              <a:t>스스로 읽고 이해하며</a:t>
+            </a:r>
+            <a:pPr algn="l" indent="0" marL="0">
+              <a:lnSpc>
+                <a:spcPts val="2600"/>
+              </a:lnSpc>
+              <a:buNone/>
+            </a:pPr>
+            <a:r>
+              <a:rPr lang="ko-KR" altLang="en-US" sz="1800" dirty="0">
+                <a:solidFill>
+                  <a:srgbClr val="101D42"/>
+                </a:solidFill>
+                <a:latin typeface="Noto Sans KR" pitchFamily="34" charset="0"/>
+                <a:ea typeface="Noto Sans KR" pitchFamily="34" charset="-122"/>
+                <a:cs typeface="Noto Sans KR" pitchFamily="34" charset="-120"/>
+              </a:rPr>
+              <a:t>, </a:t>
+            </a:r>
+            <a:pPr algn="l" indent="0" marL="0">
+              <a:lnSpc>
+                <a:spcPts val="2600"/>
+              </a:lnSpc>
+              <a:buNone/>
+            </a:pPr>
+            <a:r>
+              <a:rPr lang="ko-KR" altLang="en-US" sz="1800" b="1" dirty="0">
+                <a:solidFill>
+                  <a:srgbClr val="101D42"/>
+                </a:solidFill>
+                <a:highlight>
+                  <a:srgbClr val="FFF0AD"/>
+                </a:highlight>
+                <a:latin typeface="Noto Sans KR" pitchFamily="34" charset="0"/>
+                <a:ea typeface="Noto Sans KR" pitchFamily="34" charset="-122"/>
+                <a:cs typeface="Noto Sans KR" pitchFamily="34" charset="-120"/>
+              </a:rPr>
+              <a:t>근거를 들어 말하는 힘</a:t>
+            </a:r>
+            <a:pPr algn="l" indent="0" marL="0">
+              <a:lnSpc>
+                <a:spcPts val="2600"/>
+              </a:lnSpc>
+              <a:buNone/>
+            </a:pPr>
+            <a:r>
+              <a:rPr lang="ko-KR" altLang="en-US" sz="1800" dirty="0">
+                <a:solidFill>
+                  <a:srgbClr val="101D42"/>
+                </a:solidFill>
+                <a:latin typeface="Noto Sans KR" pitchFamily="34" charset="0"/>
+                <a:ea typeface="Noto Sans KR" pitchFamily="34" charset="-122"/>
+                <a:cs typeface="Noto Sans KR" pitchFamily="34" charset="-120"/>
+              </a:rPr>
+              <a:t>을 꾸준히 길러 주어야</a:t>
+            </a:r>
+            <a:endParaRPr lang="en-US" sz="1800" dirty="0"/>
+          </a:p>
+          <a:p>
+            <a:pPr algn="l" indent="0" marL="0">
+              <a:lnSpc>
+                <a:spcPts val="2600"/>
+              </a:lnSpc>
+              <a:buNone/>
+            </a:pPr>
+            <a:r>
+              <a:rPr lang="ko-KR" altLang="en-US" sz="1800" dirty="0">
+                <a:solidFill>
+                  <a:srgbClr val="101D42"/>
+                </a:solidFill>
+                <a:latin typeface="Noto Sans KR" pitchFamily="34" charset="0"/>
+                <a:ea typeface="Noto Sans KR" pitchFamily="34" charset="-122"/>
+                <a:cs typeface="Noto Sans KR" pitchFamily="34" charset="-120"/>
+              </a:rPr>
+              <a:t>합니다. 이 절실함에서 부기가 시작됐습니다.</a:t>
+            </a:r>
+            <a:endParaRPr lang="en-US" sz="1800" dirty="0"/>
           </a:p>
         </p:txBody>
       </p:sp>
       <p:sp>
         <p:nvSpPr>
-          <p:cNvPr id="25" name="txt-2-5"/>
+          <p:cNvPr id="29" name="txt-2-9"/>
           <p:cNvSpPr txBox="1"/>
           <p:nvPr/>
         </p:nvSpPr>
         <p:spPr>
           <a:xfrm>
-            <a:off x="381000" y="4945253"/>
-            <a:ext cx="7140956" cy="1089660"/>
+            <a:off x="963295" y="9322562"/>
+            <a:ext cx="5632323" cy="715645"/>
           </a:xfrm>
           <a:prstGeom prst="rect">
             <a:avLst/>
@@ -2010,171 +5578,57 @@
           <a:bodyPr wrap="square" lIns="0" tIns="0" rIns="0" bIns="0" rtlCol="0" anchor="t"/>
           <a:lstStyle/>
           <a:p>
-            <a:pPr algn="l" indent="0" marL="0">
-              <a:lnSpc>
-                <a:spcPts val="2600"/>
-              </a:lnSpc>
-              <a:buNone/>
-            </a:pPr>
-            <a:r>
-              <a:rPr lang="ko-KR" altLang="en-US" sz="1800" b="1" dirty="0">
-                <a:solidFill>
-                  <a:srgbClr val="101D42"/>
-                </a:solidFill>
-                <a:highlight>
-                  <a:srgbClr val="FFF0AD"/>
-                </a:highlight>
-                <a:latin typeface="Noto Sans KR" pitchFamily="34" charset="0"/>
-                <a:ea typeface="Noto Sans KR" pitchFamily="34" charset="-127"/>
-                <a:cs typeface="Noto Sans KR" pitchFamily="34" charset="-120"/>
-              </a:rPr>
-              <a:t>문장의 뜻</a:t>
-            </a:r>
-            <a:pPr algn="l" indent="0" marL="0">
-              <a:lnSpc>
-                <a:spcPts val="2600"/>
-              </a:lnSpc>
-              <a:buNone/>
-            </a:pPr>
-            <a:r>
-              <a:rPr lang="ko-KR" altLang="en-US" sz="1800" dirty="0">
-                <a:solidFill>
-                  <a:srgbClr val="101D42"/>
-                </a:solidFill>
-                <a:latin typeface="Noto Sans KR" pitchFamily="34" charset="0"/>
-                <a:ea typeface="Noto Sans KR" pitchFamily="34" charset="-127"/>
-                <a:cs typeface="Noto Sans KR" pitchFamily="34" charset="-120"/>
-              </a:rPr>
-              <a:t>을 헤아리고, </a:t>
-            </a:r>
-            <a:pPr algn="l" indent="0" marL="0">
-              <a:lnSpc>
-                <a:spcPts val="2600"/>
-              </a:lnSpc>
-              <a:buNone/>
-            </a:pPr>
-            <a:r>
-              <a:rPr lang="ko-KR" altLang="en-US" sz="1800" b="1" dirty="0">
-                <a:solidFill>
-                  <a:srgbClr val="101D42"/>
-                </a:solidFill>
-                <a:highlight>
-                  <a:srgbClr val="FFF0AD"/>
-                </a:highlight>
-                <a:latin typeface="Noto Sans KR" pitchFamily="34" charset="0"/>
-                <a:ea typeface="Noto Sans KR" pitchFamily="34" charset="-127"/>
-                <a:cs typeface="Noto Sans KR" pitchFamily="34" charset="-120"/>
-              </a:rPr>
-              <a:t>앞뒤 내용을 연결</a:t>
-            </a:r>
-            <a:pPr algn="l" indent="0" marL="0">
-              <a:lnSpc>
-                <a:spcPts val="2600"/>
-              </a:lnSpc>
-              <a:buNone/>
-            </a:pPr>
-            <a:r>
-              <a:rPr lang="ko-KR" altLang="en-US" sz="1800" dirty="0">
-                <a:solidFill>
-                  <a:srgbClr val="101D42"/>
-                </a:solidFill>
-                <a:latin typeface="Noto Sans KR" pitchFamily="34" charset="0"/>
-                <a:ea typeface="Noto Sans KR" pitchFamily="34" charset="-127"/>
-                <a:cs typeface="Noto Sans KR" pitchFamily="34" charset="-120"/>
-              </a:rPr>
-              <a:t>하고, </a:t>
-            </a:r>
-            <a:pPr algn="l" indent="0" marL="0">
-              <a:lnSpc>
-                <a:spcPts val="2600"/>
-              </a:lnSpc>
-              <a:buNone/>
-            </a:pPr>
-            <a:r>
-              <a:rPr lang="ko-KR" altLang="en-US" sz="1800" b="1" dirty="0">
-                <a:solidFill>
-                  <a:srgbClr val="101D42"/>
-                </a:solidFill>
-                <a:highlight>
-                  <a:srgbClr val="FFF0AD"/>
-                </a:highlight>
-                <a:latin typeface="Noto Sans KR" pitchFamily="34" charset="0"/>
-                <a:ea typeface="Noto Sans KR" pitchFamily="34" charset="-127"/>
-                <a:cs typeface="Noto Sans KR" pitchFamily="34" charset="-120"/>
-              </a:rPr>
-              <a:t>오래 생각하는 시간</a:t>
-            </a:r>
-            <a:pPr algn="l" indent="0" marL="0">
-              <a:lnSpc>
-                <a:spcPts val="2600"/>
-              </a:lnSpc>
-              <a:buNone/>
-            </a:pPr>
-            <a:r>
-              <a:rPr lang="ko-KR" altLang="en-US" sz="1800" dirty="0">
-                <a:solidFill>
-                  <a:srgbClr val="101D42"/>
-                </a:solidFill>
-                <a:latin typeface="Noto Sans KR" pitchFamily="34" charset="0"/>
-                <a:ea typeface="Noto Sans KR" pitchFamily="34" charset="-127"/>
-                <a:cs typeface="Noto Sans KR" pitchFamily="34" charset="-120"/>
-              </a:rPr>
-              <a:t>은 따로</a:t>
-            </a:r>
-            <a:endParaRPr lang="en-US" sz="1800" dirty="0"/>
-          </a:p>
-          <a:p>
-            <a:pPr algn="l" indent="0" marL="0">
-              <a:lnSpc>
-                <a:spcPts val="2600"/>
-              </a:lnSpc>
-              <a:buNone/>
-            </a:pPr>
-            <a:r>
-              <a:rPr lang="ko-KR" altLang="en-US" sz="1800" dirty="0">
-                <a:solidFill>
-                  <a:srgbClr val="101D42"/>
-                </a:solidFill>
-                <a:latin typeface="Noto Sans KR" pitchFamily="34" charset="0"/>
-                <a:ea typeface="Noto Sans KR" pitchFamily="34" charset="-127"/>
-                <a:cs typeface="Noto Sans KR" pitchFamily="34" charset="-120"/>
-              </a:rPr>
-              <a:t>필요합니다. 짧은 영상과 빠른 답에 익숙해지는 동안, 학생 안에 무엇이</a:t>
-            </a:r>
-            <a:endParaRPr lang="en-US" sz="1800" dirty="0"/>
-          </a:p>
-          <a:p>
-            <a:pPr algn="l" indent="0" marL="0">
-              <a:lnSpc>
-                <a:spcPts val="2600"/>
-              </a:lnSpc>
-              <a:buNone/>
-            </a:pPr>
-            <a:r>
-              <a:rPr lang="ko-KR" altLang="en-US" sz="1800" dirty="0">
-                <a:solidFill>
-                  <a:srgbClr val="101D42"/>
-                </a:solidFill>
-                <a:latin typeface="Noto Sans KR" pitchFamily="34" charset="0"/>
-                <a:ea typeface="Noto Sans KR" pitchFamily="34" charset="-127"/>
-                <a:cs typeface="Noto Sans KR" pitchFamily="34" charset="-120"/>
-              </a:rPr>
-              <a:t>남고 있는지 묻고 싶습니다.</a:t>
-            </a:r>
-            <a:endParaRPr lang="en-US" sz="1800" dirty="0"/>
+            <a:pPr algn="ctr" indent="0" marL="0">
+              <a:lnSpc>
+                <a:spcPts val="2450"/>
+              </a:lnSpc>
+              <a:buNone/>
+            </a:pPr>
+            <a:r>
+              <a:rPr lang="ko-KR" altLang="en-US" sz="1750" dirty="0">
+                <a:solidFill>
+                  <a:srgbClr val="101D42"/>
+                </a:solidFill>
+                <a:latin typeface="Noto Serif KR Black" pitchFamily="34" charset="0"/>
+                <a:ea typeface="Noto Serif KR Black" pitchFamily="34" charset="-122"/>
+                <a:cs typeface="Noto Serif KR Black" pitchFamily="34" charset="-120"/>
+              </a:rPr>
+              <a:t>학생이 직접 읽고 묻고 정리한 생각은</a:t>
+            </a:r>
+            <a:endParaRPr lang="en-US" sz="1750" dirty="0"/>
+          </a:p>
+          <a:p>
+            <a:pPr algn="ctr" indent="0" marL="0">
+              <a:lnSpc>
+                <a:spcPts val="2450"/>
+              </a:lnSpc>
+              <a:buNone/>
+            </a:pPr>
+            <a:r>
+              <a:rPr lang="ko-KR" altLang="en-US" sz="1750" dirty="0">
+                <a:solidFill>
+                  <a:srgbClr val="101D42"/>
+                </a:solidFill>
+                <a:latin typeface="Noto Serif KR Black" pitchFamily="34" charset="0"/>
+                <a:ea typeface="Noto Serif KR Black" pitchFamily="34" charset="-122"/>
+                <a:cs typeface="Noto Serif KR Black" pitchFamily="34" charset="-120"/>
+              </a:rPr>
+              <a:t>다음 글을 이해하고 판단할 바탕이 됩니다.</a:t>
+            </a:r>
+            <a:endParaRPr lang="en-US" sz="1750" dirty="0"/>
           </a:p>
         </p:txBody>
       </p:sp>
       <p:sp>
         <p:nvSpPr>
-          <p:cNvPr id="26" name="txt-2-6"/>
+          <p:cNvPr id="30" name="txt-2-10"/>
           <p:cNvSpPr txBox="1"/>
           <p:nvPr/>
         </p:nvSpPr>
         <p:spPr>
           <a:xfrm>
-            <a:off x="863346" y="6341999"/>
-            <a:ext cx="3579368" cy="418465"/>
+            <a:off x="3504565" y="10362692"/>
+            <a:ext cx="424815" cy="214630"/>
           </a:xfrm>
           <a:prstGeom prst="rect">
             <a:avLst/>
@@ -2188,402 +5642,6 @@
           <a:p>
             <a:pPr algn="l" indent="0" marL="0">
               <a:lnSpc>
-                <a:spcPts val="2535"/>
-              </a:lnSpc>
-              <a:buNone/>
-            </a:pPr>
-            <a:r>
-              <a:rPr lang="ko-KR" altLang="en-US" sz="1950" dirty="0">
-                <a:solidFill>
-                  <a:srgbClr val="15543C"/>
-                </a:solidFill>
-                <a:latin typeface="Noto Serif KR Black" pitchFamily="34" charset="0"/>
-                <a:ea typeface="Noto Serif KR Black" pitchFamily="34" charset="-127"/>
-                <a:cs typeface="Noto Serif KR Black" pitchFamily="34" charset="-120"/>
-              </a:rPr>
-              <a:t>학교가 먼저 고민해야 할 질문</a:t>
-            </a:r>
-            <a:endParaRPr lang="en-US" sz="1950" dirty="0"/>
-          </a:p>
-        </p:txBody>
-      </p:sp>
-      <p:sp>
-        <p:nvSpPr>
-          <p:cNvPr id="27" name="txt-2-7"/>
-          <p:cNvSpPr txBox="1"/>
-          <p:nvPr/>
-        </p:nvSpPr>
-        <p:spPr>
-          <a:xfrm>
-            <a:off x="381000" y="6837045"/>
-            <a:ext cx="7140956" cy="759460"/>
-          </a:xfrm>
-          <a:prstGeom prst="rect">
-            <a:avLst/>
-          </a:prstGeom>
-          <a:noFill/>
-          <a:ln/>
-        </p:spPr>
-        <p:txBody>
-          <a:bodyPr wrap="square" lIns="0" tIns="0" rIns="0" bIns="0" rtlCol="0" anchor="t"/>
-          <a:lstStyle/>
-          <a:p>
-            <a:pPr algn="l" indent="0" marL="0">
-              <a:lnSpc>
-                <a:spcPts val="2600"/>
-              </a:lnSpc>
-              <a:buNone/>
-            </a:pPr>
-            <a:r>
-              <a:rPr lang="ko-KR" altLang="en-US" sz="1800" dirty="0">
-                <a:solidFill>
-                  <a:srgbClr val="101D42"/>
-                </a:solidFill>
-                <a:latin typeface="Noto Sans KR" pitchFamily="34" charset="0"/>
-                <a:ea typeface="Noto Sans KR" pitchFamily="34" charset="-127"/>
-                <a:cs typeface="Noto Sans KR" pitchFamily="34" charset="-120"/>
-              </a:rPr>
-              <a:t>학생은 </a:t>
-            </a:r>
-            <a:pPr algn="l" indent="0" marL="0">
-              <a:lnSpc>
-                <a:spcPts val="2600"/>
-              </a:lnSpc>
-              <a:buNone/>
-            </a:pPr>
-            <a:r>
-              <a:rPr lang="ko-KR" altLang="en-US" sz="1800" b="1" dirty="0">
-                <a:solidFill>
-                  <a:srgbClr val="101D42"/>
-                </a:solidFill>
-                <a:highlight>
-                  <a:srgbClr val="FFF0AD"/>
-                </a:highlight>
-                <a:latin typeface="Noto Sans KR" pitchFamily="34" charset="0"/>
-                <a:ea typeface="Noto Sans KR" pitchFamily="34" charset="-127"/>
-                <a:cs typeface="Noto Sans KR" pitchFamily="34" charset="-120"/>
-              </a:rPr>
-              <a:t>무엇을 알고</a:t>
-            </a:r>
-            <a:pPr algn="l" indent="0" marL="0">
-              <a:lnSpc>
-                <a:spcPts val="2600"/>
-              </a:lnSpc>
-              <a:buNone/>
-            </a:pPr>
-            <a:r>
-              <a:rPr lang="ko-KR" altLang="en-US" sz="1800" dirty="0">
-                <a:solidFill>
-                  <a:srgbClr val="101D42"/>
-                </a:solidFill>
-                <a:latin typeface="Noto Sans KR" pitchFamily="34" charset="0"/>
-                <a:ea typeface="Noto Sans KR" pitchFamily="34" charset="-127"/>
-                <a:cs typeface="Noto Sans KR" pitchFamily="34" charset="-120"/>
-              </a:rPr>
-              <a:t>, </a:t>
-            </a:r>
-            <a:pPr algn="l" indent="0" marL="0">
-              <a:lnSpc>
-                <a:spcPts val="2600"/>
-              </a:lnSpc>
-              <a:buNone/>
-            </a:pPr>
-            <a:r>
-              <a:rPr lang="ko-KR" altLang="en-US" sz="1800" b="1" dirty="0">
-                <a:solidFill>
-                  <a:srgbClr val="101D42"/>
-                </a:solidFill>
-                <a:highlight>
-                  <a:srgbClr val="FFF0AD"/>
-                </a:highlight>
-                <a:latin typeface="Noto Sans KR" pitchFamily="34" charset="0"/>
-                <a:ea typeface="Noto Sans KR" pitchFamily="34" charset="-127"/>
-                <a:cs typeface="Noto Sans KR" pitchFamily="34" charset="-120"/>
-              </a:rPr>
-              <a:t>어떤 경험을 쌓고</a:t>
-            </a:r>
-            <a:pPr algn="l" indent="0" marL="0">
-              <a:lnSpc>
-                <a:spcPts val="2600"/>
-              </a:lnSpc>
-              <a:buNone/>
-            </a:pPr>
-            <a:r>
-              <a:rPr lang="ko-KR" altLang="en-US" sz="1800" dirty="0">
-                <a:solidFill>
-                  <a:srgbClr val="101D42"/>
-                </a:solidFill>
-                <a:latin typeface="Noto Sans KR" pitchFamily="34" charset="0"/>
-                <a:ea typeface="Noto Sans KR" pitchFamily="34" charset="-127"/>
-                <a:cs typeface="Noto Sans KR" pitchFamily="34" charset="-120"/>
-              </a:rPr>
-              <a:t>, </a:t>
-            </a:r>
-            <a:pPr algn="l" indent="0" marL="0">
-              <a:lnSpc>
-                <a:spcPts val="2600"/>
-              </a:lnSpc>
-              <a:buNone/>
-            </a:pPr>
-            <a:r>
-              <a:rPr lang="ko-KR" altLang="en-US" sz="1800" b="1" dirty="0">
-                <a:solidFill>
-                  <a:srgbClr val="101D42"/>
-                </a:solidFill>
-                <a:highlight>
-                  <a:srgbClr val="FFF0AD"/>
-                </a:highlight>
-                <a:latin typeface="Noto Sans KR" pitchFamily="34" charset="0"/>
-                <a:ea typeface="Noto Sans KR" pitchFamily="34" charset="-127"/>
-                <a:cs typeface="Noto Sans KR" pitchFamily="34" charset="-120"/>
-              </a:rPr>
-              <a:t>어떻게 생각하는 사람</a:t>
-            </a:r>
-            <a:pPr algn="l" indent="0" marL="0">
-              <a:lnSpc>
-                <a:spcPts val="2600"/>
-              </a:lnSpc>
-              <a:buNone/>
-            </a:pPr>
-            <a:r>
-              <a:rPr lang="ko-KR" altLang="en-US" sz="1800" dirty="0">
-                <a:solidFill>
-                  <a:srgbClr val="101D42"/>
-                </a:solidFill>
-                <a:latin typeface="Noto Sans KR" pitchFamily="34" charset="0"/>
-                <a:ea typeface="Noto Sans KR" pitchFamily="34" charset="-127"/>
-                <a:cs typeface="Noto Sans KR" pitchFamily="34" charset="-120"/>
-              </a:rPr>
-              <a:t>으로 자라야</a:t>
-            </a:r>
-            <a:endParaRPr lang="en-US" sz="1800" dirty="0"/>
-          </a:p>
-          <a:p>
-            <a:pPr algn="l" indent="0" marL="0">
-              <a:lnSpc>
-                <a:spcPts val="2600"/>
-              </a:lnSpc>
-              <a:buNone/>
-            </a:pPr>
-            <a:r>
-              <a:rPr lang="ko-KR" altLang="en-US" sz="1800" dirty="0">
-                <a:solidFill>
-                  <a:srgbClr val="101D42"/>
-                </a:solidFill>
-                <a:latin typeface="Noto Sans KR" pitchFamily="34" charset="0"/>
-                <a:ea typeface="Noto Sans KR" pitchFamily="34" charset="-127"/>
-                <a:cs typeface="Noto Sans KR" pitchFamily="34" charset="-120"/>
-              </a:rPr>
-              <a:t>할까요. 디지털 도구를 도입하는 일에도 이 질문이 먼저 놓여야 합니다.</a:t>
-            </a:r>
-            <a:endParaRPr lang="en-US" sz="1800" dirty="0"/>
-          </a:p>
-        </p:txBody>
-      </p:sp>
-      <p:sp>
-        <p:nvSpPr>
-          <p:cNvPr id="28" name="txt-2-8"/>
-          <p:cNvSpPr txBox="1"/>
-          <p:nvPr/>
-        </p:nvSpPr>
-        <p:spPr>
-          <a:xfrm>
-            <a:off x="381000" y="7637145"/>
-            <a:ext cx="6979285" cy="759460"/>
-          </a:xfrm>
-          <a:prstGeom prst="rect">
-            <a:avLst/>
-          </a:prstGeom>
-          <a:noFill/>
-          <a:ln/>
-        </p:spPr>
-        <p:txBody>
-          <a:bodyPr wrap="square" lIns="0" tIns="0" rIns="0" bIns="0" rtlCol="0" anchor="t"/>
-          <a:lstStyle/>
-          <a:p>
-            <a:pPr algn="l" indent="0" marL="0">
-              <a:lnSpc>
-                <a:spcPts val="2600"/>
-              </a:lnSpc>
-              <a:buNone/>
-            </a:pPr>
-            <a:r>
-              <a:rPr lang="ko-KR" altLang="en-US" sz="1800" b="1" dirty="0">
-                <a:solidFill>
-                  <a:srgbClr val="101D42"/>
-                </a:solidFill>
-                <a:highlight>
-                  <a:srgbClr val="FFF0AD"/>
-                </a:highlight>
-                <a:latin typeface="Noto Sans KR" pitchFamily="34" charset="0"/>
-                <a:ea typeface="Noto Sans KR" pitchFamily="34" charset="-127"/>
-                <a:cs typeface="Noto Sans KR" pitchFamily="34" charset="-120"/>
-              </a:rPr>
-              <a:t>스스로 읽고 이해하며</a:t>
-            </a:r>
-            <a:pPr algn="l" indent="0" marL="0">
-              <a:lnSpc>
-                <a:spcPts val="2600"/>
-              </a:lnSpc>
-              <a:buNone/>
-            </a:pPr>
-            <a:r>
-              <a:rPr lang="ko-KR" altLang="en-US" sz="1800" dirty="0">
-                <a:solidFill>
-                  <a:srgbClr val="101D42"/>
-                </a:solidFill>
-                <a:latin typeface="Noto Sans KR" pitchFamily="34" charset="0"/>
-                <a:ea typeface="Noto Sans KR" pitchFamily="34" charset="-127"/>
-                <a:cs typeface="Noto Sans KR" pitchFamily="34" charset="-120"/>
-              </a:rPr>
-              <a:t>, </a:t>
-            </a:r>
-            <a:pPr algn="l" indent="0" marL="0">
-              <a:lnSpc>
-                <a:spcPts val="2600"/>
-              </a:lnSpc>
-              <a:buNone/>
-            </a:pPr>
-            <a:r>
-              <a:rPr lang="ko-KR" altLang="en-US" sz="1800" b="1" dirty="0">
-                <a:solidFill>
-                  <a:srgbClr val="101D42"/>
-                </a:solidFill>
-                <a:highlight>
-                  <a:srgbClr val="FFF0AD"/>
-                </a:highlight>
-                <a:latin typeface="Noto Sans KR" pitchFamily="34" charset="0"/>
-                <a:ea typeface="Noto Sans KR" pitchFamily="34" charset="-127"/>
-                <a:cs typeface="Noto Sans KR" pitchFamily="34" charset="-120"/>
-              </a:rPr>
-              <a:t>근거를 들어 말하는 힘</a:t>
-            </a:r>
-            <a:pPr algn="l" indent="0" marL="0">
-              <a:lnSpc>
-                <a:spcPts val="2600"/>
-              </a:lnSpc>
-              <a:buNone/>
-            </a:pPr>
-            <a:r>
-              <a:rPr lang="ko-KR" altLang="en-US" sz="1800" dirty="0">
-                <a:solidFill>
-                  <a:srgbClr val="101D42"/>
-                </a:solidFill>
-                <a:latin typeface="Noto Sans KR" pitchFamily="34" charset="0"/>
-                <a:ea typeface="Noto Sans KR" pitchFamily="34" charset="-127"/>
-                <a:cs typeface="Noto Sans KR" pitchFamily="34" charset="-120"/>
-              </a:rPr>
-              <a:t>을 꾸준히 길러 주어야</a:t>
-            </a:r>
-            <a:endParaRPr lang="en-US" sz="1800" dirty="0"/>
-          </a:p>
-          <a:p>
-            <a:pPr algn="l" indent="0" marL="0">
-              <a:lnSpc>
-                <a:spcPts val="2600"/>
-              </a:lnSpc>
-              <a:buNone/>
-            </a:pPr>
-            <a:r>
-              <a:rPr lang="ko-KR" altLang="en-US" sz="1800" dirty="0">
-                <a:solidFill>
-                  <a:srgbClr val="101D42"/>
-                </a:solidFill>
-                <a:latin typeface="Noto Sans KR" pitchFamily="34" charset="0"/>
-                <a:ea typeface="Noto Sans KR" pitchFamily="34" charset="-127"/>
-                <a:cs typeface="Noto Sans KR" pitchFamily="34" charset="-120"/>
-              </a:rPr>
-              <a:t>합니다. 이 절실함에서 부기가 시작됐습니다.</a:t>
-            </a:r>
-            <a:endParaRPr lang="en-US" sz="1800" dirty="0"/>
-          </a:p>
-        </p:txBody>
-      </p:sp>
-      <p:sp>
-        <p:nvSpPr>
-          <p:cNvPr id="29" name="txt-2-9"/>
-          <p:cNvSpPr txBox="1"/>
-          <p:nvPr/>
-        </p:nvSpPr>
-        <p:spPr>
-          <a:xfrm>
-            <a:off x="963295" y="9322562"/>
-            <a:ext cx="5632323" cy="715645"/>
-          </a:xfrm>
-          <a:prstGeom prst="rect">
-            <a:avLst/>
-          </a:prstGeom>
-          <a:noFill/>
-          <a:ln/>
-        </p:spPr>
-        <p:txBody>
-          <a:bodyPr wrap="square" lIns="0" tIns="0" rIns="0" bIns="0" rtlCol="0" anchor="t"/>
-          <a:lstStyle/>
-          <a:p>
-            <a:pPr algn="ctr" indent="0" marL="0">
-              <a:lnSpc>
-                <a:spcPts val="2450"/>
-              </a:lnSpc>
-              <a:buNone/>
-            </a:pPr>
-            <a:r>
-              <a:rPr lang="ko-KR" altLang="en-US" sz="1750" dirty="0">
-                <a:solidFill>
-                  <a:srgbClr val="101D42"/>
-                </a:solidFill>
-                <a:latin typeface="Noto Serif KR Black" pitchFamily="34" charset="0"/>
-                <a:ea typeface="Noto Serif KR Black" pitchFamily="34" charset="-127"/>
-                <a:cs typeface="Noto Serif KR Black" pitchFamily="34" charset="-120"/>
-              </a:rPr>
-              <a:t>스마트폰 속 세상에 빠져 있는 아이들이</a:t>
-            </a:r>
-            <a:endParaRPr lang="en-US" sz="1750" dirty="0"/>
-          </a:p>
-          <a:p>
-            <a:pPr algn="ctr" indent="0" marL="0">
-              <a:lnSpc>
-                <a:spcPts val="2450"/>
-              </a:lnSpc>
-              <a:buNone/>
-            </a:pPr>
-            <a:r>
-              <a:rPr lang="ko-KR" altLang="en-US" sz="1750" dirty="0">
-                <a:solidFill>
-                  <a:srgbClr val="15543C"/>
-                </a:solidFill>
-                <a:latin typeface="Noto Serif KR Black" pitchFamily="34" charset="0"/>
-                <a:ea typeface="Noto Serif KR Black" pitchFamily="34" charset="-127"/>
-                <a:cs typeface="Noto Serif KR Black" pitchFamily="34" charset="-120"/>
-              </a:rPr>
-              <a:t>세상을 깊이있게 이해하는 아이로 자라고 있을까요?</a:t>
-            </a:r>
-            <a:endParaRPr lang="en-US" sz="1750" dirty="0"/>
-          </a:p>
-        </p:txBody>
-      </p:sp>
-      <p:sp>
-        <p:nvSpPr>
-          <p:cNvPr id="30" name="txt-2-10"/>
-          <p:cNvSpPr txBox="1"/>
-          <p:nvPr/>
-        </p:nvSpPr>
-        <p:spPr>
-          <a:xfrm>
-            <a:off x="3504565" y="10362692"/>
-            <a:ext cx="424815" cy="214630"/>
-          </a:xfrm>
-          <a:prstGeom prst="rect">
-            <a:avLst/>
-          </a:prstGeom>
-          <a:noFill/>
-          <a:ln/>
-        </p:spPr>
-        <p:txBody>
-          <a:bodyPr wrap="square" lIns="0" tIns="0" rIns="0" bIns="0" rtlCol="0" anchor="t"/>
-          <a:lstStyle/>
-          <a:p>
-            <a:pPr algn="l" indent="0" marL="0">
-              <a:lnSpc>
                 <a:spcPts val="1300"/>
               </a:lnSpc>
               <a:buNone/>
@@ -2594,7 +5652,7 @@
                   <a:srgbClr val="101D42"/>
                 </a:solidFill>
                 <a:latin typeface="Noto Sans KR" pitchFamily="34" charset="0"/>
-                <a:ea typeface="Noto Sans KR" pitchFamily="34" charset="-127"/>
+                <a:ea typeface="Noto Sans KR" pitchFamily="34" charset="-122"/>
                 <a:cs typeface="Noto Sans KR" pitchFamily="34" charset="-120"/>
               </a:rPr>
               <a:t>1 / 4</a:t>
@@ -2611,9 +5669,9 @@
 </p:sld>
 </file>
 
-<file path=ppt/slides/slide2.xml><?xml version="1.0" encoding="utf-8"?>
+<file path=ppt/slides/slide3.xml><?xml version="1.0" encoding="utf-8"?>
 <p:sld xmlns:a="http://schemas.openxmlformats.org/drawingml/2006/main" xmlns:r="http://schemas.openxmlformats.org/officeDocument/2006/relationships" xmlns:p="http://schemas.openxmlformats.org/presentationml/2006/main">
-  <p:cSld name="Slide 2">
+  <p:cSld name="Slide 3">
     <p:bg>
       <p:bgPr>
         <a:solidFill>
@@ -3489,7 +6547,7 @@
                   <a:srgbClr val="101D42"/>
                 </a:solidFill>
                 <a:latin typeface="Noto Serif KR Black" pitchFamily="34" charset="0"/>
-                <a:ea typeface="Noto Serif KR Black" pitchFamily="34" charset="-127"/>
+                <a:ea typeface="Noto Serif KR Black" pitchFamily="34" charset="-122"/>
                 <a:cs typeface="Noto Serif KR Black" pitchFamily="34" charset="-120"/>
               </a:rPr>
               <a:t>독서가 만드는 이해의 바탕</a:t>
@@ -3531,7 +6589,7 @@
                   <a:srgbClr val="101D42"/>
                 </a:solidFill>
                 <a:latin typeface="Noto Serif KR Black" pitchFamily="34" charset="0"/>
-                <a:ea typeface="Noto Serif KR Black" pitchFamily="34" charset="-127"/>
+                <a:ea typeface="Noto Serif KR Black" pitchFamily="34" charset="-122"/>
                 <a:cs typeface="Noto Serif KR Black" pitchFamily="34" charset="-120"/>
               </a:rPr>
               <a:t>아는 것이 쌓여야,</a:t>
@@ -3551,7 +6609,7 @@
                   <a:srgbClr val="15543C"/>
                 </a:solidFill>
                 <a:latin typeface="Noto Serif KR Black" pitchFamily="34" charset="0"/>
-                <a:ea typeface="Noto Serif KR Black" pitchFamily="34" charset="-127"/>
+                <a:ea typeface="Noto Serif KR Black" pitchFamily="34" charset="-122"/>
                 <a:cs typeface="Noto Serif KR Black" pitchFamily="34" charset="-120"/>
               </a:rPr>
               <a:t>새 지식이 연결됩니다.</a:t>
@@ -3593,7 +6651,7 @@
                   <a:srgbClr val="15543C"/>
                 </a:solidFill>
                 <a:latin typeface="Noto Serif KR Black" pitchFamily="34" charset="0"/>
-                <a:ea typeface="Noto Serif KR Black" pitchFamily="34" charset="-127"/>
+                <a:ea typeface="Noto Serif KR Black" pitchFamily="34" charset="-122"/>
                 <a:cs typeface="Noto Serif KR Black" pitchFamily="34" charset="-120"/>
               </a:rPr>
               <a:t>어휘와 간접 경험이 이해의 바탕을 넓힙니다</a:t>
@@ -3635,7 +6693,7 @@
                   <a:srgbClr val="101D42"/>
                 </a:solidFill>
                 <a:latin typeface="Noto Sans KR" pitchFamily="34" charset="0"/>
-                <a:ea typeface="Noto Sans KR" pitchFamily="34" charset="-127"/>
+                <a:ea typeface="Noto Sans KR" pitchFamily="34" charset="-122"/>
                 <a:cs typeface="Noto Sans KR" pitchFamily="34" charset="-120"/>
               </a:rPr>
               <a:t>이야기에서는 </a:t>
@@ -3655,7 +6713,7 @@
                   <a:srgbClr val="FFF0AD"/>
                 </a:highlight>
                 <a:latin typeface="Noto Sans KR" pitchFamily="34" charset="0"/>
-                <a:ea typeface="Noto Sans KR" pitchFamily="34" charset="-127"/>
+                <a:ea typeface="Noto Sans KR" pitchFamily="34" charset="-122"/>
                 <a:cs typeface="Noto Sans KR" pitchFamily="34" charset="-120"/>
               </a:rPr>
               <a:t>다른 삶과 선택</a:t>
@@ -3672,7 +6730,7 @@
                   <a:srgbClr val="101D42"/>
                 </a:solidFill>
                 <a:latin typeface="Noto Sans KR" pitchFamily="34" charset="0"/>
-                <a:ea typeface="Noto Sans KR" pitchFamily="34" charset="-127"/>
+                <a:ea typeface="Noto Sans KR" pitchFamily="34" charset="-122"/>
                 <a:cs typeface="Noto Sans KR" pitchFamily="34" charset="-120"/>
               </a:rPr>
               <a:t>을, 설명하는 글에서는 세상의 원리를,</a:t>
@@ -3692,7 +6750,7 @@
                   <a:srgbClr val="101D42"/>
                 </a:solidFill>
                 <a:latin typeface="Noto Sans KR" pitchFamily="34" charset="0"/>
-                <a:ea typeface="Noto Sans KR" pitchFamily="34" charset="-127"/>
+                <a:ea typeface="Noto Sans KR" pitchFamily="34" charset="-122"/>
                 <a:cs typeface="Noto Sans KR" pitchFamily="34" charset="-120"/>
               </a:rPr>
               <a:t>에세이에서는 </a:t>
@@ -3712,7 +6770,7 @@
                   <a:srgbClr val="FFF0AD"/>
                 </a:highlight>
                 <a:latin typeface="Noto Sans KR" pitchFamily="34" charset="0"/>
-                <a:ea typeface="Noto Sans KR" pitchFamily="34" charset="-127"/>
+                <a:ea typeface="Noto Sans KR" pitchFamily="34" charset="-122"/>
                 <a:cs typeface="Noto Sans KR" pitchFamily="34" charset="-120"/>
               </a:rPr>
               <a:t>다른 사람의 생각</a:t>
@@ -3729,7 +6787,7 @@
                   <a:srgbClr val="101D42"/>
                 </a:solidFill>
                 <a:latin typeface="Noto Sans KR" pitchFamily="34" charset="0"/>
-                <a:ea typeface="Noto Sans KR" pitchFamily="34" charset="-127"/>
+                <a:ea typeface="Noto Sans KR" pitchFamily="34" charset="-122"/>
                 <a:cs typeface="Noto Sans KR" pitchFamily="34" charset="-120"/>
               </a:rPr>
               <a:t>을 만납니다. 문맥 속에서 </a:t>
@@ -3749,7 +6807,7 @@
                   <a:srgbClr val="FFF0AD"/>
                 </a:highlight>
                 <a:latin typeface="Noto Sans KR" pitchFamily="34" charset="0"/>
-                <a:ea typeface="Noto Sans KR" pitchFamily="34" charset="-127"/>
+                <a:ea typeface="Noto Sans KR" pitchFamily="34" charset="-122"/>
                 <a:cs typeface="Noto Sans KR" pitchFamily="34" charset="-120"/>
               </a:rPr>
               <a:t>낱말</a:t>
@@ -3766,7 +6824,7 @@
                   <a:srgbClr val="101D42"/>
                 </a:solidFill>
                 <a:latin typeface="Noto Sans KR" pitchFamily="34" charset="0"/>
-                <a:ea typeface="Noto Sans KR" pitchFamily="34" charset="-127"/>
+                <a:ea typeface="Noto Sans KR" pitchFamily="34" charset="-122"/>
                 <a:cs typeface="Noto Sans KR" pitchFamily="34" charset="-120"/>
               </a:rPr>
               <a:t>을 익히고,</a:t>
@@ -3786,7 +6844,7 @@
                   <a:srgbClr val="101D42"/>
                 </a:solidFill>
                 <a:latin typeface="Noto Sans KR" pitchFamily="34" charset="0"/>
-                <a:ea typeface="Noto Sans KR" pitchFamily="34" charset="-127"/>
+                <a:ea typeface="Noto Sans KR" pitchFamily="34" charset="-122"/>
                 <a:cs typeface="Noto Sans KR" pitchFamily="34" charset="-120"/>
               </a:rPr>
               <a:t>다른 생각을 따라 읽으며 </a:t>
@@ -3806,7 +6864,7 @@
                   <a:srgbClr val="FFF0AD"/>
                 </a:highlight>
                 <a:latin typeface="Noto Sans KR" pitchFamily="34" charset="0"/>
-                <a:ea typeface="Noto Sans KR" pitchFamily="34" charset="-127"/>
+                <a:ea typeface="Noto Sans KR" pitchFamily="34" charset="-122"/>
                 <a:cs typeface="Noto Sans KR" pitchFamily="34" charset="-120"/>
               </a:rPr>
               <a:t>자기 경험</a:t>
@@ -3823,7 +6881,7 @@
                   <a:srgbClr val="101D42"/>
                 </a:solidFill>
                 <a:latin typeface="Noto Sans KR" pitchFamily="34" charset="0"/>
-                <a:ea typeface="Noto Sans KR" pitchFamily="34" charset="-127"/>
+                <a:ea typeface="Noto Sans KR" pitchFamily="34" charset="-122"/>
                 <a:cs typeface="Noto Sans KR" pitchFamily="34" charset="-120"/>
               </a:rPr>
               <a:t>과 비교합니다.</a:t>
@@ -3865,7 +6923,7 @@
                   <a:srgbClr val="15543C"/>
                 </a:solidFill>
                 <a:latin typeface="Noto Serif KR Black" pitchFamily="34" charset="0"/>
-                <a:ea typeface="Noto Serif KR Black" pitchFamily="34" charset="-127"/>
+                <a:ea typeface="Noto Serif KR Black" pitchFamily="34" charset="-122"/>
                 <a:cs typeface="Noto Serif KR Black" pitchFamily="34" charset="-120"/>
               </a:rPr>
               <a:t>스키마는 경험과 지식이 조직된 ‘이해의 틀’입니다</a:t>
@@ -3907,7 +6965,7 @@
                   <a:srgbClr val="101D42"/>
                 </a:solidFill>
                 <a:latin typeface="Noto Sans KR" pitchFamily="34" charset="0"/>
-                <a:ea typeface="Noto Sans KR" pitchFamily="34" charset="-127"/>
+                <a:ea typeface="Noto Sans KR" pitchFamily="34" charset="-122"/>
                 <a:cs typeface="Noto Sans KR" pitchFamily="34" charset="-120"/>
               </a:rPr>
               <a:t>새로운 내용은 </a:t>
@@ -3927,7 +6985,7 @@
                   <a:srgbClr val="FFF0AD"/>
                 </a:highlight>
                 <a:latin typeface="Noto Sans KR" pitchFamily="34" charset="0"/>
-                <a:ea typeface="Noto Sans KR" pitchFamily="34" charset="-127"/>
+                <a:ea typeface="Noto Sans KR" pitchFamily="34" charset="-122"/>
                 <a:cs typeface="Noto Sans KR" pitchFamily="34" charset="-120"/>
               </a:rPr>
               <a:t>이미 알고 있는 개념과 경험</a:t>
@@ -3944,7 +7002,7 @@
                   <a:srgbClr val="101D42"/>
                 </a:solidFill>
                 <a:latin typeface="Noto Sans KR" pitchFamily="34" charset="0"/>
-                <a:ea typeface="Noto Sans KR" pitchFamily="34" charset="-127"/>
+                <a:ea typeface="Noto Sans KR" pitchFamily="34" charset="-122"/>
                 <a:cs typeface="Noto Sans KR" pitchFamily="34" charset="-120"/>
               </a:rPr>
               <a:t>에 연결될 때 더 잘 이해할 수</a:t>
@@ -3964,7 +7022,7 @@
                   <a:srgbClr val="101D42"/>
                 </a:solidFill>
                 <a:latin typeface="Noto Sans KR" pitchFamily="34" charset="0"/>
-                <a:ea typeface="Noto Sans KR" pitchFamily="34" charset="-127"/>
+                <a:ea typeface="Noto Sans KR" pitchFamily="34" charset="-122"/>
                 <a:cs typeface="Noto Sans KR" pitchFamily="34" charset="-120"/>
               </a:rPr>
               <a:t>있습니다. </a:t>
@@ -3984,7 +7042,7 @@
                   <a:srgbClr val="FFF0AD"/>
                 </a:highlight>
                 <a:latin typeface="Noto Sans KR" pitchFamily="34" charset="0"/>
-                <a:ea typeface="Noto Sans KR" pitchFamily="34" charset="-127"/>
+                <a:ea typeface="Noto Sans KR" pitchFamily="34" charset="-122"/>
                 <a:cs typeface="Noto Sans KR" pitchFamily="34" charset="-120"/>
               </a:rPr>
               <a:t>관련 어휘와 배경지식</a:t>
@@ -4001,7 +7059,7 @@
                   <a:srgbClr val="101D42"/>
                 </a:solidFill>
                 <a:latin typeface="Noto Sans KR" pitchFamily="34" charset="0"/>
-                <a:ea typeface="Noto Sans KR" pitchFamily="34" charset="-127"/>
+                <a:ea typeface="Noto Sans KR" pitchFamily="34" charset="-122"/>
                 <a:cs typeface="Noto Sans KR" pitchFamily="34" charset="-120"/>
               </a:rPr>
               <a:t>이 부족하면 글자를 읽어도 </a:t>
@@ -4021,7 +7079,7 @@
                   <a:srgbClr val="FFF0AD"/>
                 </a:highlight>
                 <a:latin typeface="Noto Sans KR" pitchFamily="34" charset="0"/>
-                <a:ea typeface="Noto Sans KR" pitchFamily="34" charset="-127"/>
+                <a:ea typeface="Noto Sans KR" pitchFamily="34" charset="-122"/>
                 <a:cs typeface="Noto Sans KR" pitchFamily="34" charset="-120"/>
               </a:rPr>
               <a:t>맥락과 의미</a:t>
@@ -4038,7 +7096,7 @@
                   <a:srgbClr val="101D42"/>
                 </a:solidFill>
                 <a:latin typeface="Noto Sans KR" pitchFamily="34" charset="0"/>
-                <a:ea typeface="Noto Sans KR" pitchFamily="34" charset="-127"/>
+                <a:ea typeface="Noto Sans KR" pitchFamily="34" charset="-122"/>
                 <a:cs typeface="Noto Sans KR" pitchFamily="34" charset="-120"/>
               </a:rPr>
               <a:t>를</a:t>
@@ -4058,7 +7116,7 @@
                   <a:srgbClr val="101D42"/>
                 </a:solidFill>
                 <a:latin typeface="Noto Sans KR" pitchFamily="34" charset="0"/>
-                <a:ea typeface="Noto Sans KR" pitchFamily="34" charset="-127"/>
+                <a:ea typeface="Noto Sans KR" pitchFamily="34" charset="-122"/>
                 <a:cs typeface="Noto Sans KR" pitchFamily="34" charset="-120"/>
               </a:rPr>
               <a:t>연결하기 어렵습니다.</a:t>
@@ -4100,7 +7158,7 @@
                   <a:srgbClr val="101D42"/>
                 </a:solidFill>
                 <a:latin typeface="Noto Sans KR" pitchFamily="34" charset="0"/>
-                <a:ea typeface="Noto Sans KR" pitchFamily="34" charset="-127"/>
+                <a:ea typeface="Noto Sans KR" pitchFamily="34" charset="-122"/>
                 <a:cs typeface="Noto Sans KR" pitchFamily="34" charset="-120"/>
               </a:rPr>
               <a:t>그래서 읽기 전 필요한 </a:t>
@@ -4120,7 +7178,7 @@
                   <a:srgbClr val="FFF0AD"/>
                 </a:highlight>
                 <a:latin typeface="Noto Sans KR" pitchFamily="34" charset="0"/>
-                <a:ea typeface="Noto Sans KR" pitchFamily="34" charset="-127"/>
+                <a:ea typeface="Noto Sans KR" pitchFamily="34" charset="-122"/>
                 <a:cs typeface="Noto Sans KR" pitchFamily="34" charset="-120"/>
               </a:rPr>
               <a:t>배경을 짚고</a:t>
@@ -4137,7 +7195,7 @@
                   <a:srgbClr val="101D42"/>
                 </a:solidFill>
                 <a:latin typeface="Noto Sans KR" pitchFamily="34" charset="0"/>
-                <a:ea typeface="Noto Sans KR" pitchFamily="34" charset="-127"/>
+                <a:ea typeface="Noto Sans KR" pitchFamily="34" charset="-122"/>
                 <a:cs typeface="Noto Sans KR" pitchFamily="34" charset="-120"/>
               </a:rPr>
               <a:t>, 읽으며 </a:t>
@@ -4157,7 +7215,7 @@
                   <a:srgbClr val="FFF0AD"/>
                 </a:highlight>
                 <a:latin typeface="Noto Sans KR" pitchFamily="34" charset="0"/>
-                <a:ea typeface="Noto Sans KR" pitchFamily="34" charset="-127"/>
+                <a:ea typeface="Noto Sans KR" pitchFamily="34" charset="-122"/>
                 <a:cs typeface="Noto Sans KR" pitchFamily="34" charset="-120"/>
               </a:rPr>
               <a:t>어휘를 익히고</a:t>
@@ -4174,7 +7232,7 @@
                   <a:srgbClr val="101D42"/>
                 </a:solidFill>
                 <a:latin typeface="Noto Sans KR" pitchFamily="34" charset="0"/>
-                <a:ea typeface="Noto Sans KR" pitchFamily="34" charset="-127"/>
+                <a:ea typeface="Noto Sans KR" pitchFamily="34" charset="-122"/>
                 <a:cs typeface="Noto Sans KR" pitchFamily="34" charset="-120"/>
               </a:rPr>
               <a:t>, 새 내용으로</a:t>
@@ -4197,7 +7255,7 @@
                   <a:srgbClr val="FFF0AD"/>
                 </a:highlight>
                 <a:latin typeface="Noto Sans KR" pitchFamily="34" charset="0"/>
-                <a:ea typeface="Noto Sans KR" pitchFamily="34" charset="-127"/>
+                <a:ea typeface="Noto Sans KR" pitchFamily="34" charset="-122"/>
                 <a:cs typeface="Noto Sans KR" pitchFamily="34" charset="-120"/>
               </a:rPr>
               <a:t>기존 생각을 넓히거나 고치는</a:t>
@@ -4214,7 +7272,7 @@
                   <a:srgbClr val="101D42"/>
                 </a:solidFill>
                 <a:latin typeface="Noto Sans KR" pitchFamily="34" charset="0"/>
-                <a:ea typeface="Noto Sans KR" pitchFamily="34" charset="-127"/>
+                <a:ea typeface="Noto Sans KR" pitchFamily="34" charset="-122"/>
                 <a:cs typeface="Noto Sans KR" pitchFamily="34" charset="-120"/>
               </a:rPr>
               <a:t> 과정이 필요합니다.</a:t>
@@ -4256,7 +7314,7 @@
                   <a:srgbClr val="15543C"/>
                 </a:solidFill>
                 <a:latin typeface="Noto Sans KR" pitchFamily="34" charset="0"/>
-                <a:ea typeface="Noto Sans KR" pitchFamily="34" charset="-127"/>
+                <a:ea typeface="Noto Sans KR" pitchFamily="34" charset="-122"/>
                 <a:cs typeface="Noto Sans KR" pitchFamily="34" charset="-120"/>
               </a:rPr>
               <a:t>어휘 · 간접 경험</a:t>
@@ -4298,7 +7356,7 @@
                   <a:srgbClr val="15543C"/>
                 </a:solidFill>
                 <a:latin typeface="Noto Sans KR" pitchFamily="34" charset="0"/>
-                <a:ea typeface="Noto Sans KR" pitchFamily="34" charset="-127"/>
+                <a:ea typeface="Noto Sans KR" pitchFamily="34" charset="-122"/>
                 <a:cs typeface="Noto Sans KR" pitchFamily="34" charset="-120"/>
               </a:rPr>
               <a:t>배경지식 · 스키마</a:t>
@@ -4340,7 +7398,7 @@
                   <a:srgbClr val="15543C"/>
                 </a:solidFill>
                 <a:latin typeface="Noto Sans KR" pitchFamily="34" charset="0"/>
-                <a:ea typeface="Noto Sans KR" pitchFamily="34" charset="-127"/>
+                <a:ea typeface="Noto Sans KR" pitchFamily="34" charset="-122"/>
                 <a:cs typeface="Noto Sans KR" pitchFamily="34" charset="-120"/>
               </a:rPr>
               <a:t>이해 · 추론 · 연결</a:t>
@@ -4382,7 +7440,7 @@
                   <a:srgbClr val="D59B32"/>
                 </a:solidFill>
                 <a:latin typeface="Noto Sans KR" pitchFamily="34" charset="0"/>
-                <a:ea typeface="Noto Sans KR" pitchFamily="34" charset="-127"/>
+                <a:ea typeface="Noto Sans KR" pitchFamily="34" charset="-122"/>
                 <a:cs typeface="Noto Sans KR" pitchFamily="34" charset="-120"/>
               </a:rPr>
               <a:t>→</a:t>
@@ -4424,7 +7482,7 @@
                   <a:srgbClr val="D59B32"/>
                 </a:solidFill>
                 <a:latin typeface="Noto Sans KR" pitchFamily="34" charset="0"/>
-                <a:ea typeface="Noto Sans KR" pitchFamily="34" charset="-127"/>
+                <a:ea typeface="Noto Sans KR" pitchFamily="34" charset="-122"/>
                 <a:cs typeface="Noto Sans KR" pitchFamily="34" charset="-120"/>
               </a:rPr>
               <a:t>→</a:t>
@@ -4466,7 +7524,7 @@
                   <a:srgbClr val="101D42"/>
                 </a:solidFill>
                 <a:latin typeface="Noto Serif KR Black" pitchFamily="34" charset="0"/>
-                <a:ea typeface="Noto Serif KR Black" pitchFamily="34" charset="-127"/>
+                <a:ea typeface="Noto Serif KR Black" pitchFamily="34" charset="-122"/>
                 <a:cs typeface="Noto Serif KR Black" pitchFamily="34" charset="-120"/>
               </a:rPr>
               <a:t>읽고 받아들이는 경험이 쌓여,</a:t>
@@ -4486,7 +7544,7 @@
                   <a:srgbClr val="15543C"/>
                 </a:solidFill>
                 <a:latin typeface="Noto Serif KR Black" pitchFamily="34" charset="0"/>
-                <a:ea typeface="Noto Serif KR Black" pitchFamily="34" charset="-127"/>
+                <a:ea typeface="Noto Serif KR Black" pitchFamily="34" charset="-122"/>
                 <a:cs typeface="Noto Serif KR Black" pitchFamily="34" charset="-120"/>
               </a:rPr>
               <a:t>세상을 이해하는 생각의 바탕이 됩니다.</a:t>
@@ -4528,7 +7586,7 @@
                   <a:srgbClr val="43516A"/>
                 </a:solidFill>
                 <a:latin typeface="Noto Sans KR" pitchFamily="34" charset="0"/>
-                <a:ea typeface="Noto Sans KR" pitchFamily="34" charset="-127"/>
+                <a:ea typeface="Noto Sans KR" pitchFamily="34" charset="-122"/>
                 <a:cs typeface="Noto Sans KR" pitchFamily="34" charset="-120"/>
               </a:rPr>
               <a:t>배경지식의 영향은 지식의 정확성 · 글의 특성 등에 따라 달라집니다.</a:t>
@@ -4548,7 +7606,7 @@
                   <a:srgbClr val="43516A"/>
                 </a:solidFill>
                 <a:latin typeface="Noto Sans KR" pitchFamily="34" charset="0"/>
-                <a:ea typeface="Noto Sans KR" pitchFamily="34" charset="-127"/>
+                <a:ea typeface="Noto Sans KR" pitchFamily="34" charset="-122"/>
                 <a:cs typeface="Noto Sans KR" pitchFamily="34" charset="-120"/>
               </a:rPr>
               <a:t>출처: Smith et al. (2021) · Hattan et al. (2024)</a:t>
@@ -4590,7 +7648,7 @@
                   <a:srgbClr val="101D42"/>
                 </a:solidFill>
                 <a:latin typeface="Noto Sans KR" pitchFamily="34" charset="0"/>
-                <a:ea typeface="Noto Sans KR" pitchFamily="34" charset="-127"/>
+                <a:ea typeface="Noto Sans KR" pitchFamily="34" charset="-122"/>
                 <a:cs typeface="Noto Sans KR" pitchFamily="34" charset="-120"/>
               </a:rPr>
               <a:t>2 / 4</a:t>
@@ -4607,9 +7665,9 @@
 </p:sld>
 </file>
 
-<file path=ppt/slides/slide3.xml><?xml version="1.0" encoding="utf-8"?>
+<file path=ppt/slides/slide4.xml><?xml version="1.0" encoding="utf-8"?>
 <p:sld xmlns:a="http://schemas.openxmlformats.org/drawingml/2006/main" xmlns:r="http://schemas.openxmlformats.org/officeDocument/2006/relationships" xmlns:p="http://schemas.openxmlformats.org/presentationml/2006/main">
-  <p:cSld name="Slide 3">
+  <p:cSld name="Slide 4">
     <p:bg>
       <p:bgPr>
         <a:solidFill>
@@ -5320,7 +8378,7 @@
                   <a:srgbClr val="101D42"/>
                 </a:solidFill>
                 <a:latin typeface="Noto Serif KR Black" pitchFamily="34" charset="0"/>
-                <a:ea typeface="Noto Serif KR Black" pitchFamily="34" charset="-127"/>
+                <a:ea typeface="Noto Serif KR Black" pitchFamily="34" charset="-122"/>
                 <a:cs typeface="Noto Serif KR Black" pitchFamily="34" charset="-120"/>
               </a:rPr>
               <a:t>단편적인 정보에서 깊이 있는 이해로</a:t>
@@ -5362,7 +8420,7 @@
                   <a:srgbClr val="101D42"/>
                 </a:solidFill>
                 <a:latin typeface="Noto Serif KR Black" pitchFamily="34" charset="0"/>
-                <a:ea typeface="Noto Serif KR Black" pitchFamily="34" charset="-127"/>
+                <a:ea typeface="Noto Serif KR Black" pitchFamily="34" charset="-122"/>
                 <a:cs typeface="Noto Serif KR Black" pitchFamily="34" charset="-120"/>
               </a:rPr>
               <a:t>‘본 적 있다’는 익숙함이</a:t>
@@ -5404,7 +8462,7 @@
                   <a:srgbClr val="15543C"/>
                 </a:solidFill>
                 <a:latin typeface="Noto Serif KR Black" pitchFamily="34" charset="0"/>
-                <a:ea typeface="Noto Serif KR Black" pitchFamily="34" charset="-127"/>
+                <a:ea typeface="Noto Serif KR Black" pitchFamily="34" charset="-122"/>
                 <a:cs typeface="Noto Serif KR Black" pitchFamily="34" charset="-120"/>
               </a:rPr>
               <a:t>‘안다’는 이해는 아닙니다.</a:t>
@@ -5446,7 +8504,7 @@
                   <a:srgbClr val="15543C"/>
                 </a:solidFill>
                 <a:latin typeface="Noto Serif KR Black" pitchFamily="34" charset="0"/>
-                <a:ea typeface="Noto Serif KR Black" pitchFamily="34" charset="-127"/>
+                <a:ea typeface="Noto Serif KR Black" pitchFamily="34" charset="-122"/>
                 <a:cs typeface="Noto Serif KR Black" pitchFamily="34" charset="-120"/>
               </a:rPr>
               <a:t>단편적인 정보가 생각의 전부가 될까 걱정됩니다</a:t>
@@ -5488,10 +8546,10 @@
                   <a:srgbClr val="101D42"/>
                 </a:solidFill>
                 <a:latin typeface="Noto Sans KR" pitchFamily="34" charset="0"/>
-                <a:ea typeface="Noto Sans KR" pitchFamily="34" charset="-127"/>
-                <a:cs typeface="Noto Sans KR" pitchFamily="34" charset="-120"/>
-              </a:rPr>
-              <a:t>SNS와 짧은 영상은 정보를 빠르게 접하게 합니다. 그러나 이런 접촉만</a:t>
+                <a:ea typeface="Noto Sans KR" pitchFamily="34" charset="-122"/>
+                <a:cs typeface="Noto Sans KR" pitchFamily="34" charset="-120"/>
+              </a:rPr>
+              <a:t>AI가 만든 답을 읽었다고 학습까지 끝나는 것은 아닙니다.</a:t>
             </a:r>
             <a:endParaRPr lang="en-US" sz="1800" dirty="0"/>
           </a:p>
@@ -5508,10 +8566,176 @@
                   <a:srgbClr val="101D42"/>
                 </a:solidFill>
                 <a:latin typeface="Noto Sans KR" pitchFamily="34" charset="0"/>
-                <a:ea typeface="Noto Sans KR" pitchFamily="34" charset="-127"/>
-                <a:cs typeface="Noto Sans KR" pitchFamily="34" charset="-120"/>
-              </a:rPr>
-              <a:t>이어지면 </a:t>
+                <a:ea typeface="Noto Sans KR" pitchFamily="34" charset="-122"/>
+                <a:cs typeface="Noto Sans KR" pitchFamily="34" charset="-120"/>
+              </a:rPr>
+              <a:t>중등학생 읽기 실험에서는 LLM만 쓴 조건보다 직접 필기한 조건이</a:t>
+            </a:r>
+            <a:endParaRPr lang="en-US" sz="1800" dirty="0"/>
+          </a:p>
+          <a:p>
+            <a:pPr algn="l" indent="0" marL="0">
+              <a:lnSpc>
+                <a:spcPts val="2600"/>
+              </a:lnSpc>
+              <a:buNone/>
+            </a:pPr>
+            <a:r>
+              <a:rPr lang="ko-KR" altLang="en-US" sz="1800" dirty="0">
+                <a:solidFill>
+                  <a:srgbClr val="101D42"/>
+                </a:solidFill>
+                <a:latin typeface="Noto Sans KR" pitchFamily="34" charset="0"/>
+                <a:ea typeface="Noto Sans KR" pitchFamily="34" charset="-122"/>
+                <a:cs typeface="Noto Sans KR" pitchFamily="34" charset="-120"/>
+              </a:rPr>
+              <a:t>학습 3일 뒤 이해 평가에서 더 높은 점수를 받았습니다.</a:t>
+            </a:r>
+            <a:endParaRPr lang="en-US" sz="1800" dirty="0"/>
+          </a:p>
+        </p:txBody>
+      </p:sp>
+      <p:sp>
+        <p:nvSpPr>
+          <p:cNvPr id="28" name="txt-4-5"/>
+          <p:cNvSpPr txBox="1"/>
+          <p:nvPr/>
+        </p:nvSpPr>
+        <p:spPr>
+          <a:xfrm>
+            <a:off x="863346" y="4292346"/>
+            <a:ext cx="5427472" cy="429260"/>
+          </a:xfrm>
+          <a:prstGeom prst="rect">
+            <a:avLst/>
+          </a:prstGeom>
+          <a:noFill/>
+          <a:ln/>
+        </p:spPr>
+        <p:txBody>
+          <a:bodyPr wrap="square" lIns="0" tIns="0" rIns="0" bIns="0" rtlCol="0" anchor="t"/>
+          <a:lstStyle/>
+          <a:p>
+            <a:pPr algn="l" indent="0" marL="0">
+              <a:lnSpc>
+                <a:spcPts val="2600"/>
+              </a:lnSpc>
+              <a:buNone/>
+            </a:pPr>
+            <a:r>
+              <a:rPr lang="ko-KR" altLang="en-US" sz="2000" dirty="0">
+                <a:solidFill>
+                  <a:srgbClr val="15543C"/>
+                </a:solidFill>
+                <a:latin typeface="Noto Serif KR Black" pitchFamily="34" charset="0"/>
+                <a:ea typeface="Noto Serif KR Black" pitchFamily="34" charset="-122"/>
+                <a:cs typeface="Noto Serif KR Black" pitchFamily="34" charset="-120"/>
+              </a:rPr>
+              <a:t>‘안다는 착각’을 넘어서는 연습이 필요합니다</a:t>
+            </a:r>
+            <a:endParaRPr lang="en-US" sz="2000" dirty="0"/>
+          </a:p>
+        </p:txBody>
+      </p:sp>
+      <p:sp>
+        <p:nvSpPr>
+          <p:cNvPr id="29" name="txt-4-6"/>
+          <p:cNvSpPr txBox="1"/>
+          <p:nvPr/>
+        </p:nvSpPr>
+        <p:spPr>
+          <a:xfrm>
+            <a:off x="381000" y="4780026"/>
+            <a:ext cx="7140956" cy="759460"/>
+          </a:xfrm>
+          <a:prstGeom prst="rect">
+            <a:avLst/>
+          </a:prstGeom>
+          <a:noFill/>
+          <a:ln/>
+        </p:spPr>
+        <p:txBody>
+          <a:bodyPr wrap="square" lIns="0" tIns="0" rIns="0" bIns="0" rtlCol="0" anchor="t"/>
+          <a:lstStyle/>
+          <a:p>
+            <a:pPr algn="l" indent="0" marL="0">
+              <a:lnSpc>
+                <a:spcPts val="2600"/>
+              </a:lnSpc>
+              <a:buNone/>
+            </a:pPr>
+            <a:r>
+              <a:rPr lang="ko-KR" altLang="en-US" sz="1800" dirty="0">
+                <a:solidFill>
+                  <a:srgbClr val="101D42"/>
+                </a:solidFill>
+                <a:latin typeface="Noto Sans KR" pitchFamily="34" charset="0"/>
+                <a:ea typeface="Noto Sans KR" pitchFamily="34" charset="-122"/>
+                <a:cs typeface="Noto Sans KR" pitchFamily="34" charset="-120"/>
+              </a:rPr>
+              <a:t>12점 만점의 이해 점수는 LLM 조건 4.00점, 필기 조건 4.89점이었습니다.</a:t>
+            </a:r>
+            <a:endParaRPr lang="en-US" sz="1800" dirty="0"/>
+          </a:p>
+          <a:p>
+            <a:pPr algn="l" indent="0" marL="0">
+              <a:lnSpc>
+                <a:spcPts val="2600"/>
+              </a:lnSpc>
+              <a:buNone/>
+            </a:pPr>
+            <a:r>
+              <a:rPr lang="ko-KR" altLang="en-US" sz="1800" dirty="0">
+                <a:solidFill>
+                  <a:srgbClr val="101D42"/>
+                </a:solidFill>
+                <a:latin typeface="Noto Sans KR" pitchFamily="34" charset="0"/>
+                <a:ea typeface="Noto Sans KR" pitchFamily="34" charset="-122"/>
+                <a:cs typeface="Noto Sans KR" pitchFamily="34" charset="-120"/>
+              </a:rPr>
+              <a:t>학생이 직접 읽고 정리하는 과정을 남기는 데 주목했습니다.</a:t>
+            </a:r>
+            <a:endParaRPr lang="en-US" sz="1800" dirty="0"/>
+          </a:p>
+        </p:txBody>
+      </p:sp>
+      <p:sp>
+        <p:nvSpPr>
+          <p:cNvPr id="30" name="txt-4-7"/>
+          <p:cNvSpPr txBox="1"/>
+          <p:nvPr/>
+        </p:nvSpPr>
+        <p:spPr>
+          <a:xfrm>
+            <a:off x="381000" y="5567426"/>
+            <a:ext cx="7140956" cy="759460"/>
+          </a:xfrm>
+          <a:prstGeom prst="rect">
+            <a:avLst/>
+          </a:prstGeom>
+          <a:noFill/>
+          <a:ln/>
+        </p:spPr>
+        <p:txBody>
+          <a:bodyPr wrap="square" lIns="0" tIns="0" rIns="0" bIns="0" rtlCol="0" anchor="t"/>
+          <a:lstStyle/>
+          <a:p>
+            <a:pPr algn="l" indent="0" marL="0">
+              <a:lnSpc>
+                <a:spcPts val="2600"/>
+              </a:lnSpc>
+              <a:buNone/>
+            </a:pPr>
+            <a:r>
+              <a:rPr lang="ko-KR" altLang="en-US" sz="1800" dirty="0">
+                <a:solidFill>
+                  <a:srgbClr val="101D42"/>
+                </a:solidFill>
+                <a:latin typeface="Noto Sans KR" pitchFamily="34" charset="0"/>
+                <a:ea typeface="Noto Sans KR" pitchFamily="34" charset="-122"/>
+                <a:cs typeface="Noto Sans KR" pitchFamily="34" charset="-120"/>
+              </a:rPr>
+              <a:t>학생이 </a:t>
             </a:r>
             <a:pPr algn="l" indent="0" marL="0">
               <a:lnSpc>
@@ -5528,10 +8752,10 @@
                   <a:srgbClr val="FFF0AD"/>
                 </a:highlight>
                 <a:latin typeface="Noto Sans KR" pitchFamily="34" charset="0"/>
-                <a:ea typeface="Noto Sans KR" pitchFamily="34" charset="-127"/>
-                <a:cs typeface="Noto Sans KR" pitchFamily="34" charset="-120"/>
-              </a:rPr>
-              <a:t>원인과 맥락</a:t>
+                <a:ea typeface="Noto Sans KR" pitchFamily="34" charset="-122"/>
+                <a:cs typeface="Noto Sans KR" pitchFamily="34" charset="-120"/>
+              </a:rPr>
+              <a:t>자기 말로 설명</a:t>
             </a:r>
             <a:pPr algn="l" indent="0" marL="0">
               <a:lnSpc>
@@ -5545,10 +8769,10 @@
                   <a:srgbClr val="101D42"/>
                 </a:solidFill>
                 <a:latin typeface="Noto Sans KR" pitchFamily="34" charset="0"/>
-                <a:ea typeface="Noto Sans KR" pitchFamily="34" charset="-127"/>
-                <a:cs typeface="Noto Sans KR" pitchFamily="34" charset="-120"/>
-              </a:rPr>
-              <a:t>, </a:t>
+                <a:ea typeface="Noto Sans KR" pitchFamily="34" charset="-122"/>
+                <a:cs typeface="Noto Sans KR" pitchFamily="34" charset="-120"/>
+              </a:rPr>
+              <a:t>하고, </a:t>
             </a:r>
             <a:pPr algn="l" indent="0" marL="0">
               <a:lnSpc>
@@ -5565,10 +8789,10 @@
                   <a:srgbClr val="FFF0AD"/>
                 </a:highlight>
                 <a:latin typeface="Noto Sans KR" pitchFamily="34" charset="0"/>
-                <a:ea typeface="Noto Sans KR" pitchFamily="34" charset="-127"/>
-                <a:cs typeface="Noto Sans KR" pitchFamily="34" charset="-120"/>
-              </a:rPr>
-              <a:t>다른 관점과 반대 근거</a:t>
+                <a:ea typeface="Noto Sans KR" pitchFamily="34" charset="-122"/>
+                <a:cs typeface="Noto Sans KR" pitchFamily="34" charset="-120"/>
+              </a:rPr>
+              <a:t>책에서 근거를 찾고</a:t>
             </a:r>
             <a:pPr algn="l" indent="0" marL="0">
               <a:lnSpc>
@@ -5582,10 +8806,47 @@
                   <a:srgbClr val="101D42"/>
                 </a:solidFill>
                 <a:latin typeface="Noto Sans KR" pitchFamily="34" charset="0"/>
-                <a:ea typeface="Noto Sans KR" pitchFamily="34" charset="-127"/>
-                <a:cs typeface="Noto Sans KR" pitchFamily="34" charset="-120"/>
-              </a:rPr>
-              <a:t>를 따져 볼 시간은 부족해질</a:t>
+                <a:ea typeface="Noto Sans KR" pitchFamily="34" charset="-122"/>
+                <a:cs typeface="Noto Sans KR" pitchFamily="34" charset="-120"/>
+              </a:rPr>
+              <a:t>, </a:t>
+            </a:r>
+            <a:pPr algn="l" indent="0" marL="0">
+              <a:lnSpc>
+                <a:spcPts val="2600"/>
+              </a:lnSpc>
+              <a:buNone/>
+            </a:pPr>
+            <a:r>
+              <a:rPr lang="ko-KR" altLang="en-US" sz="1800" b="1" dirty="0">
+                <a:solidFill>
+                  <a:srgbClr val="101D42"/>
+                </a:solidFill>
+                <a:highlight>
+                  <a:srgbClr val="FFF0AD"/>
+                </a:highlight>
+                <a:latin typeface="Noto Sans KR" pitchFamily="34" charset="0"/>
+                <a:ea typeface="Noto Sans KR" pitchFamily="34" charset="-122"/>
+                <a:cs typeface="Noto Sans KR" pitchFamily="34" charset="-120"/>
+              </a:rPr>
+              <a:t>다른 상황에 적용</a:t>
+            </a:r>
+            <a:pPr algn="l" indent="0" marL="0">
+              <a:lnSpc>
+                <a:spcPts val="2600"/>
+              </a:lnSpc>
+              <a:buNone/>
+            </a:pPr>
+            <a:r>
+              <a:rPr lang="ko-KR" altLang="en-US" sz="1800" dirty="0">
+                <a:solidFill>
+                  <a:srgbClr val="101D42"/>
+                </a:solidFill>
+                <a:latin typeface="Noto Sans KR" pitchFamily="34" charset="0"/>
+                <a:ea typeface="Noto Sans KR" pitchFamily="34" charset="-122"/>
+                <a:cs typeface="Noto Sans KR" pitchFamily="34" charset="-120"/>
+              </a:rPr>
+              <a:t>해 보는</a:t>
             </a:r>
             <a:endParaRPr lang="en-US" sz="1800" dirty="0"/>
           </a:p>
@@ -5602,10 +8863,10 @@
                   <a:srgbClr val="101D42"/>
                 </a:solidFill>
                 <a:latin typeface="Noto Sans KR" pitchFamily="34" charset="0"/>
-                <a:ea typeface="Noto Sans KR" pitchFamily="34" charset="-127"/>
-                <a:cs typeface="Noto Sans KR" pitchFamily="34" charset="-120"/>
-              </a:rPr>
-              <a:t>수 있습니다.</a:t>
+                <a:ea typeface="Noto Sans KR" pitchFamily="34" charset="-122"/>
+                <a:cs typeface="Noto Sans KR" pitchFamily="34" charset="-120"/>
+              </a:rPr>
+              <a:t>활동이 필요합니다.</a:t>
             </a:r>
             <a:endParaRPr lang="en-US" sz="1800" dirty="0"/>
           </a:p>
@@ -5613,14 +8874,14 @@
       </p:sp>
       <p:sp>
         <p:nvSpPr>
-          <p:cNvPr id="28" name="txt-4-5"/>
+          <p:cNvPr id="31" name="txt-4-8"/>
           <p:cNvSpPr txBox="1"/>
           <p:nvPr/>
         </p:nvSpPr>
         <p:spPr>
           <a:xfrm>
-            <a:off x="863346" y="4292346"/>
-            <a:ext cx="5427472" cy="429260"/>
+            <a:off x="863346" y="7060057"/>
+            <a:ext cx="6186678" cy="407797"/>
           </a:xfrm>
           <a:prstGeom prst="rect">
             <a:avLst/>
@@ -5634,35 +8895,35 @@
           <a:p>
             <a:pPr algn="l" indent="0" marL="0">
               <a:lnSpc>
-                <a:spcPts val="2600"/>
-              </a:lnSpc>
-              <a:buNone/>
-            </a:pPr>
-            <a:r>
-              <a:rPr lang="ko-KR" altLang="en-US" sz="2000" dirty="0">
+                <a:spcPts val="2470"/>
+              </a:lnSpc>
+              <a:buNone/>
+            </a:pPr>
+            <a:r>
+              <a:rPr lang="ko-KR" altLang="en-US" sz="1900" dirty="0">
                 <a:solidFill>
                   <a:srgbClr val="15543C"/>
                 </a:solidFill>
                 <a:latin typeface="Noto Serif KR Black" pitchFamily="34" charset="0"/>
-                <a:ea typeface="Noto Serif KR Black" pitchFamily="34" charset="-127"/>
+                <a:ea typeface="Noto Serif KR Black" pitchFamily="34" charset="-122"/>
                 <a:cs typeface="Noto Serif KR Black" pitchFamily="34" charset="-120"/>
               </a:rPr>
-              <a:t>‘안다는 착각’을 넘어서는 연습이 필요합니다</a:t>
-            </a:r>
-            <a:endParaRPr lang="en-US" sz="2000" dirty="0"/>
+              <a:t>디지털 교육의 중심에도 학생의 사고가 있어야 합니다</a:t>
+            </a:r>
+            <a:endParaRPr lang="en-US" sz="1900" dirty="0"/>
           </a:p>
         </p:txBody>
       </p:sp>
       <p:sp>
         <p:nvSpPr>
-          <p:cNvPr id="29" name="txt-4-6"/>
+          <p:cNvPr id="32" name="txt-4-9"/>
           <p:cNvSpPr txBox="1"/>
           <p:nvPr/>
         </p:nvSpPr>
         <p:spPr>
           <a:xfrm>
-            <a:off x="381000" y="4780026"/>
-            <a:ext cx="7140956" cy="759460"/>
+            <a:off x="381000" y="7565136"/>
+            <a:ext cx="7140956" cy="1047750"/>
           </a:xfrm>
           <a:prstGeom prst="rect">
             <a:avLst/>
@@ -5676,29 +8937,29 @@
           <a:p>
             <a:pPr algn="l" indent="0" marL="0">
               <a:lnSpc>
-                <a:spcPts val="2600"/>
-              </a:lnSpc>
-              <a:buNone/>
-            </a:pPr>
-            <a:r>
-              <a:rPr lang="ko-KR" altLang="en-US" sz="1800" dirty="0">
-                <a:solidFill>
-                  <a:srgbClr val="101D42"/>
-                </a:solidFill>
-                <a:latin typeface="Noto Sans KR" pitchFamily="34" charset="0"/>
-                <a:ea typeface="Noto Sans KR" pitchFamily="34" charset="-127"/>
-                <a:cs typeface="Noto Sans KR" pitchFamily="34" charset="-120"/>
-              </a:rPr>
-              <a:t>인터넷 검색 실험에서는 찾은 정보를 </a:t>
-            </a:r>
-            <a:pPr algn="l" indent="0" marL="0">
-              <a:lnSpc>
-                <a:spcPts val="2600"/>
-              </a:lnSpc>
-              <a:buNone/>
-            </a:pPr>
-            <a:r>
-              <a:rPr lang="ko-KR" altLang="en-US" sz="1800" b="1" dirty="0">
+                <a:spcPts val="2500"/>
+              </a:lnSpc>
+              <a:buNone/>
+            </a:pPr>
+            <a:r>
+              <a:rPr lang="ko-KR" altLang="en-US" sz="1750" dirty="0">
+                <a:solidFill>
+                  <a:srgbClr val="101D42"/>
+                </a:solidFill>
+                <a:latin typeface="Noto Sans KR" pitchFamily="34" charset="0"/>
+                <a:ea typeface="Noto Sans KR" pitchFamily="34" charset="-122"/>
+                <a:cs typeface="Noto Sans KR" pitchFamily="34" charset="-120"/>
+              </a:rPr>
+              <a:t>AI가 빠르게 답을 제시해도, 그 </a:t>
+            </a:r>
+            <a:pPr algn="l" indent="0" marL="0">
+              <a:lnSpc>
+                <a:spcPts val="2500"/>
+              </a:lnSpc>
+              <a:buNone/>
+            </a:pPr>
+            <a:r>
+              <a:rPr lang="ko-KR" altLang="en-US" sz="1750" b="1" dirty="0">
                 <a:solidFill>
                   <a:srgbClr val="101D42"/>
                 </a:solidFill>
@@ -5706,56 +8967,56 @@
                   <a:srgbClr val="FFF0AD"/>
                 </a:highlight>
                 <a:latin typeface="Noto Sans KR" pitchFamily="34" charset="0"/>
-                <a:ea typeface="Noto Sans KR" pitchFamily="34" charset="-127"/>
-                <a:cs typeface="Noto Sans KR" pitchFamily="34" charset="-120"/>
-              </a:rPr>
-              <a:t>자신의 지식으로 혼동</a:t>
-            </a:r>
-            <a:pPr algn="l" indent="0" marL="0">
-              <a:lnSpc>
-                <a:spcPts val="2600"/>
-              </a:lnSpc>
-              <a:buNone/>
-            </a:pPr>
-            <a:r>
-              <a:rPr lang="ko-KR" altLang="en-US" sz="1800" dirty="0">
-                <a:solidFill>
-                  <a:srgbClr val="101D42"/>
-                </a:solidFill>
-                <a:latin typeface="Noto Sans KR" pitchFamily="34" charset="0"/>
-                <a:ea typeface="Noto Sans KR" pitchFamily="34" charset="-127"/>
-                <a:cs typeface="Noto Sans KR" pitchFamily="34" charset="-120"/>
-              </a:rPr>
-              <a:t>하고, 아는</a:t>
-            </a:r>
-            <a:endParaRPr lang="en-US" sz="1800" dirty="0"/>
-          </a:p>
-          <a:p>
-            <a:pPr algn="l" indent="0" marL="0">
-              <a:lnSpc>
-                <a:spcPts val="2600"/>
-              </a:lnSpc>
-              <a:buNone/>
-            </a:pPr>
-            <a:r>
-              <a:rPr lang="ko-KR" altLang="en-US" sz="1800" dirty="0">
-                <a:solidFill>
-                  <a:srgbClr val="101D42"/>
-                </a:solidFill>
-                <a:latin typeface="Noto Sans KR" pitchFamily="34" charset="0"/>
-                <a:ea typeface="Noto Sans KR" pitchFamily="34" charset="-127"/>
-                <a:cs typeface="Noto Sans KR" pitchFamily="34" charset="-120"/>
-              </a:rPr>
-              <a:t>정도를 </a:t>
-            </a:r>
-            <a:pPr algn="l" indent="0" marL="0">
-              <a:lnSpc>
-                <a:spcPts val="2600"/>
-              </a:lnSpc>
-              <a:buNone/>
-            </a:pPr>
-            <a:r>
-              <a:rPr lang="ko-KR" altLang="en-US" sz="1800" b="1" dirty="0">
+                <a:ea typeface="Noto Sans KR" pitchFamily="34" charset="-122"/>
+                <a:cs typeface="Noto Sans KR" pitchFamily="34" charset="-120"/>
+              </a:rPr>
+              <a:t>뜻과 근거를 판단하는 힘</a:t>
+            </a:r>
+            <a:pPr algn="l" indent="0" marL="0">
+              <a:lnSpc>
+                <a:spcPts val="2500"/>
+              </a:lnSpc>
+              <a:buNone/>
+            </a:pPr>
+            <a:r>
+              <a:rPr lang="ko-KR" altLang="en-US" sz="1750" dirty="0">
+                <a:solidFill>
+                  <a:srgbClr val="101D42"/>
+                </a:solidFill>
+                <a:latin typeface="Noto Sans KR" pitchFamily="34" charset="0"/>
+                <a:ea typeface="Noto Sans KR" pitchFamily="34" charset="-122"/>
+                <a:cs typeface="Noto Sans KR" pitchFamily="34" charset="-120"/>
+              </a:rPr>
+              <a:t>은 학생 안에 있어야</a:t>
+            </a:r>
+            <a:endParaRPr lang="en-US" sz="1750" dirty="0"/>
+          </a:p>
+          <a:p>
+            <a:pPr algn="l" indent="0" marL="0">
+              <a:lnSpc>
+                <a:spcPts val="2500"/>
+              </a:lnSpc>
+              <a:buNone/>
+            </a:pPr>
+            <a:r>
+              <a:rPr lang="ko-KR" altLang="en-US" sz="1750" dirty="0">
+                <a:solidFill>
+                  <a:srgbClr val="101D42"/>
+                </a:solidFill>
+                <a:latin typeface="Noto Sans KR" pitchFamily="34" charset="0"/>
+                <a:ea typeface="Noto Sans KR" pitchFamily="34" charset="-122"/>
+                <a:cs typeface="Noto Sans KR" pitchFamily="34" charset="-120"/>
+              </a:rPr>
+              <a:t>합니다. 기술은 읽기와 표현을 돕고, 학생에게 </a:t>
+            </a:r>
+            <a:pPr algn="l" indent="0" marL="0">
+              <a:lnSpc>
+                <a:spcPts val="2500"/>
+              </a:lnSpc>
+              <a:buNone/>
+            </a:pPr>
+            <a:r>
+              <a:rPr lang="ko-KR" altLang="en-US" sz="1750" b="1" dirty="0">
                 <a:solidFill>
                   <a:srgbClr val="101D42"/>
                 </a:solidFill>
@@ -5763,42 +9024,62 @@
                   <a:srgbClr val="FFF0AD"/>
                 </a:highlight>
                 <a:latin typeface="Noto Sans KR" pitchFamily="34" charset="0"/>
-                <a:ea typeface="Noto Sans KR" pitchFamily="34" charset="-127"/>
-                <a:cs typeface="Noto Sans KR" pitchFamily="34" charset="-120"/>
-              </a:rPr>
-              <a:t>과대평가</a:t>
-            </a:r>
-            <a:pPr algn="l" indent="0" marL="0">
-              <a:lnSpc>
-                <a:spcPts val="2600"/>
-              </a:lnSpc>
-              <a:buNone/>
-            </a:pPr>
-            <a:r>
-              <a:rPr lang="ko-KR" altLang="en-US" sz="1800" dirty="0">
-                <a:solidFill>
-                  <a:srgbClr val="101D42"/>
-                </a:solidFill>
-                <a:latin typeface="Noto Sans KR" pitchFamily="34" charset="0"/>
-                <a:ea typeface="Noto Sans KR" pitchFamily="34" charset="-127"/>
-                <a:cs typeface="Noto Sans KR" pitchFamily="34" charset="-120"/>
-              </a:rPr>
-              <a:t>하는 현상이 관찰됐습니다.</a:t>
-            </a:r>
-            <a:endParaRPr lang="en-US" sz="1800" dirty="0"/>
+                <a:ea typeface="Noto Sans KR" pitchFamily="34" charset="-122"/>
+                <a:cs typeface="Noto Sans KR" pitchFamily="34" charset="-120"/>
+              </a:rPr>
+              <a:t>충분히 생각할 시간</a:t>
+            </a:r>
+            <a:pPr algn="l" indent="0" marL="0">
+              <a:lnSpc>
+                <a:spcPts val="2500"/>
+              </a:lnSpc>
+              <a:buNone/>
+            </a:pPr>
+            <a:r>
+              <a:rPr lang="ko-KR" altLang="en-US" sz="1750" dirty="0">
+                <a:solidFill>
+                  <a:srgbClr val="101D42"/>
+                </a:solidFill>
+                <a:latin typeface="Noto Sans KR" pitchFamily="34" charset="0"/>
+                <a:ea typeface="Noto Sans KR" pitchFamily="34" charset="-122"/>
+                <a:cs typeface="Noto Sans KR" pitchFamily="34" charset="-120"/>
+              </a:rPr>
+              <a:t>을 주는</a:t>
+            </a:r>
+            <a:endParaRPr lang="en-US" sz="1750" dirty="0"/>
+          </a:p>
+          <a:p>
+            <a:pPr algn="l" indent="0" marL="0">
+              <a:lnSpc>
+                <a:spcPts val="2500"/>
+              </a:lnSpc>
+              <a:buNone/>
+            </a:pPr>
+            <a:r>
+              <a:rPr lang="ko-KR" altLang="en-US" sz="1750" dirty="0">
+                <a:solidFill>
+                  <a:srgbClr val="101D42"/>
+                </a:solidFill>
+                <a:latin typeface="Noto Sans KR" pitchFamily="34" charset="0"/>
+                <a:ea typeface="Noto Sans KR" pitchFamily="34" charset="-122"/>
+                <a:cs typeface="Noto Sans KR" pitchFamily="34" charset="-120"/>
+              </a:rPr>
+              <a:t>방향으로 써야 합니다.</a:t>
+            </a:r>
+            <a:endParaRPr lang="en-US" sz="1750" dirty="0"/>
           </a:p>
         </p:txBody>
       </p:sp>
       <p:sp>
         <p:nvSpPr>
-          <p:cNvPr id="30" name="txt-4-7"/>
+          <p:cNvPr id="33" name="txt-4-10"/>
           <p:cNvSpPr txBox="1"/>
           <p:nvPr/>
         </p:nvSpPr>
         <p:spPr>
           <a:xfrm>
-            <a:off x="381000" y="5567426"/>
-            <a:ext cx="7140956" cy="759460"/>
+            <a:off x="545973" y="8965946"/>
+            <a:ext cx="224155" cy="214630"/>
           </a:xfrm>
           <a:prstGeom prst="rect">
             <a:avLst/>
@@ -5812,166 +9093,35 @@
           <a:p>
             <a:pPr algn="l" indent="0" marL="0">
               <a:lnSpc>
-                <a:spcPts val="2600"/>
-              </a:lnSpc>
-              <a:buNone/>
-            </a:pPr>
-            <a:r>
-              <a:rPr lang="ko-KR" altLang="en-US" sz="1800" dirty="0">
-                <a:solidFill>
-                  <a:srgbClr val="101D42"/>
-                </a:solidFill>
-                <a:latin typeface="Noto Sans KR" pitchFamily="34" charset="0"/>
-                <a:ea typeface="Noto Sans KR" pitchFamily="34" charset="-127"/>
-                <a:cs typeface="Noto Sans KR" pitchFamily="34" charset="-120"/>
-              </a:rPr>
-              <a:t>학생이 </a:t>
-            </a:r>
-            <a:pPr algn="l" indent="0" marL="0">
-              <a:lnSpc>
-                <a:spcPts val="2600"/>
-              </a:lnSpc>
-              <a:buNone/>
-            </a:pPr>
-            <a:r>
-              <a:rPr lang="ko-KR" altLang="en-US" sz="1800" b="1" dirty="0">
-                <a:solidFill>
-                  <a:srgbClr val="101D42"/>
-                </a:solidFill>
-                <a:highlight>
-                  <a:srgbClr val="FFF0AD"/>
-                </a:highlight>
-                <a:latin typeface="Noto Sans KR" pitchFamily="34" charset="0"/>
-                <a:ea typeface="Noto Sans KR" pitchFamily="34" charset="-127"/>
-                <a:cs typeface="Noto Sans KR" pitchFamily="34" charset="-120"/>
-              </a:rPr>
-              <a:t>자기 말로 설명</a:t>
-            </a:r>
-            <a:pPr algn="l" indent="0" marL="0">
-              <a:lnSpc>
-                <a:spcPts val="2600"/>
-              </a:lnSpc>
-              <a:buNone/>
-            </a:pPr>
-            <a:r>
-              <a:rPr lang="ko-KR" altLang="en-US" sz="1800" dirty="0">
-                <a:solidFill>
-                  <a:srgbClr val="101D42"/>
-                </a:solidFill>
-                <a:latin typeface="Noto Sans KR" pitchFamily="34" charset="0"/>
-                <a:ea typeface="Noto Sans KR" pitchFamily="34" charset="-127"/>
-                <a:cs typeface="Noto Sans KR" pitchFamily="34" charset="-120"/>
-              </a:rPr>
-              <a:t>하고, </a:t>
-            </a:r>
-            <a:pPr algn="l" indent="0" marL="0">
-              <a:lnSpc>
-                <a:spcPts val="2600"/>
-              </a:lnSpc>
-              <a:buNone/>
-            </a:pPr>
-            <a:r>
-              <a:rPr lang="ko-KR" altLang="en-US" sz="1800" b="1" dirty="0">
-                <a:solidFill>
-                  <a:srgbClr val="101D42"/>
-                </a:solidFill>
-                <a:highlight>
-                  <a:srgbClr val="FFF0AD"/>
-                </a:highlight>
-                <a:latin typeface="Noto Sans KR" pitchFamily="34" charset="0"/>
-                <a:ea typeface="Noto Sans KR" pitchFamily="34" charset="-127"/>
-                <a:cs typeface="Noto Sans KR" pitchFamily="34" charset="-120"/>
-              </a:rPr>
-              <a:t>책에서 근거를 찾고</a:t>
-            </a:r>
-            <a:pPr algn="l" indent="0" marL="0">
-              <a:lnSpc>
-                <a:spcPts val="2600"/>
-              </a:lnSpc>
-              <a:buNone/>
-            </a:pPr>
-            <a:r>
-              <a:rPr lang="ko-KR" altLang="en-US" sz="1800" dirty="0">
-                <a:solidFill>
-                  <a:srgbClr val="101D42"/>
-                </a:solidFill>
-                <a:latin typeface="Noto Sans KR" pitchFamily="34" charset="0"/>
-                <a:ea typeface="Noto Sans KR" pitchFamily="34" charset="-127"/>
-                <a:cs typeface="Noto Sans KR" pitchFamily="34" charset="-120"/>
-              </a:rPr>
-              <a:t>, </a:t>
-            </a:r>
-            <a:pPr algn="l" indent="0" marL="0">
-              <a:lnSpc>
-                <a:spcPts val="2600"/>
-              </a:lnSpc>
-              <a:buNone/>
-            </a:pPr>
-            <a:r>
-              <a:rPr lang="ko-KR" altLang="en-US" sz="1800" b="1" dirty="0">
-                <a:solidFill>
-                  <a:srgbClr val="101D42"/>
-                </a:solidFill>
-                <a:highlight>
-                  <a:srgbClr val="FFF0AD"/>
-                </a:highlight>
-                <a:latin typeface="Noto Sans KR" pitchFamily="34" charset="0"/>
-                <a:ea typeface="Noto Sans KR" pitchFamily="34" charset="-127"/>
-                <a:cs typeface="Noto Sans KR" pitchFamily="34" charset="-120"/>
-              </a:rPr>
-              <a:t>다른 상황에 적용</a:t>
-            </a:r>
-            <a:pPr algn="l" indent="0" marL="0">
-              <a:lnSpc>
-                <a:spcPts val="2600"/>
-              </a:lnSpc>
-              <a:buNone/>
-            </a:pPr>
-            <a:r>
-              <a:rPr lang="ko-KR" altLang="en-US" sz="1800" dirty="0">
-                <a:solidFill>
-                  <a:srgbClr val="101D42"/>
-                </a:solidFill>
-                <a:latin typeface="Noto Sans KR" pitchFamily="34" charset="0"/>
-                <a:ea typeface="Noto Sans KR" pitchFamily="34" charset="-127"/>
-                <a:cs typeface="Noto Sans KR" pitchFamily="34" charset="-120"/>
-              </a:rPr>
-              <a:t>해 보는</a:t>
-            </a:r>
-            <a:endParaRPr lang="en-US" sz="1800" dirty="0"/>
-          </a:p>
-          <a:p>
-            <a:pPr algn="l" indent="0" marL="0">
-              <a:lnSpc>
-                <a:spcPts val="2600"/>
-              </a:lnSpc>
-              <a:buNone/>
-            </a:pPr>
-            <a:r>
-              <a:rPr lang="ko-KR" altLang="en-US" sz="1800" dirty="0">
-                <a:solidFill>
-                  <a:srgbClr val="101D42"/>
-                </a:solidFill>
-                <a:latin typeface="Noto Sans KR" pitchFamily="34" charset="0"/>
-                <a:ea typeface="Noto Sans KR" pitchFamily="34" charset="-127"/>
-                <a:cs typeface="Noto Sans KR" pitchFamily="34" charset="-120"/>
-              </a:rPr>
-              <a:t>활동이 필요합니다.</a:t>
-            </a:r>
-            <a:endParaRPr lang="en-US" sz="1800" dirty="0"/>
+                <a:spcPts val="1300"/>
+              </a:lnSpc>
+              <a:buNone/>
+            </a:pPr>
+            <a:r>
+              <a:rPr lang="ko-KR" altLang="en-US" sz="1000" b="1" dirty="0">
+                <a:solidFill>
+                  <a:srgbClr val="FFFFFF"/>
+                </a:solidFill>
+                <a:latin typeface="Noto Sans KR" pitchFamily="34" charset="0"/>
+                <a:ea typeface="Noto Sans KR" pitchFamily="34" charset="-122"/>
+                <a:cs typeface="Noto Sans KR" pitchFamily="34" charset="-120"/>
+              </a:rPr>
+              <a:t>?</a:t>
+            </a:r>
+            <a:endParaRPr lang="en-US" sz="1000" dirty="0"/>
           </a:p>
         </p:txBody>
       </p:sp>
       <p:sp>
         <p:nvSpPr>
-          <p:cNvPr id="31" name="txt-4-8"/>
+          <p:cNvPr id="34" name="txt-4-11"/>
           <p:cNvSpPr txBox="1"/>
           <p:nvPr/>
         </p:nvSpPr>
         <p:spPr>
           <a:xfrm>
-            <a:off x="863346" y="7060057"/>
-            <a:ext cx="6186678" cy="407797"/>
+            <a:off x="812673" y="8910447"/>
+            <a:ext cx="2582672" cy="880110"/>
           </a:xfrm>
           <a:prstGeom prst="rect">
             <a:avLst/>
@@ -5985,35 +9135,75 @@
           <a:p>
             <a:pPr algn="l" indent="0" marL="0">
               <a:lnSpc>
-                <a:spcPts val="2470"/>
-              </a:lnSpc>
-              <a:buNone/>
-            </a:pPr>
-            <a:r>
-              <a:rPr lang="ko-KR" altLang="en-US" sz="1900" dirty="0">
+                <a:spcPts val="2100"/>
+              </a:lnSpc>
+              <a:buNone/>
+            </a:pPr>
+            <a:r>
+              <a:rPr lang="ko-KR" altLang="en-US" sz="1300" b="1" dirty="0">
                 <a:solidFill>
                   <a:srgbClr val="15543C"/>
                 </a:solidFill>
-                <a:latin typeface="Noto Serif KR Black" pitchFamily="34" charset="0"/>
-                <a:ea typeface="Noto Serif KR Black" pitchFamily="34" charset="-127"/>
-                <a:cs typeface="Noto Serif KR Black" pitchFamily="34" charset="-120"/>
-              </a:rPr>
-              <a:t>디지털 교육의 중심에도 학생의 사고가 있어야 합니다</a:t>
-            </a:r>
-            <a:endParaRPr lang="en-US" sz="1900" dirty="0"/>
+                <a:latin typeface="Noto Sans KR" pitchFamily="34" charset="0"/>
+                <a:ea typeface="Noto Sans KR" pitchFamily="34" charset="-122"/>
+                <a:cs typeface="Noto Sans KR" pitchFamily="34" charset="-120"/>
+              </a:rPr>
+              <a:t>내 말로 설명할 수 있는가?</a:t>
+            </a:r>
+            <a:endParaRPr lang="en-US" sz="1300" dirty="0"/>
+          </a:p>
+          <a:p>
+            <a:pPr algn="l" indent="0" marL="0">
+              <a:lnSpc>
+                <a:spcPts val="2100"/>
+              </a:lnSpc>
+              <a:buNone/>
+            </a:pPr>
+            <a:r>
+              <a:rPr lang="ko-KR" altLang="en-US" sz="1300" b="1" dirty="0">
+                <a:solidFill>
+                  <a:srgbClr val="15543C"/>
+                </a:solidFill>
+                <a:latin typeface="Noto Sans KR" pitchFamily="34" charset="0"/>
+                <a:ea typeface="Noto Sans KR" pitchFamily="34" charset="-122"/>
+                <a:cs typeface="Noto Sans KR" pitchFamily="34" charset="-120"/>
+              </a:rPr>
+              <a:t>그렇게 생각한 근거는 무엇인가?</a:t>
+            </a:r>
+            <a:endParaRPr lang="en-US" sz="1300" dirty="0"/>
+          </a:p>
+          <a:p>
+            <a:pPr algn="l" indent="0" marL="0">
+              <a:lnSpc>
+                <a:spcPts val="2100"/>
+              </a:lnSpc>
+              <a:buNone/>
+            </a:pPr>
+            <a:r>
+              <a:rPr lang="ko-KR" altLang="en-US" sz="1300" b="1" dirty="0">
+                <a:solidFill>
+                  <a:srgbClr val="15543C"/>
+                </a:solidFill>
+                <a:latin typeface="Noto Sans KR" pitchFamily="34" charset="0"/>
+                <a:ea typeface="Noto Sans KR" pitchFamily="34" charset="-122"/>
+                <a:cs typeface="Noto Sans KR" pitchFamily="34" charset="-120"/>
+              </a:rPr>
+              <a:t>다른 상황에도 적용할 수 있는가?</a:t>
+            </a:r>
+            <a:endParaRPr lang="en-US" sz="1300" dirty="0"/>
           </a:p>
         </p:txBody>
       </p:sp>
       <p:sp>
         <p:nvSpPr>
-          <p:cNvPr id="32" name="txt-4-9"/>
+          <p:cNvPr id="35" name="txt-4-12"/>
           <p:cNvSpPr txBox="1"/>
           <p:nvPr/>
         </p:nvSpPr>
         <p:spPr>
           <a:xfrm>
-            <a:off x="381000" y="7565136"/>
-            <a:ext cx="7140956" cy="1047750"/>
+            <a:off x="545973" y="9232646"/>
+            <a:ext cx="224155" cy="214630"/>
           </a:xfrm>
           <a:prstGeom prst="rect">
             <a:avLst/>
@@ -6027,148 +9217,34 @@
           <a:p>
             <a:pPr algn="l" indent="0" marL="0">
               <a:lnSpc>
-                <a:spcPts val="2500"/>
-              </a:lnSpc>
-              <a:buNone/>
-            </a:pPr>
-            <a:r>
-              <a:rPr lang="ko-KR" altLang="en-US" sz="1750" dirty="0">
-                <a:solidFill>
-                  <a:srgbClr val="101D42"/>
-                </a:solidFill>
-                <a:latin typeface="Noto Sans KR" pitchFamily="34" charset="0"/>
-                <a:ea typeface="Noto Sans KR" pitchFamily="34" charset="-127"/>
-                <a:cs typeface="Noto Sans KR" pitchFamily="34" charset="-120"/>
-              </a:rPr>
-              <a:t>AI가 빠르게 답을 제시해도, 그 </a:t>
-            </a:r>
-            <a:pPr algn="l" indent="0" marL="0">
-              <a:lnSpc>
-                <a:spcPts val="2500"/>
-              </a:lnSpc>
-              <a:buNone/>
-            </a:pPr>
-            <a:r>
-              <a:rPr lang="ko-KR" altLang="en-US" sz="1750" b="1" dirty="0">
-                <a:solidFill>
-                  <a:srgbClr val="101D42"/>
-                </a:solidFill>
-                <a:highlight>
-                  <a:srgbClr val="FFF0AD"/>
-                </a:highlight>
-                <a:latin typeface="Noto Sans KR" pitchFamily="34" charset="0"/>
-                <a:ea typeface="Noto Sans KR" pitchFamily="34" charset="-127"/>
-                <a:cs typeface="Noto Sans KR" pitchFamily="34" charset="-120"/>
-              </a:rPr>
-              <a:t>뜻과 근거를 판단하는 힘</a:t>
-            </a:r>
-            <a:pPr algn="l" indent="0" marL="0">
-              <a:lnSpc>
-                <a:spcPts val="2500"/>
-              </a:lnSpc>
-              <a:buNone/>
-            </a:pPr>
-            <a:r>
-              <a:rPr lang="ko-KR" altLang="en-US" sz="1750" dirty="0">
-                <a:solidFill>
-                  <a:srgbClr val="101D42"/>
-                </a:solidFill>
-                <a:latin typeface="Noto Sans KR" pitchFamily="34" charset="0"/>
-                <a:ea typeface="Noto Sans KR" pitchFamily="34" charset="-127"/>
-                <a:cs typeface="Noto Sans KR" pitchFamily="34" charset="-120"/>
-              </a:rPr>
-              <a:t>은 학생 안에 있어야</a:t>
-            </a:r>
-            <a:endParaRPr lang="en-US" sz="1750" dirty="0"/>
-          </a:p>
-          <a:p>
-            <a:pPr algn="l" indent="0" marL="0">
-              <a:lnSpc>
-                <a:spcPts val="2500"/>
-              </a:lnSpc>
-              <a:buNone/>
-            </a:pPr>
-            <a:r>
-              <a:rPr lang="ko-KR" altLang="en-US" sz="1750" dirty="0">
-                <a:solidFill>
-                  <a:srgbClr val="101D42"/>
-                </a:solidFill>
-                <a:latin typeface="Noto Sans KR" pitchFamily="34" charset="0"/>
-                <a:ea typeface="Noto Sans KR" pitchFamily="34" charset="-127"/>
-                <a:cs typeface="Noto Sans KR" pitchFamily="34" charset="-120"/>
-              </a:rPr>
-              <a:t>합니다. 기술은 읽기와 표현을 돕고, 학생에게 </a:t>
-            </a:r>
-            <a:pPr algn="l" indent="0" marL="0">
-              <a:lnSpc>
-                <a:spcPts val="2500"/>
-              </a:lnSpc>
-              <a:buNone/>
-            </a:pPr>
-            <a:r>
-              <a:rPr lang="ko-KR" altLang="en-US" sz="1750" b="1" dirty="0">
-                <a:solidFill>
-                  <a:srgbClr val="101D42"/>
-                </a:solidFill>
-                <a:highlight>
-                  <a:srgbClr val="FFF0AD"/>
-                </a:highlight>
-                <a:latin typeface="Noto Sans KR" pitchFamily="34" charset="0"/>
-                <a:ea typeface="Noto Sans KR" pitchFamily="34" charset="-127"/>
-                <a:cs typeface="Noto Sans KR" pitchFamily="34" charset="-120"/>
-              </a:rPr>
-              <a:t>충분히 생각할 시간</a:t>
-            </a:r>
-            <a:pPr algn="l" indent="0" marL="0">
-              <a:lnSpc>
-                <a:spcPts val="2500"/>
-              </a:lnSpc>
-              <a:buNone/>
-            </a:pPr>
-            <a:r>
-              <a:rPr lang="ko-KR" altLang="en-US" sz="1750" dirty="0">
-                <a:solidFill>
-                  <a:srgbClr val="101D42"/>
-                </a:solidFill>
-                <a:latin typeface="Noto Sans KR" pitchFamily="34" charset="0"/>
-                <a:ea typeface="Noto Sans KR" pitchFamily="34" charset="-127"/>
-                <a:cs typeface="Noto Sans KR" pitchFamily="34" charset="-120"/>
-              </a:rPr>
-              <a:t>을 주는</a:t>
-            </a:r>
-            <a:endParaRPr lang="en-US" sz="1750" dirty="0"/>
-          </a:p>
-          <a:p>
-            <a:pPr algn="l" indent="0" marL="0">
-              <a:lnSpc>
-                <a:spcPts val="2500"/>
-              </a:lnSpc>
-              <a:buNone/>
-            </a:pPr>
-            <a:r>
-              <a:rPr lang="ko-KR" altLang="en-US" sz="1750" dirty="0">
-                <a:solidFill>
-                  <a:srgbClr val="101D42"/>
-                </a:solidFill>
-                <a:latin typeface="Noto Sans KR" pitchFamily="34" charset="0"/>
-                <a:ea typeface="Noto Sans KR" pitchFamily="34" charset="-127"/>
-                <a:cs typeface="Noto Sans KR" pitchFamily="34" charset="-120"/>
-              </a:rPr>
-              <a:t>방향으로 써야 합니다.</a:t>
-            </a:r>
-            <a:endParaRPr lang="en-US" sz="1750" dirty="0"/>
+                <a:spcPts val="1300"/>
+              </a:lnSpc>
+              <a:buNone/>
+            </a:pPr>
+            <a:r>
+              <a:rPr lang="ko-KR" altLang="en-US" sz="1000" b="1" dirty="0">
+                <a:solidFill>
+                  <a:srgbClr val="FFFFFF"/>
+                </a:solidFill>
+                <a:latin typeface="Noto Sans KR" pitchFamily="34" charset="0"/>
+                <a:ea typeface="Noto Sans KR" pitchFamily="34" charset="-122"/>
+                <a:cs typeface="Noto Sans KR" pitchFamily="34" charset="-120"/>
+              </a:rPr>
+              <a:t>?</a:t>
+            </a:r>
+            <a:endParaRPr lang="en-US" sz="1000" dirty="0"/>
           </a:p>
         </p:txBody>
       </p:sp>
       <p:sp>
         <p:nvSpPr>
-          <p:cNvPr id="33" name="txt-4-10"/>
+          <p:cNvPr id="36" name="txt-4-13"/>
           <p:cNvSpPr txBox="1"/>
           <p:nvPr/>
         </p:nvSpPr>
         <p:spPr>
           <a:xfrm>
-            <a:off x="545973" y="8965946"/>
+            <a:off x="545973" y="9499346"/>
             <a:ext cx="224155" cy="214630"/>
           </a:xfrm>
           <a:prstGeom prst="rect">
@@ -6193,7 +9269,7 @@
                   <a:srgbClr val="FFFFFF"/>
                 </a:solidFill>
                 <a:latin typeface="Noto Sans KR" pitchFamily="34" charset="0"/>
-                <a:ea typeface="Noto Sans KR" pitchFamily="34" charset="-127"/>
+                <a:ea typeface="Noto Sans KR" pitchFamily="34" charset="-122"/>
                 <a:cs typeface="Noto Sans KR" pitchFamily="34" charset="-120"/>
               </a:rPr>
               <a:t>?</a:t>
@@ -6204,14 +9280,14 @@
       </p:sp>
       <p:sp>
         <p:nvSpPr>
-          <p:cNvPr id="34" name="txt-4-11"/>
+          <p:cNvPr id="37" name="txt-4-14"/>
           <p:cNvSpPr txBox="1"/>
           <p:nvPr/>
         </p:nvSpPr>
         <p:spPr>
           <a:xfrm>
-            <a:off x="812673" y="8910447"/>
-            <a:ext cx="2582672" cy="880110"/>
+            <a:off x="381000" y="9901301"/>
+            <a:ext cx="6350000" cy="408940"/>
           </a:xfrm>
           <a:prstGeom prst="rect">
             <a:avLst/>
@@ -6225,75 +9301,55 @@
           <a:p>
             <a:pPr algn="l" indent="0" marL="0">
               <a:lnSpc>
-                <a:spcPts val="2100"/>
-              </a:lnSpc>
-              <a:buNone/>
-            </a:pPr>
-            <a:r>
-              <a:rPr lang="ko-KR" altLang="en-US" sz="1300" b="1" dirty="0">
-                <a:solidFill>
-                  <a:srgbClr val="15543C"/>
-                </a:solidFill>
-                <a:latin typeface="Noto Sans KR" pitchFamily="34" charset="0"/>
-                <a:ea typeface="Noto Sans KR" pitchFamily="34" charset="-127"/>
-                <a:cs typeface="Noto Sans KR" pitchFamily="34" charset="-120"/>
-              </a:rPr>
-              <a:t>내 말로 설명할 수 있는가?</a:t>
-            </a:r>
-            <a:endParaRPr lang="en-US" sz="1300" dirty="0"/>
-          </a:p>
-          <a:p>
-            <a:pPr algn="l" indent="0" marL="0">
-              <a:lnSpc>
-                <a:spcPts val="2100"/>
-              </a:lnSpc>
-              <a:buNone/>
-            </a:pPr>
-            <a:r>
-              <a:rPr lang="ko-KR" altLang="en-US" sz="1300" b="1" dirty="0">
-                <a:solidFill>
-                  <a:srgbClr val="15543C"/>
-                </a:solidFill>
-                <a:latin typeface="Noto Sans KR" pitchFamily="34" charset="0"/>
-                <a:ea typeface="Noto Sans KR" pitchFamily="34" charset="-127"/>
-                <a:cs typeface="Noto Sans KR" pitchFamily="34" charset="-120"/>
-              </a:rPr>
-              <a:t>그렇게 생각한 근거는 무엇인가?</a:t>
-            </a:r>
-            <a:endParaRPr lang="en-US" sz="1300" dirty="0"/>
-          </a:p>
-          <a:p>
-            <a:pPr algn="l" indent="0" marL="0">
-              <a:lnSpc>
-                <a:spcPts val="2100"/>
-              </a:lnSpc>
-              <a:buNone/>
-            </a:pPr>
-            <a:r>
-              <a:rPr lang="ko-KR" altLang="en-US" sz="1300" b="1" dirty="0">
-                <a:solidFill>
-                  <a:srgbClr val="15543C"/>
-                </a:solidFill>
-                <a:latin typeface="Noto Sans KR" pitchFamily="34" charset="0"/>
-                <a:ea typeface="Noto Sans KR" pitchFamily="34" charset="-127"/>
-                <a:cs typeface="Noto Sans KR" pitchFamily="34" charset="-120"/>
-              </a:rPr>
-              <a:t>다른 상황에도 적용할 수 있는가?</a:t>
-            </a:r>
-            <a:endParaRPr lang="en-US" sz="1300" dirty="0"/>
+                <a:spcPts val="1400"/>
+              </a:lnSpc>
+              <a:buNone/>
+            </a:pPr>
+            <a:r>
+              <a:rPr lang="ko-KR" altLang="en-US" sz="830" dirty="0">
+                <a:solidFill>
+                  <a:srgbClr val="43516A"/>
+                </a:solidFill>
+                <a:latin typeface="Noto Sans KR" pitchFamily="34" charset="0"/>
+                <a:ea typeface="Noto Sans KR" pitchFamily="34" charset="-122"/>
+                <a:cs typeface="Noto Sans KR" pitchFamily="34" charset="-120"/>
+              </a:rPr>
+              <a:t>Kreijkes 외(2026), Computers &amp; Education 243, 105514.</a:t>
+            </a:r>
+            <a:endParaRPr lang="en-US" sz="830" dirty="0"/>
+          </a:p>
+          <a:p>
+            <a:pPr algn="l" indent="0" marL="0">
+              <a:lnSpc>
+                <a:spcPts val="1400"/>
+              </a:lnSpc>
+              <a:buNone/>
+            </a:pPr>
+            <a:r>
+              <a:rPr lang="ko-KR" altLang="en-US" sz="830" dirty="0">
+                <a:solidFill>
+                  <a:srgbClr val="43516A"/>
+                </a:solidFill>
+                <a:latin typeface="Noto Sans KR" pitchFamily="34" charset="0"/>
+                <a:ea typeface="Noto Sans KR" pitchFamily="34" charset="-122"/>
+                <a:cs typeface="Noto Sans KR" pitchFamily="34" charset="-120"/>
+              </a:rPr>
+              <a:t>14~15세 중등학생 연구이며, 초등학생이나 부기의 효과를 직접 검증한 결과는 아닙니다.</a:t>
+            </a:r>
+            <a:endParaRPr lang="en-US" sz="830" dirty="0"/>
           </a:p>
         </p:txBody>
       </p:sp>
       <p:sp>
         <p:nvSpPr>
-          <p:cNvPr id="35" name="txt-4-12"/>
+          <p:cNvPr id="38" name="txt-4-15"/>
           <p:cNvSpPr txBox="1"/>
           <p:nvPr/>
         </p:nvSpPr>
         <p:spPr>
           <a:xfrm>
-            <a:off x="545973" y="9232646"/>
-            <a:ext cx="224155" cy="214630"/>
+            <a:off x="3504565" y="10362692"/>
+            <a:ext cx="424815" cy="214630"/>
           </a:xfrm>
           <a:prstGeom prst="rect">
             <a:avLst/>
@@ -6312,158 +9368,12 @@
               <a:buNone/>
             </a:pPr>
             <a:r>
-              <a:rPr lang="ko-KR" altLang="en-US" sz="1000" b="1" dirty="0">
-                <a:solidFill>
-                  <a:srgbClr val="FFFFFF"/>
-                </a:solidFill>
-                <a:latin typeface="Noto Sans KR" pitchFamily="34" charset="0"/>
-                <a:ea typeface="Noto Sans KR" pitchFamily="34" charset="-127"/>
-                <a:cs typeface="Noto Sans KR" pitchFamily="34" charset="-120"/>
-              </a:rPr>
-              <a:t>?</a:t>
-            </a:r>
-            <a:endParaRPr lang="en-US" sz="1000" dirty="0"/>
-          </a:p>
-        </p:txBody>
-      </p:sp>
-      <p:sp>
-        <p:nvSpPr>
-          <p:cNvPr id="36" name="txt-4-13"/>
-          <p:cNvSpPr txBox="1"/>
-          <p:nvPr/>
-        </p:nvSpPr>
-        <p:spPr>
-          <a:xfrm>
-            <a:off x="545973" y="9499346"/>
-            <a:ext cx="224155" cy="214630"/>
-          </a:xfrm>
-          <a:prstGeom prst="rect">
-            <a:avLst/>
-          </a:prstGeom>
-          <a:noFill/>
-          <a:ln/>
-        </p:spPr>
-        <p:txBody>
-          <a:bodyPr wrap="square" lIns="0" tIns="0" rIns="0" bIns="0" rtlCol="0" anchor="t"/>
-          <a:lstStyle/>
-          <a:p>
-            <a:pPr algn="l" indent="0" marL="0">
-              <a:lnSpc>
-                <a:spcPts val="1300"/>
-              </a:lnSpc>
-              <a:buNone/>
-            </a:pPr>
-            <a:r>
-              <a:rPr lang="ko-KR" altLang="en-US" sz="1000" b="1" dirty="0">
-                <a:solidFill>
-                  <a:srgbClr val="FFFFFF"/>
-                </a:solidFill>
-                <a:latin typeface="Noto Sans KR" pitchFamily="34" charset="0"/>
-                <a:ea typeface="Noto Sans KR" pitchFamily="34" charset="-127"/>
-                <a:cs typeface="Noto Sans KR" pitchFamily="34" charset="-120"/>
-              </a:rPr>
-              <a:t>?</a:t>
-            </a:r>
-            <a:endParaRPr lang="en-US" sz="1000" dirty="0"/>
-          </a:p>
-        </p:txBody>
-      </p:sp>
-      <p:sp>
-        <p:nvSpPr>
-          <p:cNvPr id="37" name="txt-4-14"/>
-          <p:cNvSpPr txBox="1"/>
-          <p:nvPr/>
-        </p:nvSpPr>
-        <p:spPr>
-          <a:xfrm>
-            <a:off x="381000" y="9901301"/>
-            <a:ext cx="4458208" cy="408940"/>
-          </a:xfrm>
-          <a:prstGeom prst="rect">
-            <a:avLst/>
-          </a:prstGeom>
-          <a:noFill/>
-          <a:ln/>
-        </p:spPr>
-        <p:txBody>
-          <a:bodyPr wrap="square" lIns="0" tIns="0" rIns="0" bIns="0" rtlCol="0" anchor="t"/>
-          <a:lstStyle/>
-          <a:p>
-            <a:pPr algn="l" indent="0" marL="0">
-              <a:lnSpc>
-                <a:spcPts val="1400"/>
-              </a:lnSpc>
-              <a:buNone/>
-            </a:pPr>
-            <a:r>
-              <a:rPr lang="ko-KR" altLang="en-US" sz="830" dirty="0">
-                <a:solidFill>
-                  <a:srgbClr val="43516A"/>
-                </a:solidFill>
-                <a:latin typeface="Noto Sans KR" pitchFamily="34" charset="0"/>
-                <a:ea typeface="Noto Sans KR" pitchFamily="34" charset="-127"/>
-                <a:cs typeface="Noto Sans KR" pitchFamily="34" charset="-120"/>
-              </a:rPr>
-              <a:t>연구는 성인의 인터넷 검색 실험이며, 초등학생의 SNS 효과를 직접 검증한 결과는 아닙니다.</a:t>
-            </a:r>
-            <a:endParaRPr lang="en-US" sz="830" dirty="0"/>
-          </a:p>
-          <a:p>
-            <a:pPr algn="l" indent="0" marL="0">
-              <a:lnSpc>
-                <a:spcPts val="1400"/>
-              </a:lnSpc>
-              <a:buNone/>
-            </a:pPr>
-            <a:r>
-              <a:rPr lang="ko-KR" altLang="en-US" sz="830" dirty="0">
-                <a:solidFill>
-                  <a:srgbClr val="43516A"/>
-                </a:solidFill>
-                <a:latin typeface="Noto Sans KR" pitchFamily="34" charset="0"/>
-                <a:ea typeface="Noto Sans KR" pitchFamily="34" charset="-127"/>
-                <a:cs typeface="Noto Sans KR" pitchFamily="34" charset="-120"/>
-              </a:rPr>
-              <a:t>출처: Fisher et al. (2015) · Ward (2021)</a:t>
-            </a:r>
-            <a:endParaRPr lang="en-US" sz="830" dirty="0"/>
-          </a:p>
-        </p:txBody>
-      </p:sp>
-      <p:sp>
-        <p:nvSpPr>
-          <p:cNvPr id="38" name="txt-4-15"/>
-          <p:cNvSpPr txBox="1"/>
-          <p:nvPr/>
-        </p:nvSpPr>
-        <p:spPr>
-          <a:xfrm>
-            <a:off x="3504565" y="10362692"/>
-            <a:ext cx="424815" cy="214630"/>
-          </a:xfrm>
-          <a:prstGeom prst="rect">
-            <a:avLst/>
-          </a:prstGeom>
-          <a:noFill/>
-          <a:ln/>
-        </p:spPr>
-        <p:txBody>
-          <a:bodyPr wrap="square" lIns="0" tIns="0" rIns="0" bIns="0" rtlCol="0" anchor="t"/>
-          <a:lstStyle/>
-          <a:p>
-            <a:pPr algn="l" indent="0" marL="0">
-              <a:lnSpc>
-                <a:spcPts val="1300"/>
-              </a:lnSpc>
-              <a:buNone/>
-            </a:pPr>
-            <a:r>
               <a:rPr lang="ko-KR" altLang="en-US" sz="1000" dirty="0">
                 <a:solidFill>
                   <a:srgbClr val="101D42"/>
                 </a:solidFill>
                 <a:latin typeface="Noto Sans KR" pitchFamily="34" charset="0"/>
-                <a:ea typeface="Noto Sans KR" pitchFamily="34" charset="-127"/>
+                <a:ea typeface="Noto Sans KR" pitchFamily="34" charset="-122"/>
                 <a:cs typeface="Noto Sans KR" pitchFamily="34" charset="-120"/>
               </a:rPr>
               <a:t>3 / 4</a:t>
@@ -6480,9 +9390,9 @@
 </p:sld>
 </file>
 
-<file path=ppt/slides/slide4.xml><?xml version="1.0" encoding="utf-8"?>
+<file path=ppt/slides/slide5.xml><?xml version="1.0" encoding="utf-8"?>
 <p:sld xmlns:a="http://schemas.openxmlformats.org/drawingml/2006/main" xmlns:r="http://schemas.openxmlformats.org/officeDocument/2006/relationships" xmlns:p="http://schemas.openxmlformats.org/presentationml/2006/main">
-  <p:cSld name="Slide 4">
+  <p:cSld name="Slide 5">
     <p:bg>
       <p:bgPr>
         <a:solidFill>
@@ -7595,7 +10505,7 @@
                   <a:srgbClr val="101D42"/>
                 </a:solidFill>
                 <a:latin typeface="Noto Serif KR Black" pitchFamily="34" charset="0"/>
-                <a:ea typeface="Noto Serif KR Black" pitchFamily="34" charset="-127"/>
+                <a:ea typeface="Noto Serif KR Black" pitchFamily="34" charset="-122"/>
                 <a:cs typeface="Noto Serif KR Black" pitchFamily="34" charset="-120"/>
               </a:rPr>
               <a:t>교실의 문제에서 출발한 부기</a:t>
@@ -7637,7 +10547,7 @@
                   <a:srgbClr val="101D42"/>
                 </a:solidFill>
                 <a:latin typeface="Noto Serif KR Black" pitchFamily="34" charset="0"/>
-                <a:ea typeface="Noto Serif KR Black" pitchFamily="34" charset="-127"/>
+                <a:ea typeface="Noto Serif KR Black" pitchFamily="34" charset="-122"/>
                 <a:cs typeface="Noto Serif KR Black" pitchFamily="34" charset="-120"/>
               </a:rPr>
               <a:t>지금 학교 현장에는</a:t>
@@ -7657,7 +10567,7 @@
                   <a:srgbClr val="15543C"/>
                 </a:solidFill>
                 <a:latin typeface="Noto Serif KR Black" pitchFamily="34" charset="0"/>
-                <a:ea typeface="Noto Serif KR Black" pitchFamily="34" charset="-127"/>
+                <a:ea typeface="Noto Serif KR Black" pitchFamily="34" charset="-122"/>
                 <a:cs typeface="Noto Serif KR Black" pitchFamily="34" charset="-120"/>
               </a:rPr>
               <a:t>독서가 절실합니다.</a:t>
@@ -7699,7 +10609,7 @@
                   <a:srgbClr val="15543C"/>
                 </a:solidFill>
                 <a:latin typeface="Noto Serif KR Black" pitchFamily="34" charset="0"/>
-                <a:ea typeface="Noto Serif KR Black" pitchFamily="34" charset="-127"/>
+                <a:ea typeface="Noto Serif KR Black" pitchFamily="34" charset="-122"/>
                 <a:cs typeface="Noto Serif KR Black" pitchFamily="34" charset="-120"/>
               </a:rPr>
               <a:t>고전의 지혜에서 시작하고자 합니다</a:t>
@@ -7741,7 +10651,7 @@
                   <a:srgbClr val="101D42"/>
                 </a:solidFill>
                 <a:latin typeface="Noto Sans KR" pitchFamily="34" charset="0"/>
-                <a:ea typeface="Noto Sans KR" pitchFamily="34" charset="-127"/>
+                <a:ea typeface="Noto Sans KR" pitchFamily="34" charset="-122"/>
                 <a:cs typeface="Noto Sans KR" pitchFamily="34" charset="-120"/>
               </a:rPr>
               <a:t>사람과 세상을 이해하고 </a:t>
@@ -7761,7 +10671,7 @@
                   <a:srgbClr val="FFF0AD"/>
                 </a:highlight>
                 <a:latin typeface="Noto Sans KR" pitchFamily="34" charset="0"/>
-                <a:ea typeface="Noto Sans KR" pitchFamily="34" charset="-127"/>
+                <a:ea typeface="Noto Sans KR" pitchFamily="34" charset="-122"/>
                 <a:cs typeface="Noto Sans KR" pitchFamily="34" charset="-120"/>
               </a:rPr>
               <a:t>스스로 생각할 힘</a:t>
@@ -7778,7 +10688,7 @@
                   <a:srgbClr val="101D42"/>
                 </a:solidFill>
                 <a:latin typeface="Noto Sans KR" pitchFamily="34" charset="0"/>
-                <a:ea typeface="Noto Sans KR" pitchFamily="34" charset="-127"/>
+                <a:ea typeface="Noto Sans KR" pitchFamily="34" charset="-122"/>
                 <a:cs typeface="Noto Sans KR" pitchFamily="34" charset="-120"/>
               </a:rPr>
               <a:t>을 기르기 위해, </a:t>
@@ -7798,7 +10708,7 @@
                   <a:srgbClr val="FFF0AD"/>
                 </a:highlight>
                 <a:latin typeface="Noto Sans KR" pitchFamily="34" charset="0"/>
-                <a:ea typeface="Noto Sans KR" pitchFamily="34" charset="-127"/>
+                <a:ea typeface="Noto Sans KR" pitchFamily="34" charset="-122"/>
                 <a:cs typeface="Noto Sans KR" pitchFamily="34" charset="-120"/>
               </a:rPr>
               <a:t>고전의 지혜</a:t>
@@ -7815,7 +10725,7 @@
                   <a:srgbClr val="101D42"/>
                 </a:solidFill>
                 <a:latin typeface="Noto Sans KR" pitchFamily="34" charset="0"/>
-                <a:ea typeface="Noto Sans KR" pitchFamily="34" charset="-127"/>
+                <a:ea typeface="Noto Sans KR" pitchFamily="34" charset="-122"/>
                 <a:cs typeface="Noto Sans KR" pitchFamily="34" charset="-120"/>
               </a:rPr>
               <a:t>를</a:t>
@@ -7835,7 +10745,7 @@
                   <a:srgbClr val="101D42"/>
                 </a:solidFill>
                 <a:latin typeface="Noto Sans KR" pitchFamily="34" charset="0"/>
-                <a:ea typeface="Noto Sans KR" pitchFamily="34" charset="-127"/>
+                <a:ea typeface="Noto Sans KR" pitchFamily="34" charset="-122"/>
                 <a:cs typeface="Noto Sans KR" pitchFamily="34" charset="-120"/>
               </a:rPr>
               <a:t>빌리고자 했습니다. </a:t>
@@ -7855,7 +10765,7 @@
                   <a:srgbClr val="FFF0AD"/>
                 </a:highlight>
                 <a:latin typeface="Noto Sans KR" pitchFamily="34" charset="0"/>
-                <a:ea typeface="Noto Sans KR" pitchFamily="34" charset="-127"/>
+                <a:ea typeface="Noto Sans KR" pitchFamily="34" charset="-122"/>
                 <a:cs typeface="Noto Sans KR" pitchFamily="34" charset="-120"/>
               </a:rPr>
               <a:t>우정과 책임</a:t>
@@ -7872,7 +10782,7 @@
                   <a:srgbClr val="101D42"/>
                 </a:solidFill>
                 <a:latin typeface="Noto Sans KR" pitchFamily="34" charset="0"/>
-                <a:ea typeface="Noto Sans KR" pitchFamily="34" charset="-127"/>
+                <a:ea typeface="Noto Sans KR" pitchFamily="34" charset="-122"/>
                 <a:cs typeface="Noto Sans KR" pitchFamily="34" charset="-120"/>
               </a:rPr>
               <a:t>, </a:t>
@@ -7892,7 +10802,7 @@
                   <a:srgbClr val="FFF0AD"/>
                 </a:highlight>
                 <a:latin typeface="Noto Sans KR" pitchFamily="34" charset="0"/>
-                <a:ea typeface="Noto Sans KR" pitchFamily="34" charset="-127"/>
+                <a:ea typeface="Noto Sans KR" pitchFamily="34" charset="-122"/>
                 <a:cs typeface="Noto Sans KR" pitchFamily="34" charset="-120"/>
               </a:rPr>
               <a:t>공정과 나눔</a:t>
@@ -7909,7 +10819,7 @@
                   <a:srgbClr val="101D42"/>
                 </a:solidFill>
                 <a:latin typeface="Noto Sans KR" pitchFamily="34" charset="0"/>
-                <a:ea typeface="Noto Sans KR" pitchFamily="34" charset="-127"/>
+                <a:ea typeface="Noto Sans KR" pitchFamily="34" charset="-122"/>
                 <a:cs typeface="Noto Sans KR" pitchFamily="34" charset="-120"/>
               </a:rPr>
               <a:t>을 읽으며 ‘왜 그런 선택을 했을까’,</a:t>
@@ -7929,7 +10839,7 @@
                   <a:srgbClr val="101D42"/>
                 </a:solidFill>
                 <a:latin typeface="Noto Sans KR" pitchFamily="34" charset="0"/>
-                <a:ea typeface="Noto Sans KR" pitchFamily="34" charset="-127"/>
+                <a:ea typeface="Noto Sans KR" pitchFamily="34" charset="-122"/>
                 <a:cs typeface="Noto Sans KR" pitchFamily="34" charset="-120"/>
               </a:rPr>
               <a:t>‘나라면 어떻게 했을까’를 함께 묻습니다.</a:t>
@@ -7971,7 +10881,7 @@
                   <a:srgbClr val="15543C"/>
                 </a:solidFill>
                 <a:latin typeface="Noto Serif KR Black" pitchFamily="34" charset="0"/>
-                <a:ea typeface="Noto Serif KR Black" pitchFamily="34" charset="-127"/>
+                <a:ea typeface="Noto Serif KR Black" pitchFamily="34" charset="-122"/>
                 <a:cs typeface="Noto Serif KR Black" pitchFamily="34" charset="-120"/>
               </a:rPr>
               <a:t>초등교사들이 뜻을 모아 만들었습니다</a:t>
@@ -8013,11 +10923,14 @@
                   <a:srgbClr val="101D42"/>
                 </a:solidFill>
                 <a:latin typeface="Noto Sans KR" pitchFamily="34" charset="0"/>
-                <a:ea typeface="Noto Sans KR" pitchFamily="34" charset="-127"/>
-                <a:cs typeface="Noto Sans KR" pitchFamily="34" charset="-120"/>
-              </a:rPr>
-              <a:t>교실의 읽기 어려움을 풀고자 </a:t>
-            </a:r>
+                <a:ea typeface="Noto Sans KR" pitchFamily="34" charset="-122"/>
+                <a:cs typeface="Noto Sans KR" pitchFamily="34" charset="-120"/>
+              </a:rPr>
+              <a:t>책을 제공해도 모르는 낱말에서 멈추면 읽기의 재미를 느끼기 어렵습니다.</a:t>
+            </a:r>
+            <a:endParaRPr lang="en-US" sz="1650" dirty="0"/>
+          </a:p>
+          <a:p>
             <a:pPr algn="l" indent="0" marL="0">
               <a:lnSpc>
                 <a:spcPts val="2400"/>
@@ -8025,19 +10938,19 @@
               <a:buNone/>
             </a:pPr>
             <a:r>
-              <a:rPr lang="ko-KR" altLang="en-US" sz="1650" b="1" dirty="0">
-                <a:solidFill>
-                  <a:srgbClr val="101D42"/>
-                </a:solidFill>
-                <a:highlight>
-                  <a:srgbClr val="FFF0AD"/>
-                </a:highlight>
-                <a:latin typeface="Noto Sans KR" pitchFamily="34" charset="0"/>
-                <a:ea typeface="Noto Sans KR" pitchFamily="34" charset="-127"/>
-                <a:cs typeface="Noto Sans KR" pitchFamily="34" charset="-120"/>
-              </a:rPr>
-              <a:t>교사들이 기획</a:t>
-            </a:r>
+              <a:rPr lang="ko-KR" altLang="en-US" sz="1650" dirty="0">
+                <a:solidFill>
+                  <a:srgbClr val="101D42"/>
+                </a:solidFill>
+                <a:latin typeface="Noto Sans KR" pitchFamily="34" charset="0"/>
+                <a:ea typeface="Noto Sans KR" pitchFamily="34" charset="-122"/>
+                <a:cs typeface="Noto Sans KR" pitchFamily="34" charset="-120"/>
+              </a:rPr>
+              <a:t>읽던 자리의 뜻풀이와 교사의 질문을 연결해 이해를 돕고,</a:t>
+            </a:r>
+            <a:endParaRPr lang="en-US" sz="1650" dirty="0"/>
+          </a:p>
+          <a:p>
             <a:pPr algn="l" indent="0" marL="0">
               <a:lnSpc>
                 <a:spcPts val="2400"/>
@@ -8050,161 +10963,10 @@
                   <a:srgbClr val="101D42"/>
                 </a:solidFill>
                 <a:latin typeface="Noto Sans KR" pitchFamily="34" charset="0"/>
-                <a:ea typeface="Noto Sans KR" pitchFamily="34" charset="-127"/>
-                <a:cs typeface="Noto Sans KR" pitchFamily="34" charset="-120"/>
-              </a:rPr>
-              <a:t>하고, </a:t>
-            </a:r>
-            <a:pPr algn="l" indent="0" marL="0">
-              <a:lnSpc>
-                <a:spcPts val="2400"/>
-              </a:lnSpc>
-              <a:buNone/>
-            </a:pPr>
-            <a:r>
-              <a:rPr lang="ko-KR" altLang="en-US" sz="1650" b="1" dirty="0">
-                <a:solidFill>
-                  <a:srgbClr val="101D42"/>
-                </a:solidFill>
-                <a:highlight>
-                  <a:srgbClr val="FFF0AD"/>
-                </a:highlight>
-                <a:latin typeface="Noto Sans KR" pitchFamily="34" charset="0"/>
-                <a:ea typeface="Noto Sans KR" pitchFamily="34" charset="-127"/>
-                <a:cs typeface="Noto Sans KR" pitchFamily="34" charset="-120"/>
-              </a:rPr>
-              <a:t>기업의 지원</a:t>
-            </a:r>
-            <a:pPr algn="l" indent="0" marL="0">
-              <a:lnSpc>
-                <a:spcPts val="2400"/>
-              </a:lnSpc>
-              <a:buNone/>
-            </a:pPr>
-            <a:r>
-              <a:rPr lang="ko-KR" altLang="en-US" sz="1650" dirty="0">
-                <a:solidFill>
-                  <a:srgbClr val="101D42"/>
-                </a:solidFill>
-                <a:latin typeface="Noto Sans KR" pitchFamily="34" charset="0"/>
-                <a:ea typeface="Noto Sans KR" pitchFamily="34" charset="-127"/>
-                <a:cs typeface="Noto Sans KR" pitchFamily="34" charset="-120"/>
-              </a:rPr>
-              <a:t>을 더해 학교에</a:t>
-            </a:r>
-            <a:endParaRPr lang="en-US" sz="1650" dirty="0"/>
-          </a:p>
-          <a:p>
-            <a:pPr algn="l" indent="0" marL="0">
-              <a:lnSpc>
-                <a:spcPts val="2400"/>
-              </a:lnSpc>
-              <a:buNone/>
-            </a:pPr>
-            <a:r>
-              <a:rPr lang="ko-KR" altLang="en-US" sz="1650" dirty="0">
-                <a:solidFill>
-                  <a:srgbClr val="101D42"/>
-                </a:solidFill>
-                <a:latin typeface="Noto Sans KR" pitchFamily="34" charset="0"/>
-                <a:ea typeface="Noto Sans KR" pitchFamily="34" charset="-127"/>
-                <a:cs typeface="Noto Sans KR" pitchFamily="34" charset="-120"/>
-              </a:rPr>
-              <a:t>적용했습니다. 학교에서 </a:t>
-            </a:r>
-            <a:pPr algn="l" indent="0" marL="0">
-              <a:lnSpc>
-                <a:spcPts val="2400"/>
-              </a:lnSpc>
-              <a:buNone/>
-            </a:pPr>
-            <a:r>
-              <a:rPr lang="ko-KR" altLang="en-US" sz="1650" b="1" dirty="0">
-                <a:solidFill>
-                  <a:srgbClr val="101D42"/>
-                </a:solidFill>
-                <a:highlight>
-                  <a:srgbClr val="FFF0AD"/>
-                </a:highlight>
-                <a:latin typeface="Noto Sans KR" pitchFamily="34" charset="0"/>
-                <a:ea typeface="Noto Sans KR" pitchFamily="34" charset="-127"/>
-                <a:cs typeface="Noto Sans KR" pitchFamily="34" charset="-120"/>
-              </a:rPr>
-              <a:t>시범 사용</a:t>
-            </a:r>
-            <a:pPr algn="l" indent="0" marL="0">
-              <a:lnSpc>
-                <a:spcPts val="2400"/>
-              </a:lnSpc>
-              <a:buNone/>
-            </a:pPr>
-            <a:r>
-              <a:rPr lang="ko-KR" altLang="en-US" sz="1650" dirty="0">
-                <a:solidFill>
-                  <a:srgbClr val="101D42"/>
-                </a:solidFill>
-                <a:latin typeface="Noto Sans KR" pitchFamily="34" charset="0"/>
-                <a:ea typeface="Noto Sans KR" pitchFamily="34" charset="-127"/>
-                <a:cs typeface="Noto Sans KR" pitchFamily="34" charset="-120"/>
-              </a:rPr>
-              <a:t>을 통해 </a:t>
-            </a:r>
-            <a:pPr algn="l" indent="0" marL="0">
-              <a:lnSpc>
-                <a:spcPts val="2400"/>
-              </a:lnSpc>
-              <a:buNone/>
-            </a:pPr>
-            <a:r>
-              <a:rPr lang="ko-KR" altLang="en-US" sz="1650" b="1" dirty="0">
-                <a:solidFill>
-                  <a:srgbClr val="101D42"/>
-                </a:solidFill>
-                <a:highlight>
-                  <a:srgbClr val="FFF0AD"/>
-                </a:highlight>
-                <a:latin typeface="Noto Sans KR" pitchFamily="34" charset="0"/>
-                <a:ea typeface="Noto Sans KR" pitchFamily="34" charset="-127"/>
-                <a:cs typeface="Noto Sans KR" pitchFamily="34" charset="-120"/>
-              </a:rPr>
-              <a:t>계속 개선하고 발전</a:t>
-            </a:r>
-            <a:pPr algn="l" indent="0" marL="0">
-              <a:lnSpc>
-                <a:spcPts val="2400"/>
-              </a:lnSpc>
-              <a:buNone/>
-            </a:pPr>
-            <a:r>
-              <a:rPr lang="ko-KR" altLang="en-US" sz="1650" dirty="0">
-                <a:solidFill>
-                  <a:srgbClr val="101D42"/>
-                </a:solidFill>
-                <a:latin typeface="Noto Sans KR" pitchFamily="34" charset="0"/>
-                <a:ea typeface="Noto Sans KR" pitchFamily="34" charset="-127"/>
-                <a:cs typeface="Noto Sans KR" pitchFamily="34" charset="-120"/>
-              </a:rPr>
-              <a:t>시켜 나가고</a:t>
-            </a:r>
-            <a:endParaRPr lang="en-US" sz="1650" dirty="0"/>
-          </a:p>
-          <a:p>
-            <a:pPr algn="l" indent="0" marL="0">
-              <a:lnSpc>
-                <a:spcPts val="2400"/>
-              </a:lnSpc>
-              <a:buNone/>
-            </a:pPr>
-            <a:r>
-              <a:rPr lang="ko-KR" altLang="en-US" sz="1650" dirty="0">
-                <a:solidFill>
-                  <a:srgbClr val="101D42"/>
-                </a:solidFill>
-                <a:latin typeface="Noto Sans KR" pitchFamily="34" charset="0"/>
-                <a:ea typeface="Noto Sans KR" pitchFamily="34" charset="-127"/>
-                <a:cs typeface="Noto Sans KR" pitchFamily="34" charset="-120"/>
-              </a:rPr>
-              <a:t>있습니다.</a:t>
+                <a:ea typeface="Noto Sans KR" pitchFamily="34" charset="-122"/>
+                <a:cs typeface="Noto Sans KR" pitchFamily="34" charset="-120"/>
+              </a:rPr>
+              <a:t>한 권을 읽은 경험이 다음 책으로 이어지도록 구성했습니다.</a:t>
             </a:r>
             <a:endParaRPr lang="en-US" sz="1650" dirty="0"/>
           </a:p>
@@ -8243,7 +11005,7 @@
                   <a:srgbClr val="101D42"/>
                 </a:solidFill>
                 <a:latin typeface="Noto Sans KR" pitchFamily="34" charset="0"/>
-                <a:ea typeface="Noto Sans KR" pitchFamily="34" charset="-127"/>
+                <a:ea typeface="Noto Sans KR" pitchFamily="34" charset="-122"/>
                 <a:cs typeface="Noto Sans KR" pitchFamily="34" charset="-120"/>
               </a:rPr>
               <a:t>낱말 뜻 · 능동적 그림 읽기 · 다국어 지원</a:t>
@@ -8285,7 +11047,7 @@
                   <a:srgbClr val="15543C"/>
                 </a:solidFill>
                 <a:latin typeface="Noto Serif KR Black" pitchFamily="34" charset="0"/>
-                <a:ea typeface="Noto Serif KR Black" pitchFamily="34" charset="-127"/>
+                <a:ea typeface="Noto Serif KR Black" pitchFamily="34" charset="-122"/>
                 <a:cs typeface="Noto Serif KR Black" pitchFamily="34" charset="-120"/>
               </a:rPr>
               <a:t>읽기 지원</a:t>
@@ -8327,7 +11089,7 @@
                   <a:srgbClr val="101D42"/>
                 </a:solidFill>
                 <a:latin typeface="Noto Sans KR" pitchFamily="34" charset="0"/>
-                <a:ea typeface="Noto Sans KR" pitchFamily="34" charset="-127"/>
+                <a:ea typeface="Noto Sans KR" pitchFamily="34" charset="-122"/>
                 <a:cs typeface="Noto Sans KR" pitchFamily="34" charset="-120"/>
               </a:rPr>
               <a:t>캐릭터와의 대화 · 다양한 독후활동</a:t>
@@ -8369,7 +11131,7 @@
                   <a:srgbClr val="15543C"/>
                 </a:solidFill>
                 <a:latin typeface="Noto Serif KR Black" pitchFamily="34" charset="0"/>
-                <a:ea typeface="Noto Serif KR Black" pitchFamily="34" charset="-127"/>
+                <a:ea typeface="Noto Serif KR Black" pitchFamily="34" charset="-122"/>
                 <a:cs typeface="Noto Serif KR Black" pitchFamily="34" charset="-120"/>
               </a:rPr>
               <a:t>생각과 표현</a:t>
@@ -8411,7 +11173,7 @@
                   <a:srgbClr val="101D42"/>
                 </a:solidFill>
                 <a:latin typeface="Noto Sans KR" pitchFamily="34" charset="0"/>
-                <a:ea typeface="Noto Sans KR" pitchFamily="34" charset="-127"/>
+                <a:ea typeface="Noto Sans KR" pitchFamily="34" charset="-122"/>
                 <a:cs typeface="Noto Sans KR" pitchFamily="34" charset="-120"/>
               </a:rPr>
               <a:t>독서 기록 자산 · 수업 자료 · 학생 기록</a:t>
@@ -8453,7 +11215,7 @@
                   <a:srgbClr val="15543C"/>
                 </a:solidFill>
                 <a:latin typeface="Noto Serif KR Black" pitchFamily="34" charset="0"/>
-                <a:ea typeface="Noto Serif KR Black" pitchFamily="34" charset="-127"/>
+                <a:ea typeface="Noto Serif KR Black" pitchFamily="34" charset="-122"/>
                 <a:cs typeface="Noto Serif KR Black" pitchFamily="34" charset="-120"/>
               </a:rPr>
               <a:t>기록과 지도</a:t>
@@ -8495,10 +11257,10 @@
                   <a:srgbClr val="15543C"/>
                 </a:solidFill>
                 <a:latin typeface="Noto Serif KR Black" pitchFamily="34" charset="0"/>
-                <a:ea typeface="Noto Serif KR Black" pitchFamily="34" charset="-127"/>
+                <a:ea typeface="Noto Serif KR Black" pitchFamily="34" charset="-122"/>
                 <a:cs typeface="Noto Serif KR Black" pitchFamily="34" charset="-120"/>
               </a:rPr>
-              <a:t>모두가 차별 없이 함께 읽을 수 있도록</a:t>
+              <a:t>온라인과 오프라인에서 같은 수업을</a:t>
             </a:r>
             <a:endParaRPr lang="en-US" sz="2050" dirty="0"/>
           </a:p>
@@ -8537,11 +11299,14 @@
                   <a:srgbClr val="101D42"/>
                 </a:solidFill>
                 <a:latin typeface="Noto Sans KR" pitchFamily="34" charset="0"/>
-                <a:ea typeface="Noto Sans KR" pitchFamily="34" charset="-127"/>
-                <a:cs typeface="Noto Sans KR" pitchFamily="34" charset="-120"/>
-              </a:rPr>
-              <a:t>어려운 어휘는 </a:t>
-            </a:r>
+                <a:ea typeface="Noto Sans KR" pitchFamily="34" charset="-122"/>
+                <a:cs typeface="Noto Sans KR" pitchFamily="34" charset="-120"/>
+              </a:rPr>
+              <a:t>온라인에서는 화면에 답하고 포트폴리오에 기록합니다. 오프라인에서는 같은</a:t>
+            </a:r>
+            <a:endParaRPr lang="en-US" sz="1500" dirty="0"/>
+          </a:p>
+          <a:p>
             <a:pPr algn="l" indent="0" marL="0">
               <a:lnSpc>
                 <a:spcPts val="2100"/>
@@ -8549,169 +11314,15 @@
               <a:buNone/>
             </a:pPr>
             <a:r>
-              <a:rPr lang="ko-KR" altLang="en-US" sz="1500" b="1" dirty="0">
-                <a:solidFill>
-                  <a:srgbClr val="101D42"/>
-                </a:solidFill>
-                <a:highlight>
-                  <a:srgbClr val="FFF0AD"/>
-                </a:highlight>
-                <a:latin typeface="Noto Sans KR" pitchFamily="34" charset="0"/>
-                <a:ea typeface="Noto Sans KR" pitchFamily="34" charset="-127"/>
-                <a:cs typeface="Noto Sans KR" pitchFamily="34" charset="-120"/>
-              </a:rPr>
-              <a:t>디지털 도움</a:t>
-            </a:r>
-            <a:pPr algn="l" indent="0" marL="0">
-              <a:lnSpc>
-                <a:spcPts val="2100"/>
-              </a:lnSpc>
-              <a:buNone/>
-            </a:pPr>
-            <a:r>
               <a:rPr lang="ko-KR" altLang="en-US" sz="1500" dirty="0">
                 <a:solidFill>
                   <a:srgbClr val="101D42"/>
                 </a:solidFill>
                 <a:latin typeface="Noto Sans KR" pitchFamily="34" charset="0"/>
-                <a:ea typeface="Noto Sans KR" pitchFamily="34" charset="-127"/>
-                <a:cs typeface="Noto Sans KR" pitchFamily="34" charset="-120"/>
-              </a:rPr>
-              <a:t>으로, 언어의 차이는 </a:t>
-            </a:r>
-            <a:pPr algn="l" indent="0" marL="0">
-              <a:lnSpc>
-                <a:spcPts val="2100"/>
-              </a:lnSpc>
-              <a:buNone/>
-            </a:pPr>
-            <a:r>
-              <a:rPr lang="ko-KR" altLang="en-US" sz="1500" b="1" dirty="0">
-                <a:solidFill>
-                  <a:srgbClr val="101D42"/>
-                </a:solidFill>
-                <a:highlight>
-                  <a:srgbClr val="FFF0AD"/>
-                </a:highlight>
-                <a:latin typeface="Noto Sans KR" pitchFamily="34" charset="0"/>
-                <a:ea typeface="Noto Sans KR" pitchFamily="34" charset="-127"/>
-                <a:cs typeface="Noto Sans KR" pitchFamily="34" charset="-120"/>
-              </a:rPr>
-              <a:t>다국어 번역</a:t>
-            </a:r>
-            <a:pPr algn="l" indent="0" marL="0">
-              <a:lnSpc>
-                <a:spcPts val="2100"/>
-              </a:lnSpc>
-              <a:buNone/>
-            </a:pPr>
-            <a:r>
-              <a:rPr lang="ko-KR" altLang="en-US" sz="1500" dirty="0">
-                <a:solidFill>
-                  <a:srgbClr val="101D42"/>
-                </a:solidFill>
-                <a:latin typeface="Noto Sans KR" pitchFamily="34" charset="0"/>
-                <a:ea typeface="Noto Sans KR" pitchFamily="34" charset="-127"/>
-                <a:cs typeface="Noto Sans KR" pitchFamily="34" charset="-120"/>
-              </a:rPr>
-              <a:t>으로 지원합니다. </a:t>
-            </a:r>
-            <a:pPr algn="l" indent="0" marL="0">
-              <a:lnSpc>
-                <a:spcPts val="2100"/>
-              </a:lnSpc>
-              <a:buNone/>
-            </a:pPr>
-            <a:r>
-              <a:rPr lang="ko-KR" altLang="en-US" sz="1500" b="1" dirty="0">
-                <a:solidFill>
-                  <a:srgbClr val="101D42"/>
-                </a:solidFill>
-                <a:highlight>
-                  <a:srgbClr val="FFF0AD"/>
-                </a:highlight>
-                <a:latin typeface="Noto Sans KR" pitchFamily="34" charset="0"/>
-                <a:ea typeface="Noto Sans KR" pitchFamily="34" charset="-127"/>
-                <a:cs typeface="Noto Sans KR" pitchFamily="34" charset="-120"/>
-              </a:rPr>
-              <a:t>다문화</a:t>
-            </a:r>
-            <a:endParaRPr lang="en-US" sz="1500" dirty="0"/>
-          </a:p>
-          <a:p>
-            <a:pPr algn="l" indent="0" marL="0">
-              <a:lnSpc>
-                <a:spcPts val="2100"/>
-              </a:lnSpc>
-              <a:buNone/>
-            </a:pPr>
-            <a:r>
-              <a:rPr lang="ko-KR" altLang="en-US" sz="1500" b="1" dirty="0">
-                <a:solidFill>
-                  <a:srgbClr val="101D42"/>
-                </a:solidFill>
-                <a:highlight>
-                  <a:srgbClr val="FFF0AD"/>
-                </a:highlight>
-                <a:latin typeface="Noto Sans KR" pitchFamily="34" charset="0"/>
-                <a:ea typeface="Noto Sans KR" pitchFamily="34" charset="-127"/>
-                <a:cs typeface="Noto Sans KR" pitchFamily="34" charset="-120"/>
-              </a:rPr>
-              <a:t>학생</a:t>
-            </a:r>
-            <a:pPr algn="l" indent="0" marL="0">
-              <a:lnSpc>
-                <a:spcPts val="2100"/>
-              </a:lnSpc>
-              <a:buNone/>
-            </a:pPr>
-            <a:r>
-              <a:rPr lang="ko-KR" altLang="en-US" sz="1500" dirty="0">
-                <a:solidFill>
-                  <a:srgbClr val="101D42"/>
-                </a:solidFill>
-                <a:latin typeface="Noto Sans KR" pitchFamily="34" charset="0"/>
-                <a:ea typeface="Noto Sans KR" pitchFamily="34" charset="-127"/>
-                <a:cs typeface="Noto Sans KR" pitchFamily="34" charset="-120"/>
-              </a:rPr>
-              <a:t>을 포함한 </a:t>
-            </a:r>
-            <a:pPr algn="l" indent="0" marL="0">
-              <a:lnSpc>
-                <a:spcPts val="2100"/>
-              </a:lnSpc>
-              <a:buNone/>
-            </a:pPr>
-            <a:r>
-              <a:rPr lang="ko-KR" altLang="en-US" sz="1500" b="1" dirty="0">
-                <a:solidFill>
-                  <a:srgbClr val="101D42"/>
-                </a:solidFill>
-                <a:highlight>
-                  <a:srgbClr val="FFF0AD"/>
-                </a:highlight>
-                <a:latin typeface="Noto Sans KR" pitchFamily="34" charset="0"/>
-                <a:ea typeface="Noto Sans KR" pitchFamily="34" charset="-127"/>
-                <a:cs typeface="Noto Sans KR" pitchFamily="34" charset="-120"/>
-              </a:rPr>
-              <a:t>모두가 차별 없이 함께 읽는 가치</a:t>
-            </a:r>
-            <a:pPr algn="l" indent="0" marL="0">
-              <a:lnSpc>
-                <a:spcPts val="2100"/>
-              </a:lnSpc>
-              <a:buNone/>
-            </a:pPr>
-            <a:r>
-              <a:rPr lang="ko-KR" altLang="en-US" sz="1500" dirty="0">
-                <a:solidFill>
-                  <a:srgbClr val="101D42"/>
-                </a:solidFill>
-                <a:latin typeface="Noto Sans KR" pitchFamily="34" charset="0"/>
-                <a:ea typeface="Noto Sans KR" pitchFamily="34" charset="-127"/>
-                <a:cs typeface="Noto Sans KR" pitchFamily="34" charset="-120"/>
-              </a:rPr>
-              <a:t>를 확산하고자 합니다.</a:t>
+                <a:ea typeface="Noto Sans KR" pitchFamily="34" charset="-122"/>
+                <a:cs typeface="Noto Sans KR" pitchFamily="34" charset="-120"/>
+              </a:rPr>
+              <a:t>활동지를 인쇄해 손글씨, 그림, 역할극으로 읽은 내용을 표현합니다.</a:t>
             </a:r>
             <a:endParaRPr lang="en-US" sz="1500" dirty="0"/>
           </a:p>
@@ -8750,11 +11361,14 @@
                   <a:srgbClr val="101D42"/>
                 </a:solidFill>
                 <a:latin typeface="Noto Sans KR" pitchFamily="34" charset="0"/>
-                <a:ea typeface="Noto Sans KR" pitchFamily="34" charset="-127"/>
-                <a:cs typeface="Noto Sans KR" pitchFamily="34" charset="-120"/>
-              </a:rPr>
-              <a:t>학생에게는 </a:t>
-            </a:r>
+                <a:ea typeface="Noto Sans KR" pitchFamily="34" charset="-122"/>
+                <a:cs typeface="Noto Sans KR" pitchFamily="34" charset="-120"/>
+              </a:rPr>
+              <a:t>교사는 우리 반의 고민에 맞는 책과 질문을 고르고, 학생의 답을 보며</a:t>
+            </a:r>
+            <a:endParaRPr lang="en-US" sz="1500" dirty="0"/>
+          </a:p>
+          <a:p>
             <a:pPr algn="l" indent="0" marL="0">
               <a:lnSpc>
                 <a:spcPts val="2100"/>
@@ -8762,92 +11376,15 @@
               <a:buNone/>
             </a:pPr>
             <a:r>
-              <a:rPr lang="ko-KR" altLang="en-US" sz="1500" b="1" dirty="0">
-                <a:solidFill>
-                  <a:srgbClr val="101D42"/>
-                </a:solidFill>
-                <a:highlight>
-                  <a:srgbClr val="FFF0AD"/>
-                </a:highlight>
-                <a:latin typeface="Noto Sans KR" pitchFamily="34" charset="0"/>
-                <a:ea typeface="Noto Sans KR" pitchFamily="34" charset="-127"/>
-                <a:cs typeface="Noto Sans KR" pitchFamily="34" charset="-120"/>
-              </a:rPr>
-              <a:t>충분히 읽고 생각할 시간</a:t>
-            </a:r>
-            <a:pPr algn="l" indent="0" marL="0">
-              <a:lnSpc>
-                <a:spcPts val="2100"/>
-              </a:lnSpc>
-              <a:buNone/>
-            </a:pPr>
-            <a:r>
               <a:rPr lang="ko-KR" altLang="en-US" sz="1500" dirty="0">
                 <a:solidFill>
                   <a:srgbClr val="101D42"/>
                 </a:solidFill>
                 <a:latin typeface="Noto Sans KR" pitchFamily="34" charset="0"/>
-                <a:ea typeface="Noto Sans KR" pitchFamily="34" charset="-127"/>
-                <a:cs typeface="Noto Sans KR" pitchFamily="34" charset="-120"/>
-              </a:rPr>
-              <a:t>을, 교사에게는 </a:t>
-            </a:r>
-            <a:pPr algn="l" indent="0" marL="0">
-              <a:lnSpc>
-                <a:spcPts val="2100"/>
-              </a:lnSpc>
-              <a:buNone/>
-            </a:pPr>
-            <a:r>
-              <a:rPr lang="ko-KR" altLang="en-US" sz="1500" b="1" dirty="0">
-                <a:solidFill>
-                  <a:srgbClr val="101D42"/>
-                </a:solidFill>
-                <a:highlight>
-                  <a:srgbClr val="FFF0AD"/>
-                </a:highlight>
-                <a:latin typeface="Noto Sans KR" pitchFamily="34" charset="0"/>
-                <a:ea typeface="Noto Sans KR" pitchFamily="34" charset="-127"/>
-                <a:cs typeface="Noto Sans KR" pitchFamily="34" charset="-120"/>
-              </a:rPr>
-              <a:t>수업 준비와 개별 지도</a:t>
-            </a:r>
-            <a:pPr algn="l" indent="0" marL="0">
-              <a:lnSpc>
-                <a:spcPts val="2100"/>
-              </a:lnSpc>
-              <a:buNone/>
-            </a:pPr>
-            <a:r>
-              <a:rPr lang="ko-KR" altLang="en-US" sz="1500" dirty="0">
-                <a:solidFill>
-                  <a:srgbClr val="101D42"/>
-                </a:solidFill>
-                <a:latin typeface="Noto Sans KR" pitchFamily="34" charset="0"/>
-                <a:ea typeface="Noto Sans KR" pitchFamily="34" charset="-127"/>
-                <a:cs typeface="Noto Sans KR" pitchFamily="34" charset="-120"/>
-              </a:rPr>
-              <a:t>를 위한</a:t>
-            </a:r>
-            <a:endParaRPr lang="en-US" sz="1500" dirty="0"/>
-          </a:p>
-          <a:p>
-            <a:pPr algn="l" indent="0" marL="0">
-              <a:lnSpc>
-                <a:spcPts val="2100"/>
-              </a:lnSpc>
-              <a:buNone/>
-            </a:pPr>
-            <a:r>
-              <a:rPr lang="ko-KR" altLang="en-US" sz="1500" dirty="0">
-                <a:solidFill>
-                  <a:srgbClr val="101D42"/>
-                </a:solidFill>
-                <a:latin typeface="Noto Sans KR" pitchFamily="34" charset="0"/>
-                <a:ea typeface="Noto Sans KR" pitchFamily="34" charset="-127"/>
-                <a:cs typeface="Noto Sans KR" pitchFamily="34" charset="-120"/>
-              </a:rPr>
-              <a:t>지원을 요청드립니다.</a:t>
+                <a:ea typeface="Noto Sans KR" pitchFamily="34" charset="-122"/>
+                <a:cs typeface="Noto Sans KR" pitchFamily="34" charset="-120"/>
+              </a:rPr>
+              <a:t>다음 질문과 피드백을 정합니다. 읽기와 학급 생활을 함께 잇는 수업입니다.</a:t>
             </a:r>
             <a:endParaRPr lang="en-US" sz="1500" dirty="0"/>
           </a:p>
@@ -8886,7 +11423,7 @@
                   <a:srgbClr val="101D42"/>
                 </a:solidFill>
                 <a:latin typeface="Noto Serif KR Black" pitchFamily="34" charset="0"/>
-                <a:ea typeface="Noto Serif KR Black" pitchFamily="34" charset="-127"/>
+                <a:ea typeface="Noto Serif KR Black" pitchFamily="34" charset="-122"/>
                 <a:cs typeface="Noto Serif KR Black" pitchFamily="34" charset="-120"/>
               </a:rPr>
               <a:t>경남의 아이들이 스스로 이해하고 판단하는 사람으로 자라도록,</a:t>
@@ -8906,7 +11443,7 @@
                   <a:srgbClr val="15543C"/>
                 </a:solidFill>
                 <a:latin typeface="Noto Serif KR Black" pitchFamily="34" charset="0"/>
-                <a:ea typeface="Noto Serif KR Black" pitchFamily="34" charset="-127"/>
+                <a:ea typeface="Noto Serif KR Black" pitchFamily="34" charset="-122"/>
                 <a:cs typeface="Noto Serif KR Black" pitchFamily="34" charset="-120"/>
               </a:rPr>
               <a:t>기본 독서교육을 함께 지켜 주십시오.</a:t>
@@ -8948,7 +11485,7 @@
                   <a:srgbClr val="101D42"/>
                 </a:solidFill>
                 <a:latin typeface="Noto Sans KR" pitchFamily="34" charset="0"/>
-                <a:ea typeface="Noto Sans KR" pitchFamily="34" charset="-127"/>
+                <a:ea typeface="Noto Sans KR" pitchFamily="34" charset="-122"/>
                 <a:cs typeface="Noto Sans KR" pitchFamily="34" charset="-120"/>
               </a:rPr>
               <a:t>4 / 4</a:t>

--- a/promo/dl/brochure/bookie-detail-4p-edit.pptx
+++ b/promo/dl/brochure/bookie-detail-4p-edit.pptx
@@ -3974,7 +3974,7 @@
                 <a:ea typeface="Noto Sans KR" pitchFamily="34" charset="-122"/>
                 <a:cs typeface="Noto Sans KR" pitchFamily="34" charset="-120"/>
               </a:rPr>
-              <a:t>26,924건</a:t>
+              <a:t>26,924권</a:t>
             </a:r>
             <a:endParaRPr lang="en-US" sz="2400" dirty="0"/>
           </a:p>
@@ -4330,7 +4330,7 @@
                 <a:ea typeface="Noto Sans KR" pitchFamily="34" charset="-122"/>
                 <a:cs typeface="Noto Sans KR" pitchFamily="34" charset="-120"/>
               </a:rPr>
-              <a:t>* Kreijkes 외(2026), Computers &amp; Education 243, 105514. 중등학생 연구.</a:t>
+              <a:t>* Kreijkes 외(2026), Computers &amp; Education 243, 105514.</a:t>
             </a:r>
             <a:endParaRPr lang="en-US" sz="650" dirty="0"/>
           </a:p>
@@ -5053,7 +5053,7 @@
                 <a:ea typeface="Noto Sans KR" pitchFamily="34" charset="-122"/>
                 <a:cs typeface="Noto Sans KR" pitchFamily="34" charset="-120"/>
               </a:rPr>
-              <a:t>GPT가 요약과 답안을 대신 만드는 동안 학생은 무엇을 직접 읽고 생각할까요.</a:t>
+              <a:t>AI가 요약과 답안을 대신 만드는 동안 학생은 무엇을 직접 읽고 생각할까요.</a:t>
             </a:r>
             <a:endParaRPr lang="en-US" sz="1800" dirty="0"/>
           </a:p>
@@ -9334,7 +9334,7 @@
                 <a:ea typeface="Noto Sans KR" pitchFamily="34" charset="-122"/>
                 <a:cs typeface="Noto Sans KR" pitchFamily="34" charset="-120"/>
               </a:rPr>
-              <a:t>14~15세 중등학생 연구이며, 초등학생이나 부기의 효과를 직접 검증한 결과는 아닙니다.</a:t>
+              <a:t/>
             </a:r>
             <a:endParaRPr lang="en-US" sz="830" dirty="0"/>
           </a:p>
